--- a/Aula 05 - Exemplo 4.pptx
+++ b/Aula 05 - Exemplo 4.pptx
@@ -27,6 +27,21 @@
     <p:sldId id="312" r:id="rId21"/>
     <p:sldId id="313" r:id="rId22"/>
     <p:sldId id="314" r:id="rId23"/>
+    <p:sldId id="315" r:id="rId24"/>
+    <p:sldId id="316" r:id="rId25"/>
+    <p:sldId id="317" r:id="rId26"/>
+    <p:sldId id="318" r:id="rId27"/>
+    <p:sldId id="319" r:id="rId28"/>
+    <p:sldId id="320" r:id="rId29"/>
+    <p:sldId id="321" r:id="rId30"/>
+    <p:sldId id="322" r:id="rId31"/>
+    <p:sldId id="323" r:id="rId32"/>
+    <p:sldId id="326" r:id="rId33"/>
+    <p:sldId id="324" r:id="rId34"/>
+    <p:sldId id="325" r:id="rId35"/>
+    <p:sldId id="327" r:id="rId36"/>
+    <p:sldId id="328" r:id="rId37"/>
+    <p:sldId id="329" r:id="rId38"/>
   </p:sldIdLst>
   <p:sldSz cx="12192000" cy="6858000"/>
   <p:notesSz cx="6858000" cy="9144000"/>
@@ -5181,6 +5196,212 @@
           <a:chExt cx="0" cy="0"/>
         </a:xfrm>
       </p:grpSpPr>
+      <p:pic>
+        <p:nvPicPr>
+          <p:cNvPr id="2" name="Imagem 1">
+            <a:extLst>
+              <a:ext uri="{FF2B5EF4-FFF2-40B4-BE49-F238E27FC236}">
+                <a16:creationId xmlns:a16="http://schemas.microsoft.com/office/drawing/2014/main" id="{05AED5ED-865B-4897-97D5-A0EA00CAD4DF}"/>
+              </a:ext>
+            </a:extLst>
+          </p:cNvPr>
+          <p:cNvPicPr>
+            <a:picLocks noChangeAspect="1"/>
+          </p:cNvPicPr>
+          <p:nvPr/>
+        </p:nvPicPr>
+        <p:blipFill>
+          <a:blip r:embed="rId2"/>
+          <a:stretch>
+            <a:fillRect/>
+          </a:stretch>
+        </p:blipFill>
+        <p:spPr>
+          <a:xfrm>
+            <a:off x="4682066" y="581553"/>
+            <a:ext cx="6705600" cy="4848225"/>
+          </a:xfrm>
+          <a:prstGeom prst="rect">
+            <a:avLst/>
+          </a:prstGeom>
+        </p:spPr>
+      </p:pic>
+      <p:sp>
+        <p:nvSpPr>
+          <p:cNvPr id="3" name="Retângulo 2">
+            <a:extLst>
+              <a:ext uri="{FF2B5EF4-FFF2-40B4-BE49-F238E27FC236}">
+                <a16:creationId xmlns:a16="http://schemas.microsoft.com/office/drawing/2014/main" id="{E0E37CF1-B255-4D14-AB9A-05492C6AD163}"/>
+              </a:ext>
+            </a:extLst>
+          </p:cNvPr>
+          <p:cNvSpPr/>
+          <p:nvPr/>
+        </p:nvSpPr>
+        <p:spPr>
+          <a:xfrm>
+            <a:off x="5274733" y="3200399"/>
+            <a:ext cx="1016000" cy="601134"/>
+          </a:xfrm>
+          <a:prstGeom prst="rect">
+            <a:avLst/>
+          </a:prstGeom>
+          <a:noFill/>
+          <a:ln w="38100">
+            <a:solidFill>
+              <a:srgbClr val="FF0000"/>
+            </a:solidFill>
+          </a:ln>
+        </p:spPr>
+        <p:style>
+          <a:lnRef idx="2">
+            <a:schemeClr val="accent1">
+              <a:shade val="50000"/>
+            </a:schemeClr>
+          </a:lnRef>
+          <a:fillRef idx="1">
+            <a:schemeClr val="accent1"/>
+          </a:fillRef>
+          <a:effectRef idx="0">
+            <a:schemeClr val="accent1"/>
+          </a:effectRef>
+          <a:fontRef idx="minor">
+            <a:schemeClr val="lt1"/>
+          </a:fontRef>
+        </p:style>
+        <p:txBody>
+          <a:bodyPr rtlCol="0" anchor="ctr"/>
+          <a:lstStyle/>
+          <a:p>
+            <a:pPr algn="ctr"/>
+            <a:endParaRPr lang="pt-BR" sz="2000" dirty="0">
+              <a:solidFill>
+                <a:schemeClr val="tx1"/>
+              </a:solidFill>
+            </a:endParaRPr>
+          </a:p>
+        </p:txBody>
+      </p:sp>
+      <p:sp>
+        <p:nvSpPr>
+          <p:cNvPr id="4" name="Elipse 3">
+            <a:extLst>
+              <a:ext uri="{FF2B5EF4-FFF2-40B4-BE49-F238E27FC236}">
+                <a16:creationId xmlns:a16="http://schemas.microsoft.com/office/drawing/2014/main" id="{D5E9D2C2-8D83-4A3C-A4CB-4BA95C3A9F0A}"/>
+              </a:ext>
+            </a:extLst>
+          </p:cNvPr>
+          <p:cNvSpPr/>
+          <p:nvPr/>
+        </p:nvSpPr>
+        <p:spPr>
+          <a:xfrm>
+            <a:off x="508001" y="2518833"/>
+            <a:ext cx="2980266" cy="1964266"/>
+          </a:xfrm>
+          <a:prstGeom prst="ellipse">
+            <a:avLst/>
+          </a:prstGeom>
+          <a:solidFill>
+            <a:srgbClr val="FFFF00"/>
+          </a:solidFill>
+          <a:ln w="38100">
+            <a:solidFill>
+              <a:srgbClr val="FF0000"/>
+            </a:solidFill>
+          </a:ln>
+        </p:spPr>
+        <p:style>
+          <a:lnRef idx="2">
+            <a:schemeClr val="accent1">
+              <a:shade val="50000"/>
+            </a:schemeClr>
+          </a:lnRef>
+          <a:fillRef idx="1">
+            <a:schemeClr val="accent1"/>
+          </a:fillRef>
+          <a:effectRef idx="0">
+            <a:schemeClr val="accent1"/>
+          </a:effectRef>
+          <a:fontRef idx="minor">
+            <a:schemeClr val="lt1"/>
+          </a:fontRef>
+        </p:style>
+        <p:txBody>
+          <a:bodyPr rtlCol="0" anchor="ctr"/>
+          <a:lstStyle/>
+          <a:p>
+            <a:pPr algn="ctr"/>
+            <a:r>
+              <a:rPr lang="pt-BR" sz="2400" b="1" u="sng" dirty="0">
+                <a:solidFill>
+                  <a:schemeClr val="tx1"/>
+                </a:solidFill>
+                <a:highlight>
+                  <a:srgbClr val="FFFF00"/>
+                </a:highlight>
+              </a:rPr>
+              <a:t>Objetivo</a:t>
+            </a:r>
+            <a:r>
+              <a:rPr lang="pt-BR" sz="2400" dirty="0">
+                <a:solidFill>
+                  <a:schemeClr val="tx1"/>
+                </a:solidFill>
+                <a:highlight>
+                  <a:srgbClr val="FFFF00"/>
+                </a:highlight>
+              </a:rPr>
+              <a:t>: mesclar estas duas células verticalmente</a:t>
+            </a:r>
+          </a:p>
+        </p:txBody>
+      </p:sp>
+      <p:cxnSp>
+        <p:nvCxnSpPr>
+          <p:cNvPr id="6" name="Conector de Seta Reta 5">
+            <a:extLst>
+              <a:ext uri="{FF2B5EF4-FFF2-40B4-BE49-F238E27FC236}">
+                <a16:creationId xmlns:a16="http://schemas.microsoft.com/office/drawing/2014/main" id="{0DE96557-2BAF-46DF-BEC2-7FD878913ADA}"/>
+              </a:ext>
+            </a:extLst>
+          </p:cNvPr>
+          <p:cNvCxnSpPr>
+            <a:stCxn id="4" idx="6"/>
+            <a:endCxn id="3" idx="1"/>
+          </p:cNvCxnSpPr>
+          <p:nvPr/>
+        </p:nvCxnSpPr>
+        <p:spPr>
+          <a:xfrm>
+            <a:off x="3488267" y="3500966"/>
+            <a:ext cx="1786466" cy="0"/>
+          </a:xfrm>
+          <a:prstGeom prst="straightConnector1">
+            <a:avLst/>
+          </a:prstGeom>
+          <a:ln w="38100">
+            <a:solidFill>
+              <a:srgbClr val="FF0000"/>
+            </a:solidFill>
+            <a:tailEnd type="triangle"/>
+          </a:ln>
+        </p:spPr>
+        <p:style>
+          <a:lnRef idx="1">
+            <a:schemeClr val="accent1"/>
+          </a:lnRef>
+          <a:fillRef idx="0">
+            <a:schemeClr val="accent1"/>
+          </a:fillRef>
+          <a:effectRef idx="0">
+            <a:schemeClr val="accent1"/>
+          </a:effectRef>
+          <a:fontRef idx="minor">
+            <a:schemeClr val="tx1"/>
+          </a:fontRef>
+        </p:style>
+      </p:cxnSp>
     </p:spTree>
     <p:extLst>
       <p:ext uri="{BB962C8B-B14F-4D97-AF65-F5344CB8AC3E}">
@@ -5426,6 +5647,250 @@
           <a:chExt cx="0" cy="0"/>
         </a:xfrm>
       </p:grpSpPr>
+      <p:pic>
+        <p:nvPicPr>
+          <p:cNvPr id="3" name="Imagem 2">
+            <a:extLst>
+              <a:ext uri="{FF2B5EF4-FFF2-40B4-BE49-F238E27FC236}">
+                <a16:creationId xmlns:a16="http://schemas.microsoft.com/office/drawing/2014/main" id="{221D6B3F-8805-41E5-87F4-8CD5CBB3464D}"/>
+              </a:ext>
+            </a:extLst>
+          </p:cNvPr>
+          <p:cNvPicPr>
+            <a:picLocks noChangeAspect="1"/>
+          </p:cNvPicPr>
+          <p:nvPr/>
+        </p:nvPicPr>
+        <p:blipFill>
+          <a:blip r:embed="rId2">
+            <a:extLst>
+              <a:ext uri="{28A0092B-C50C-407E-A947-70E740481C1C}">
+                <a14:useLocalDpi xmlns:a14="http://schemas.microsoft.com/office/drawing/2010/main" val="0"/>
+              </a:ext>
+            </a:extLst>
+          </a:blip>
+          <a:stretch>
+            <a:fillRect/>
+          </a:stretch>
+        </p:blipFill>
+        <p:spPr>
+          <a:xfrm>
+            <a:off x="665475" y="791383"/>
+            <a:ext cx="4063338" cy="4686550"/>
+          </a:xfrm>
+          <a:prstGeom prst="rect">
+            <a:avLst/>
+          </a:prstGeom>
+        </p:spPr>
+      </p:pic>
+      <p:pic>
+        <p:nvPicPr>
+          <p:cNvPr id="5" name="Imagem 4">
+            <a:extLst>
+              <a:ext uri="{FF2B5EF4-FFF2-40B4-BE49-F238E27FC236}">
+                <a16:creationId xmlns:a16="http://schemas.microsoft.com/office/drawing/2014/main" id="{11F7B35A-B92E-4718-A9FB-F7A2586CA6D7}"/>
+              </a:ext>
+            </a:extLst>
+          </p:cNvPr>
+          <p:cNvPicPr>
+            <a:picLocks noChangeAspect="1"/>
+          </p:cNvPicPr>
+          <p:nvPr/>
+        </p:nvPicPr>
+        <p:blipFill>
+          <a:blip r:embed="rId3">
+            <a:extLst>
+              <a:ext uri="{28A0092B-C50C-407E-A947-70E740481C1C}">
+                <a14:useLocalDpi xmlns:a14="http://schemas.microsoft.com/office/drawing/2010/main" val="0"/>
+              </a:ext>
+            </a:extLst>
+          </a:blip>
+          <a:stretch>
+            <a:fillRect/>
+          </a:stretch>
+        </p:blipFill>
+        <p:spPr>
+          <a:xfrm>
+            <a:off x="5321733" y="3429000"/>
+            <a:ext cx="6204792" cy="3003172"/>
+          </a:xfrm>
+          <a:prstGeom prst="rect">
+            <a:avLst/>
+          </a:prstGeom>
+        </p:spPr>
+      </p:pic>
+      <p:sp>
+        <p:nvSpPr>
+          <p:cNvPr id="6" name="Seta: Dobrada para Cima 5">
+            <a:extLst>
+              <a:ext uri="{FF2B5EF4-FFF2-40B4-BE49-F238E27FC236}">
+                <a16:creationId xmlns:a16="http://schemas.microsoft.com/office/drawing/2014/main" id="{3DBEB01C-FC64-44C2-ABEF-2F0F3F11A210}"/>
+              </a:ext>
+            </a:extLst>
+          </p:cNvPr>
+          <p:cNvSpPr/>
+          <p:nvPr/>
+        </p:nvSpPr>
+        <p:spPr>
+          <a:xfrm flipV="1">
+            <a:off x="1604254" y="2622421"/>
+            <a:ext cx="6574545" cy="1847977"/>
+          </a:xfrm>
+          <a:prstGeom prst="bentUpArrow">
+            <a:avLst/>
+          </a:prstGeom>
+          <a:noFill/>
+          <a:ln w="38100">
+            <a:solidFill>
+              <a:srgbClr val="FF0000"/>
+            </a:solidFill>
+          </a:ln>
+        </p:spPr>
+        <p:style>
+          <a:lnRef idx="2">
+            <a:schemeClr val="accent1">
+              <a:shade val="50000"/>
+            </a:schemeClr>
+          </a:lnRef>
+          <a:fillRef idx="1">
+            <a:schemeClr val="accent1"/>
+          </a:fillRef>
+          <a:effectRef idx="0">
+            <a:schemeClr val="accent1"/>
+          </a:effectRef>
+          <a:fontRef idx="minor">
+            <a:schemeClr val="lt1"/>
+          </a:fontRef>
+        </p:style>
+        <p:txBody>
+          <a:bodyPr rtlCol="0" anchor="ctr"/>
+          <a:lstStyle/>
+          <a:p>
+            <a:pPr algn="ctr"/>
+            <a:endParaRPr lang="pt-BR" sz="2000" dirty="0">
+              <a:solidFill>
+                <a:schemeClr val="tx1"/>
+              </a:solidFill>
+            </a:endParaRPr>
+          </a:p>
+        </p:txBody>
+      </p:sp>
+      <p:sp>
+        <p:nvSpPr>
+          <p:cNvPr id="9" name="Seta: para a Direita 8">
+            <a:extLst>
+              <a:ext uri="{FF2B5EF4-FFF2-40B4-BE49-F238E27FC236}">
+                <a16:creationId xmlns:a16="http://schemas.microsoft.com/office/drawing/2014/main" id="{EBB0A592-7CB0-4079-A587-E9162FE6E475}"/>
+              </a:ext>
+            </a:extLst>
+          </p:cNvPr>
+          <p:cNvSpPr/>
+          <p:nvPr/>
+        </p:nvSpPr>
+        <p:spPr>
+          <a:xfrm>
+            <a:off x="5638799" y="4356099"/>
+            <a:ext cx="651933" cy="618066"/>
+          </a:xfrm>
+          <a:prstGeom prst="rightArrow">
+            <a:avLst/>
+          </a:prstGeom>
+          <a:solidFill>
+            <a:srgbClr val="FFFF00"/>
+          </a:solidFill>
+          <a:ln w="38100">
+            <a:solidFill>
+              <a:srgbClr val="FF0000"/>
+            </a:solidFill>
+          </a:ln>
+        </p:spPr>
+        <p:style>
+          <a:lnRef idx="2">
+            <a:schemeClr val="accent1">
+              <a:shade val="50000"/>
+            </a:schemeClr>
+          </a:lnRef>
+          <a:fillRef idx="1">
+            <a:schemeClr val="accent1"/>
+          </a:fillRef>
+          <a:effectRef idx="0">
+            <a:schemeClr val="accent1"/>
+          </a:effectRef>
+          <a:fontRef idx="minor">
+            <a:schemeClr val="lt1"/>
+          </a:fontRef>
+        </p:style>
+        <p:txBody>
+          <a:bodyPr rtlCol="0" anchor="ctr"/>
+          <a:lstStyle/>
+          <a:p>
+            <a:pPr algn="ctr"/>
+            <a:endParaRPr lang="pt-BR" sz="2000" dirty="0">
+              <a:solidFill>
+                <a:schemeClr val="tx1"/>
+              </a:solidFill>
+            </a:endParaRPr>
+          </a:p>
+        </p:txBody>
+      </p:sp>
+      <p:sp>
+        <p:nvSpPr>
+          <p:cNvPr id="10" name="Seta: para a Direita 9">
+            <a:extLst>
+              <a:ext uri="{FF2B5EF4-FFF2-40B4-BE49-F238E27FC236}">
+                <a16:creationId xmlns:a16="http://schemas.microsoft.com/office/drawing/2014/main" id="{2BD0362C-6B69-426D-9DB7-CD024EB7730F}"/>
+              </a:ext>
+            </a:extLst>
+          </p:cNvPr>
+          <p:cNvSpPr/>
+          <p:nvPr/>
+        </p:nvSpPr>
+        <p:spPr>
+          <a:xfrm flipH="1">
+            <a:off x="10942326" y="4356099"/>
+            <a:ext cx="651933" cy="618066"/>
+          </a:xfrm>
+          <a:prstGeom prst="rightArrow">
+            <a:avLst/>
+          </a:prstGeom>
+          <a:solidFill>
+            <a:srgbClr val="FFFF00"/>
+          </a:solidFill>
+          <a:ln w="38100">
+            <a:solidFill>
+              <a:srgbClr val="FF0000"/>
+            </a:solidFill>
+          </a:ln>
+        </p:spPr>
+        <p:style>
+          <a:lnRef idx="2">
+            <a:schemeClr val="accent1">
+              <a:shade val="50000"/>
+            </a:schemeClr>
+          </a:lnRef>
+          <a:fillRef idx="1">
+            <a:schemeClr val="accent1"/>
+          </a:fillRef>
+          <a:effectRef idx="0">
+            <a:schemeClr val="accent1"/>
+          </a:effectRef>
+          <a:fontRef idx="minor">
+            <a:schemeClr val="lt1"/>
+          </a:fontRef>
+        </p:style>
+        <p:txBody>
+          <a:bodyPr rtlCol="0" anchor="ctr"/>
+          <a:lstStyle/>
+          <a:p>
+            <a:pPr algn="ctr"/>
+            <a:endParaRPr lang="pt-BR" sz="2000" dirty="0">
+              <a:solidFill>
+                <a:schemeClr val="tx1"/>
+              </a:solidFill>
+            </a:endParaRPr>
+          </a:p>
+        </p:txBody>
+      </p:sp>
     </p:spTree>
     <p:extLst>
       <p:ext uri="{BB962C8B-B14F-4D97-AF65-F5344CB8AC3E}">
@@ -5456,6 +5921,325 @@
           <a:chExt cx="0" cy="0"/>
         </a:xfrm>
       </p:grpSpPr>
+      <p:pic>
+        <p:nvPicPr>
+          <p:cNvPr id="2" name="Imagem 1">
+            <a:extLst>
+              <a:ext uri="{FF2B5EF4-FFF2-40B4-BE49-F238E27FC236}">
+                <a16:creationId xmlns:a16="http://schemas.microsoft.com/office/drawing/2014/main" id="{309857C3-6CDC-42F8-A5AF-8D7D8CB5F6C1}"/>
+              </a:ext>
+            </a:extLst>
+          </p:cNvPr>
+          <p:cNvPicPr>
+            <a:picLocks noChangeAspect="1"/>
+          </p:cNvPicPr>
+          <p:nvPr/>
+        </p:nvPicPr>
+        <p:blipFill>
+          <a:blip r:embed="rId2"/>
+          <a:stretch>
+            <a:fillRect/>
+          </a:stretch>
+        </p:blipFill>
+        <p:spPr>
+          <a:xfrm>
+            <a:off x="3996266" y="1004887"/>
+            <a:ext cx="6705600" cy="4848225"/>
+          </a:xfrm>
+          <a:prstGeom prst="rect">
+            <a:avLst/>
+          </a:prstGeom>
+        </p:spPr>
+      </p:pic>
+      <p:sp>
+        <p:nvSpPr>
+          <p:cNvPr id="3" name="Elipse 2">
+            <a:extLst>
+              <a:ext uri="{FF2B5EF4-FFF2-40B4-BE49-F238E27FC236}">
+                <a16:creationId xmlns:a16="http://schemas.microsoft.com/office/drawing/2014/main" id="{EF04B3B3-9734-41CA-8A81-E5C734688FE9}"/>
+              </a:ext>
+            </a:extLst>
+          </p:cNvPr>
+          <p:cNvSpPr/>
+          <p:nvPr/>
+        </p:nvSpPr>
+        <p:spPr>
+          <a:xfrm>
+            <a:off x="237066" y="3026833"/>
+            <a:ext cx="2980266" cy="1964266"/>
+          </a:xfrm>
+          <a:prstGeom prst="ellipse">
+            <a:avLst/>
+          </a:prstGeom>
+          <a:solidFill>
+            <a:srgbClr val="FFFF00"/>
+          </a:solidFill>
+          <a:ln w="38100">
+            <a:solidFill>
+              <a:srgbClr val="FF0000"/>
+            </a:solidFill>
+          </a:ln>
+        </p:spPr>
+        <p:style>
+          <a:lnRef idx="2">
+            <a:schemeClr val="accent1">
+              <a:shade val="50000"/>
+            </a:schemeClr>
+          </a:lnRef>
+          <a:fillRef idx="1">
+            <a:schemeClr val="accent1"/>
+          </a:fillRef>
+          <a:effectRef idx="0">
+            <a:schemeClr val="accent1"/>
+          </a:effectRef>
+          <a:fontRef idx="minor">
+            <a:schemeClr val="lt1"/>
+          </a:fontRef>
+        </p:style>
+        <p:txBody>
+          <a:bodyPr rtlCol="0" anchor="ctr"/>
+          <a:lstStyle/>
+          <a:p>
+            <a:pPr algn="ctr"/>
+            <a:r>
+              <a:rPr lang="pt-BR" sz="2400" b="1" u="sng" dirty="0">
+                <a:solidFill>
+                  <a:schemeClr val="tx1"/>
+                </a:solidFill>
+                <a:highlight>
+                  <a:srgbClr val="FFFF00"/>
+                </a:highlight>
+              </a:rPr>
+              <a:t>Objetivo</a:t>
+            </a:r>
+            <a:r>
+              <a:rPr lang="pt-BR" sz="2400" dirty="0">
+                <a:solidFill>
+                  <a:schemeClr val="tx1"/>
+                </a:solidFill>
+                <a:highlight>
+                  <a:srgbClr val="FFFF00"/>
+                </a:highlight>
+              </a:rPr>
+              <a:t>: mesclar estas duas células verticalmente</a:t>
+            </a:r>
+          </a:p>
+        </p:txBody>
+      </p:sp>
+      <p:cxnSp>
+        <p:nvCxnSpPr>
+          <p:cNvPr id="5" name="Conector de Seta Reta 4">
+            <a:extLst>
+              <a:ext uri="{FF2B5EF4-FFF2-40B4-BE49-F238E27FC236}">
+                <a16:creationId xmlns:a16="http://schemas.microsoft.com/office/drawing/2014/main" id="{6371C75D-CC9A-4FF9-9A1C-476BB64203D9}"/>
+              </a:ext>
+            </a:extLst>
+          </p:cNvPr>
+          <p:cNvCxnSpPr>
+            <a:cxnSpLocks/>
+            <a:stCxn id="3" idx="6"/>
+            <a:endCxn id="6" idx="1"/>
+          </p:cNvCxnSpPr>
+          <p:nvPr/>
+        </p:nvCxnSpPr>
+        <p:spPr>
+          <a:xfrm flipV="1">
+            <a:off x="3217332" y="3945467"/>
+            <a:ext cx="1329268" cy="63499"/>
+          </a:xfrm>
+          <a:prstGeom prst="straightConnector1">
+            <a:avLst/>
+          </a:prstGeom>
+          <a:ln w="38100">
+            <a:solidFill>
+              <a:srgbClr val="FF0000"/>
+            </a:solidFill>
+            <a:tailEnd type="triangle"/>
+          </a:ln>
+        </p:spPr>
+        <p:style>
+          <a:lnRef idx="1">
+            <a:schemeClr val="accent1"/>
+          </a:lnRef>
+          <a:fillRef idx="0">
+            <a:schemeClr val="accent1"/>
+          </a:fillRef>
+          <a:effectRef idx="0">
+            <a:schemeClr val="accent1"/>
+          </a:effectRef>
+          <a:fontRef idx="minor">
+            <a:schemeClr val="tx1"/>
+          </a:fontRef>
+        </p:style>
+      </p:cxnSp>
+      <p:sp>
+        <p:nvSpPr>
+          <p:cNvPr id="6" name="Retângulo 5">
+            <a:extLst>
+              <a:ext uri="{FF2B5EF4-FFF2-40B4-BE49-F238E27FC236}">
+                <a16:creationId xmlns:a16="http://schemas.microsoft.com/office/drawing/2014/main" id="{5BF1340B-6253-4C3B-ADB3-6CE66B6EC203}"/>
+              </a:ext>
+            </a:extLst>
+          </p:cNvPr>
+          <p:cNvSpPr/>
+          <p:nvPr/>
+        </p:nvSpPr>
+        <p:spPr>
+          <a:xfrm>
+            <a:off x="4546600" y="3606800"/>
+            <a:ext cx="1092200" cy="677333"/>
+          </a:xfrm>
+          <a:prstGeom prst="rect">
+            <a:avLst/>
+          </a:prstGeom>
+          <a:noFill/>
+          <a:ln w="38100">
+            <a:solidFill>
+              <a:srgbClr val="FF0000"/>
+            </a:solidFill>
+          </a:ln>
+        </p:spPr>
+        <p:style>
+          <a:lnRef idx="2">
+            <a:schemeClr val="accent1">
+              <a:shade val="50000"/>
+            </a:schemeClr>
+          </a:lnRef>
+          <a:fillRef idx="1">
+            <a:schemeClr val="accent1"/>
+          </a:fillRef>
+          <a:effectRef idx="0">
+            <a:schemeClr val="accent1"/>
+          </a:effectRef>
+          <a:fontRef idx="minor">
+            <a:schemeClr val="lt1"/>
+          </a:fontRef>
+        </p:style>
+        <p:txBody>
+          <a:bodyPr rtlCol="0" anchor="ctr"/>
+          <a:lstStyle/>
+          <a:p>
+            <a:pPr algn="ctr"/>
+            <a:endParaRPr lang="pt-BR" sz="2000" dirty="0">
+              <a:solidFill>
+                <a:schemeClr val="tx1"/>
+              </a:solidFill>
+            </a:endParaRPr>
+          </a:p>
+        </p:txBody>
+      </p:sp>
+      <p:cxnSp>
+        <p:nvCxnSpPr>
+          <p:cNvPr id="9" name="Conector de Seta Reta 8">
+            <a:extLst>
+              <a:ext uri="{FF2B5EF4-FFF2-40B4-BE49-F238E27FC236}">
+                <a16:creationId xmlns:a16="http://schemas.microsoft.com/office/drawing/2014/main" id="{67158E25-BC62-47AB-8040-FEEAB9F55678}"/>
+              </a:ext>
+            </a:extLst>
+          </p:cNvPr>
+          <p:cNvCxnSpPr/>
+          <p:nvPr/>
+        </p:nvCxnSpPr>
+        <p:spPr>
+          <a:xfrm flipH="1">
+            <a:off x="7526866" y="3818467"/>
+            <a:ext cx="1007534" cy="190499"/>
+          </a:xfrm>
+          <a:prstGeom prst="straightConnector1">
+            <a:avLst/>
+          </a:prstGeom>
+          <a:ln w="38100">
+            <a:solidFill>
+              <a:srgbClr val="FF0000"/>
+            </a:solidFill>
+            <a:tailEnd type="triangle"/>
+          </a:ln>
+        </p:spPr>
+        <p:style>
+          <a:lnRef idx="1">
+            <a:schemeClr val="accent1"/>
+          </a:lnRef>
+          <a:fillRef idx="0">
+            <a:schemeClr val="accent1"/>
+          </a:fillRef>
+          <a:effectRef idx="0">
+            <a:schemeClr val="accent1"/>
+          </a:effectRef>
+          <a:fontRef idx="minor">
+            <a:schemeClr val="tx1"/>
+          </a:fontRef>
+        </p:style>
+      </p:cxnSp>
+      <p:sp>
+        <p:nvSpPr>
+          <p:cNvPr id="10" name="Retângulo: Cantos Arredondados 9">
+            <a:extLst>
+              <a:ext uri="{FF2B5EF4-FFF2-40B4-BE49-F238E27FC236}">
+                <a16:creationId xmlns:a16="http://schemas.microsoft.com/office/drawing/2014/main" id="{86F70D00-EACA-41A5-9994-1749BC36023C}"/>
+              </a:ext>
+            </a:extLst>
+          </p:cNvPr>
+          <p:cNvSpPr/>
+          <p:nvPr/>
+        </p:nvSpPr>
+        <p:spPr>
+          <a:xfrm>
+            <a:off x="8415867" y="3429000"/>
+            <a:ext cx="2285999" cy="1363133"/>
+          </a:xfrm>
+          <a:prstGeom prst="roundRect">
+            <a:avLst/>
+          </a:prstGeom>
+          <a:noFill/>
+          <a:ln w="38100">
+            <a:solidFill>
+              <a:srgbClr val="FF0000"/>
+            </a:solidFill>
+          </a:ln>
+        </p:spPr>
+        <p:style>
+          <a:lnRef idx="2">
+            <a:schemeClr val="accent1">
+              <a:shade val="50000"/>
+            </a:schemeClr>
+          </a:lnRef>
+          <a:fillRef idx="1">
+            <a:schemeClr val="accent1"/>
+          </a:fillRef>
+          <a:effectRef idx="0">
+            <a:schemeClr val="accent1"/>
+          </a:effectRef>
+          <a:fontRef idx="minor">
+            <a:schemeClr val="lt1"/>
+          </a:fontRef>
+        </p:style>
+        <p:txBody>
+          <a:bodyPr rtlCol="0" anchor="ctr"/>
+          <a:lstStyle/>
+          <a:p>
+            <a:pPr algn="ctr"/>
+            <a:r>
+              <a:rPr lang="pt-BR" sz="2000" dirty="0">
+                <a:solidFill>
+                  <a:schemeClr val="tx1"/>
+                </a:solidFill>
+              </a:rPr>
+              <a:t>Efeito Colateral</a:t>
+            </a:r>
+          </a:p>
+          <a:p>
+            <a:pPr algn="ctr"/>
+            <a:r>
+              <a:rPr lang="pt-BR" sz="2000" dirty="0">
+                <a:solidFill>
+                  <a:schemeClr val="tx1"/>
+                </a:solidFill>
+              </a:rPr>
+              <a:t>Na 3ª linha há uma coluna a mais sobrando</a:t>
+            </a:r>
+          </a:p>
+        </p:txBody>
+      </p:sp>
     </p:spTree>
     <p:extLst>
       <p:ext uri="{BB962C8B-B14F-4D97-AF65-F5344CB8AC3E}">
@@ -5486,10 +6270,1609 @@
           <a:chExt cx="0" cy="0"/>
         </a:xfrm>
       </p:grpSpPr>
+      <p:pic>
+        <p:nvPicPr>
+          <p:cNvPr id="2" name="Imagem 1">
+            <a:extLst>
+              <a:ext uri="{FF2B5EF4-FFF2-40B4-BE49-F238E27FC236}">
+                <a16:creationId xmlns:a16="http://schemas.microsoft.com/office/drawing/2014/main" id="{ADEF95A6-73AC-4B04-99E7-1A8094B7BB18}"/>
+              </a:ext>
+            </a:extLst>
+          </p:cNvPr>
+          <p:cNvPicPr>
+            <a:picLocks noChangeAspect="1"/>
+          </p:cNvPicPr>
+          <p:nvPr/>
+        </p:nvPicPr>
+        <p:blipFill>
+          <a:blip r:embed="rId2"/>
+          <a:stretch>
+            <a:fillRect/>
+          </a:stretch>
+        </p:blipFill>
+        <p:spPr>
+          <a:xfrm>
+            <a:off x="1299865" y="475838"/>
+            <a:ext cx="4258269" cy="5906324"/>
+          </a:xfrm>
+          <a:prstGeom prst="rect">
+            <a:avLst/>
+          </a:prstGeom>
+        </p:spPr>
+      </p:pic>
+      <p:cxnSp>
+        <p:nvCxnSpPr>
+          <p:cNvPr id="4" name="Conector de Seta Reta 3">
+            <a:extLst>
+              <a:ext uri="{FF2B5EF4-FFF2-40B4-BE49-F238E27FC236}">
+                <a16:creationId xmlns:a16="http://schemas.microsoft.com/office/drawing/2014/main" id="{682AC1D4-CEFD-4A39-8499-166B07455FB1}"/>
+              </a:ext>
+            </a:extLst>
+          </p:cNvPr>
+          <p:cNvCxnSpPr/>
+          <p:nvPr/>
+        </p:nvCxnSpPr>
+        <p:spPr>
+          <a:xfrm flipH="1">
+            <a:off x="3344333" y="4123267"/>
+            <a:ext cx="3175000" cy="237066"/>
+          </a:xfrm>
+          <a:prstGeom prst="straightConnector1">
+            <a:avLst/>
+          </a:prstGeom>
+          <a:ln w="38100">
+            <a:solidFill>
+              <a:srgbClr val="FF0000"/>
+            </a:solidFill>
+            <a:tailEnd type="triangle"/>
+          </a:ln>
+        </p:spPr>
+        <p:style>
+          <a:lnRef idx="1">
+            <a:schemeClr val="accent1"/>
+          </a:lnRef>
+          <a:fillRef idx="0">
+            <a:schemeClr val="accent1"/>
+          </a:fillRef>
+          <a:effectRef idx="0">
+            <a:schemeClr val="accent1"/>
+          </a:effectRef>
+          <a:fontRef idx="minor">
+            <a:schemeClr val="tx1"/>
+          </a:fontRef>
+        </p:style>
+      </p:cxnSp>
+      <p:sp>
+        <p:nvSpPr>
+          <p:cNvPr id="5" name="Retângulo 4">
+            <a:extLst>
+              <a:ext uri="{FF2B5EF4-FFF2-40B4-BE49-F238E27FC236}">
+                <a16:creationId xmlns:a16="http://schemas.microsoft.com/office/drawing/2014/main" id="{F8DEBD69-E9A3-4AC6-A0D4-F6FDE10F83EF}"/>
+              </a:ext>
+            </a:extLst>
+          </p:cNvPr>
+          <p:cNvSpPr/>
+          <p:nvPr/>
+        </p:nvSpPr>
+        <p:spPr>
+          <a:xfrm>
+            <a:off x="2015067" y="4182533"/>
+            <a:ext cx="1549400" cy="347134"/>
+          </a:xfrm>
+          <a:prstGeom prst="rect">
+            <a:avLst/>
+          </a:prstGeom>
+          <a:noFill/>
+          <a:ln w="38100">
+            <a:solidFill>
+              <a:srgbClr val="FF0000"/>
+            </a:solidFill>
+          </a:ln>
+        </p:spPr>
+        <p:style>
+          <a:lnRef idx="2">
+            <a:schemeClr val="accent1">
+              <a:shade val="50000"/>
+            </a:schemeClr>
+          </a:lnRef>
+          <a:fillRef idx="1">
+            <a:schemeClr val="accent1"/>
+          </a:fillRef>
+          <a:effectRef idx="0">
+            <a:schemeClr val="accent1"/>
+          </a:effectRef>
+          <a:fontRef idx="minor">
+            <a:schemeClr val="lt1"/>
+          </a:fontRef>
+        </p:style>
+        <p:txBody>
+          <a:bodyPr rtlCol="0" anchor="ctr"/>
+          <a:lstStyle/>
+          <a:p>
+            <a:pPr algn="ctr"/>
+            <a:endParaRPr lang="pt-BR" sz="2000" dirty="0">
+              <a:solidFill>
+                <a:schemeClr val="tx1"/>
+              </a:solidFill>
+            </a:endParaRPr>
+          </a:p>
+        </p:txBody>
+      </p:sp>
+      <p:sp>
+        <p:nvSpPr>
+          <p:cNvPr id="6" name="Elipse 5">
+            <a:extLst>
+              <a:ext uri="{FF2B5EF4-FFF2-40B4-BE49-F238E27FC236}">
+                <a16:creationId xmlns:a16="http://schemas.microsoft.com/office/drawing/2014/main" id="{9E9B35C6-C890-4F54-B5AB-0C4BE51D9712}"/>
+              </a:ext>
+            </a:extLst>
+          </p:cNvPr>
+          <p:cNvSpPr/>
+          <p:nvPr/>
+        </p:nvSpPr>
+        <p:spPr>
+          <a:xfrm>
+            <a:off x="6392333" y="3606800"/>
+            <a:ext cx="1794934" cy="1371600"/>
+          </a:xfrm>
+          <a:prstGeom prst="ellipse">
+            <a:avLst/>
+          </a:prstGeom>
+          <a:solidFill>
+            <a:srgbClr val="FFFF00"/>
+          </a:solidFill>
+          <a:ln w="38100">
+            <a:solidFill>
+              <a:srgbClr val="FF0000"/>
+            </a:solidFill>
+          </a:ln>
+        </p:spPr>
+        <p:style>
+          <a:lnRef idx="2">
+            <a:schemeClr val="accent1">
+              <a:shade val="50000"/>
+            </a:schemeClr>
+          </a:lnRef>
+          <a:fillRef idx="1">
+            <a:schemeClr val="accent1"/>
+          </a:fillRef>
+          <a:effectRef idx="0">
+            <a:schemeClr val="accent1"/>
+          </a:effectRef>
+          <a:fontRef idx="minor">
+            <a:schemeClr val="lt1"/>
+          </a:fontRef>
+        </p:style>
+        <p:txBody>
+          <a:bodyPr rtlCol="0" anchor="ctr"/>
+          <a:lstStyle/>
+          <a:p>
+            <a:pPr algn="ctr"/>
+            <a:r>
+              <a:rPr lang="pt-BR" sz="2000" dirty="0">
+                <a:solidFill>
+                  <a:schemeClr val="tx1"/>
+                </a:solidFill>
+              </a:rPr>
+              <a:t>Excluir o par &lt;</a:t>
+            </a:r>
+            <a:r>
+              <a:rPr lang="pt-BR" sz="2000" dirty="0" err="1">
+                <a:solidFill>
+                  <a:schemeClr val="tx1"/>
+                </a:solidFill>
+              </a:rPr>
+              <a:t>td</a:t>
+            </a:r>
+            <a:r>
+              <a:rPr lang="pt-BR" sz="2000" dirty="0">
+                <a:solidFill>
+                  <a:schemeClr val="tx1"/>
+                </a:solidFill>
+              </a:rPr>
+              <a:t>&gt;</a:t>
+            </a:r>
+          </a:p>
+        </p:txBody>
+      </p:sp>
     </p:spTree>
     <p:extLst>
       <p:ext uri="{BB962C8B-B14F-4D97-AF65-F5344CB8AC3E}">
         <p14:creationId xmlns:p14="http://schemas.microsoft.com/office/powerpoint/2010/main" val="3181705717"/>
+      </p:ext>
+    </p:extLst>
+  </p:cSld>
+  <p:clrMapOvr>
+    <a:masterClrMapping/>
+  </p:clrMapOvr>
+</p:sld>
+</file>
+
+<file path=ppt/slides/slide23.xml><?xml version="1.0" encoding="utf-8"?>
+<p:sld xmlns:a="http://schemas.openxmlformats.org/drawingml/2006/main" xmlns:r="http://schemas.openxmlformats.org/officeDocument/2006/relationships" xmlns:p="http://schemas.openxmlformats.org/presentationml/2006/main">
+  <p:cSld>
+    <p:spTree>
+      <p:nvGrpSpPr>
+        <p:cNvPr id="1" name=""/>
+        <p:cNvGrpSpPr/>
+        <p:nvPr/>
+      </p:nvGrpSpPr>
+      <p:grpSpPr>
+        <a:xfrm>
+          <a:off x="0" y="0"/>
+          <a:ext cx="0" cy="0"/>
+          <a:chOff x="0" y="0"/>
+          <a:chExt cx="0" cy="0"/>
+        </a:xfrm>
+      </p:grpSpPr>
+      <p:pic>
+        <p:nvPicPr>
+          <p:cNvPr id="2" name="Imagem 1">
+            <a:extLst>
+              <a:ext uri="{FF2B5EF4-FFF2-40B4-BE49-F238E27FC236}">
+                <a16:creationId xmlns:a16="http://schemas.microsoft.com/office/drawing/2014/main" id="{3E92C05B-5024-4F3B-8DBD-FAADE3B552E4}"/>
+              </a:ext>
+            </a:extLst>
+          </p:cNvPr>
+          <p:cNvPicPr>
+            <a:picLocks noChangeAspect="1"/>
+          </p:cNvPicPr>
+          <p:nvPr/>
+        </p:nvPicPr>
+        <p:blipFill>
+          <a:blip r:embed="rId2"/>
+          <a:stretch>
+            <a:fillRect/>
+          </a:stretch>
+        </p:blipFill>
+        <p:spPr>
+          <a:xfrm>
+            <a:off x="532623" y="590154"/>
+            <a:ext cx="11126753" cy="5677692"/>
+          </a:xfrm>
+          <a:prstGeom prst="rect">
+            <a:avLst/>
+          </a:prstGeom>
+        </p:spPr>
+      </p:pic>
+      <p:cxnSp>
+        <p:nvCxnSpPr>
+          <p:cNvPr id="4" name="Conector de Seta Reta 3">
+            <a:extLst>
+              <a:ext uri="{FF2B5EF4-FFF2-40B4-BE49-F238E27FC236}">
+                <a16:creationId xmlns:a16="http://schemas.microsoft.com/office/drawing/2014/main" id="{D9568A33-6AC0-4BF3-A329-BC662D6CD621}"/>
+              </a:ext>
+            </a:extLst>
+          </p:cNvPr>
+          <p:cNvCxnSpPr>
+            <a:cxnSpLocks/>
+            <a:stCxn id="5" idx="3"/>
+          </p:cNvCxnSpPr>
+          <p:nvPr/>
+        </p:nvCxnSpPr>
+        <p:spPr>
+          <a:xfrm flipV="1">
+            <a:off x="3488267" y="4318002"/>
+            <a:ext cx="1380066" cy="355598"/>
+          </a:xfrm>
+          <a:prstGeom prst="straightConnector1">
+            <a:avLst/>
+          </a:prstGeom>
+          <a:ln w="38100">
+            <a:solidFill>
+              <a:srgbClr val="FF0000"/>
+            </a:solidFill>
+            <a:tailEnd type="triangle"/>
+          </a:ln>
+        </p:spPr>
+        <p:style>
+          <a:lnRef idx="1">
+            <a:schemeClr val="accent1"/>
+          </a:lnRef>
+          <a:fillRef idx="0">
+            <a:schemeClr val="accent1"/>
+          </a:fillRef>
+          <a:effectRef idx="0">
+            <a:schemeClr val="accent1"/>
+          </a:effectRef>
+          <a:fontRef idx="minor">
+            <a:schemeClr val="tx1"/>
+          </a:fontRef>
+        </p:style>
+      </p:cxnSp>
+      <p:sp>
+        <p:nvSpPr>
+          <p:cNvPr id="5" name="Retângulo 4">
+            <a:extLst>
+              <a:ext uri="{FF2B5EF4-FFF2-40B4-BE49-F238E27FC236}">
+                <a16:creationId xmlns:a16="http://schemas.microsoft.com/office/drawing/2014/main" id="{DFE55E52-2432-4849-BE14-72AB5240C34A}"/>
+              </a:ext>
+            </a:extLst>
+          </p:cNvPr>
+          <p:cNvSpPr/>
+          <p:nvPr/>
+        </p:nvSpPr>
+        <p:spPr>
+          <a:xfrm>
+            <a:off x="1236133" y="4191000"/>
+            <a:ext cx="2252134" cy="965200"/>
+          </a:xfrm>
+          <a:prstGeom prst="rect">
+            <a:avLst/>
+          </a:prstGeom>
+          <a:noFill/>
+          <a:ln w="38100">
+            <a:solidFill>
+              <a:srgbClr val="FF0000"/>
+            </a:solidFill>
+          </a:ln>
+        </p:spPr>
+        <p:style>
+          <a:lnRef idx="2">
+            <a:schemeClr val="accent1">
+              <a:shade val="50000"/>
+            </a:schemeClr>
+          </a:lnRef>
+          <a:fillRef idx="1">
+            <a:schemeClr val="accent1"/>
+          </a:fillRef>
+          <a:effectRef idx="0">
+            <a:schemeClr val="accent1"/>
+          </a:effectRef>
+          <a:fontRef idx="minor">
+            <a:schemeClr val="lt1"/>
+          </a:fontRef>
+        </p:style>
+        <p:txBody>
+          <a:bodyPr rtlCol="0" anchor="ctr"/>
+          <a:lstStyle/>
+          <a:p>
+            <a:pPr algn="ctr"/>
+            <a:endParaRPr lang="pt-BR" sz="2000" dirty="0">
+              <a:solidFill>
+                <a:schemeClr val="tx1"/>
+              </a:solidFill>
+            </a:endParaRPr>
+          </a:p>
+        </p:txBody>
+      </p:sp>
+      <p:sp>
+        <p:nvSpPr>
+          <p:cNvPr id="8" name="Retângulo: Cantos Arredondados 7">
+            <a:extLst>
+              <a:ext uri="{FF2B5EF4-FFF2-40B4-BE49-F238E27FC236}">
+                <a16:creationId xmlns:a16="http://schemas.microsoft.com/office/drawing/2014/main" id="{2B5B20A2-604B-4A9C-8993-4F6F4E3557EE}"/>
+              </a:ext>
+            </a:extLst>
+          </p:cNvPr>
+          <p:cNvSpPr/>
+          <p:nvPr/>
+        </p:nvSpPr>
+        <p:spPr>
+          <a:xfrm>
+            <a:off x="2413000" y="5473698"/>
+            <a:ext cx="2116666" cy="1103181"/>
+          </a:xfrm>
+          <a:prstGeom prst="roundRect">
+            <a:avLst/>
+          </a:prstGeom>
+          <a:solidFill>
+            <a:srgbClr val="FFFF00"/>
+          </a:solidFill>
+          <a:ln w="38100">
+            <a:solidFill>
+              <a:srgbClr val="FF0000"/>
+            </a:solidFill>
+          </a:ln>
+        </p:spPr>
+        <p:style>
+          <a:lnRef idx="2">
+            <a:schemeClr val="accent1">
+              <a:shade val="50000"/>
+            </a:schemeClr>
+          </a:lnRef>
+          <a:fillRef idx="1">
+            <a:schemeClr val="accent1"/>
+          </a:fillRef>
+          <a:effectRef idx="0">
+            <a:schemeClr val="accent1"/>
+          </a:effectRef>
+          <a:fontRef idx="minor">
+            <a:schemeClr val="lt1"/>
+          </a:fontRef>
+        </p:style>
+        <p:txBody>
+          <a:bodyPr rtlCol="0" anchor="ctr"/>
+          <a:lstStyle/>
+          <a:p>
+            <a:pPr algn="ctr"/>
+            <a:r>
+              <a:rPr lang="pt-BR" sz="2000" dirty="0">
+                <a:solidFill>
+                  <a:schemeClr val="tx1"/>
+                </a:solidFill>
+              </a:rPr>
+              <a:t>Estes 3 &lt;</a:t>
+            </a:r>
+            <a:r>
+              <a:rPr lang="pt-BR" sz="2000" dirty="0" err="1">
+                <a:solidFill>
+                  <a:schemeClr val="tx1"/>
+                </a:solidFill>
+              </a:rPr>
+              <a:t>td</a:t>
+            </a:r>
+            <a:r>
+              <a:rPr lang="pt-BR" sz="2000" dirty="0">
+                <a:solidFill>
+                  <a:schemeClr val="tx1"/>
+                </a:solidFill>
+              </a:rPr>
+              <a:t>&gt; são referente a 3ª linha</a:t>
+            </a:r>
+          </a:p>
+        </p:txBody>
+      </p:sp>
+    </p:spTree>
+    <p:extLst>
+      <p:ext uri="{BB962C8B-B14F-4D97-AF65-F5344CB8AC3E}">
+        <p14:creationId xmlns:p14="http://schemas.microsoft.com/office/powerpoint/2010/main" val="230489129"/>
+      </p:ext>
+    </p:extLst>
+  </p:cSld>
+  <p:clrMapOvr>
+    <a:masterClrMapping/>
+  </p:clrMapOvr>
+</p:sld>
+</file>
+
+<file path=ppt/slides/slide24.xml><?xml version="1.0" encoding="utf-8"?>
+<p:sld xmlns:a="http://schemas.openxmlformats.org/drawingml/2006/main" xmlns:r="http://schemas.openxmlformats.org/officeDocument/2006/relationships" xmlns:p="http://schemas.openxmlformats.org/presentationml/2006/main">
+  <p:cSld>
+    <p:spTree>
+      <p:nvGrpSpPr>
+        <p:cNvPr id="1" name=""/>
+        <p:cNvGrpSpPr/>
+        <p:nvPr/>
+      </p:nvGrpSpPr>
+      <p:grpSpPr>
+        <a:xfrm>
+          <a:off x="0" y="0"/>
+          <a:ext cx="0" cy="0"/>
+          <a:chOff x="0" y="0"/>
+          <a:chExt cx="0" cy="0"/>
+        </a:xfrm>
+      </p:grpSpPr>
+      <p:pic>
+        <p:nvPicPr>
+          <p:cNvPr id="3" name="Imagem 2">
+            <a:extLst>
+              <a:ext uri="{FF2B5EF4-FFF2-40B4-BE49-F238E27FC236}">
+                <a16:creationId xmlns:a16="http://schemas.microsoft.com/office/drawing/2014/main" id="{835F08DD-43EC-4158-A9BB-A694DF673E76}"/>
+              </a:ext>
+            </a:extLst>
+          </p:cNvPr>
+          <p:cNvPicPr>
+            <a:picLocks noChangeAspect="1"/>
+          </p:cNvPicPr>
+          <p:nvPr/>
+        </p:nvPicPr>
+        <p:blipFill>
+          <a:blip r:embed="rId2">
+            <a:extLst>
+              <a:ext uri="{28A0092B-C50C-407E-A947-70E740481C1C}">
+                <a14:useLocalDpi xmlns:a14="http://schemas.microsoft.com/office/drawing/2010/main" val="0"/>
+              </a:ext>
+            </a:extLst>
+          </a:blip>
+          <a:stretch>
+            <a:fillRect/>
+          </a:stretch>
+        </p:blipFill>
+        <p:spPr>
+          <a:xfrm>
+            <a:off x="151570" y="485364"/>
+            <a:ext cx="11888859" cy="5887272"/>
+          </a:xfrm>
+          <a:prstGeom prst="rect">
+            <a:avLst/>
+          </a:prstGeom>
+        </p:spPr>
+      </p:pic>
+      <p:sp>
+        <p:nvSpPr>
+          <p:cNvPr id="4" name="Retângulo 3">
+            <a:extLst>
+              <a:ext uri="{FF2B5EF4-FFF2-40B4-BE49-F238E27FC236}">
+                <a16:creationId xmlns:a16="http://schemas.microsoft.com/office/drawing/2014/main" id="{D05749E4-10FE-47E1-BF8A-FCC34040D0A0}"/>
+              </a:ext>
+            </a:extLst>
+          </p:cNvPr>
+          <p:cNvSpPr/>
+          <p:nvPr/>
+        </p:nvSpPr>
+        <p:spPr>
+          <a:xfrm>
+            <a:off x="1083733" y="2489200"/>
+            <a:ext cx="3488267" cy="609600"/>
+          </a:xfrm>
+          <a:prstGeom prst="rect">
+            <a:avLst/>
+          </a:prstGeom>
+          <a:noFill/>
+          <a:ln w="38100">
+            <a:solidFill>
+              <a:srgbClr val="FF0000"/>
+            </a:solidFill>
+          </a:ln>
+        </p:spPr>
+        <p:style>
+          <a:lnRef idx="2">
+            <a:schemeClr val="accent1">
+              <a:shade val="50000"/>
+            </a:schemeClr>
+          </a:lnRef>
+          <a:fillRef idx="1">
+            <a:schemeClr val="accent1"/>
+          </a:fillRef>
+          <a:effectRef idx="0">
+            <a:schemeClr val="accent1"/>
+          </a:effectRef>
+          <a:fontRef idx="minor">
+            <a:schemeClr val="lt1"/>
+          </a:fontRef>
+        </p:style>
+        <p:txBody>
+          <a:bodyPr rtlCol="0" anchor="ctr"/>
+          <a:lstStyle/>
+          <a:p>
+            <a:pPr algn="ctr"/>
+            <a:endParaRPr lang="pt-BR" sz="2000" dirty="0">
+              <a:solidFill>
+                <a:schemeClr val="tx1"/>
+              </a:solidFill>
+            </a:endParaRPr>
+          </a:p>
+        </p:txBody>
+      </p:sp>
+      <p:cxnSp>
+        <p:nvCxnSpPr>
+          <p:cNvPr id="6" name="Conector de Seta Reta 5">
+            <a:extLst>
+              <a:ext uri="{FF2B5EF4-FFF2-40B4-BE49-F238E27FC236}">
+                <a16:creationId xmlns:a16="http://schemas.microsoft.com/office/drawing/2014/main" id="{C2CFC6CD-E835-4896-A825-9D6102FB8E1E}"/>
+              </a:ext>
+            </a:extLst>
+          </p:cNvPr>
+          <p:cNvCxnSpPr/>
+          <p:nvPr/>
+        </p:nvCxnSpPr>
+        <p:spPr>
+          <a:xfrm>
+            <a:off x="4572000" y="2650067"/>
+            <a:ext cx="558800" cy="778933"/>
+          </a:xfrm>
+          <a:prstGeom prst="straightConnector1">
+            <a:avLst/>
+          </a:prstGeom>
+          <a:ln w="38100">
+            <a:solidFill>
+              <a:srgbClr val="FF0000"/>
+            </a:solidFill>
+            <a:tailEnd type="triangle"/>
+          </a:ln>
+        </p:spPr>
+        <p:style>
+          <a:lnRef idx="1">
+            <a:schemeClr val="accent1"/>
+          </a:lnRef>
+          <a:fillRef idx="0">
+            <a:schemeClr val="accent1"/>
+          </a:fillRef>
+          <a:effectRef idx="0">
+            <a:schemeClr val="accent1"/>
+          </a:effectRef>
+          <a:fontRef idx="minor">
+            <a:schemeClr val="tx1"/>
+          </a:fontRef>
+        </p:style>
+      </p:cxnSp>
+      <p:sp>
+        <p:nvSpPr>
+          <p:cNvPr id="7" name="Retângulo 6">
+            <a:extLst>
+              <a:ext uri="{FF2B5EF4-FFF2-40B4-BE49-F238E27FC236}">
+                <a16:creationId xmlns:a16="http://schemas.microsoft.com/office/drawing/2014/main" id="{18E12C7A-F25C-4A2F-AA23-BE66E9918E2D}"/>
+              </a:ext>
+            </a:extLst>
+          </p:cNvPr>
+          <p:cNvSpPr/>
+          <p:nvPr/>
+        </p:nvSpPr>
+        <p:spPr>
+          <a:xfrm>
+            <a:off x="1159933" y="4343400"/>
+            <a:ext cx="2523067" cy="618067"/>
+          </a:xfrm>
+          <a:prstGeom prst="rect">
+            <a:avLst/>
+          </a:prstGeom>
+          <a:noFill/>
+          <a:ln w="38100">
+            <a:solidFill>
+              <a:srgbClr val="FF0000"/>
+            </a:solidFill>
+          </a:ln>
+        </p:spPr>
+        <p:style>
+          <a:lnRef idx="2">
+            <a:schemeClr val="accent1">
+              <a:shade val="50000"/>
+            </a:schemeClr>
+          </a:lnRef>
+          <a:fillRef idx="1">
+            <a:schemeClr val="accent1"/>
+          </a:fillRef>
+          <a:effectRef idx="0">
+            <a:schemeClr val="accent1"/>
+          </a:effectRef>
+          <a:fontRef idx="minor">
+            <a:schemeClr val="lt1"/>
+          </a:fontRef>
+        </p:style>
+        <p:txBody>
+          <a:bodyPr rtlCol="0" anchor="ctr"/>
+          <a:lstStyle/>
+          <a:p>
+            <a:pPr algn="ctr"/>
+            <a:endParaRPr lang="pt-BR" sz="2000" dirty="0">
+              <a:solidFill>
+                <a:schemeClr val="tx1"/>
+              </a:solidFill>
+            </a:endParaRPr>
+          </a:p>
+        </p:txBody>
+      </p:sp>
+      <p:cxnSp>
+        <p:nvCxnSpPr>
+          <p:cNvPr id="9" name="Conector de Seta Reta 8">
+            <a:extLst>
+              <a:ext uri="{FF2B5EF4-FFF2-40B4-BE49-F238E27FC236}">
+                <a16:creationId xmlns:a16="http://schemas.microsoft.com/office/drawing/2014/main" id="{1BADC14E-3186-45AA-BA9E-9C37F84507B5}"/>
+              </a:ext>
+            </a:extLst>
+          </p:cNvPr>
+          <p:cNvCxnSpPr/>
+          <p:nvPr/>
+        </p:nvCxnSpPr>
+        <p:spPr>
+          <a:xfrm flipV="1">
+            <a:off x="3826933" y="3996267"/>
+            <a:ext cx="2836334" cy="750769"/>
+          </a:xfrm>
+          <a:prstGeom prst="straightConnector1">
+            <a:avLst/>
+          </a:prstGeom>
+          <a:ln w="38100">
+            <a:solidFill>
+              <a:srgbClr val="FF0000"/>
+            </a:solidFill>
+            <a:tailEnd type="triangle"/>
+          </a:ln>
+        </p:spPr>
+        <p:style>
+          <a:lnRef idx="1">
+            <a:schemeClr val="accent1"/>
+          </a:lnRef>
+          <a:fillRef idx="0">
+            <a:schemeClr val="accent1"/>
+          </a:fillRef>
+          <a:effectRef idx="0">
+            <a:schemeClr val="accent1"/>
+          </a:effectRef>
+          <a:fontRef idx="minor">
+            <a:schemeClr val="tx1"/>
+          </a:fontRef>
+        </p:style>
+      </p:cxnSp>
+    </p:spTree>
+    <p:extLst>
+      <p:ext uri="{BB962C8B-B14F-4D97-AF65-F5344CB8AC3E}">
+        <p14:creationId xmlns:p14="http://schemas.microsoft.com/office/powerpoint/2010/main" val="802548380"/>
+      </p:ext>
+    </p:extLst>
+  </p:cSld>
+  <p:clrMapOvr>
+    <a:masterClrMapping/>
+  </p:clrMapOvr>
+</p:sld>
+</file>
+
+<file path=ppt/slides/slide25.xml><?xml version="1.0" encoding="utf-8"?>
+<p:sld xmlns:a="http://schemas.openxmlformats.org/drawingml/2006/main" xmlns:r="http://schemas.openxmlformats.org/officeDocument/2006/relationships" xmlns:p="http://schemas.openxmlformats.org/presentationml/2006/main">
+  <p:cSld>
+    <p:spTree>
+      <p:nvGrpSpPr>
+        <p:cNvPr id="1" name=""/>
+        <p:cNvGrpSpPr/>
+        <p:nvPr/>
+      </p:nvGrpSpPr>
+      <p:grpSpPr>
+        <a:xfrm>
+          <a:off x="0" y="0"/>
+          <a:ext cx="0" cy="0"/>
+          <a:chOff x="0" y="0"/>
+          <a:chExt cx="0" cy="0"/>
+        </a:xfrm>
+      </p:grpSpPr>
+      <p:pic>
+        <p:nvPicPr>
+          <p:cNvPr id="3" name="Imagem 2">
+            <a:extLst>
+              <a:ext uri="{FF2B5EF4-FFF2-40B4-BE49-F238E27FC236}">
+                <a16:creationId xmlns:a16="http://schemas.microsoft.com/office/drawing/2014/main" id="{6C47B6A2-C6C4-4B33-8898-2EE2ADDE2484}"/>
+              </a:ext>
+            </a:extLst>
+          </p:cNvPr>
+          <p:cNvPicPr>
+            <a:picLocks noChangeAspect="1"/>
+          </p:cNvPicPr>
+          <p:nvPr/>
+        </p:nvPicPr>
+        <p:blipFill>
+          <a:blip r:embed="rId2">
+            <a:extLst>
+              <a:ext uri="{28A0092B-C50C-407E-A947-70E740481C1C}">
+                <a14:useLocalDpi xmlns:a14="http://schemas.microsoft.com/office/drawing/2010/main" val="0"/>
+              </a:ext>
+            </a:extLst>
+          </a:blip>
+          <a:stretch>
+            <a:fillRect/>
+          </a:stretch>
+        </p:blipFill>
+        <p:spPr>
+          <a:xfrm>
+            <a:off x="351623" y="618733"/>
+            <a:ext cx="11488753" cy="5620534"/>
+          </a:xfrm>
+          <a:prstGeom prst="rect">
+            <a:avLst/>
+          </a:prstGeom>
+        </p:spPr>
+      </p:pic>
+      <p:sp>
+        <p:nvSpPr>
+          <p:cNvPr id="4" name="Retângulo 3">
+            <a:extLst>
+              <a:ext uri="{FF2B5EF4-FFF2-40B4-BE49-F238E27FC236}">
+                <a16:creationId xmlns:a16="http://schemas.microsoft.com/office/drawing/2014/main" id="{624876AC-19CA-4A70-A35A-B0C2227AD82A}"/>
+              </a:ext>
+            </a:extLst>
+          </p:cNvPr>
+          <p:cNvSpPr/>
+          <p:nvPr/>
+        </p:nvSpPr>
+        <p:spPr>
+          <a:xfrm>
+            <a:off x="931333" y="3158067"/>
+            <a:ext cx="2726267" cy="965200"/>
+          </a:xfrm>
+          <a:prstGeom prst="rect">
+            <a:avLst/>
+          </a:prstGeom>
+          <a:noFill/>
+          <a:ln w="38100">
+            <a:solidFill>
+              <a:srgbClr val="FF0000"/>
+            </a:solidFill>
+          </a:ln>
+        </p:spPr>
+        <p:style>
+          <a:lnRef idx="2">
+            <a:schemeClr val="accent1">
+              <a:shade val="50000"/>
+            </a:schemeClr>
+          </a:lnRef>
+          <a:fillRef idx="1">
+            <a:schemeClr val="accent1"/>
+          </a:fillRef>
+          <a:effectRef idx="0">
+            <a:schemeClr val="accent1"/>
+          </a:effectRef>
+          <a:fontRef idx="minor">
+            <a:schemeClr val="lt1"/>
+          </a:fontRef>
+        </p:style>
+        <p:txBody>
+          <a:bodyPr rtlCol="0" anchor="ctr"/>
+          <a:lstStyle/>
+          <a:p>
+            <a:pPr algn="ctr"/>
+            <a:endParaRPr lang="pt-BR" sz="2000" dirty="0">
+              <a:solidFill>
+                <a:schemeClr val="tx1"/>
+              </a:solidFill>
+            </a:endParaRPr>
+          </a:p>
+        </p:txBody>
+      </p:sp>
+      <p:sp>
+        <p:nvSpPr>
+          <p:cNvPr id="5" name="Seta: para a Direita 4">
+            <a:extLst>
+              <a:ext uri="{FF2B5EF4-FFF2-40B4-BE49-F238E27FC236}">
+                <a16:creationId xmlns:a16="http://schemas.microsoft.com/office/drawing/2014/main" id="{DE6AEDFB-FA38-4560-8AB1-78DB2850A198}"/>
+              </a:ext>
+            </a:extLst>
+          </p:cNvPr>
+          <p:cNvSpPr/>
+          <p:nvPr/>
+        </p:nvSpPr>
+        <p:spPr>
+          <a:xfrm>
+            <a:off x="101599" y="3293533"/>
+            <a:ext cx="728134" cy="575734"/>
+          </a:xfrm>
+          <a:prstGeom prst="rightArrow">
+            <a:avLst/>
+          </a:prstGeom>
+          <a:solidFill>
+            <a:srgbClr val="FFFF00"/>
+          </a:solidFill>
+          <a:ln w="38100">
+            <a:solidFill>
+              <a:srgbClr val="FF0000"/>
+            </a:solidFill>
+          </a:ln>
+        </p:spPr>
+        <p:style>
+          <a:lnRef idx="2">
+            <a:schemeClr val="accent1">
+              <a:shade val="50000"/>
+            </a:schemeClr>
+          </a:lnRef>
+          <a:fillRef idx="1">
+            <a:schemeClr val="accent1"/>
+          </a:fillRef>
+          <a:effectRef idx="0">
+            <a:schemeClr val="accent1"/>
+          </a:effectRef>
+          <a:fontRef idx="minor">
+            <a:schemeClr val="lt1"/>
+          </a:fontRef>
+        </p:style>
+        <p:txBody>
+          <a:bodyPr rtlCol="0" anchor="ctr"/>
+          <a:lstStyle/>
+          <a:p>
+            <a:pPr algn="ctr"/>
+            <a:endParaRPr lang="pt-BR" sz="2000" dirty="0">
+              <a:solidFill>
+                <a:schemeClr val="tx1"/>
+              </a:solidFill>
+            </a:endParaRPr>
+          </a:p>
+        </p:txBody>
+      </p:sp>
+    </p:spTree>
+    <p:extLst>
+      <p:ext uri="{BB962C8B-B14F-4D97-AF65-F5344CB8AC3E}">
+        <p14:creationId xmlns:p14="http://schemas.microsoft.com/office/powerpoint/2010/main" val="882908080"/>
+      </p:ext>
+    </p:extLst>
+  </p:cSld>
+  <p:clrMapOvr>
+    <a:masterClrMapping/>
+  </p:clrMapOvr>
+</p:sld>
+</file>
+
+<file path=ppt/slides/slide26.xml><?xml version="1.0" encoding="utf-8"?>
+<p:sld xmlns:a="http://schemas.openxmlformats.org/drawingml/2006/main" xmlns:r="http://schemas.openxmlformats.org/officeDocument/2006/relationships" xmlns:p="http://schemas.openxmlformats.org/presentationml/2006/main">
+  <p:cSld>
+    <p:spTree>
+      <p:nvGrpSpPr>
+        <p:cNvPr id="1" name=""/>
+        <p:cNvGrpSpPr/>
+        <p:nvPr/>
+      </p:nvGrpSpPr>
+      <p:grpSpPr>
+        <a:xfrm>
+          <a:off x="0" y="0"/>
+          <a:ext cx="0" cy="0"/>
+          <a:chOff x="0" y="0"/>
+          <a:chExt cx="0" cy="0"/>
+        </a:xfrm>
+      </p:grpSpPr>
+      <p:pic>
+        <p:nvPicPr>
+          <p:cNvPr id="2" name="Imagem 1">
+            <a:extLst>
+              <a:ext uri="{FF2B5EF4-FFF2-40B4-BE49-F238E27FC236}">
+                <a16:creationId xmlns:a16="http://schemas.microsoft.com/office/drawing/2014/main" id="{70470D80-DFBC-40E0-83B1-371FA4C6A177}"/>
+              </a:ext>
+            </a:extLst>
+          </p:cNvPr>
+          <p:cNvPicPr>
+            <a:picLocks noChangeAspect="1"/>
+          </p:cNvPicPr>
+          <p:nvPr/>
+        </p:nvPicPr>
+        <p:blipFill>
+          <a:blip r:embed="rId2"/>
+          <a:stretch>
+            <a:fillRect/>
+          </a:stretch>
+        </p:blipFill>
+        <p:spPr>
+          <a:xfrm>
+            <a:off x="227781" y="642548"/>
+            <a:ext cx="11736438" cy="5572903"/>
+          </a:xfrm>
+          <a:prstGeom prst="rect">
+            <a:avLst/>
+          </a:prstGeom>
+        </p:spPr>
+      </p:pic>
+      <p:sp>
+        <p:nvSpPr>
+          <p:cNvPr id="3" name="Retângulo 2">
+            <a:extLst>
+              <a:ext uri="{FF2B5EF4-FFF2-40B4-BE49-F238E27FC236}">
+                <a16:creationId xmlns:a16="http://schemas.microsoft.com/office/drawing/2014/main" id="{3621026D-7F99-45D4-B221-107ED3DF388C}"/>
+              </a:ext>
+            </a:extLst>
+          </p:cNvPr>
+          <p:cNvSpPr/>
+          <p:nvPr/>
+        </p:nvSpPr>
+        <p:spPr>
+          <a:xfrm>
+            <a:off x="1066800" y="4893733"/>
+            <a:ext cx="2455333" cy="939800"/>
+          </a:xfrm>
+          <a:prstGeom prst="rect">
+            <a:avLst/>
+          </a:prstGeom>
+          <a:noFill/>
+          <a:ln w="38100">
+            <a:solidFill>
+              <a:srgbClr val="FF0000"/>
+            </a:solidFill>
+          </a:ln>
+        </p:spPr>
+        <p:style>
+          <a:lnRef idx="2">
+            <a:schemeClr val="accent1">
+              <a:shade val="50000"/>
+            </a:schemeClr>
+          </a:lnRef>
+          <a:fillRef idx="1">
+            <a:schemeClr val="accent1"/>
+          </a:fillRef>
+          <a:effectRef idx="0">
+            <a:schemeClr val="accent1"/>
+          </a:effectRef>
+          <a:fontRef idx="minor">
+            <a:schemeClr val="lt1"/>
+          </a:fontRef>
+        </p:style>
+        <p:txBody>
+          <a:bodyPr rtlCol="0" anchor="ctr"/>
+          <a:lstStyle/>
+          <a:p>
+            <a:pPr algn="ctr"/>
+            <a:endParaRPr lang="pt-BR" sz="2000" dirty="0">
+              <a:solidFill>
+                <a:schemeClr val="tx1"/>
+              </a:solidFill>
+            </a:endParaRPr>
+          </a:p>
+        </p:txBody>
+      </p:sp>
+      <p:cxnSp>
+        <p:nvCxnSpPr>
+          <p:cNvPr id="5" name="Conector de Seta Reta 4">
+            <a:extLst>
+              <a:ext uri="{FF2B5EF4-FFF2-40B4-BE49-F238E27FC236}">
+                <a16:creationId xmlns:a16="http://schemas.microsoft.com/office/drawing/2014/main" id="{9DB113B1-CC01-4000-A38F-4A5560974940}"/>
+              </a:ext>
+            </a:extLst>
+          </p:cNvPr>
+          <p:cNvCxnSpPr/>
+          <p:nvPr/>
+        </p:nvCxnSpPr>
+        <p:spPr>
+          <a:xfrm flipV="1">
+            <a:off x="3522133" y="4639733"/>
+            <a:ext cx="1464734" cy="745067"/>
+          </a:xfrm>
+          <a:prstGeom prst="straightConnector1">
+            <a:avLst/>
+          </a:prstGeom>
+          <a:ln w="38100">
+            <a:solidFill>
+              <a:srgbClr val="FF0000"/>
+            </a:solidFill>
+            <a:tailEnd type="triangle"/>
+          </a:ln>
+        </p:spPr>
+        <p:style>
+          <a:lnRef idx="1">
+            <a:schemeClr val="accent1"/>
+          </a:lnRef>
+          <a:fillRef idx="0">
+            <a:schemeClr val="accent1"/>
+          </a:fillRef>
+          <a:effectRef idx="0">
+            <a:schemeClr val="accent1"/>
+          </a:effectRef>
+          <a:fontRef idx="minor">
+            <a:schemeClr val="tx1"/>
+          </a:fontRef>
+        </p:style>
+      </p:cxnSp>
+      <p:cxnSp>
+        <p:nvCxnSpPr>
+          <p:cNvPr id="7" name="Conector reto 6">
+            <a:extLst>
+              <a:ext uri="{FF2B5EF4-FFF2-40B4-BE49-F238E27FC236}">
+                <a16:creationId xmlns:a16="http://schemas.microsoft.com/office/drawing/2014/main" id="{E9883753-D3CE-482C-9B66-2807060F55A1}"/>
+              </a:ext>
+            </a:extLst>
+          </p:cNvPr>
+          <p:cNvCxnSpPr/>
+          <p:nvPr/>
+        </p:nvCxnSpPr>
+        <p:spPr>
+          <a:xfrm>
+            <a:off x="4986867" y="4639733"/>
+            <a:ext cx="3505200" cy="0"/>
+          </a:xfrm>
+          <a:prstGeom prst="line">
+            <a:avLst/>
+          </a:prstGeom>
+          <a:ln w="38100">
+            <a:solidFill>
+              <a:srgbClr val="FF0000"/>
+            </a:solidFill>
+            <a:headEnd type="none" w="med" len="med"/>
+            <a:tailEnd type="none" w="med" len="med"/>
+          </a:ln>
+        </p:spPr>
+        <p:style>
+          <a:lnRef idx="1">
+            <a:schemeClr val="accent1"/>
+          </a:lnRef>
+          <a:fillRef idx="0">
+            <a:schemeClr val="accent1"/>
+          </a:fillRef>
+          <a:effectRef idx="0">
+            <a:schemeClr val="accent1"/>
+          </a:effectRef>
+          <a:fontRef idx="minor">
+            <a:schemeClr val="tx1"/>
+          </a:fontRef>
+        </p:style>
+      </p:cxnSp>
+    </p:spTree>
+    <p:extLst>
+      <p:ext uri="{BB962C8B-B14F-4D97-AF65-F5344CB8AC3E}">
+        <p14:creationId xmlns:p14="http://schemas.microsoft.com/office/powerpoint/2010/main" val="1782096221"/>
+      </p:ext>
+    </p:extLst>
+  </p:cSld>
+  <p:clrMapOvr>
+    <a:masterClrMapping/>
+  </p:clrMapOvr>
+</p:sld>
+</file>
+
+<file path=ppt/slides/slide27.xml><?xml version="1.0" encoding="utf-8"?>
+<p:sld xmlns:a="http://schemas.openxmlformats.org/drawingml/2006/main" xmlns:r="http://schemas.openxmlformats.org/officeDocument/2006/relationships" xmlns:p="http://schemas.openxmlformats.org/presentationml/2006/main">
+  <p:cSld>
+    <p:spTree>
+      <p:nvGrpSpPr>
+        <p:cNvPr id="1" name=""/>
+        <p:cNvGrpSpPr/>
+        <p:nvPr/>
+      </p:nvGrpSpPr>
+      <p:grpSpPr>
+        <a:xfrm>
+          <a:off x="0" y="0"/>
+          <a:ext cx="0" cy="0"/>
+          <a:chOff x="0" y="0"/>
+          <a:chExt cx="0" cy="0"/>
+        </a:xfrm>
+      </p:grpSpPr>
+      <p:pic>
+        <p:nvPicPr>
+          <p:cNvPr id="2" name="Imagem 1">
+            <a:extLst>
+              <a:ext uri="{FF2B5EF4-FFF2-40B4-BE49-F238E27FC236}">
+                <a16:creationId xmlns:a16="http://schemas.microsoft.com/office/drawing/2014/main" id="{7AF021E4-CE24-439C-9610-332359E1D5F9}"/>
+              </a:ext>
+            </a:extLst>
+          </p:cNvPr>
+          <p:cNvPicPr>
+            <a:picLocks noChangeAspect="1"/>
+          </p:cNvPicPr>
+          <p:nvPr/>
+        </p:nvPicPr>
+        <p:blipFill>
+          <a:blip r:embed="rId2"/>
+          <a:stretch>
+            <a:fillRect/>
+          </a:stretch>
+        </p:blipFill>
+        <p:spPr>
+          <a:xfrm>
+            <a:off x="227781" y="642548"/>
+            <a:ext cx="11736438" cy="5572903"/>
+          </a:xfrm>
+          <a:prstGeom prst="rect">
+            <a:avLst/>
+          </a:prstGeom>
+        </p:spPr>
+      </p:pic>
+      <p:sp>
+        <p:nvSpPr>
+          <p:cNvPr id="3" name="Seta: para a Direita 2">
+            <a:extLst>
+              <a:ext uri="{FF2B5EF4-FFF2-40B4-BE49-F238E27FC236}">
+                <a16:creationId xmlns:a16="http://schemas.microsoft.com/office/drawing/2014/main" id="{4FCD26FE-E193-49CB-9A18-D0053D910F33}"/>
+              </a:ext>
+            </a:extLst>
+          </p:cNvPr>
+          <p:cNvSpPr/>
+          <p:nvPr/>
+        </p:nvSpPr>
+        <p:spPr>
+          <a:xfrm>
+            <a:off x="93134" y="4986867"/>
+            <a:ext cx="931333" cy="668866"/>
+          </a:xfrm>
+          <a:prstGeom prst="rightArrow">
+            <a:avLst/>
+          </a:prstGeom>
+          <a:solidFill>
+            <a:srgbClr val="FFFF00"/>
+          </a:solidFill>
+          <a:ln w="38100">
+            <a:solidFill>
+              <a:srgbClr val="FF0000"/>
+            </a:solidFill>
+          </a:ln>
+        </p:spPr>
+        <p:style>
+          <a:lnRef idx="2">
+            <a:schemeClr val="accent1">
+              <a:shade val="50000"/>
+            </a:schemeClr>
+          </a:lnRef>
+          <a:fillRef idx="1">
+            <a:schemeClr val="accent1"/>
+          </a:fillRef>
+          <a:effectRef idx="0">
+            <a:schemeClr val="accent1"/>
+          </a:effectRef>
+          <a:fontRef idx="minor">
+            <a:schemeClr val="lt1"/>
+          </a:fontRef>
+        </p:style>
+        <p:txBody>
+          <a:bodyPr rtlCol="0" anchor="ctr"/>
+          <a:lstStyle/>
+          <a:p>
+            <a:pPr algn="ctr"/>
+            <a:r>
+              <a:rPr lang="pt-BR" sz="1600" dirty="0">
+                <a:solidFill>
+                  <a:schemeClr val="tx1"/>
+                </a:solidFill>
+              </a:rPr>
+              <a:t>excluir</a:t>
+            </a:r>
+          </a:p>
+        </p:txBody>
+      </p:sp>
+      <p:sp>
+        <p:nvSpPr>
+          <p:cNvPr id="4" name="Retângulo 3">
+            <a:extLst>
+              <a:ext uri="{FF2B5EF4-FFF2-40B4-BE49-F238E27FC236}">
+                <a16:creationId xmlns:a16="http://schemas.microsoft.com/office/drawing/2014/main" id="{95CAB087-8502-4F01-B89D-5F055372105D}"/>
+              </a:ext>
+            </a:extLst>
+          </p:cNvPr>
+          <p:cNvSpPr/>
+          <p:nvPr/>
+        </p:nvSpPr>
+        <p:spPr>
+          <a:xfrm>
+            <a:off x="1109133" y="5164667"/>
+            <a:ext cx="1388534" cy="330200"/>
+          </a:xfrm>
+          <a:prstGeom prst="rect">
+            <a:avLst/>
+          </a:prstGeom>
+          <a:noFill/>
+          <a:ln w="38100">
+            <a:solidFill>
+              <a:srgbClr val="FF0000"/>
+            </a:solidFill>
+          </a:ln>
+        </p:spPr>
+        <p:style>
+          <a:lnRef idx="2">
+            <a:schemeClr val="accent1">
+              <a:shade val="50000"/>
+            </a:schemeClr>
+          </a:lnRef>
+          <a:fillRef idx="1">
+            <a:schemeClr val="accent1"/>
+          </a:fillRef>
+          <a:effectRef idx="0">
+            <a:schemeClr val="accent1"/>
+          </a:effectRef>
+          <a:fontRef idx="minor">
+            <a:schemeClr val="lt1"/>
+          </a:fontRef>
+        </p:style>
+        <p:txBody>
+          <a:bodyPr rtlCol="0" anchor="ctr"/>
+          <a:lstStyle/>
+          <a:p>
+            <a:pPr algn="ctr"/>
+            <a:endParaRPr lang="pt-BR" sz="2000" dirty="0">
+              <a:solidFill>
+                <a:schemeClr val="tx1"/>
+              </a:solidFill>
+            </a:endParaRPr>
+          </a:p>
+        </p:txBody>
+      </p:sp>
+    </p:spTree>
+    <p:extLst>
+      <p:ext uri="{BB962C8B-B14F-4D97-AF65-F5344CB8AC3E}">
+        <p14:creationId xmlns:p14="http://schemas.microsoft.com/office/powerpoint/2010/main" val="3881982321"/>
+      </p:ext>
+    </p:extLst>
+  </p:cSld>
+  <p:clrMapOvr>
+    <a:masterClrMapping/>
+  </p:clrMapOvr>
+</p:sld>
+</file>
+
+<file path=ppt/slides/slide28.xml><?xml version="1.0" encoding="utf-8"?>
+<p:sld xmlns:a="http://schemas.openxmlformats.org/drawingml/2006/main" xmlns:r="http://schemas.openxmlformats.org/officeDocument/2006/relationships" xmlns:p="http://schemas.openxmlformats.org/presentationml/2006/main">
+  <p:cSld>
+    <p:spTree>
+      <p:nvGrpSpPr>
+        <p:cNvPr id="1" name=""/>
+        <p:cNvGrpSpPr/>
+        <p:nvPr/>
+      </p:nvGrpSpPr>
+      <p:grpSpPr>
+        <a:xfrm>
+          <a:off x="0" y="0"/>
+          <a:ext cx="0" cy="0"/>
+          <a:chOff x="0" y="0"/>
+          <a:chExt cx="0" cy="0"/>
+        </a:xfrm>
+      </p:grpSpPr>
+      <p:pic>
+        <p:nvPicPr>
+          <p:cNvPr id="2" name="Imagem 1">
+            <a:extLst>
+              <a:ext uri="{FF2B5EF4-FFF2-40B4-BE49-F238E27FC236}">
+                <a16:creationId xmlns:a16="http://schemas.microsoft.com/office/drawing/2014/main" id="{6D8C50C5-C965-4278-AC74-D585E123ADD7}"/>
+              </a:ext>
+            </a:extLst>
+          </p:cNvPr>
+          <p:cNvPicPr>
+            <a:picLocks noChangeAspect="1"/>
+          </p:cNvPicPr>
+          <p:nvPr/>
+        </p:nvPicPr>
+        <p:blipFill>
+          <a:blip r:embed="rId2"/>
+          <a:stretch>
+            <a:fillRect/>
+          </a:stretch>
+        </p:blipFill>
+        <p:spPr>
+          <a:xfrm>
+            <a:off x="280176" y="494890"/>
+            <a:ext cx="11631648" cy="5868219"/>
+          </a:xfrm>
+          <a:prstGeom prst="rect">
+            <a:avLst/>
+          </a:prstGeom>
+        </p:spPr>
+      </p:pic>
+    </p:spTree>
+    <p:extLst>
+      <p:ext uri="{BB962C8B-B14F-4D97-AF65-F5344CB8AC3E}">
+        <p14:creationId xmlns:p14="http://schemas.microsoft.com/office/powerpoint/2010/main" val="2996047118"/>
+      </p:ext>
+    </p:extLst>
+  </p:cSld>
+  <p:clrMapOvr>
+    <a:masterClrMapping/>
+  </p:clrMapOvr>
+</p:sld>
+</file>
+
+<file path=ppt/slides/slide29.xml><?xml version="1.0" encoding="utf-8"?>
+<p:sld xmlns:a="http://schemas.openxmlformats.org/drawingml/2006/main" xmlns:r="http://schemas.openxmlformats.org/officeDocument/2006/relationships" xmlns:p="http://schemas.openxmlformats.org/presentationml/2006/main">
+  <p:cSld>
+    <p:spTree>
+      <p:nvGrpSpPr>
+        <p:cNvPr id="1" name=""/>
+        <p:cNvGrpSpPr/>
+        <p:nvPr/>
+      </p:nvGrpSpPr>
+      <p:grpSpPr>
+        <a:xfrm>
+          <a:off x="0" y="0"/>
+          <a:ext cx="0" cy="0"/>
+          <a:chOff x="0" y="0"/>
+          <a:chExt cx="0" cy="0"/>
+        </a:xfrm>
+      </p:grpSpPr>
+      <p:pic>
+        <p:nvPicPr>
+          <p:cNvPr id="2" name="Imagem 1">
+            <a:extLst>
+              <a:ext uri="{FF2B5EF4-FFF2-40B4-BE49-F238E27FC236}">
+                <a16:creationId xmlns:a16="http://schemas.microsoft.com/office/drawing/2014/main" id="{A22D08C1-B1C4-4CA6-84AE-480B5CD39570}"/>
+              </a:ext>
+            </a:extLst>
+          </p:cNvPr>
+          <p:cNvPicPr>
+            <a:picLocks noChangeAspect="1"/>
+          </p:cNvPicPr>
+          <p:nvPr/>
+        </p:nvPicPr>
+        <p:blipFill>
+          <a:blip r:embed="rId2"/>
+          <a:stretch>
+            <a:fillRect/>
+          </a:stretch>
+        </p:blipFill>
+        <p:spPr>
+          <a:xfrm>
+            <a:off x="384965" y="671127"/>
+            <a:ext cx="11422069" cy="5515745"/>
+          </a:xfrm>
+          <a:prstGeom prst="rect">
+            <a:avLst/>
+          </a:prstGeom>
+        </p:spPr>
+      </p:pic>
+      <p:sp>
+        <p:nvSpPr>
+          <p:cNvPr id="3" name="Retângulo 2">
+            <a:extLst>
+              <a:ext uri="{FF2B5EF4-FFF2-40B4-BE49-F238E27FC236}">
+                <a16:creationId xmlns:a16="http://schemas.microsoft.com/office/drawing/2014/main" id="{4637BFB5-3446-4007-9CBA-40003024AB1A}"/>
+              </a:ext>
+            </a:extLst>
+          </p:cNvPr>
+          <p:cNvSpPr/>
+          <p:nvPr/>
+        </p:nvSpPr>
+        <p:spPr>
+          <a:xfrm>
+            <a:off x="990600" y="2954867"/>
+            <a:ext cx="2150533" cy="338666"/>
+          </a:xfrm>
+          <a:prstGeom prst="rect">
+            <a:avLst/>
+          </a:prstGeom>
+          <a:noFill/>
+          <a:ln w="38100">
+            <a:solidFill>
+              <a:srgbClr val="FF0000"/>
+            </a:solidFill>
+          </a:ln>
+        </p:spPr>
+        <p:style>
+          <a:lnRef idx="2">
+            <a:schemeClr val="accent1">
+              <a:shade val="50000"/>
+            </a:schemeClr>
+          </a:lnRef>
+          <a:fillRef idx="1">
+            <a:schemeClr val="accent1"/>
+          </a:fillRef>
+          <a:effectRef idx="0">
+            <a:schemeClr val="accent1"/>
+          </a:effectRef>
+          <a:fontRef idx="minor">
+            <a:schemeClr val="lt1"/>
+          </a:fontRef>
+        </p:style>
+        <p:txBody>
+          <a:bodyPr rtlCol="0" anchor="ctr"/>
+          <a:lstStyle/>
+          <a:p>
+            <a:pPr algn="ctr"/>
+            <a:endParaRPr lang="pt-BR" sz="2000" dirty="0">
+              <a:solidFill>
+                <a:schemeClr val="tx1"/>
+              </a:solidFill>
+            </a:endParaRPr>
+          </a:p>
+        </p:txBody>
+      </p:sp>
+      <p:cxnSp>
+        <p:nvCxnSpPr>
+          <p:cNvPr id="5" name="Conector de Seta Reta 4">
+            <a:extLst>
+              <a:ext uri="{FF2B5EF4-FFF2-40B4-BE49-F238E27FC236}">
+                <a16:creationId xmlns:a16="http://schemas.microsoft.com/office/drawing/2014/main" id="{1FE43C76-D924-48E0-B2CD-9FCD0ABBCDC2}"/>
+              </a:ext>
+            </a:extLst>
+          </p:cNvPr>
+          <p:cNvCxnSpPr/>
+          <p:nvPr/>
+        </p:nvCxnSpPr>
+        <p:spPr>
+          <a:xfrm flipH="1">
+            <a:off x="3141133" y="1930400"/>
+            <a:ext cx="838200" cy="863600"/>
+          </a:xfrm>
+          <a:prstGeom prst="straightConnector1">
+            <a:avLst/>
+          </a:prstGeom>
+          <a:ln w="38100">
+            <a:solidFill>
+              <a:srgbClr val="FF0000"/>
+            </a:solidFill>
+            <a:tailEnd type="triangle"/>
+          </a:ln>
+        </p:spPr>
+        <p:style>
+          <a:lnRef idx="1">
+            <a:schemeClr val="accent1"/>
+          </a:lnRef>
+          <a:fillRef idx="0">
+            <a:schemeClr val="accent1"/>
+          </a:fillRef>
+          <a:effectRef idx="0">
+            <a:schemeClr val="accent1"/>
+          </a:effectRef>
+          <a:fontRef idx="minor">
+            <a:schemeClr val="tx1"/>
+          </a:fontRef>
+        </p:style>
+      </p:cxnSp>
+      <p:sp>
+        <p:nvSpPr>
+          <p:cNvPr id="6" name="Elipse 5">
+            <a:extLst>
+              <a:ext uri="{FF2B5EF4-FFF2-40B4-BE49-F238E27FC236}">
+                <a16:creationId xmlns:a16="http://schemas.microsoft.com/office/drawing/2014/main" id="{B3C27D48-7AC3-4235-877A-C1C0E5FF06A0}"/>
+              </a:ext>
+            </a:extLst>
+          </p:cNvPr>
+          <p:cNvSpPr/>
+          <p:nvPr/>
+        </p:nvSpPr>
+        <p:spPr>
+          <a:xfrm>
+            <a:off x="3826933" y="1515533"/>
+            <a:ext cx="1617134" cy="1032934"/>
+          </a:xfrm>
+          <a:prstGeom prst="ellipse">
+            <a:avLst/>
+          </a:prstGeom>
+          <a:solidFill>
+            <a:srgbClr val="FFFF00"/>
+          </a:solidFill>
+          <a:ln w="38100">
+            <a:solidFill>
+              <a:srgbClr val="FF0000"/>
+            </a:solidFill>
+          </a:ln>
+        </p:spPr>
+        <p:style>
+          <a:lnRef idx="2">
+            <a:schemeClr val="accent1">
+              <a:shade val="50000"/>
+            </a:schemeClr>
+          </a:lnRef>
+          <a:fillRef idx="1">
+            <a:schemeClr val="accent1"/>
+          </a:fillRef>
+          <a:effectRef idx="0">
+            <a:schemeClr val="accent1"/>
+          </a:effectRef>
+          <a:fontRef idx="minor">
+            <a:schemeClr val="lt1"/>
+          </a:fontRef>
+        </p:style>
+        <p:txBody>
+          <a:bodyPr rtlCol="0" anchor="ctr"/>
+          <a:lstStyle/>
+          <a:p>
+            <a:pPr algn="ctr"/>
+            <a:r>
+              <a:rPr lang="pt-BR" sz="2000" dirty="0">
+                <a:solidFill>
+                  <a:schemeClr val="tx1"/>
+                </a:solidFill>
+              </a:rPr>
+              <a:t>Insira um </a:t>
+            </a:r>
+            <a:r>
+              <a:rPr lang="pt-BR" sz="2000" u="sng" dirty="0" err="1">
+                <a:solidFill>
+                  <a:schemeClr val="tx1"/>
+                </a:solidFill>
+              </a:rPr>
+              <a:t>rowspan</a:t>
+            </a:r>
+            <a:endParaRPr lang="pt-BR" sz="2000" u="sng" dirty="0">
+              <a:solidFill>
+                <a:schemeClr val="tx1"/>
+              </a:solidFill>
+            </a:endParaRPr>
+          </a:p>
+        </p:txBody>
+      </p:sp>
+      <p:cxnSp>
+        <p:nvCxnSpPr>
+          <p:cNvPr id="8" name="Conector de Seta Reta 7">
+            <a:extLst>
+              <a:ext uri="{FF2B5EF4-FFF2-40B4-BE49-F238E27FC236}">
+                <a16:creationId xmlns:a16="http://schemas.microsoft.com/office/drawing/2014/main" id="{68788E1A-8C3D-42C9-AE3E-283983159FB9}"/>
+              </a:ext>
+            </a:extLst>
+          </p:cNvPr>
+          <p:cNvCxnSpPr>
+            <a:stCxn id="6" idx="5"/>
+          </p:cNvCxnSpPr>
+          <p:nvPr/>
+        </p:nvCxnSpPr>
+        <p:spPr>
+          <a:xfrm>
+            <a:off x="5207243" y="2397197"/>
+            <a:ext cx="1371357" cy="1666804"/>
+          </a:xfrm>
+          <a:prstGeom prst="straightConnector1">
+            <a:avLst/>
+          </a:prstGeom>
+          <a:ln w="38100">
+            <a:solidFill>
+              <a:srgbClr val="FF0000"/>
+            </a:solidFill>
+            <a:tailEnd type="triangle"/>
+          </a:ln>
+        </p:spPr>
+        <p:style>
+          <a:lnRef idx="1">
+            <a:schemeClr val="accent1"/>
+          </a:lnRef>
+          <a:fillRef idx="0">
+            <a:schemeClr val="accent1"/>
+          </a:fillRef>
+          <a:effectRef idx="0">
+            <a:schemeClr val="accent1"/>
+          </a:effectRef>
+          <a:fontRef idx="minor">
+            <a:schemeClr val="tx1"/>
+          </a:fontRef>
+        </p:style>
+      </p:cxnSp>
+    </p:spTree>
+    <p:extLst>
+      <p:ext uri="{BB962C8B-B14F-4D97-AF65-F5344CB8AC3E}">
+        <p14:creationId xmlns:p14="http://schemas.microsoft.com/office/powerpoint/2010/main" val="2642839225"/>
       </p:ext>
     </p:extLst>
   </p:cSld>
@@ -5683,6 +8066,1092 @@
     <p:extLst>
       <p:ext uri="{BB962C8B-B14F-4D97-AF65-F5344CB8AC3E}">
         <p14:creationId xmlns:p14="http://schemas.microsoft.com/office/powerpoint/2010/main" val="3223067508"/>
+      </p:ext>
+    </p:extLst>
+  </p:cSld>
+  <p:clrMapOvr>
+    <a:masterClrMapping/>
+  </p:clrMapOvr>
+</p:sld>
+</file>
+
+<file path=ppt/slides/slide30.xml><?xml version="1.0" encoding="utf-8"?>
+<p:sld xmlns:a="http://schemas.openxmlformats.org/drawingml/2006/main" xmlns:r="http://schemas.openxmlformats.org/officeDocument/2006/relationships" xmlns:p="http://schemas.openxmlformats.org/presentationml/2006/main">
+  <p:cSld>
+    <p:spTree>
+      <p:nvGrpSpPr>
+        <p:cNvPr id="1" name=""/>
+        <p:cNvGrpSpPr/>
+        <p:nvPr/>
+      </p:nvGrpSpPr>
+      <p:grpSpPr>
+        <a:xfrm>
+          <a:off x="0" y="0"/>
+          <a:ext cx="0" cy="0"/>
+          <a:chOff x="0" y="0"/>
+          <a:chExt cx="0" cy="0"/>
+        </a:xfrm>
+      </p:grpSpPr>
+      <p:sp>
+        <p:nvSpPr>
+          <p:cNvPr id="2" name="Título 1">
+            <a:extLst>
+              <a:ext uri="{FF2B5EF4-FFF2-40B4-BE49-F238E27FC236}">
+                <a16:creationId xmlns:a16="http://schemas.microsoft.com/office/drawing/2014/main" id="{F358CB55-B402-42E6-956A-96883371E5C6}"/>
+              </a:ext>
+            </a:extLst>
+          </p:cNvPr>
+          <p:cNvSpPr>
+            <a:spLocks noGrp="1"/>
+          </p:cNvSpPr>
+          <p:nvPr>
+            <p:ph type="ctrTitle"/>
+          </p:nvPr>
+        </p:nvSpPr>
+        <p:spPr/>
+        <p:txBody>
+          <a:bodyPr/>
+          <a:lstStyle/>
+          <a:p>
+            <a:r>
+              <a:rPr lang="pt-BR" dirty="0"/>
+              <a:t>Preenchendo a 5ª aula</a:t>
+            </a:r>
+          </a:p>
+        </p:txBody>
+      </p:sp>
+      <p:sp>
+        <p:nvSpPr>
+          <p:cNvPr id="3" name="Subtítulo 2">
+            <a:extLst>
+              <a:ext uri="{FF2B5EF4-FFF2-40B4-BE49-F238E27FC236}">
+                <a16:creationId xmlns:a16="http://schemas.microsoft.com/office/drawing/2014/main" id="{5A0C5FB5-EBBA-4464-BED8-BAA1D0F184D4}"/>
+              </a:ext>
+            </a:extLst>
+          </p:cNvPr>
+          <p:cNvSpPr>
+            <a:spLocks noGrp="1"/>
+          </p:cNvSpPr>
+          <p:nvPr>
+            <p:ph type="subTitle" idx="1"/>
+          </p:nvPr>
+        </p:nvSpPr>
+        <p:spPr/>
+        <p:txBody>
+          <a:bodyPr/>
+          <a:lstStyle/>
+          <a:p>
+            <a:endParaRPr lang="pt-BR"/>
+          </a:p>
+        </p:txBody>
+      </p:sp>
+    </p:spTree>
+    <p:extLst>
+      <p:ext uri="{BB962C8B-B14F-4D97-AF65-F5344CB8AC3E}">
+        <p14:creationId xmlns:p14="http://schemas.microsoft.com/office/powerpoint/2010/main" val="2501837663"/>
+      </p:ext>
+    </p:extLst>
+  </p:cSld>
+  <p:clrMapOvr>
+    <a:masterClrMapping/>
+  </p:clrMapOvr>
+</p:sld>
+</file>
+
+<file path=ppt/slides/slide31.xml><?xml version="1.0" encoding="utf-8"?>
+<p:sld xmlns:a="http://schemas.openxmlformats.org/drawingml/2006/main" xmlns:r="http://schemas.openxmlformats.org/officeDocument/2006/relationships" xmlns:p="http://schemas.openxmlformats.org/presentationml/2006/main">
+  <p:cSld>
+    <p:spTree>
+      <p:nvGrpSpPr>
+        <p:cNvPr id="1" name=""/>
+        <p:cNvGrpSpPr/>
+        <p:nvPr/>
+      </p:nvGrpSpPr>
+      <p:grpSpPr>
+        <a:xfrm>
+          <a:off x="0" y="0"/>
+          <a:ext cx="0" cy="0"/>
+          <a:chOff x="0" y="0"/>
+          <a:chExt cx="0" cy="0"/>
+        </a:xfrm>
+      </p:grpSpPr>
+      <p:pic>
+        <p:nvPicPr>
+          <p:cNvPr id="2" name="Imagem 1">
+            <a:extLst>
+              <a:ext uri="{FF2B5EF4-FFF2-40B4-BE49-F238E27FC236}">
+                <a16:creationId xmlns:a16="http://schemas.microsoft.com/office/drawing/2014/main" id="{26CDE9EE-2AF3-41ED-86FB-B811B89EE8F1}"/>
+              </a:ext>
+            </a:extLst>
+          </p:cNvPr>
+          <p:cNvPicPr>
+            <a:picLocks noChangeAspect="1"/>
+          </p:cNvPicPr>
+          <p:nvPr/>
+        </p:nvPicPr>
+        <p:blipFill>
+          <a:blip r:embed="rId2"/>
+          <a:stretch>
+            <a:fillRect/>
+          </a:stretch>
+        </p:blipFill>
+        <p:spPr>
+          <a:xfrm>
+            <a:off x="361149" y="637785"/>
+            <a:ext cx="11469701" cy="5582429"/>
+          </a:xfrm>
+          <a:prstGeom prst="rect">
+            <a:avLst/>
+          </a:prstGeom>
+        </p:spPr>
+      </p:pic>
+      <p:sp>
+        <p:nvSpPr>
+          <p:cNvPr id="3" name="Retângulo 2">
+            <a:extLst>
+              <a:ext uri="{FF2B5EF4-FFF2-40B4-BE49-F238E27FC236}">
+                <a16:creationId xmlns:a16="http://schemas.microsoft.com/office/drawing/2014/main" id="{76E993C2-B53D-4BB1-B159-0C52E42F6213}"/>
+              </a:ext>
+            </a:extLst>
+          </p:cNvPr>
+          <p:cNvSpPr/>
+          <p:nvPr/>
+        </p:nvSpPr>
+        <p:spPr>
+          <a:xfrm>
+            <a:off x="1134533" y="4241800"/>
+            <a:ext cx="2192867" cy="931333"/>
+          </a:xfrm>
+          <a:prstGeom prst="rect">
+            <a:avLst/>
+          </a:prstGeom>
+          <a:noFill/>
+          <a:ln w="38100">
+            <a:solidFill>
+              <a:srgbClr val="FF0000"/>
+            </a:solidFill>
+          </a:ln>
+        </p:spPr>
+        <p:style>
+          <a:lnRef idx="2">
+            <a:schemeClr val="accent1">
+              <a:shade val="50000"/>
+            </a:schemeClr>
+          </a:lnRef>
+          <a:fillRef idx="1">
+            <a:schemeClr val="accent1"/>
+          </a:fillRef>
+          <a:effectRef idx="0">
+            <a:schemeClr val="accent1"/>
+          </a:effectRef>
+          <a:fontRef idx="minor">
+            <a:schemeClr val="lt1"/>
+          </a:fontRef>
+        </p:style>
+        <p:txBody>
+          <a:bodyPr rtlCol="0" anchor="ctr"/>
+          <a:lstStyle/>
+          <a:p>
+            <a:pPr algn="ctr"/>
+            <a:endParaRPr lang="pt-BR" sz="2000" dirty="0">
+              <a:solidFill>
+                <a:schemeClr val="tx1"/>
+              </a:solidFill>
+            </a:endParaRPr>
+          </a:p>
+        </p:txBody>
+      </p:sp>
+      <p:cxnSp>
+        <p:nvCxnSpPr>
+          <p:cNvPr id="5" name="Conector de Seta Reta 4">
+            <a:extLst>
+              <a:ext uri="{FF2B5EF4-FFF2-40B4-BE49-F238E27FC236}">
+                <a16:creationId xmlns:a16="http://schemas.microsoft.com/office/drawing/2014/main" id="{97AF7078-DE66-4F8F-9C7C-2AB082695931}"/>
+              </a:ext>
+            </a:extLst>
+          </p:cNvPr>
+          <p:cNvCxnSpPr/>
+          <p:nvPr/>
+        </p:nvCxnSpPr>
+        <p:spPr>
+          <a:xfrm>
+            <a:off x="3327400" y="4707467"/>
+            <a:ext cx="1693333" cy="93133"/>
+          </a:xfrm>
+          <a:prstGeom prst="straightConnector1">
+            <a:avLst/>
+          </a:prstGeom>
+          <a:ln w="38100">
+            <a:solidFill>
+              <a:srgbClr val="FF0000"/>
+            </a:solidFill>
+            <a:tailEnd type="triangle"/>
+          </a:ln>
+        </p:spPr>
+        <p:style>
+          <a:lnRef idx="1">
+            <a:schemeClr val="accent1"/>
+          </a:lnRef>
+          <a:fillRef idx="0">
+            <a:schemeClr val="accent1"/>
+          </a:fillRef>
+          <a:effectRef idx="0">
+            <a:schemeClr val="accent1"/>
+          </a:effectRef>
+          <a:fontRef idx="minor">
+            <a:schemeClr val="tx1"/>
+          </a:fontRef>
+        </p:style>
+      </p:cxnSp>
+    </p:spTree>
+    <p:extLst>
+      <p:ext uri="{BB962C8B-B14F-4D97-AF65-F5344CB8AC3E}">
+        <p14:creationId xmlns:p14="http://schemas.microsoft.com/office/powerpoint/2010/main" val="2347614594"/>
+      </p:ext>
+    </p:extLst>
+  </p:cSld>
+  <p:clrMapOvr>
+    <a:masterClrMapping/>
+  </p:clrMapOvr>
+</p:sld>
+</file>
+
+<file path=ppt/slides/slide32.xml><?xml version="1.0" encoding="utf-8"?>
+<p:sld xmlns:a="http://schemas.openxmlformats.org/drawingml/2006/main" xmlns:r="http://schemas.openxmlformats.org/officeDocument/2006/relationships" xmlns:p="http://schemas.openxmlformats.org/presentationml/2006/main">
+  <p:cSld>
+    <p:spTree>
+      <p:nvGrpSpPr>
+        <p:cNvPr id="1" name=""/>
+        <p:cNvGrpSpPr/>
+        <p:nvPr/>
+      </p:nvGrpSpPr>
+      <p:grpSpPr>
+        <a:xfrm>
+          <a:off x="0" y="0"/>
+          <a:ext cx="0" cy="0"/>
+          <a:chOff x="0" y="0"/>
+          <a:chExt cx="0" cy="0"/>
+        </a:xfrm>
+      </p:grpSpPr>
+      <p:sp>
+        <p:nvSpPr>
+          <p:cNvPr id="2" name="Título 1">
+            <a:extLst>
+              <a:ext uri="{FF2B5EF4-FFF2-40B4-BE49-F238E27FC236}">
+                <a16:creationId xmlns:a16="http://schemas.microsoft.com/office/drawing/2014/main" id="{F358CB55-B402-42E6-956A-96883371E5C6}"/>
+              </a:ext>
+            </a:extLst>
+          </p:cNvPr>
+          <p:cNvSpPr>
+            <a:spLocks noGrp="1"/>
+          </p:cNvSpPr>
+          <p:nvPr>
+            <p:ph type="ctrTitle"/>
+          </p:nvPr>
+        </p:nvSpPr>
+        <p:spPr/>
+        <p:txBody>
+          <a:bodyPr/>
+          <a:lstStyle/>
+          <a:p>
+            <a:r>
+              <a:rPr lang="pt-BR" dirty="0"/>
+              <a:t>Preenchendo a 6ª aula</a:t>
+            </a:r>
+          </a:p>
+        </p:txBody>
+      </p:sp>
+      <p:sp>
+        <p:nvSpPr>
+          <p:cNvPr id="3" name="Subtítulo 2">
+            <a:extLst>
+              <a:ext uri="{FF2B5EF4-FFF2-40B4-BE49-F238E27FC236}">
+                <a16:creationId xmlns:a16="http://schemas.microsoft.com/office/drawing/2014/main" id="{5A0C5FB5-EBBA-4464-BED8-BAA1D0F184D4}"/>
+              </a:ext>
+            </a:extLst>
+          </p:cNvPr>
+          <p:cNvSpPr>
+            <a:spLocks noGrp="1"/>
+          </p:cNvSpPr>
+          <p:nvPr>
+            <p:ph type="subTitle" idx="1"/>
+          </p:nvPr>
+        </p:nvSpPr>
+        <p:spPr/>
+        <p:txBody>
+          <a:bodyPr/>
+          <a:lstStyle/>
+          <a:p>
+            <a:endParaRPr lang="pt-BR"/>
+          </a:p>
+        </p:txBody>
+      </p:sp>
+    </p:spTree>
+    <p:extLst>
+      <p:ext uri="{BB962C8B-B14F-4D97-AF65-F5344CB8AC3E}">
+        <p14:creationId xmlns:p14="http://schemas.microsoft.com/office/powerpoint/2010/main" val="3726129546"/>
+      </p:ext>
+    </p:extLst>
+  </p:cSld>
+  <p:clrMapOvr>
+    <a:masterClrMapping/>
+  </p:clrMapOvr>
+</p:sld>
+</file>
+
+<file path=ppt/slides/slide33.xml><?xml version="1.0" encoding="utf-8"?>
+<p:sld xmlns:a="http://schemas.openxmlformats.org/drawingml/2006/main" xmlns:r="http://schemas.openxmlformats.org/officeDocument/2006/relationships" xmlns:p="http://schemas.openxmlformats.org/presentationml/2006/main">
+  <p:cSld>
+    <p:spTree>
+      <p:nvGrpSpPr>
+        <p:cNvPr id="1" name=""/>
+        <p:cNvGrpSpPr/>
+        <p:nvPr/>
+      </p:nvGrpSpPr>
+      <p:grpSpPr>
+        <a:xfrm>
+          <a:off x="0" y="0"/>
+          <a:ext cx="0" cy="0"/>
+          <a:chOff x="0" y="0"/>
+          <a:chExt cx="0" cy="0"/>
+        </a:xfrm>
+      </p:grpSpPr>
+      <p:pic>
+        <p:nvPicPr>
+          <p:cNvPr id="2" name="Imagem 1">
+            <a:extLst>
+              <a:ext uri="{FF2B5EF4-FFF2-40B4-BE49-F238E27FC236}">
+                <a16:creationId xmlns:a16="http://schemas.microsoft.com/office/drawing/2014/main" id="{5D9E50D0-91E8-45D6-848F-0A63BBACF499}"/>
+              </a:ext>
+            </a:extLst>
+          </p:cNvPr>
+          <p:cNvPicPr>
+            <a:picLocks noChangeAspect="1"/>
+          </p:cNvPicPr>
+          <p:nvPr/>
+        </p:nvPicPr>
+        <p:blipFill>
+          <a:blip r:embed="rId2"/>
+          <a:stretch>
+            <a:fillRect/>
+          </a:stretch>
+        </p:blipFill>
+        <p:spPr>
+          <a:xfrm>
+            <a:off x="361149" y="742575"/>
+            <a:ext cx="11469701" cy="5372850"/>
+          </a:xfrm>
+          <a:prstGeom prst="rect">
+            <a:avLst/>
+          </a:prstGeom>
+        </p:spPr>
+      </p:pic>
+      <p:sp>
+        <p:nvSpPr>
+          <p:cNvPr id="3" name="Retângulo 2">
+            <a:extLst>
+              <a:ext uri="{FF2B5EF4-FFF2-40B4-BE49-F238E27FC236}">
+                <a16:creationId xmlns:a16="http://schemas.microsoft.com/office/drawing/2014/main" id="{3F398499-7B74-40AC-A265-75E2C4319511}"/>
+              </a:ext>
+            </a:extLst>
+          </p:cNvPr>
+          <p:cNvSpPr/>
+          <p:nvPr/>
+        </p:nvSpPr>
+        <p:spPr>
+          <a:xfrm>
+            <a:off x="1092200" y="3683000"/>
+            <a:ext cx="2760133" cy="889000"/>
+          </a:xfrm>
+          <a:prstGeom prst="rect">
+            <a:avLst/>
+          </a:prstGeom>
+          <a:noFill/>
+          <a:ln w="38100">
+            <a:solidFill>
+              <a:srgbClr val="FF0000"/>
+            </a:solidFill>
+          </a:ln>
+        </p:spPr>
+        <p:style>
+          <a:lnRef idx="2">
+            <a:schemeClr val="accent1">
+              <a:shade val="50000"/>
+            </a:schemeClr>
+          </a:lnRef>
+          <a:fillRef idx="1">
+            <a:schemeClr val="accent1"/>
+          </a:fillRef>
+          <a:effectRef idx="0">
+            <a:schemeClr val="accent1"/>
+          </a:effectRef>
+          <a:fontRef idx="minor">
+            <a:schemeClr val="lt1"/>
+          </a:fontRef>
+        </p:style>
+        <p:txBody>
+          <a:bodyPr rtlCol="0" anchor="ctr"/>
+          <a:lstStyle/>
+          <a:p>
+            <a:pPr algn="ctr"/>
+            <a:endParaRPr lang="pt-BR" sz="2000" dirty="0">
+              <a:solidFill>
+                <a:schemeClr val="tx1"/>
+              </a:solidFill>
+            </a:endParaRPr>
+          </a:p>
+        </p:txBody>
+      </p:sp>
+      <p:cxnSp>
+        <p:nvCxnSpPr>
+          <p:cNvPr id="5" name="Conector de Seta Reta 4">
+            <a:extLst>
+              <a:ext uri="{FF2B5EF4-FFF2-40B4-BE49-F238E27FC236}">
+                <a16:creationId xmlns:a16="http://schemas.microsoft.com/office/drawing/2014/main" id="{30636D1E-82C2-4ECA-AE0B-2374AC0FC397}"/>
+              </a:ext>
+            </a:extLst>
+          </p:cNvPr>
+          <p:cNvCxnSpPr>
+            <a:stCxn id="3" idx="3"/>
+          </p:cNvCxnSpPr>
+          <p:nvPr/>
+        </p:nvCxnSpPr>
+        <p:spPr>
+          <a:xfrm>
+            <a:off x="3852333" y="4127500"/>
+            <a:ext cx="1159934" cy="690033"/>
+          </a:xfrm>
+          <a:prstGeom prst="straightConnector1">
+            <a:avLst/>
+          </a:prstGeom>
+          <a:ln w="38100">
+            <a:solidFill>
+              <a:srgbClr val="FF0000"/>
+            </a:solidFill>
+            <a:tailEnd type="triangle"/>
+          </a:ln>
+        </p:spPr>
+        <p:style>
+          <a:lnRef idx="1">
+            <a:schemeClr val="accent1"/>
+          </a:lnRef>
+          <a:fillRef idx="0">
+            <a:schemeClr val="accent1"/>
+          </a:fillRef>
+          <a:effectRef idx="0">
+            <a:schemeClr val="accent1"/>
+          </a:effectRef>
+          <a:fontRef idx="minor">
+            <a:schemeClr val="tx1"/>
+          </a:fontRef>
+        </p:style>
+      </p:cxnSp>
+    </p:spTree>
+    <p:extLst>
+      <p:ext uri="{BB962C8B-B14F-4D97-AF65-F5344CB8AC3E}">
+        <p14:creationId xmlns:p14="http://schemas.microsoft.com/office/powerpoint/2010/main" val="4200346742"/>
+      </p:ext>
+    </p:extLst>
+  </p:cSld>
+  <p:clrMapOvr>
+    <a:masterClrMapping/>
+  </p:clrMapOvr>
+</p:sld>
+</file>
+
+<file path=ppt/slides/slide34.xml><?xml version="1.0" encoding="utf-8"?>
+<p:sld xmlns:a="http://schemas.openxmlformats.org/drawingml/2006/main" xmlns:r="http://schemas.openxmlformats.org/officeDocument/2006/relationships" xmlns:p="http://schemas.openxmlformats.org/presentationml/2006/main">
+  <p:cSld>
+    <p:spTree>
+      <p:nvGrpSpPr>
+        <p:cNvPr id="1" name=""/>
+        <p:cNvGrpSpPr/>
+        <p:nvPr/>
+      </p:nvGrpSpPr>
+      <p:grpSpPr>
+        <a:xfrm>
+          <a:off x="0" y="0"/>
+          <a:ext cx="0" cy="0"/>
+          <a:chOff x="0" y="0"/>
+          <a:chExt cx="0" cy="0"/>
+        </a:xfrm>
+      </p:grpSpPr>
+      <p:sp>
+        <p:nvSpPr>
+          <p:cNvPr id="2" name="Título 1">
+            <a:extLst>
+              <a:ext uri="{FF2B5EF4-FFF2-40B4-BE49-F238E27FC236}">
+                <a16:creationId xmlns:a16="http://schemas.microsoft.com/office/drawing/2014/main" id="{5521A638-D36A-4332-A934-74D40C968EEA}"/>
+              </a:ext>
+            </a:extLst>
+          </p:cNvPr>
+          <p:cNvSpPr>
+            <a:spLocks noGrp="1"/>
+          </p:cNvSpPr>
+          <p:nvPr>
+            <p:ph type="ctrTitle"/>
+          </p:nvPr>
+        </p:nvSpPr>
+        <p:spPr/>
+        <p:txBody>
+          <a:bodyPr/>
+          <a:lstStyle/>
+          <a:p>
+            <a:r>
+              <a:rPr lang="pt-BR" dirty="0"/>
+              <a:t>Mesclando a 5ª e 6ª aula</a:t>
+            </a:r>
+          </a:p>
+        </p:txBody>
+      </p:sp>
+      <p:sp>
+        <p:nvSpPr>
+          <p:cNvPr id="3" name="Subtítulo 2">
+            <a:extLst>
+              <a:ext uri="{FF2B5EF4-FFF2-40B4-BE49-F238E27FC236}">
+                <a16:creationId xmlns:a16="http://schemas.microsoft.com/office/drawing/2014/main" id="{D0DBD50E-78B3-4846-AB48-0BE70D9BCAF2}"/>
+              </a:ext>
+            </a:extLst>
+          </p:cNvPr>
+          <p:cNvSpPr>
+            <a:spLocks noGrp="1"/>
+          </p:cNvSpPr>
+          <p:nvPr>
+            <p:ph type="subTitle" idx="1"/>
+          </p:nvPr>
+        </p:nvSpPr>
+        <p:spPr/>
+        <p:txBody>
+          <a:bodyPr/>
+          <a:lstStyle/>
+          <a:p>
+            <a:endParaRPr lang="pt-BR"/>
+          </a:p>
+        </p:txBody>
+      </p:sp>
+    </p:spTree>
+    <p:extLst>
+      <p:ext uri="{BB962C8B-B14F-4D97-AF65-F5344CB8AC3E}">
+        <p14:creationId xmlns:p14="http://schemas.microsoft.com/office/powerpoint/2010/main" val="3115586943"/>
+      </p:ext>
+    </p:extLst>
+  </p:cSld>
+  <p:clrMapOvr>
+    <a:masterClrMapping/>
+  </p:clrMapOvr>
+</p:sld>
+</file>
+
+<file path=ppt/slides/slide35.xml><?xml version="1.0" encoding="utf-8"?>
+<p:sld xmlns:a="http://schemas.openxmlformats.org/drawingml/2006/main" xmlns:r="http://schemas.openxmlformats.org/officeDocument/2006/relationships" xmlns:p="http://schemas.openxmlformats.org/presentationml/2006/main">
+  <p:cSld>
+    <p:spTree>
+      <p:nvGrpSpPr>
+        <p:cNvPr id="1" name=""/>
+        <p:cNvGrpSpPr/>
+        <p:nvPr/>
+      </p:nvGrpSpPr>
+      <p:grpSpPr>
+        <a:xfrm>
+          <a:off x="0" y="0"/>
+          <a:ext cx="0" cy="0"/>
+          <a:chOff x="0" y="0"/>
+          <a:chExt cx="0" cy="0"/>
+        </a:xfrm>
+      </p:grpSpPr>
+      <p:pic>
+        <p:nvPicPr>
+          <p:cNvPr id="2" name="Imagem 1">
+            <a:extLst>
+              <a:ext uri="{FF2B5EF4-FFF2-40B4-BE49-F238E27FC236}">
+                <a16:creationId xmlns:a16="http://schemas.microsoft.com/office/drawing/2014/main" id="{E77A6E80-5E58-44E6-A3FF-5A4BCF138EE9}"/>
+              </a:ext>
+            </a:extLst>
+          </p:cNvPr>
+          <p:cNvPicPr>
+            <a:picLocks noChangeAspect="1"/>
+          </p:cNvPicPr>
+          <p:nvPr/>
+        </p:nvPicPr>
+        <p:blipFill>
+          <a:blip r:embed="rId2"/>
+          <a:stretch>
+            <a:fillRect/>
+          </a:stretch>
+        </p:blipFill>
+        <p:spPr>
+          <a:xfrm>
+            <a:off x="280176" y="699706"/>
+            <a:ext cx="11631648" cy="5458587"/>
+          </a:xfrm>
+          <a:prstGeom prst="rect">
+            <a:avLst/>
+          </a:prstGeom>
+        </p:spPr>
+      </p:pic>
+    </p:spTree>
+    <p:extLst>
+      <p:ext uri="{BB962C8B-B14F-4D97-AF65-F5344CB8AC3E}">
+        <p14:creationId xmlns:p14="http://schemas.microsoft.com/office/powerpoint/2010/main" val="1419219450"/>
+      </p:ext>
+    </p:extLst>
+  </p:cSld>
+  <p:clrMapOvr>
+    <a:masterClrMapping/>
+  </p:clrMapOvr>
+</p:sld>
+</file>
+
+<file path=ppt/slides/slide36.xml><?xml version="1.0" encoding="utf-8"?>
+<p:sld xmlns:a="http://schemas.openxmlformats.org/drawingml/2006/main" xmlns:r="http://schemas.openxmlformats.org/officeDocument/2006/relationships" xmlns:p="http://schemas.openxmlformats.org/presentationml/2006/main">
+  <p:cSld>
+    <p:spTree>
+      <p:nvGrpSpPr>
+        <p:cNvPr id="1" name=""/>
+        <p:cNvGrpSpPr/>
+        <p:nvPr/>
+      </p:nvGrpSpPr>
+      <p:grpSpPr>
+        <a:xfrm>
+          <a:off x="0" y="0"/>
+          <a:ext cx="0" cy="0"/>
+          <a:chOff x="0" y="0"/>
+          <a:chExt cx="0" cy="0"/>
+        </a:xfrm>
+      </p:grpSpPr>
+      <p:pic>
+        <p:nvPicPr>
+          <p:cNvPr id="2" name="Imagem 1">
+            <a:extLst>
+              <a:ext uri="{FF2B5EF4-FFF2-40B4-BE49-F238E27FC236}">
+                <a16:creationId xmlns:a16="http://schemas.microsoft.com/office/drawing/2014/main" id="{8A95DDFA-8179-4A06-801C-BF9F6510AAB0}"/>
+              </a:ext>
+            </a:extLst>
+          </p:cNvPr>
+          <p:cNvPicPr>
+            <a:picLocks noChangeAspect="1"/>
+          </p:cNvPicPr>
+          <p:nvPr/>
+        </p:nvPicPr>
+        <p:blipFill>
+          <a:blip r:embed="rId2"/>
+          <a:stretch>
+            <a:fillRect/>
+          </a:stretch>
+        </p:blipFill>
+        <p:spPr>
+          <a:xfrm>
+            <a:off x="2743200" y="1004887"/>
+            <a:ext cx="6705600" cy="4848225"/>
+          </a:xfrm>
+          <a:prstGeom prst="rect">
+            <a:avLst/>
+          </a:prstGeom>
+        </p:spPr>
+      </p:pic>
+    </p:spTree>
+    <p:extLst>
+      <p:ext uri="{BB962C8B-B14F-4D97-AF65-F5344CB8AC3E}">
+        <p14:creationId xmlns:p14="http://schemas.microsoft.com/office/powerpoint/2010/main" val="2797988684"/>
+      </p:ext>
+    </p:extLst>
+  </p:cSld>
+  <p:clrMapOvr>
+    <a:masterClrMapping/>
+  </p:clrMapOvr>
+</p:sld>
+</file>
+
+<file path=ppt/slides/slide37.xml><?xml version="1.0" encoding="utf-8"?>
+<p:sld xmlns:a="http://schemas.openxmlformats.org/drawingml/2006/main" xmlns:r="http://schemas.openxmlformats.org/officeDocument/2006/relationships" xmlns:p="http://schemas.openxmlformats.org/presentationml/2006/main">
+  <p:cSld>
+    <p:spTree>
+      <p:nvGrpSpPr>
+        <p:cNvPr id="1" name=""/>
+        <p:cNvGrpSpPr/>
+        <p:nvPr/>
+      </p:nvGrpSpPr>
+      <p:grpSpPr>
+        <a:xfrm>
+          <a:off x="0" y="0"/>
+          <a:ext cx="0" cy="0"/>
+          <a:chOff x="0" y="0"/>
+          <a:chExt cx="0" cy="0"/>
+        </a:xfrm>
+      </p:grpSpPr>
+      <p:pic>
+        <p:nvPicPr>
+          <p:cNvPr id="4" name="Imagem 3">
+            <a:extLst>
+              <a:ext uri="{FF2B5EF4-FFF2-40B4-BE49-F238E27FC236}">
+                <a16:creationId xmlns:a16="http://schemas.microsoft.com/office/drawing/2014/main" id="{9A4EC703-09C3-4847-A395-9FF80CAB2023}"/>
+              </a:ext>
+            </a:extLst>
+          </p:cNvPr>
+          <p:cNvPicPr>
+            <a:picLocks noChangeAspect="1"/>
+          </p:cNvPicPr>
+          <p:nvPr/>
+        </p:nvPicPr>
+        <p:blipFill>
+          <a:blip r:embed="rId2"/>
+          <a:stretch>
+            <a:fillRect/>
+          </a:stretch>
+        </p:blipFill>
+        <p:spPr>
+          <a:xfrm>
+            <a:off x="1633423" y="202505"/>
+            <a:ext cx="8925154" cy="6452988"/>
+          </a:xfrm>
+          <a:prstGeom prst="rect">
+            <a:avLst/>
+          </a:prstGeom>
+        </p:spPr>
+      </p:pic>
+      <p:cxnSp>
+        <p:nvCxnSpPr>
+          <p:cNvPr id="6" name="Conector de Seta Reta 5">
+            <a:extLst>
+              <a:ext uri="{FF2B5EF4-FFF2-40B4-BE49-F238E27FC236}">
+                <a16:creationId xmlns:a16="http://schemas.microsoft.com/office/drawing/2014/main" id="{ABA3E6C6-D9C8-4B7A-B538-A45295A50283}"/>
+              </a:ext>
+            </a:extLst>
+          </p:cNvPr>
+          <p:cNvCxnSpPr>
+            <a:cxnSpLocks/>
+            <a:stCxn id="7" idx="5"/>
+          </p:cNvCxnSpPr>
+          <p:nvPr/>
+        </p:nvCxnSpPr>
+        <p:spPr>
+          <a:xfrm>
+            <a:off x="1319626" y="2633273"/>
+            <a:ext cx="475307" cy="186127"/>
+          </a:xfrm>
+          <a:prstGeom prst="straightConnector1">
+            <a:avLst/>
+          </a:prstGeom>
+          <a:ln w="38100">
+            <a:solidFill>
+              <a:srgbClr val="FF0000"/>
+            </a:solidFill>
+            <a:tailEnd type="triangle"/>
+          </a:ln>
+        </p:spPr>
+        <p:style>
+          <a:lnRef idx="1">
+            <a:schemeClr val="accent1"/>
+          </a:lnRef>
+          <a:fillRef idx="0">
+            <a:schemeClr val="accent1"/>
+          </a:fillRef>
+          <a:effectRef idx="0">
+            <a:schemeClr val="accent1"/>
+          </a:effectRef>
+          <a:fontRef idx="minor">
+            <a:schemeClr val="tx1"/>
+          </a:fontRef>
+        </p:style>
+      </p:cxnSp>
+      <p:sp>
+        <p:nvSpPr>
+          <p:cNvPr id="7" name="Elipse 6">
+            <a:extLst>
+              <a:ext uri="{FF2B5EF4-FFF2-40B4-BE49-F238E27FC236}">
+                <a16:creationId xmlns:a16="http://schemas.microsoft.com/office/drawing/2014/main" id="{A3AE8F98-93F9-446C-9C20-49A0B48E1114}"/>
+              </a:ext>
+            </a:extLst>
+          </p:cNvPr>
+          <p:cNvSpPr/>
+          <p:nvPr/>
+        </p:nvSpPr>
+        <p:spPr>
+          <a:xfrm>
+            <a:off x="177799" y="2091267"/>
+            <a:ext cx="1337733" cy="635000"/>
+          </a:xfrm>
+          <a:prstGeom prst="ellipse">
+            <a:avLst/>
+          </a:prstGeom>
+          <a:solidFill>
+            <a:srgbClr val="FFFF00"/>
+          </a:solidFill>
+          <a:ln w="38100">
+            <a:solidFill>
+              <a:srgbClr val="FF0000"/>
+            </a:solidFill>
+          </a:ln>
+        </p:spPr>
+        <p:style>
+          <a:lnRef idx="2">
+            <a:schemeClr val="accent1">
+              <a:shade val="50000"/>
+            </a:schemeClr>
+          </a:lnRef>
+          <a:fillRef idx="1">
+            <a:schemeClr val="accent1"/>
+          </a:fillRef>
+          <a:effectRef idx="0">
+            <a:schemeClr val="accent1"/>
+          </a:effectRef>
+          <a:fontRef idx="minor">
+            <a:schemeClr val="lt1"/>
+          </a:fontRef>
+        </p:style>
+        <p:txBody>
+          <a:bodyPr rtlCol="0" anchor="ctr"/>
+          <a:lstStyle/>
+          <a:p>
+            <a:pPr algn="ctr"/>
+            <a:r>
+              <a:rPr lang="pt-BR" sz="1200" dirty="0" err="1">
+                <a:solidFill>
+                  <a:schemeClr val="tx1"/>
+                </a:solidFill>
+              </a:rPr>
+              <a:t>rowspan</a:t>
+            </a:r>
+            <a:r>
+              <a:rPr lang="pt-BR" sz="1200" dirty="0">
+                <a:solidFill>
+                  <a:schemeClr val="tx1"/>
+                </a:solidFill>
+              </a:rPr>
+              <a:t>=2</a:t>
+            </a:r>
+          </a:p>
+        </p:txBody>
+      </p:sp>
+      <p:sp>
+        <p:nvSpPr>
+          <p:cNvPr id="9" name="Elipse 8">
+            <a:extLst>
+              <a:ext uri="{FF2B5EF4-FFF2-40B4-BE49-F238E27FC236}">
+                <a16:creationId xmlns:a16="http://schemas.microsoft.com/office/drawing/2014/main" id="{26491737-E1A0-4F63-AFEB-9C121812D8B6}"/>
+              </a:ext>
+            </a:extLst>
+          </p:cNvPr>
+          <p:cNvSpPr/>
+          <p:nvPr/>
+        </p:nvSpPr>
+        <p:spPr>
+          <a:xfrm>
+            <a:off x="218957" y="4462769"/>
+            <a:ext cx="1337733" cy="635000"/>
+          </a:xfrm>
+          <a:prstGeom prst="ellipse">
+            <a:avLst/>
+          </a:prstGeom>
+          <a:solidFill>
+            <a:srgbClr val="FFFF00"/>
+          </a:solidFill>
+          <a:ln w="38100">
+            <a:solidFill>
+              <a:srgbClr val="FF0000"/>
+            </a:solidFill>
+          </a:ln>
+        </p:spPr>
+        <p:style>
+          <a:lnRef idx="2">
+            <a:schemeClr val="accent1">
+              <a:shade val="50000"/>
+            </a:schemeClr>
+          </a:lnRef>
+          <a:fillRef idx="1">
+            <a:schemeClr val="accent1"/>
+          </a:fillRef>
+          <a:effectRef idx="0">
+            <a:schemeClr val="accent1"/>
+          </a:effectRef>
+          <a:fontRef idx="minor">
+            <a:schemeClr val="lt1"/>
+          </a:fontRef>
+        </p:style>
+        <p:txBody>
+          <a:bodyPr rtlCol="0" anchor="ctr"/>
+          <a:lstStyle/>
+          <a:p>
+            <a:pPr algn="ctr"/>
+            <a:r>
+              <a:rPr lang="pt-BR" sz="1200" dirty="0" err="1">
+                <a:solidFill>
+                  <a:schemeClr val="tx1"/>
+                </a:solidFill>
+              </a:rPr>
+              <a:t>rowspan</a:t>
+            </a:r>
+            <a:r>
+              <a:rPr lang="pt-BR" sz="1200" dirty="0">
+                <a:solidFill>
+                  <a:schemeClr val="tx1"/>
+                </a:solidFill>
+              </a:rPr>
+              <a:t>=3</a:t>
+            </a:r>
+          </a:p>
+        </p:txBody>
+      </p:sp>
+      <p:cxnSp>
+        <p:nvCxnSpPr>
+          <p:cNvPr id="10" name="Conector de Seta Reta 9">
+            <a:extLst>
+              <a:ext uri="{FF2B5EF4-FFF2-40B4-BE49-F238E27FC236}">
+                <a16:creationId xmlns:a16="http://schemas.microsoft.com/office/drawing/2014/main" id="{075A81F5-C55E-4A4D-9B8E-DB512E49746F}"/>
+              </a:ext>
+            </a:extLst>
+          </p:cNvPr>
+          <p:cNvCxnSpPr>
+            <a:cxnSpLocks/>
+            <a:stCxn id="9" idx="7"/>
+          </p:cNvCxnSpPr>
+          <p:nvPr/>
+        </p:nvCxnSpPr>
+        <p:spPr>
+          <a:xfrm flipV="1">
+            <a:off x="1360784" y="4174067"/>
+            <a:ext cx="603483" cy="381696"/>
+          </a:xfrm>
+          <a:prstGeom prst="straightConnector1">
+            <a:avLst/>
+          </a:prstGeom>
+          <a:ln w="38100">
+            <a:solidFill>
+              <a:srgbClr val="FF0000"/>
+            </a:solidFill>
+            <a:tailEnd type="triangle"/>
+          </a:ln>
+        </p:spPr>
+        <p:style>
+          <a:lnRef idx="1">
+            <a:schemeClr val="accent1"/>
+          </a:lnRef>
+          <a:fillRef idx="0">
+            <a:schemeClr val="accent1"/>
+          </a:fillRef>
+          <a:effectRef idx="0">
+            <a:schemeClr val="accent1"/>
+          </a:effectRef>
+          <a:fontRef idx="minor">
+            <a:schemeClr val="tx1"/>
+          </a:fontRef>
+        </p:style>
+      </p:cxnSp>
+      <p:sp>
+        <p:nvSpPr>
+          <p:cNvPr id="13" name="Elipse 12">
+            <a:extLst>
+              <a:ext uri="{FF2B5EF4-FFF2-40B4-BE49-F238E27FC236}">
+                <a16:creationId xmlns:a16="http://schemas.microsoft.com/office/drawing/2014/main" id="{F8FE6071-FAFC-4195-ADF1-7C28B908F605}"/>
+              </a:ext>
+            </a:extLst>
+          </p:cNvPr>
+          <p:cNvSpPr/>
+          <p:nvPr/>
+        </p:nvSpPr>
+        <p:spPr>
+          <a:xfrm>
+            <a:off x="6544732" y="2501900"/>
+            <a:ext cx="1337733" cy="635000"/>
+          </a:xfrm>
+          <a:prstGeom prst="ellipse">
+            <a:avLst/>
+          </a:prstGeom>
+          <a:solidFill>
+            <a:srgbClr val="FFFF00"/>
+          </a:solidFill>
+          <a:ln w="38100">
+            <a:solidFill>
+              <a:srgbClr val="FF0000"/>
+            </a:solidFill>
+          </a:ln>
+        </p:spPr>
+        <p:style>
+          <a:lnRef idx="2">
+            <a:schemeClr val="accent1">
+              <a:shade val="50000"/>
+            </a:schemeClr>
+          </a:lnRef>
+          <a:fillRef idx="1">
+            <a:schemeClr val="accent1"/>
+          </a:fillRef>
+          <a:effectRef idx="0">
+            <a:schemeClr val="accent1"/>
+          </a:effectRef>
+          <a:fontRef idx="minor">
+            <a:schemeClr val="lt1"/>
+          </a:fontRef>
+        </p:style>
+        <p:txBody>
+          <a:bodyPr rtlCol="0" anchor="ctr"/>
+          <a:lstStyle/>
+          <a:p>
+            <a:pPr algn="ctr"/>
+            <a:r>
+              <a:rPr lang="pt-BR" sz="1200" dirty="0" err="1">
+                <a:solidFill>
+                  <a:schemeClr val="tx1"/>
+                </a:solidFill>
+              </a:rPr>
+              <a:t>colspan</a:t>
+            </a:r>
+            <a:r>
+              <a:rPr lang="pt-BR" sz="1200" dirty="0">
+                <a:solidFill>
+                  <a:schemeClr val="tx1"/>
+                </a:solidFill>
+              </a:rPr>
+              <a:t>=3</a:t>
+            </a:r>
+          </a:p>
+        </p:txBody>
+      </p:sp>
+      <p:cxnSp>
+        <p:nvCxnSpPr>
+          <p:cNvPr id="15" name="Conector de Seta Reta 14">
+            <a:extLst>
+              <a:ext uri="{FF2B5EF4-FFF2-40B4-BE49-F238E27FC236}">
+                <a16:creationId xmlns:a16="http://schemas.microsoft.com/office/drawing/2014/main" id="{819B0A70-7CB4-42AD-9E94-809E1BC96FAB}"/>
+              </a:ext>
+            </a:extLst>
+          </p:cNvPr>
+          <p:cNvCxnSpPr/>
+          <p:nvPr/>
+        </p:nvCxnSpPr>
+        <p:spPr>
+          <a:xfrm flipH="1">
+            <a:off x="5228487" y="2819400"/>
+            <a:ext cx="1290846" cy="67733"/>
+          </a:xfrm>
+          <a:prstGeom prst="straightConnector1">
+            <a:avLst/>
+          </a:prstGeom>
+          <a:ln w="38100">
+            <a:solidFill>
+              <a:srgbClr val="FF0000"/>
+            </a:solidFill>
+            <a:tailEnd type="triangle"/>
+          </a:ln>
+        </p:spPr>
+        <p:style>
+          <a:lnRef idx="1">
+            <a:schemeClr val="accent1"/>
+          </a:lnRef>
+          <a:fillRef idx="0">
+            <a:schemeClr val="accent1"/>
+          </a:fillRef>
+          <a:effectRef idx="0">
+            <a:schemeClr val="accent1"/>
+          </a:effectRef>
+          <a:fontRef idx="minor">
+            <a:schemeClr val="tx1"/>
+          </a:fontRef>
+        </p:style>
+      </p:cxnSp>
+    </p:spTree>
+    <p:extLst>
+      <p:ext uri="{BB962C8B-B14F-4D97-AF65-F5344CB8AC3E}">
+        <p14:creationId xmlns:p14="http://schemas.microsoft.com/office/powerpoint/2010/main" val="1937054024"/>
       </p:ext>
     </p:extLst>
   </p:cSld>

--- a/Aula 05 - Exemplo 4.pptx
+++ b/Aula 05 - Exemplo 4.pptx
@@ -6,42 +6,43 @@
   </p:sldMasterIdLst>
   <p:sldIdLst>
     <p:sldId id="293" r:id="rId2"/>
-    <p:sldId id="294" r:id="rId3"/>
-    <p:sldId id="295" r:id="rId4"/>
-    <p:sldId id="296" r:id="rId5"/>
-    <p:sldId id="297" r:id="rId6"/>
-    <p:sldId id="298" r:id="rId7"/>
-    <p:sldId id="299" r:id="rId8"/>
-    <p:sldId id="300" r:id="rId9"/>
-    <p:sldId id="301" r:id="rId10"/>
-    <p:sldId id="302" r:id="rId11"/>
-    <p:sldId id="303" r:id="rId12"/>
-    <p:sldId id="304" r:id="rId13"/>
-    <p:sldId id="305" r:id="rId14"/>
-    <p:sldId id="306" r:id="rId15"/>
-    <p:sldId id="307" r:id="rId16"/>
-    <p:sldId id="308" r:id="rId17"/>
-    <p:sldId id="309" r:id="rId18"/>
-    <p:sldId id="310" r:id="rId19"/>
-    <p:sldId id="311" r:id="rId20"/>
-    <p:sldId id="312" r:id="rId21"/>
-    <p:sldId id="313" r:id="rId22"/>
-    <p:sldId id="314" r:id="rId23"/>
-    <p:sldId id="315" r:id="rId24"/>
-    <p:sldId id="316" r:id="rId25"/>
-    <p:sldId id="317" r:id="rId26"/>
-    <p:sldId id="318" r:id="rId27"/>
-    <p:sldId id="319" r:id="rId28"/>
-    <p:sldId id="320" r:id="rId29"/>
-    <p:sldId id="321" r:id="rId30"/>
-    <p:sldId id="322" r:id="rId31"/>
-    <p:sldId id="323" r:id="rId32"/>
-    <p:sldId id="326" r:id="rId33"/>
-    <p:sldId id="324" r:id="rId34"/>
-    <p:sldId id="325" r:id="rId35"/>
-    <p:sldId id="327" r:id="rId36"/>
-    <p:sldId id="328" r:id="rId37"/>
-    <p:sldId id="329" r:id="rId38"/>
+    <p:sldId id="330" r:id="rId3"/>
+    <p:sldId id="294" r:id="rId4"/>
+    <p:sldId id="295" r:id="rId5"/>
+    <p:sldId id="296" r:id="rId6"/>
+    <p:sldId id="297" r:id="rId7"/>
+    <p:sldId id="298" r:id="rId8"/>
+    <p:sldId id="299" r:id="rId9"/>
+    <p:sldId id="300" r:id="rId10"/>
+    <p:sldId id="301" r:id="rId11"/>
+    <p:sldId id="302" r:id="rId12"/>
+    <p:sldId id="303" r:id="rId13"/>
+    <p:sldId id="304" r:id="rId14"/>
+    <p:sldId id="305" r:id="rId15"/>
+    <p:sldId id="306" r:id="rId16"/>
+    <p:sldId id="307" r:id="rId17"/>
+    <p:sldId id="308" r:id="rId18"/>
+    <p:sldId id="309" r:id="rId19"/>
+    <p:sldId id="310" r:id="rId20"/>
+    <p:sldId id="311" r:id="rId21"/>
+    <p:sldId id="312" r:id="rId22"/>
+    <p:sldId id="313" r:id="rId23"/>
+    <p:sldId id="314" r:id="rId24"/>
+    <p:sldId id="315" r:id="rId25"/>
+    <p:sldId id="316" r:id="rId26"/>
+    <p:sldId id="317" r:id="rId27"/>
+    <p:sldId id="318" r:id="rId28"/>
+    <p:sldId id="319" r:id="rId29"/>
+    <p:sldId id="320" r:id="rId30"/>
+    <p:sldId id="321" r:id="rId31"/>
+    <p:sldId id="322" r:id="rId32"/>
+    <p:sldId id="323" r:id="rId33"/>
+    <p:sldId id="326" r:id="rId34"/>
+    <p:sldId id="324" r:id="rId35"/>
+    <p:sldId id="325" r:id="rId36"/>
+    <p:sldId id="327" r:id="rId37"/>
+    <p:sldId id="328" r:id="rId38"/>
+    <p:sldId id="329" r:id="rId39"/>
   </p:sldIdLst>
   <p:sldSz cx="12192000" cy="6858000"/>
   <p:notesSz cx="6858000" cy="9144000"/>
@@ -295,7 +296,7 @@
           <a:p>
             <a:fld id="{E15F8590-0EAC-44F7-8DC6-3A1411D2B327}" type="datetimeFigureOut">
               <a:rPr lang="pt-BR" smtClean="0"/>
-              <a:t>06/08/2026</a:t>
+              <a:t>07/08/2026</a:t>
             </a:fld>
             <a:endParaRPr lang="pt-BR"/>
           </a:p>
@@ -493,7 +494,7 @@
           <a:p>
             <a:fld id="{E15F8590-0EAC-44F7-8DC6-3A1411D2B327}" type="datetimeFigureOut">
               <a:rPr lang="pt-BR" smtClean="0"/>
-              <a:t>06/08/2026</a:t>
+              <a:t>07/08/2026</a:t>
             </a:fld>
             <a:endParaRPr lang="pt-BR"/>
           </a:p>
@@ -701,7 +702,7 @@
           <a:p>
             <a:fld id="{E15F8590-0EAC-44F7-8DC6-3A1411D2B327}" type="datetimeFigureOut">
               <a:rPr lang="pt-BR" smtClean="0"/>
-              <a:t>06/08/2026</a:t>
+              <a:t>07/08/2026</a:t>
             </a:fld>
             <a:endParaRPr lang="pt-BR"/>
           </a:p>
@@ -899,7 +900,7 @@
           <a:p>
             <a:fld id="{E15F8590-0EAC-44F7-8DC6-3A1411D2B327}" type="datetimeFigureOut">
               <a:rPr lang="pt-BR" smtClean="0"/>
-              <a:t>06/08/2026</a:t>
+              <a:t>07/08/2026</a:t>
             </a:fld>
             <a:endParaRPr lang="pt-BR"/>
           </a:p>
@@ -1174,7 +1175,7 @@
           <a:p>
             <a:fld id="{E15F8590-0EAC-44F7-8DC6-3A1411D2B327}" type="datetimeFigureOut">
               <a:rPr lang="pt-BR" smtClean="0"/>
-              <a:t>06/08/2026</a:t>
+              <a:t>07/08/2026</a:t>
             </a:fld>
             <a:endParaRPr lang="pt-BR"/>
           </a:p>
@@ -1439,7 +1440,7 @@
           <a:p>
             <a:fld id="{E15F8590-0EAC-44F7-8DC6-3A1411D2B327}" type="datetimeFigureOut">
               <a:rPr lang="pt-BR" smtClean="0"/>
-              <a:t>06/08/2026</a:t>
+              <a:t>07/08/2026</a:t>
             </a:fld>
             <a:endParaRPr lang="pt-BR"/>
           </a:p>
@@ -1851,7 +1852,7 @@
           <a:p>
             <a:fld id="{E15F8590-0EAC-44F7-8DC6-3A1411D2B327}" type="datetimeFigureOut">
               <a:rPr lang="pt-BR" smtClean="0"/>
-              <a:t>06/08/2026</a:t>
+              <a:t>07/08/2026</a:t>
             </a:fld>
             <a:endParaRPr lang="pt-BR"/>
           </a:p>
@@ -1992,7 +1993,7 @@
           <a:p>
             <a:fld id="{E15F8590-0EAC-44F7-8DC6-3A1411D2B327}" type="datetimeFigureOut">
               <a:rPr lang="pt-BR" smtClean="0"/>
-              <a:t>06/08/2026</a:t>
+              <a:t>07/08/2026</a:t>
             </a:fld>
             <a:endParaRPr lang="pt-BR"/>
           </a:p>
@@ -2105,7 +2106,7 @@
           <a:p>
             <a:fld id="{E15F8590-0EAC-44F7-8DC6-3A1411D2B327}" type="datetimeFigureOut">
               <a:rPr lang="pt-BR" smtClean="0"/>
-              <a:t>06/08/2026</a:t>
+              <a:t>07/08/2026</a:t>
             </a:fld>
             <a:endParaRPr lang="pt-BR"/>
           </a:p>
@@ -2416,7 +2417,7 @@
           <a:p>
             <a:fld id="{E15F8590-0EAC-44F7-8DC6-3A1411D2B327}" type="datetimeFigureOut">
               <a:rPr lang="pt-BR" smtClean="0"/>
-              <a:t>06/08/2026</a:t>
+              <a:t>07/08/2026</a:t>
             </a:fld>
             <a:endParaRPr lang="pt-BR"/>
           </a:p>
@@ -2704,7 +2705,7 @@
           <a:p>
             <a:fld id="{E15F8590-0EAC-44F7-8DC6-3A1411D2B327}" type="datetimeFigureOut">
               <a:rPr lang="pt-BR" smtClean="0"/>
-              <a:t>06/08/2026</a:t>
+              <a:t>07/08/2026</a:t>
             </a:fld>
             <a:endParaRPr lang="pt-BR"/>
           </a:p>
@@ -2945,7 +2946,7 @@
           <a:p>
             <a:fld id="{E15F8590-0EAC-44F7-8DC6-3A1411D2B327}" type="datetimeFigureOut">
               <a:rPr lang="pt-BR" smtClean="0"/>
-              <a:t>06/08/2026</a:t>
+              <a:t>07/08/2026</a:t>
             </a:fld>
             <a:endParaRPr lang="pt-BR"/>
           </a:p>
@@ -3450,7 +3451,7 @@
           <p:cNvPr id="3" name="Imagem 2">
             <a:extLst>
               <a:ext uri="{FF2B5EF4-FFF2-40B4-BE49-F238E27FC236}">
-                <a16:creationId xmlns:a16="http://schemas.microsoft.com/office/drawing/2014/main" id="{EAC9A2E7-0BB3-439E-BB99-6ADC528423A8}"/>
+                <a16:creationId xmlns:a16="http://schemas.microsoft.com/office/drawing/2014/main" id="{FF064A9E-0C37-414E-BC50-940E99A8C81E}"/>
               </a:ext>
             </a:extLst>
           </p:cNvPr>
@@ -3473,8 +3474,8 @@
         </p:blipFill>
         <p:spPr>
           <a:xfrm>
-            <a:off x="3566759" y="90021"/>
-            <a:ext cx="5058481" cy="6677957"/>
+            <a:off x="3214284" y="374382"/>
+            <a:ext cx="5763430" cy="6109236"/>
           </a:xfrm>
           <a:prstGeom prst="rect">
             <a:avLst/>
@@ -3486,7 +3487,7 @@
           <p:cNvPr id="4" name="Retângulo 3">
             <a:extLst>
               <a:ext uri="{FF2B5EF4-FFF2-40B4-BE49-F238E27FC236}">
-                <a16:creationId xmlns:a16="http://schemas.microsoft.com/office/drawing/2014/main" id="{62EDE82D-68FB-43EA-A708-242804365106}"/>
+                <a16:creationId xmlns:a16="http://schemas.microsoft.com/office/drawing/2014/main" id="{3AE0CEB2-BDE1-4E3E-847A-B955D952F261}"/>
               </a:ext>
             </a:extLst>
           </p:cNvPr>
@@ -3495,8 +3496,8 @@
         </p:nvSpPr>
         <p:spPr>
           <a:xfrm>
-            <a:off x="4546600" y="4436533"/>
-            <a:ext cx="3691467" cy="1210734"/>
+            <a:off x="3776133" y="3835400"/>
+            <a:ext cx="2455334" cy="1642533"/>
           </a:xfrm>
           <a:prstGeom prst="rect">
             <a:avLst/>
@@ -3544,10 +3545,10 @@
       </p:sp>
       <p:sp>
         <p:nvSpPr>
-          <p:cNvPr id="6" name="Seta: para a Esquerda 5">
-            <a:extLst>
-              <a:ext uri="{FF2B5EF4-FFF2-40B4-BE49-F238E27FC236}">
-                <a16:creationId xmlns:a16="http://schemas.microsoft.com/office/drawing/2014/main" id="{AA548A3F-0608-450F-87F7-F9B51454A32C}"/>
+          <p:cNvPr id="5" name="Seta: para a Direita 4">
+            <a:extLst>
+              <a:ext uri="{FF2B5EF4-FFF2-40B4-BE49-F238E27FC236}">
+                <a16:creationId xmlns:a16="http://schemas.microsoft.com/office/drawing/2014/main" id="{0901F328-91A0-4856-A2A1-B6F9F71A06E2}"/>
               </a:ext>
             </a:extLst>
           </p:cNvPr>
@@ -3556,10 +3557,10 @@
         </p:nvSpPr>
         <p:spPr>
           <a:xfrm>
-            <a:off x="8381647" y="4275666"/>
-            <a:ext cx="2446867" cy="1532467"/>
-          </a:xfrm>
-          <a:prstGeom prst="leftArrow">
+            <a:off x="1236133" y="4064000"/>
+            <a:ext cx="2286000" cy="1159933"/>
+          </a:xfrm>
+          <a:prstGeom prst="rightArrow">
             <a:avLst/>
           </a:prstGeom>
           <a:solidFill>
@@ -3603,7 +3604,7 @@
                   <a:schemeClr val="tx1"/>
                 </a:solidFill>
               </a:rPr>
-              <a:t>Digitas esta propriedades</a:t>
+              <a:t>Digite estas linhas</a:t>
             </a:r>
           </a:p>
         </p:txBody>
@@ -3611,7 +3612,7 @@
     </p:spTree>
     <p:extLst>
       <p:ext uri="{BB962C8B-B14F-4D97-AF65-F5344CB8AC3E}">
-        <p14:creationId xmlns:p14="http://schemas.microsoft.com/office/powerpoint/2010/main" val="197321257"/>
+        <p14:creationId xmlns:p14="http://schemas.microsoft.com/office/powerpoint/2010/main" val="3738543215"/>
       </p:ext>
     </p:extLst>
   </p:cSld>
@@ -3643,7 +3644,7 @@
           <p:cNvPr id="3" name="Imagem 2">
             <a:extLst>
               <a:ext uri="{FF2B5EF4-FFF2-40B4-BE49-F238E27FC236}">
-                <a16:creationId xmlns:a16="http://schemas.microsoft.com/office/drawing/2014/main" id="{E7E9F22D-D788-4BAE-89F3-C54EE323B209}"/>
+                <a16:creationId xmlns:a16="http://schemas.microsoft.com/office/drawing/2014/main" id="{EAC9A2E7-0BB3-439E-BB99-6ADC528423A8}"/>
               </a:ext>
             </a:extLst>
           </p:cNvPr>
@@ -3666,8 +3667,8 @@
         </p:blipFill>
         <p:spPr>
           <a:xfrm>
-            <a:off x="455286" y="352668"/>
-            <a:ext cx="5259714" cy="4595554"/>
+            <a:off x="3566759" y="90021"/>
+            <a:ext cx="5058481" cy="6677957"/>
           </a:xfrm>
           <a:prstGeom prst="rect">
             <a:avLst/>
@@ -3679,7 +3680,7 @@
           <p:cNvPr id="4" name="Retângulo 3">
             <a:extLst>
               <a:ext uri="{FF2B5EF4-FFF2-40B4-BE49-F238E27FC236}">
-                <a16:creationId xmlns:a16="http://schemas.microsoft.com/office/drawing/2014/main" id="{64DDECB6-8525-4C58-8742-44F1C14FA9D4}"/>
+                <a16:creationId xmlns:a16="http://schemas.microsoft.com/office/drawing/2014/main" id="{62EDE82D-68FB-43EA-A708-242804365106}"/>
               </a:ext>
             </a:extLst>
           </p:cNvPr>
@@ -3688,8 +3689,8 @@
         </p:nvSpPr>
         <p:spPr>
           <a:xfrm>
-            <a:off x="1032933" y="2175933"/>
-            <a:ext cx="4318000" cy="702734"/>
+            <a:off x="4546600" y="4436533"/>
+            <a:ext cx="3691467" cy="1210734"/>
           </a:xfrm>
           <a:prstGeom prst="rect">
             <a:avLst/>
@@ -3735,42 +3736,12 @@
           </a:p>
         </p:txBody>
       </p:sp>
-      <p:pic>
-        <p:nvPicPr>
-          <p:cNvPr id="5" name="Imagem 4">
-            <a:extLst>
-              <a:ext uri="{FF2B5EF4-FFF2-40B4-BE49-F238E27FC236}">
-                <a16:creationId xmlns:a16="http://schemas.microsoft.com/office/drawing/2014/main" id="{E9113658-F784-4168-AF4E-B79138F50960}"/>
-              </a:ext>
-            </a:extLst>
-          </p:cNvPr>
-          <p:cNvPicPr>
-            <a:picLocks noChangeAspect="1"/>
-          </p:cNvPicPr>
-          <p:nvPr/>
-        </p:nvPicPr>
-        <p:blipFill>
-          <a:blip r:embed="rId3"/>
-          <a:stretch>
-            <a:fillRect/>
-          </a:stretch>
-        </p:blipFill>
-        <p:spPr>
-          <a:xfrm>
-            <a:off x="6539133" y="3428999"/>
-            <a:ext cx="5517399" cy="3244607"/>
-          </a:xfrm>
-          <a:prstGeom prst="rect">
-            <a:avLst/>
-          </a:prstGeom>
-        </p:spPr>
-      </p:pic>
-      <p:sp>
-        <p:nvSpPr>
-          <p:cNvPr id="6" name="Seta: Dobrada para Cima 5">
-            <a:extLst>
-              <a:ext uri="{FF2B5EF4-FFF2-40B4-BE49-F238E27FC236}">
-                <a16:creationId xmlns:a16="http://schemas.microsoft.com/office/drawing/2014/main" id="{E875B653-5020-41BB-9FCF-74532F08C4DB}"/>
+      <p:sp>
+        <p:nvSpPr>
+          <p:cNvPr id="6" name="Seta: para a Esquerda 5">
+            <a:extLst>
+              <a:ext uri="{FF2B5EF4-FFF2-40B4-BE49-F238E27FC236}">
+                <a16:creationId xmlns:a16="http://schemas.microsoft.com/office/drawing/2014/main" id="{AA548A3F-0608-450F-87F7-F9B51454A32C}"/>
               </a:ext>
             </a:extLst>
           </p:cNvPr>
@@ -3778,16 +3749,12 @@
           <p:nvPr/>
         </p:nvSpPr>
         <p:spPr>
-          <a:xfrm rot="5400000">
-            <a:off x="2969684" y="2800349"/>
-            <a:ext cx="3429000" cy="3585635"/>
-          </a:xfrm>
-          <a:prstGeom prst="bentUpArrow">
-            <a:avLst>
-              <a:gd name="adj1" fmla="val 7469"/>
-              <a:gd name="adj2" fmla="val 16605"/>
-              <a:gd name="adj3" fmla="val 23025"/>
-            </a:avLst>
+          <a:xfrm>
+            <a:off x="8381647" y="4275666"/>
+            <a:ext cx="2446867" cy="1532467"/>
+          </a:xfrm>
+          <a:prstGeom prst="leftArrow">
+            <a:avLst/>
           </a:prstGeom>
           <a:solidFill>
             <a:srgbClr val="FFFF00"/>
@@ -3824,18 +3791,21 @@
           <a:lstStyle/>
           <a:p>
             <a:pPr algn="ctr"/>
-            <a:endParaRPr lang="pt-BR" sz="2000" dirty="0">
-              <a:solidFill>
-                <a:schemeClr val="tx1"/>
-              </a:solidFill>
-            </a:endParaRPr>
+            <a:r>
+              <a:rPr lang="pt-BR" sz="2000" dirty="0">
+                <a:solidFill>
+                  <a:schemeClr val="tx1"/>
+                </a:solidFill>
+              </a:rPr>
+              <a:t>Digitas esta propriedades</a:t>
+            </a:r>
           </a:p>
         </p:txBody>
       </p:sp>
     </p:spTree>
     <p:extLst>
       <p:ext uri="{BB962C8B-B14F-4D97-AF65-F5344CB8AC3E}">
-        <p14:creationId xmlns:p14="http://schemas.microsoft.com/office/powerpoint/2010/main" val="1132576089"/>
+        <p14:creationId xmlns:p14="http://schemas.microsoft.com/office/powerpoint/2010/main" val="197321257"/>
       </p:ext>
     </p:extLst>
   </p:cSld>
@@ -3867,7 +3837,7 @@
           <p:cNvPr id="3" name="Imagem 2">
             <a:extLst>
               <a:ext uri="{FF2B5EF4-FFF2-40B4-BE49-F238E27FC236}">
-                <a16:creationId xmlns:a16="http://schemas.microsoft.com/office/drawing/2014/main" id="{3035308E-CE4F-4BB0-8D59-95FB87E9F0AA}"/>
+                <a16:creationId xmlns:a16="http://schemas.microsoft.com/office/drawing/2014/main" id="{E7E9F22D-D788-4BAE-89F3-C54EE323B209}"/>
               </a:ext>
             </a:extLst>
           </p:cNvPr>
@@ -3890,8 +3860,8 @@
         </p:blipFill>
         <p:spPr>
           <a:xfrm>
-            <a:off x="3823970" y="390101"/>
-            <a:ext cx="4544059" cy="6077798"/>
+            <a:off x="455286" y="352668"/>
+            <a:ext cx="5259714" cy="4595554"/>
           </a:xfrm>
           <a:prstGeom prst="rect">
             <a:avLst/>
@@ -3903,7 +3873,7 @@
           <p:cNvPr id="4" name="Retângulo 3">
             <a:extLst>
               <a:ext uri="{FF2B5EF4-FFF2-40B4-BE49-F238E27FC236}">
-                <a16:creationId xmlns:a16="http://schemas.microsoft.com/office/drawing/2014/main" id="{F7A9BDB5-3F30-41B0-8B9F-C2F713F26AD0}"/>
+                <a16:creationId xmlns:a16="http://schemas.microsoft.com/office/drawing/2014/main" id="{64DDECB6-8525-4C58-8742-44F1C14FA9D4}"/>
               </a:ext>
             </a:extLst>
           </p:cNvPr>
@@ -3912,8 +3882,8 @@
         </p:nvSpPr>
         <p:spPr>
           <a:xfrm>
-            <a:off x="4174067" y="1913467"/>
-            <a:ext cx="3759200" cy="584200"/>
+            <a:off x="1032933" y="2175933"/>
+            <a:ext cx="4318000" cy="702734"/>
           </a:xfrm>
           <a:prstGeom prst="rect">
             <a:avLst/>
@@ -3959,12 +3929,42 @@
           </a:p>
         </p:txBody>
       </p:sp>
-      <p:sp>
-        <p:nvSpPr>
-          <p:cNvPr id="5" name="Retângulo 4">
-            <a:extLst>
-              <a:ext uri="{FF2B5EF4-FFF2-40B4-BE49-F238E27FC236}">
-                <a16:creationId xmlns:a16="http://schemas.microsoft.com/office/drawing/2014/main" id="{6858DD90-FCFB-4D8D-A12D-D6A8959B2535}"/>
+      <p:pic>
+        <p:nvPicPr>
+          <p:cNvPr id="5" name="Imagem 4">
+            <a:extLst>
+              <a:ext uri="{FF2B5EF4-FFF2-40B4-BE49-F238E27FC236}">
+                <a16:creationId xmlns:a16="http://schemas.microsoft.com/office/drawing/2014/main" id="{E9113658-F784-4168-AF4E-B79138F50960}"/>
+              </a:ext>
+            </a:extLst>
+          </p:cNvPr>
+          <p:cNvPicPr>
+            <a:picLocks noChangeAspect="1"/>
+          </p:cNvPicPr>
+          <p:nvPr/>
+        </p:nvPicPr>
+        <p:blipFill>
+          <a:blip r:embed="rId3"/>
+          <a:stretch>
+            <a:fillRect/>
+          </a:stretch>
+        </p:blipFill>
+        <p:spPr>
+          <a:xfrm>
+            <a:off x="6539133" y="3428999"/>
+            <a:ext cx="5517399" cy="3244607"/>
+          </a:xfrm>
+          <a:prstGeom prst="rect">
+            <a:avLst/>
+          </a:prstGeom>
+        </p:spPr>
+      </p:pic>
+      <p:sp>
+        <p:nvSpPr>
+          <p:cNvPr id="6" name="Seta: Dobrada para Cima 5">
+            <a:extLst>
+              <a:ext uri="{FF2B5EF4-FFF2-40B4-BE49-F238E27FC236}">
+                <a16:creationId xmlns:a16="http://schemas.microsoft.com/office/drawing/2014/main" id="{E875B653-5020-41BB-9FCF-74532F08C4DB}"/>
               </a:ext>
             </a:extLst>
           </p:cNvPr>
@@ -3972,73 +3972,16 @@
           <p:nvPr/>
         </p:nvSpPr>
         <p:spPr>
-          <a:xfrm>
-            <a:off x="4174067" y="2709331"/>
-            <a:ext cx="3759200" cy="2269067"/>
-          </a:xfrm>
-          <a:prstGeom prst="rect">
-            <a:avLst/>
-          </a:prstGeom>
-          <a:noFill/>
-          <a:ln w="38100">
-            <a:solidFill>
-              <a:srgbClr val="FF0000"/>
-            </a:solidFill>
-          </a:ln>
-        </p:spPr>
-        <p:style>
-          <a:lnRef idx="2">
-            <a:schemeClr val="accent1">
-              <a:shade val="50000"/>
-            </a:schemeClr>
-          </a:lnRef>
-          <a:fillRef idx="1">
-            <a:schemeClr val="accent1"/>
-          </a:fillRef>
-          <a:effectRef idx="0">
-            <a:schemeClr val="accent1"/>
-          </a:effectRef>
-          <a:fontRef idx="minor">
-            <a:schemeClr val="lt1"/>
-          </a:fontRef>
-        </p:style>
-        <p:txBody>
-          <a:bodyPr rot="0" spcFirstLastPara="0" vertOverflow="overflow" horzOverflow="overflow" vert="horz" wrap="square" lIns="91440" tIns="45720" rIns="91440" bIns="45720" numCol="1" spcCol="0" rtlCol="0" fromWordArt="0" anchor="ctr" anchorCtr="0" forceAA="0" compatLnSpc="1">
-            <a:prstTxWarp prst="textNoShape">
-              <a:avLst/>
-            </a:prstTxWarp>
-            <a:noAutofit/>
-          </a:bodyPr>
-          <a:lstStyle/>
-          <a:p>
-            <a:pPr algn="ctr"/>
-            <a:endParaRPr lang="pt-BR" sz="2000" dirty="0">
-              <a:solidFill>
-                <a:schemeClr val="tx1"/>
-              </a:solidFill>
-            </a:endParaRPr>
-          </a:p>
-        </p:txBody>
-      </p:sp>
-      <p:sp>
-        <p:nvSpPr>
-          <p:cNvPr id="6" name="Seta: para a Direita 5">
-            <a:extLst>
-              <a:ext uri="{FF2B5EF4-FFF2-40B4-BE49-F238E27FC236}">
-                <a16:creationId xmlns:a16="http://schemas.microsoft.com/office/drawing/2014/main" id="{74B59321-88F4-400F-86CC-8E3EA7044323}"/>
-              </a:ext>
-            </a:extLst>
-          </p:cNvPr>
-          <p:cNvSpPr/>
-          <p:nvPr/>
-        </p:nvSpPr>
-        <p:spPr>
-          <a:xfrm>
-            <a:off x="2413000" y="1634067"/>
-            <a:ext cx="1608667" cy="1075264"/>
-          </a:xfrm>
-          <a:prstGeom prst="rightArrow">
-            <a:avLst/>
+          <a:xfrm rot="5400000">
+            <a:off x="2969684" y="2800349"/>
+            <a:ext cx="3429000" cy="3585635"/>
+          </a:xfrm>
+          <a:prstGeom prst="bentUpArrow">
+            <a:avLst>
+              <a:gd name="adj1" fmla="val 7469"/>
+              <a:gd name="adj2" fmla="val 16605"/>
+              <a:gd name="adj3" fmla="val 23025"/>
+            </a:avLst>
           </a:prstGeom>
           <a:solidFill>
             <a:srgbClr val="FFFF00"/>
@@ -4083,73 +4026,10 @@
           </a:p>
         </p:txBody>
       </p:sp>
-      <p:sp>
-        <p:nvSpPr>
-          <p:cNvPr id="7" name="Seta: para a Direita 6">
-            <a:extLst>
-              <a:ext uri="{FF2B5EF4-FFF2-40B4-BE49-F238E27FC236}">
-                <a16:creationId xmlns:a16="http://schemas.microsoft.com/office/drawing/2014/main" id="{85209234-C0B8-4B1F-AF5C-0A27FC3F1097}"/>
-              </a:ext>
-            </a:extLst>
-          </p:cNvPr>
-          <p:cNvSpPr/>
-          <p:nvPr/>
-        </p:nvSpPr>
-        <p:spPr>
-          <a:xfrm>
-            <a:off x="2390352" y="3272363"/>
-            <a:ext cx="1608667" cy="1075264"/>
-          </a:xfrm>
-          <a:prstGeom prst="rightArrow">
-            <a:avLst/>
-          </a:prstGeom>
-          <a:solidFill>
-            <a:srgbClr val="FFFF00"/>
-          </a:solidFill>
-          <a:ln w="38100">
-            <a:solidFill>
-              <a:srgbClr val="FF0000"/>
-            </a:solidFill>
-          </a:ln>
-        </p:spPr>
-        <p:style>
-          <a:lnRef idx="2">
-            <a:schemeClr val="accent1">
-              <a:shade val="50000"/>
-            </a:schemeClr>
-          </a:lnRef>
-          <a:fillRef idx="1">
-            <a:schemeClr val="accent1"/>
-          </a:fillRef>
-          <a:effectRef idx="0">
-            <a:schemeClr val="accent1"/>
-          </a:effectRef>
-          <a:fontRef idx="minor">
-            <a:schemeClr val="lt1"/>
-          </a:fontRef>
-        </p:style>
-        <p:txBody>
-          <a:bodyPr rot="0" spcFirstLastPara="0" vertOverflow="overflow" horzOverflow="overflow" vert="horz" wrap="square" lIns="91440" tIns="45720" rIns="91440" bIns="45720" numCol="1" spcCol="0" rtlCol="0" fromWordArt="0" anchor="ctr" anchorCtr="0" forceAA="0" compatLnSpc="1">
-            <a:prstTxWarp prst="textNoShape">
-              <a:avLst/>
-            </a:prstTxWarp>
-            <a:noAutofit/>
-          </a:bodyPr>
-          <a:lstStyle/>
-          <a:p>
-            <a:pPr algn="ctr"/>
-            <a:endParaRPr lang="pt-BR" sz="2000" dirty="0">
-              <a:solidFill>
-                <a:schemeClr val="tx1"/>
-              </a:solidFill>
-            </a:endParaRPr>
-          </a:p>
-        </p:txBody>
-      </p:sp>
     </p:spTree>
     <p:extLst>
       <p:ext uri="{BB962C8B-B14F-4D97-AF65-F5344CB8AC3E}">
-        <p14:creationId xmlns:p14="http://schemas.microsoft.com/office/powerpoint/2010/main" val="3182245716"/>
+        <p14:creationId xmlns:p14="http://schemas.microsoft.com/office/powerpoint/2010/main" val="1132576089"/>
       </p:ext>
     </p:extLst>
   </p:cSld>
@@ -4178,10 +4058,10 @@
       </p:grpSpPr>
       <p:pic>
         <p:nvPicPr>
-          <p:cNvPr id="2" name="Imagem 1">
-            <a:extLst>
-              <a:ext uri="{FF2B5EF4-FFF2-40B4-BE49-F238E27FC236}">
-                <a16:creationId xmlns:a16="http://schemas.microsoft.com/office/drawing/2014/main" id="{ED378441-2A30-4592-95AF-EFACC63F862D}"/>
+          <p:cNvPr id="3" name="Imagem 2">
+            <a:extLst>
+              <a:ext uri="{FF2B5EF4-FFF2-40B4-BE49-F238E27FC236}">
+                <a16:creationId xmlns:a16="http://schemas.microsoft.com/office/drawing/2014/main" id="{3035308E-CE4F-4BB0-8D59-95FB87E9F0AA}"/>
               </a:ext>
             </a:extLst>
           </p:cNvPr>
@@ -4191,15 +4071,21 @@
           <p:nvPr/>
         </p:nvPicPr>
         <p:blipFill>
-          <a:blip r:embed="rId2"/>
+          <a:blip r:embed="rId2">
+            <a:extLst>
+              <a:ext uri="{28A0092B-C50C-407E-A947-70E740481C1C}">
+                <a14:useLocalDpi xmlns:a14="http://schemas.microsoft.com/office/drawing/2010/main" val="0"/>
+              </a:ext>
+            </a:extLst>
+          </a:blip>
           <a:stretch>
             <a:fillRect/>
           </a:stretch>
         </p:blipFill>
         <p:spPr>
           <a:xfrm>
-            <a:off x="332570" y="909286"/>
-            <a:ext cx="11526859" cy="5039428"/>
+            <a:off x="3823970" y="390101"/>
+            <a:ext cx="4544059" cy="6077798"/>
           </a:xfrm>
           <a:prstGeom prst="rect">
             <a:avLst/>
@@ -4208,10 +4094,10 @@
       </p:pic>
       <p:sp>
         <p:nvSpPr>
-          <p:cNvPr id="3" name="Retângulo 2">
-            <a:extLst>
-              <a:ext uri="{FF2B5EF4-FFF2-40B4-BE49-F238E27FC236}">
-                <a16:creationId xmlns:a16="http://schemas.microsoft.com/office/drawing/2014/main" id="{022ACE81-DA0E-4942-946D-4DA0D087E2E8}"/>
+          <p:cNvPr id="4" name="Retângulo 3">
+            <a:extLst>
+              <a:ext uri="{FF2B5EF4-FFF2-40B4-BE49-F238E27FC236}">
+                <a16:creationId xmlns:a16="http://schemas.microsoft.com/office/drawing/2014/main" id="{F7A9BDB5-3F30-41B0-8B9F-C2F713F26AD0}"/>
               </a:ext>
             </a:extLst>
           </p:cNvPr>
@@ -4220,8 +4106,8 @@
         </p:nvSpPr>
         <p:spPr>
           <a:xfrm>
-            <a:off x="1608667" y="3242733"/>
-            <a:ext cx="2734733" cy="1337734"/>
+            <a:off x="4174067" y="1913467"/>
+            <a:ext cx="3759200" cy="584200"/>
           </a:xfrm>
           <a:prstGeom prst="rect">
             <a:avLst/>
@@ -4269,10 +4155,10 @@
       </p:sp>
       <p:sp>
         <p:nvSpPr>
-          <p:cNvPr id="4" name="Seta: para Cima 3">
-            <a:extLst>
-              <a:ext uri="{FF2B5EF4-FFF2-40B4-BE49-F238E27FC236}">
-                <a16:creationId xmlns:a16="http://schemas.microsoft.com/office/drawing/2014/main" id="{04A7155A-CA2D-440D-B561-F0A7FDCFC047}"/>
+          <p:cNvPr id="5" name="Retângulo 4">
+            <a:extLst>
+              <a:ext uri="{FF2B5EF4-FFF2-40B4-BE49-F238E27FC236}">
+                <a16:creationId xmlns:a16="http://schemas.microsoft.com/office/drawing/2014/main" id="{6858DD90-FCFB-4D8D-A12D-D6A8959B2535}"/>
               </a:ext>
             </a:extLst>
           </p:cNvPr>
@@ -4281,10 +4167,71 @@
         </p:nvSpPr>
         <p:spPr>
           <a:xfrm>
-            <a:off x="2506134" y="4673600"/>
-            <a:ext cx="1058333" cy="1041400"/>
-          </a:xfrm>
-          <a:prstGeom prst="upArrow">
+            <a:off x="4174067" y="2709331"/>
+            <a:ext cx="3759200" cy="2269067"/>
+          </a:xfrm>
+          <a:prstGeom prst="rect">
+            <a:avLst/>
+          </a:prstGeom>
+          <a:noFill/>
+          <a:ln w="38100">
+            <a:solidFill>
+              <a:srgbClr val="FF0000"/>
+            </a:solidFill>
+          </a:ln>
+        </p:spPr>
+        <p:style>
+          <a:lnRef idx="2">
+            <a:schemeClr val="accent1">
+              <a:shade val="50000"/>
+            </a:schemeClr>
+          </a:lnRef>
+          <a:fillRef idx="1">
+            <a:schemeClr val="accent1"/>
+          </a:fillRef>
+          <a:effectRef idx="0">
+            <a:schemeClr val="accent1"/>
+          </a:effectRef>
+          <a:fontRef idx="minor">
+            <a:schemeClr val="lt1"/>
+          </a:fontRef>
+        </p:style>
+        <p:txBody>
+          <a:bodyPr rot="0" spcFirstLastPara="0" vertOverflow="overflow" horzOverflow="overflow" vert="horz" wrap="square" lIns="91440" tIns="45720" rIns="91440" bIns="45720" numCol="1" spcCol="0" rtlCol="0" fromWordArt="0" anchor="ctr" anchorCtr="0" forceAA="0" compatLnSpc="1">
+            <a:prstTxWarp prst="textNoShape">
+              <a:avLst/>
+            </a:prstTxWarp>
+            <a:noAutofit/>
+          </a:bodyPr>
+          <a:lstStyle/>
+          <a:p>
+            <a:pPr algn="ctr"/>
+            <a:endParaRPr lang="pt-BR" sz="2000" dirty="0">
+              <a:solidFill>
+                <a:schemeClr val="tx1"/>
+              </a:solidFill>
+            </a:endParaRPr>
+          </a:p>
+        </p:txBody>
+      </p:sp>
+      <p:sp>
+        <p:nvSpPr>
+          <p:cNvPr id="6" name="Seta: para a Direita 5">
+            <a:extLst>
+              <a:ext uri="{FF2B5EF4-FFF2-40B4-BE49-F238E27FC236}">
+                <a16:creationId xmlns:a16="http://schemas.microsoft.com/office/drawing/2014/main" id="{74B59321-88F4-400F-86CC-8E3EA7044323}"/>
+              </a:ext>
+            </a:extLst>
+          </p:cNvPr>
+          <p:cNvSpPr/>
+          <p:nvPr/>
+        </p:nvSpPr>
+        <p:spPr>
+          <a:xfrm>
+            <a:off x="2413000" y="1634067"/>
+            <a:ext cx="1608667" cy="1075264"/>
+          </a:xfrm>
+          <a:prstGeom prst="rightArrow">
             <a:avLst/>
           </a:prstGeom>
           <a:solidFill>
@@ -4330,10 +4277,73 @@
           </a:p>
         </p:txBody>
       </p:sp>
+      <p:sp>
+        <p:nvSpPr>
+          <p:cNvPr id="7" name="Seta: para a Direita 6">
+            <a:extLst>
+              <a:ext uri="{FF2B5EF4-FFF2-40B4-BE49-F238E27FC236}">
+                <a16:creationId xmlns:a16="http://schemas.microsoft.com/office/drawing/2014/main" id="{85209234-C0B8-4B1F-AF5C-0A27FC3F1097}"/>
+              </a:ext>
+            </a:extLst>
+          </p:cNvPr>
+          <p:cNvSpPr/>
+          <p:nvPr/>
+        </p:nvSpPr>
+        <p:spPr>
+          <a:xfrm>
+            <a:off x="2390352" y="3272363"/>
+            <a:ext cx="1608667" cy="1075264"/>
+          </a:xfrm>
+          <a:prstGeom prst="rightArrow">
+            <a:avLst/>
+          </a:prstGeom>
+          <a:solidFill>
+            <a:srgbClr val="FFFF00"/>
+          </a:solidFill>
+          <a:ln w="38100">
+            <a:solidFill>
+              <a:srgbClr val="FF0000"/>
+            </a:solidFill>
+          </a:ln>
+        </p:spPr>
+        <p:style>
+          <a:lnRef idx="2">
+            <a:schemeClr val="accent1">
+              <a:shade val="50000"/>
+            </a:schemeClr>
+          </a:lnRef>
+          <a:fillRef idx="1">
+            <a:schemeClr val="accent1"/>
+          </a:fillRef>
+          <a:effectRef idx="0">
+            <a:schemeClr val="accent1"/>
+          </a:effectRef>
+          <a:fontRef idx="minor">
+            <a:schemeClr val="lt1"/>
+          </a:fontRef>
+        </p:style>
+        <p:txBody>
+          <a:bodyPr rot="0" spcFirstLastPara="0" vertOverflow="overflow" horzOverflow="overflow" vert="horz" wrap="square" lIns="91440" tIns="45720" rIns="91440" bIns="45720" numCol="1" spcCol="0" rtlCol="0" fromWordArt="0" anchor="ctr" anchorCtr="0" forceAA="0" compatLnSpc="1">
+            <a:prstTxWarp prst="textNoShape">
+              <a:avLst/>
+            </a:prstTxWarp>
+            <a:noAutofit/>
+          </a:bodyPr>
+          <a:lstStyle/>
+          <a:p>
+            <a:pPr algn="ctr"/>
+            <a:endParaRPr lang="pt-BR" sz="2000" dirty="0">
+              <a:solidFill>
+                <a:schemeClr val="tx1"/>
+              </a:solidFill>
+            </a:endParaRPr>
+          </a:p>
+        </p:txBody>
+      </p:sp>
     </p:spTree>
     <p:extLst>
       <p:ext uri="{BB962C8B-B14F-4D97-AF65-F5344CB8AC3E}">
-        <p14:creationId xmlns:p14="http://schemas.microsoft.com/office/powerpoint/2010/main" val="994873011"/>
+        <p14:creationId xmlns:p14="http://schemas.microsoft.com/office/powerpoint/2010/main" val="3182245716"/>
       </p:ext>
     </p:extLst>
   </p:cSld>
@@ -4365,7 +4375,7 @@
           <p:cNvPr id="2" name="Imagem 1">
             <a:extLst>
               <a:ext uri="{FF2B5EF4-FFF2-40B4-BE49-F238E27FC236}">
-                <a16:creationId xmlns:a16="http://schemas.microsoft.com/office/drawing/2014/main" id="{07600447-C42B-4C6C-8847-57EAA095BF9F}"/>
+                <a16:creationId xmlns:a16="http://schemas.microsoft.com/office/drawing/2014/main" id="{ED378441-2A30-4592-95AF-EFACC63F862D}"/>
               </a:ext>
             </a:extLst>
           </p:cNvPr>
@@ -4382,8 +4392,8 @@
         </p:blipFill>
         <p:spPr>
           <a:xfrm>
-            <a:off x="389728" y="733049"/>
-            <a:ext cx="11412543" cy="5391902"/>
+            <a:off x="332570" y="909286"/>
+            <a:ext cx="11526859" cy="5039428"/>
           </a:xfrm>
           <a:prstGeom prst="rect">
             <a:avLst/>
@@ -4395,7 +4405,7 @@
           <p:cNvPr id="3" name="Retângulo 2">
             <a:extLst>
               <a:ext uri="{FF2B5EF4-FFF2-40B4-BE49-F238E27FC236}">
-                <a16:creationId xmlns:a16="http://schemas.microsoft.com/office/drawing/2014/main" id="{709D34AC-AA65-448A-9224-2875D34FBC10}"/>
+                <a16:creationId xmlns:a16="http://schemas.microsoft.com/office/drawing/2014/main" id="{022ACE81-DA0E-4942-946D-4DA0D087E2E8}"/>
               </a:ext>
             </a:extLst>
           </p:cNvPr>
@@ -4404,8 +4414,8 @@
         </p:nvSpPr>
         <p:spPr>
           <a:xfrm>
-            <a:off x="1024467" y="3564467"/>
-            <a:ext cx="2887133" cy="1972733"/>
+            <a:off x="1608667" y="3242733"/>
+            <a:ext cx="2734733" cy="1337734"/>
           </a:xfrm>
           <a:prstGeom prst="rect">
             <a:avLst/>
@@ -4456,7 +4466,7 @@
           <p:cNvPr id="4" name="Seta: para Cima 3">
             <a:extLst>
               <a:ext uri="{FF2B5EF4-FFF2-40B4-BE49-F238E27FC236}">
-                <a16:creationId xmlns:a16="http://schemas.microsoft.com/office/drawing/2014/main" id="{B1D9EFE0-32FF-40AC-A3CD-104D3F71D247}"/>
+                <a16:creationId xmlns:a16="http://schemas.microsoft.com/office/drawing/2014/main" id="{04A7155A-CA2D-440D-B561-F0A7FDCFC047}"/>
               </a:ext>
             </a:extLst>
           </p:cNvPr>
@@ -4465,8 +4475,8 @@
         </p:nvSpPr>
         <p:spPr>
           <a:xfrm>
-            <a:off x="2184400" y="5723467"/>
-            <a:ext cx="745067" cy="939800"/>
+            <a:off x="2506134" y="4673600"/>
+            <a:ext cx="1058333" cy="1041400"/>
           </a:xfrm>
           <a:prstGeom prst="upArrow">
             <a:avLst/>
@@ -4517,7 +4527,7 @@
     </p:spTree>
     <p:extLst>
       <p:ext uri="{BB962C8B-B14F-4D97-AF65-F5344CB8AC3E}">
-        <p14:creationId xmlns:p14="http://schemas.microsoft.com/office/powerpoint/2010/main" val="1389563076"/>
+        <p14:creationId xmlns:p14="http://schemas.microsoft.com/office/powerpoint/2010/main" val="994873011"/>
       </p:ext>
     </p:extLst>
   </p:cSld>
@@ -4546,10 +4556,10 @@
       </p:grpSpPr>
       <p:pic>
         <p:nvPicPr>
-          <p:cNvPr id="3" name="Imagem 2">
-            <a:extLst>
-              <a:ext uri="{FF2B5EF4-FFF2-40B4-BE49-F238E27FC236}">
-                <a16:creationId xmlns:a16="http://schemas.microsoft.com/office/drawing/2014/main" id="{F3A06652-7632-4E32-97B2-0F913A598D2D}"/>
+          <p:cNvPr id="2" name="Imagem 1">
+            <a:extLst>
+              <a:ext uri="{FF2B5EF4-FFF2-40B4-BE49-F238E27FC236}">
+                <a16:creationId xmlns:a16="http://schemas.microsoft.com/office/drawing/2014/main" id="{07600447-C42B-4C6C-8847-57EAA095BF9F}"/>
               </a:ext>
             </a:extLst>
           </p:cNvPr>
@@ -4559,31 +4569,149 @@
           <p:nvPr/>
         </p:nvPicPr>
         <p:blipFill>
-          <a:blip r:embed="rId2">
-            <a:extLst>
-              <a:ext uri="{28A0092B-C50C-407E-A947-70E740481C1C}">
-                <a14:useLocalDpi xmlns:a14="http://schemas.microsoft.com/office/drawing/2010/main" val="0"/>
-              </a:ext>
-            </a:extLst>
-          </a:blip>
+          <a:blip r:embed="rId2"/>
           <a:stretch>
             <a:fillRect/>
           </a:stretch>
         </p:blipFill>
         <p:spPr>
           <a:xfrm>
-            <a:off x="465939" y="675891"/>
-            <a:ext cx="11260121" cy="5506218"/>
+            <a:off x="389728" y="733049"/>
+            <a:ext cx="11412543" cy="5391902"/>
           </a:xfrm>
           <a:prstGeom prst="rect">
             <a:avLst/>
           </a:prstGeom>
         </p:spPr>
       </p:pic>
+      <p:sp>
+        <p:nvSpPr>
+          <p:cNvPr id="3" name="Retângulo 2">
+            <a:extLst>
+              <a:ext uri="{FF2B5EF4-FFF2-40B4-BE49-F238E27FC236}">
+                <a16:creationId xmlns:a16="http://schemas.microsoft.com/office/drawing/2014/main" id="{709D34AC-AA65-448A-9224-2875D34FBC10}"/>
+              </a:ext>
+            </a:extLst>
+          </p:cNvPr>
+          <p:cNvSpPr/>
+          <p:nvPr/>
+        </p:nvSpPr>
+        <p:spPr>
+          <a:xfrm>
+            <a:off x="1024467" y="3564467"/>
+            <a:ext cx="2887133" cy="1972733"/>
+          </a:xfrm>
+          <a:prstGeom prst="rect">
+            <a:avLst/>
+          </a:prstGeom>
+          <a:noFill/>
+          <a:ln w="38100">
+            <a:solidFill>
+              <a:srgbClr val="FF0000"/>
+            </a:solidFill>
+          </a:ln>
+        </p:spPr>
+        <p:style>
+          <a:lnRef idx="2">
+            <a:schemeClr val="accent1">
+              <a:shade val="50000"/>
+            </a:schemeClr>
+          </a:lnRef>
+          <a:fillRef idx="1">
+            <a:schemeClr val="accent1"/>
+          </a:fillRef>
+          <a:effectRef idx="0">
+            <a:schemeClr val="accent1"/>
+          </a:effectRef>
+          <a:fontRef idx="minor">
+            <a:schemeClr val="lt1"/>
+          </a:fontRef>
+        </p:style>
+        <p:txBody>
+          <a:bodyPr rot="0" spcFirstLastPara="0" vertOverflow="overflow" horzOverflow="overflow" vert="horz" wrap="square" lIns="91440" tIns="45720" rIns="91440" bIns="45720" numCol="1" spcCol="0" rtlCol="0" fromWordArt="0" anchor="ctr" anchorCtr="0" forceAA="0" compatLnSpc="1">
+            <a:prstTxWarp prst="textNoShape">
+              <a:avLst/>
+            </a:prstTxWarp>
+            <a:noAutofit/>
+          </a:bodyPr>
+          <a:lstStyle/>
+          <a:p>
+            <a:pPr algn="ctr"/>
+            <a:endParaRPr lang="pt-BR" sz="2000" dirty="0">
+              <a:solidFill>
+                <a:schemeClr val="tx1"/>
+              </a:solidFill>
+            </a:endParaRPr>
+          </a:p>
+        </p:txBody>
+      </p:sp>
+      <p:sp>
+        <p:nvSpPr>
+          <p:cNvPr id="4" name="Seta: para Cima 3">
+            <a:extLst>
+              <a:ext uri="{FF2B5EF4-FFF2-40B4-BE49-F238E27FC236}">
+                <a16:creationId xmlns:a16="http://schemas.microsoft.com/office/drawing/2014/main" id="{B1D9EFE0-32FF-40AC-A3CD-104D3F71D247}"/>
+              </a:ext>
+            </a:extLst>
+          </p:cNvPr>
+          <p:cNvSpPr/>
+          <p:nvPr/>
+        </p:nvSpPr>
+        <p:spPr>
+          <a:xfrm>
+            <a:off x="2184400" y="5723467"/>
+            <a:ext cx="745067" cy="939800"/>
+          </a:xfrm>
+          <a:prstGeom prst="upArrow">
+            <a:avLst/>
+          </a:prstGeom>
+          <a:solidFill>
+            <a:srgbClr val="FFFF00"/>
+          </a:solidFill>
+          <a:ln w="38100">
+            <a:solidFill>
+              <a:srgbClr val="FF0000"/>
+            </a:solidFill>
+          </a:ln>
+        </p:spPr>
+        <p:style>
+          <a:lnRef idx="2">
+            <a:schemeClr val="accent1">
+              <a:shade val="50000"/>
+            </a:schemeClr>
+          </a:lnRef>
+          <a:fillRef idx="1">
+            <a:schemeClr val="accent1"/>
+          </a:fillRef>
+          <a:effectRef idx="0">
+            <a:schemeClr val="accent1"/>
+          </a:effectRef>
+          <a:fontRef idx="minor">
+            <a:schemeClr val="lt1"/>
+          </a:fontRef>
+        </p:style>
+        <p:txBody>
+          <a:bodyPr rot="0" spcFirstLastPara="0" vertOverflow="overflow" horzOverflow="overflow" vert="horz" wrap="square" lIns="91440" tIns="45720" rIns="91440" bIns="45720" numCol="1" spcCol="0" rtlCol="0" fromWordArt="0" anchor="ctr" anchorCtr="0" forceAA="0" compatLnSpc="1">
+            <a:prstTxWarp prst="textNoShape">
+              <a:avLst/>
+            </a:prstTxWarp>
+            <a:noAutofit/>
+          </a:bodyPr>
+          <a:lstStyle/>
+          <a:p>
+            <a:pPr algn="ctr"/>
+            <a:endParaRPr lang="pt-BR" sz="2000" dirty="0">
+              <a:solidFill>
+                <a:schemeClr val="tx1"/>
+              </a:solidFill>
+            </a:endParaRPr>
+          </a:p>
+        </p:txBody>
+      </p:sp>
     </p:spTree>
     <p:extLst>
       <p:ext uri="{BB962C8B-B14F-4D97-AF65-F5344CB8AC3E}">
-        <p14:creationId xmlns:p14="http://schemas.microsoft.com/office/powerpoint/2010/main" val="1725406452"/>
+        <p14:creationId xmlns:p14="http://schemas.microsoft.com/office/powerpoint/2010/main" val="1389563076"/>
       </p:ext>
     </p:extLst>
   </p:cSld>
@@ -4615,7 +4743,7 @@
           <p:cNvPr id="3" name="Imagem 2">
             <a:extLst>
               <a:ext uri="{FF2B5EF4-FFF2-40B4-BE49-F238E27FC236}">
-                <a16:creationId xmlns:a16="http://schemas.microsoft.com/office/drawing/2014/main" id="{E263B8AA-8226-4D60-B9A2-7F871A13B256}"/>
+                <a16:creationId xmlns:a16="http://schemas.microsoft.com/office/drawing/2014/main" id="{F3A06652-7632-4E32-97B2-0F913A598D2D}"/>
               </a:ext>
             </a:extLst>
           </p:cNvPr>
@@ -4638,390 +4766,18 @@
         </p:blipFill>
         <p:spPr>
           <a:xfrm>
-            <a:off x="919709" y="0"/>
-            <a:ext cx="10352582" cy="6858000"/>
+            <a:off x="465939" y="675891"/>
+            <a:ext cx="11260121" cy="5506218"/>
           </a:xfrm>
           <a:prstGeom prst="rect">
             <a:avLst/>
           </a:prstGeom>
         </p:spPr>
       </p:pic>
-      <p:sp>
-        <p:nvSpPr>
-          <p:cNvPr id="4" name="Retângulo 3">
-            <a:extLst>
-              <a:ext uri="{FF2B5EF4-FFF2-40B4-BE49-F238E27FC236}">
-                <a16:creationId xmlns:a16="http://schemas.microsoft.com/office/drawing/2014/main" id="{9EB141D1-A0F1-4720-8699-6901A6E5A87A}"/>
-              </a:ext>
-            </a:extLst>
-          </p:cNvPr>
-          <p:cNvSpPr/>
-          <p:nvPr/>
-        </p:nvSpPr>
-        <p:spPr>
-          <a:xfrm>
-            <a:off x="1303867" y="0"/>
-            <a:ext cx="2827866" cy="1947333"/>
-          </a:xfrm>
-          <a:prstGeom prst="rect">
-            <a:avLst/>
-          </a:prstGeom>
-          <a:noFill/>
-          <a:ln w="38100">
-            <a:solidFill>
-              <a:srgbClr val="FF0000"/>
-            </a:solidFill>
-          </a:ln>
-        </p:spPr>
-        <p:style>
-          <a:lnRef idx="2">
-            <a:schemeClr val="accent1">
-              <a:shade val="50000"/>
-            </a:schemeClr>
-          </a:lnRef>
-          <a:fillRef idx="1">
-            <a:schemeClr val="accent1"/>
-          </a:fillRef>
-          <a:effectRef idx="0">
-            <a:schemeClr val="accent1"/>
-          </a:effectRef>
-          <a:fontRef idx="minor">
-            <a:schemeClr val="lt1"/>
-          </a:fontRef>
-        </p:style>
-        <p:txBody>
-          <a:bodyPr rot="0" spcFirstLastPara="0" vertOverflow="overflow" horzOverflow="overflow" vert="horz" wrap="square" lIns="91440" tIns="45720" rIns="91440" bIns="45720" numCol="1" spcCol="0" rtlCol="0" fromWordArt="0" anchor="ctr" anchorCtr="0" forceAA="0" compatLnSpc="1">
-            <a:prstTxWarp prst="textNoShape">
-              <a:avLst/>
-            </a:prstTxWarp>
-            <a:noAutofit/>
-          </a:bodyPr>
-          <a:lstStyle/>
-          <a:p>
-            <a:pPr algn="ctr"/>
-            <a:endParaRPr lang="pt-BR" sz="2000" dirty="0">
-              <a:solidFill>
-                <a:schemeClr val="tx1"/>
-              </a:solidFill>
-            </a:endParaRPr>
-          </a:p>
-        </p:txBody>
-      </p:sp>
-      <p:sp>
-        <p:nvSpPr>
-          <p:cNvPr id="5" name="Retângulo 4">
-            <a:extLst>
-              <a:ext uri="{FF2B5EF4-FFF2-40B4-BE49-F238E27FC236}">
-                <a16:creationId xmlns:a16="http://schemas.microsoft.com/office/drawing/2014/main" id="{5BC8FE05-C0E0-452A-AD87-0B77ABC9A1B1}"/>
-              </a:ext>
-            </a:extLst>
-          </p:cNvPr>
-          <p:cNvSpPr/>
-          <p:nvPr/>
-        </p:nvSpPr>
-        <p:spPr>
-          <a:xfrm>
-            <a:off x="1303867" y="2108199"/>
-            <a:ext cx="2827866" cy="1947333"/>
-          </a:xfrm>
-          <a:prstGeom prst="rect">
-            <a:avLst/>
-          </a:prstGeom>
-          <a:noFill/>
-          <a:ln w="38100">
-            <a:solidFill>
-              <a:srgbClr val="FF0000"/>
-            </a:solidFill>
-          </a:ln>
-        </p:spPr>
-        <p:style>
-          <a:lnRef idx="2">
-            <a:schemeClr val="accent1">
-              <a:shade val="50000"/>
-            </a:schemeClr>
-          </a:lnRef>
-          <a:fillRef idx="1">
-            <a:schemeClr val="accent1"/>
-          </a:fillRef>
-          <a:effectRef idx="0">
-            <a:schemeClr val="accent1"/>
-          </a:effectRef>
-          <a:fontRef idx="minor">
-            <a:schemeClr val="lt1"/>
-          </a:fontRef>
-        </p:style>
-        <p:txBody>
-          <a:bodyPr rot="0" spcFirstLastPara="0" vertOverflow="overflow" horzOverflow="overflow" vert="horz" wrap="square" lIns="91440" tIns="45720" rIns="91440" bIns="45720" numCol="1" spcCol="0" rtlCol="0" fromWordArt="0" anchor="ctr" anchorCtr="0" forceAA="0" compatLnSpc="1">
-            <a:prstTxWarp prst="textNoShape">
-              <a:avLst/>
-            </a:prstTxWarp>
-            <a:noAutofit/>
-          </a:bodyPr>
-          <a:lstStyle/>
-          <a:p>
-            <a:pPr algn="ctr"/>
-            <a:endParaRPr lang="pt-BR" sz="2000" dirty="0">
-              <a:solidFill>
-                <a:schemeClr val="tx1"/>
-              </a:solidFill>
-            </a:endParaRPr>
-          </a:p>
-        </p:txBody>
-      </p:sp>
-      <p:sp>
-        <p:nvSpPr>
-          <p:cNvPr id="6" name="Retângulo 5">
-            <a:extLst>
-              <a:ext uri="{FF2B5EF4-FFF2-40B4-BE49-F238E27FC236}">
-                <a16:creationId xmlns:a16="http://schemas.microsoft.com/office/drawing/2014/main" id="{9E1DAC71-092B-4C46-9E9C-3224BABE003A}"/>
-              </a:ext>
-            </a:extLst>
-          </p:cNvPr>
-          <p:cNvSpPr/>
-          <p:nvPr/>
-        </p:nvSpPr>
-        <p:spPr>
-          <a:xfrm>
-            <a:off x="1303867" y="4292601"/>
-            <a:ext cx="2827866" cy="1947333"/>
-          </a:xfrm>
-          <a:prstGeom prst="rect">
-            <a:avLst/>
-          </a:prstGeom>
-          <a:noFill/>
-          <a:ln w="38100">
-            <a:solidFill>
-              <a:srgbClr val="FF0000"/>
-            </a:solidFill>
-          </a:ln>
-        </p:spPr>
-        <p:style>
-          <a:lnRef idx="2">
-            <a:schemeClr val="accent1">
-              <a:shade val="50000"/>
-            </a:schemeClr>
-          </a:lnRef>
-          <a:fillRef idx="1">
-            <a:schemeClr val="accent1"/>
-          </a:fillRef>
-          <a:effectRef idx="0">
-            <a:schemeClr val="accent1"/>
-          </a:effectRef>
-          <a:fontRef idx="minor">
-            <a:schemeClr val="lt1"/>
-          </a:fontRef>
-        </p:style>
-        <p:txBody>
-          <a:bodyPr rot="0" spcFirstLastPara="0" vertOverflow="overflow" horzOverflow="overflow" vert="horz" wrap="square" lIns="91440" tIns="45720" rIns="91440" bIns="45720" numCol="1" spcCol="0" rtlCol="0" fromWordArt="0" anchor="ctr" anchorCtr="0" forceAA="0" compatLnSpc="1">
-            <a:prstTxWarp prst="textNoShape">
-              <a:avLst/>
-            </a:prstTxWarp>
-            <a:noAutofit/>
-          </a:bodyPr>
-          <a:lstStyle/>
-          <a:p>
-            <a:pPr algn="ctr"/>
-            <a:endParaRPr lang="pt-BR" sz="2000" dirty="0">
-              <a:solidFill>
-                <a:schemeClr val="tx1"/>
-              </a:solidFill>
-            </a:endParaRPr>
-          </a:p>
-        </p:txBody>
-      </p:sp>
-      <p:sp>
-        <p:nvSpPr>
-          <p:cNvPr id="7" name="Seta: para a Direita 6">
-            <a:extLst>
-              <a:ext uri="{FF2B5EF4-FFF2-40B4-BE49-F238E27FC236}">
-                <a16:creationId xmlns:a16="http://schemas.microsoft.com/office/drawing/2014/main" id="{C9550070-A828-49CA-B2C7-5F85C5FB61A7}"/>
-              </a:ext>
-            </a:extLst>
-          </p:cNvPr>
-          <p:cNvSpPr/>
-          <p:nvPr/>
-        </p:nvSpPr>
-        <p:spPr>
-          <a:xfrm>
-            <a:off x="220133" y="533399"/>
-            <a:ext cx="939800" cy="880533"/>
-          </a:xfrm>
-          <a:prstGeom prst="rightArrow">
-            <a:avLst/>
-          </a:prstGeom>
-          <a:solidFill>
-            <a:srgbClr val="FFFF00"/>
-          </a:solidFill>
-          <a:ln w="38100">
-            <a:solidFill>
-              <a:srgbClr val="FF0000"/>
-            </a:solidFill>
-          </a:ln>
-        </p:spPr>
-        <p:style>
-          <a:lnRef idx="2">
-            <a:schemeClr val="accent1">
-              <a:shade val="50000"/>
-            </a:schemeClr>
-          </a:lnRef>
-          <a:fillRef idx="1">
-            <a:schemeClr val="accent1"/>
-          </a:fillRef>
-          <a:effectRef idx="0">
-            <a:schemeClr val="accent1"/>
-          </a:effectRef>
-          <a:fontRef idx="minor">
-            <a:schemeClr val="lt1"/>
-          </a:fontRef>
-        </p:style>
-        <p:txBody>
-          <a:bodyPr rot="0" spcFirstLastPara="0" vertOverflow="overflow" horzOverflow="overflow" vert="horz" wrap="square" lIns="91440" tIns="45720" rIns="91440" bIns="45720" numCol="1" spcCol="0" rtlCol="0" fromWordArt="0" anchor="ctr" anchorCtr="0" forceAA="0" compatLnSpc="1">
-            <a:prstTxWarp prst="textNoShape">
-              <a:avLst/>
-            </a:prstTxWarp>
-            <a:noAutofit/>
-          </a:bodyPr>
-          <a:lstStyle/>
-          <a:p>
-            <a:pPr algn="ctr"/>
-            <a:endParaRPr lang="pt-BR" sz="2000" dirty="0">
-              <a:solidFill>
-                <a:schemeClr val="tx1"/>
-              </a:solidFill>
-            </a:endParaRPr>
-          </a:p>
-        </p:txBody>
-      </p:sp>
-      <p:sp>
-        <p:nvSpPr>
-          <p:cNvPr id="8" name="Seta: para a Direita 7">
-            <a:extLst>
-              <a:ext uri="{FF2B5EF4-FFF2-40B4-BE49-F238E27FC236}">
-                <a16:creationId xmlns:a16="http://schemas.microsoft.com/office/drawing/2014/main" id="{AA3E9ECD-1062-4C7D-AD83-82DDB679CB66}"/>
-              </a:ext>
-            </a:extLst>
-          </p:cNvPr>
-          <p:cNvSpPr/>
-          <p:nvPr/>
-        </p:nvSpPr>
-        <p:spPr>
-          <a:xfrm>
-            <a:off x="220133" y="2641598"/>
-            <a:ext cx="939800" cy="880533"/>
-          </a:xfrm>
-          <a:prstGeom prst="rightArrow">
-            <a:avLst/>
-          </a:prstGeom>
-          <a:solidFill>
-            <a:srgbClr val="FFFF00"/>
-          </a:solidFill>
-          <a:ln w="38100">
-            <a:solidFill>
-              <a:srgbClr val="FF0000"/>
-            </a:solidFill>
-          </a:ln>
-        </p:spPr>
-        <p:style>
-          <a:lnRef idx="2">
-            <a:schemeClr val="accent1">
-              <a:shade val="50000"/>
-            </a:schemeClr>
-          </a:lnRef>
-          <a:fillRef idx="1">
-            <a:schemeClr val="accent1"/>
-          </a:fillRef>
-          <a:effectRef idx="0">
-            <a:schemeClr val="accent1"/>
-          </a:effectRef>
-          <a:fontRef idx="minor">
-            <a:schemeClr val="lt1"/>
-          </a:fontRef>
-        </p:style>
-        <p:txBody>
-          <a:bodyPr rot="0" spcFirstLastPara="0" vertOverflow="overflow" horzOverflow="overflow" vert="horz" wrap="square" lIns="91440" tIns="45720" rIns="91440" bIns="45720" numCol="1" spcCol="0" rtlCol="0" fromWordArt="0" anchor="ctr" anchorCtr="0" forceAA="0" compatLnSpc="1">
-            <a:prstTxWarp prst="textNoShape">
-              <a:avLst/>
-            </a:prstTxWarp>
-            <a:noAutofit/>
-          </a:bodyPr>
-          <a:lstStyle/>
-          <a:p>
-            <a:pPr algn="ctr"/>
-            <a:endParaRPr lang="pt-BR" sz="2000" dirty="0">
-              <a:solidFill>
-                <a:schemeClr val="tx1"/>
-              </a:solidFill>
-            </a:endParaRPr>
-          </a:p>
-        </p:txBody>
-      </p:sp>
-      <p:sp>
-        <p:nvSpPr>
-          <p:cNvPr id="9" name="Seta: para a Direita 8">
-            <a:extLst>
-              <a:ext uri="{FF2B5EF4-FFF2-40B4-BE49-F238E27FC236}">
-                <a16:creationId xmlns:a16="http://schemas.microsoft.com/office/drawing/2014/main" id="{1839B500-4F2A-42B9-B0E3-76223DE9C8BB}"/>
-              </a:ext>
-            </a:extLst>
-          </p:cNvPr>
-          <p:cNvSpPr/>
-          <p:nvPr/>
-        </p:nvSpPr>
-        <p:spPr>
-          <a:xfrm>
-            <a:off x="220133" y="4826000"/>
-            <a:ext cx="939800" cy="880533"/>
-          </a:xfrm>
-          <a:prstGeom prst="rightArrow">
-            <a:avLst/>
-          </a:prstGeom>
-          <a:solidFill>
-            <a:srgbClr val="FFFF00"/>
-          </a:solidFill>
-          <a:ln w="38100">
-            <a:solidFill>
-              <a:srgbClr val="FF0000"/>
-            </a:solidFill>
-          </a:ln>
-        </p:spPr>
-        <p:style>
-          <a:lnRef idx="2">
-            <a:schemeClr val="accent1">
-              <a:shade val="50000"/>
-            </a:schemeClr>
-          </a:lnRef>
-          <a:fillRef idx="1">
-            <a:schemeClr val="accent1"/>
-          </a:fillRef>
-          <a:effectRef idx="0">
-            <a:schemeClr val="accent1"/>
-          </a:effectRef>
-          <a:fontRef idx="minor">
-            <a:schemeClr val="lt1"/>
-          </a:fontRef>
-        </p:style>
-        <p:txBody>
-          <a:bodyPr rot="0" spcFirstLastPara="0" vertOverflow="overflow" horzOverflow="overflow" vert="horz" wrap="square" lIns="91440" tIns="45720" rIns="91440" bIns="45720" numCol="1" spcCol="0" rtlCol="0" fromWordArt="0" anchor="ctr" anchorCtr="0" forceAA="0" compatLnSpc="1">
-            <a:prstTxWarp prst="textNoShape">
-              <a:avLst/>
-            </a:prstTxWarp>
-            <a:noAutofit/>
-          </a:bodyPr>
-          <a:lstStyle/>
-          <a:p>
-            <a:pPr algn="ctr"/>
-            <a:endParaRPr lang="pt-BR" sz="2000" dirty="0">
-              <a:solidFill>
-                <a:schemeClr val="tx1"/>
-              </a:solidFill>
-            </a:endParaRPr>
-          </a:p>
-        </p:txBody>
-      </p:sp>
     </p:spTree>
     <p:extLst>
       <p:ext uri="{BB962C8B-B14F-4D97-AF65-F5344CB8AC3E}">
-        <p14:creationId xmlns:p14="http://schemas.microsoft.com/office/powerpoint/2010/main" val="2442101673"/>
+        <p14:creationId xmlns:p14="http://schemas.microsoft.com/office/powerpoint/2010/main" val="1725406452"/>
       </p:ext>
     </p:extLst>
   </p:cSld>
@@ -5050,10 +4806,10 @@
       </p:grpSpPr>
       <p:pic>
         <p:nvPicPr>
-          <p:cNvPr id="2" name="Imagem 1">
-            <a:extLst>
-              <a:ext uri="{FF2B5EF4-FFF2-40B4-BE49-F238E27FC236}">
-                <a16:creationId xmlns:a16="http://schemas.microsoft.com/office/drawing/2014/main" id="{658B38B1-C43F-48AB-9108-698D5A0E1F50}"/>
+          <p:cNvPr id="3" name="Imagem 2">
+            <a:extLst>
+              <a:ext uri="{FF2B5EF4-FFF2-40B4-BE49-F238E27FC236}">
+                <a16:creationId xmlns:a16="http://schemas.microsoft.com/office/drawing/2014/main" id="{E263B8AA-8226-4D60-B9A2-7F871A13B256}"/>
               </a:ext>
             </a:extLst>
           </p:cNvPr>
@@ -5063,25 +4819,403 @@
           <p:nvPr/>
         </p:nvPicPr>
         <p:blipFill>
-          <a:blip r:embed="rId2"/>
+          <a:blip r:embed="rId2">
+            <a:extLst>
+              <a:ext uri="{28A0092B-C50C-407E-A947-70E740481C1C}">
+                <a14:useLocalDpi xmlns:a14="http://schemas.microsoft.com/office/drawing/2010/main" val="0"/>
+              </a:ext>
+            </a:extLst>
+          </a:blip>
           <a:stretch>
             <a:fillRect/>
           </a:stretch>
         </p:blipFill>
         <p:spPr>
           <a:xfrm>
-            <a:off x="2743200" y="1004887"/>
-            <a:ext cx="6705600" cy="4848225"/>
+            <a:off x="919709" y="0"/>
+            <a:ext cx="10352582" cy="6858000"/>
           </a:xfrm>
           <a:prstGeom prst="rect">
             <a:avLst/>
           </a:prstGeom>
         </p:spPr>
       </p:pic>
+      <p:sp>
+        <p:nvSpPr>
+          <p:cNvPr id="4" name="Retângulo 3">
+            <a:extLst>
+              <a:ext uri="{FF2B5EF4-FFF2-40B4-BE49-F238E27FC236}">
+                <a16:creationId xmlns:a16="http://schemas.microsoft.com/office/drawing/2014/main" id="{9EB141D1-A0F1-4720-8699-6901A6E5A87A}"/>
+              </a:ext>
+            </a:extLst>
+          </p:cNvPr>
+          <p:cNvSpPr/>
+          <p:nvPr/>
+        </p:nvSpPr>
+        <p:spPr>
+          <a:xfrm>
+            <a:off x="1303867" y="0"/>
+            <a:ext cx="2827866" cy="1947333"/>
+          </a:xfrm>
+          <a:prstGeom prst="rect">
+            <a:avLst/>
+          </a:prstGeom>
+          <a:noFill/>
+          <a:ln w="38100">
+            <a:solidFill>
+              <a:srgbClr val="FF0000"/>
+            </a:solidFill>
+          </a:ln>
+        </p:spPr>
+        <p:style>
+          <a:lnRef idx="2">
+            <a:schemeClr val="accent1">
+              <a:shade val="50000"/>
+            </a:schemeClr>
+          </a:lnRef>
+          <a:fillRef idx="1">
+            <a:schemeClr val="accent1"/>
+          </a:fillRef>
+          <a:effectRef idx="0">
+            <a:schemeClr val="accent1"/>
+          </a:effectRef>
+          <a:fontRef idx="minor">
+            <a:schemeClr val="lt1"/>
+          </a:fontRef>
+        </p:style>
+        <p:txBody>
+          <a:bodyPr rot="0" spcFirstLastPara="0" vertOverflow="overflow" horzOverflow="overflow" vert="horz" wrap="square" lIns="91440" tIns="45720" rIns="91440" bIns="45720" numCol="1" spcCol="0" rtlCol="0" fromWordArt="0" anchor="ctr" anchorCtr="0" forceAA="0" compatLnSpc="1">
+            <a:prstTxWarp prst="textNoShape">
+              <a:avLst/>
+            </a:prstTxWarp>
+            <a:noAutofit/>
+          </a:bodyPr>
+          <a:lstStyle/>
+          <a:p>
+            <a:pPr algn="ctr"/>
+            <a:endParaRPr lang="pt-BR" sz="2000" dirty="0">
+              <a:solidFill>
+                <a:schemeClr val="tx1"/>
+              </a:solidFill>
+            </a:endParaRPr>
+          </a:p>
+        </p:txBody>
+      </p:sp>
+      <p:sp>
+        <p:nvSpPr>
+          <p:cNvPr id="5" name="Retângulo 4">
+            <a:extLst>
+              <a:ext uri="{FF2B5EF4-FFF2-40B4-BE49-F238E27FC236}">
+                <a16:creationId xmlns:a16="http://schemas.microsoft.com/office/drawing/2014/main" id="{5BC8FE05-C0E0-452A-AD87-0B77ABC9A1B1}"/>
+              </a:ext>
+            </a:extLst>
+          </p:cNvPr>
+          <p:cNvSpPr/>
+          <p:nvPr/>
+        </p:nvSpPr>
+        <p:spPr>
+          <a:xfrm>
+            <a:off x="1303867" y="2108199"/>
+            <a:ext cx="2827866" cy="1947333"/>
+          </a:xfrm>
+          <a:prstGeom prst="rect">
+            <a:avLst/>
+          </a:prstGeom>
+          <a:noFill/>
+          <a:ln w="38100">
+            <a:solidFill>
+              <a:srgbClr val="FF0000"/>
+            </a:solidFill>
+          </a:ln>
+        </p:spPr>
+        <p:style>
+          <a:lnRef idx="2">
+            <a:schemeClr val="accent1">
+              <a:shade val="50000"/>
+            </a:schemeClr>
+          </a:lnRef>
+          <a:fillRef idx="1">
+            <a:schemeClr val="accent1"/>
+          </a:fillRef>
+          <a:effectRef idx="0">
+            <a:schemeClr val="accent1"/>
+          </a:effectRef>
+          <a:fontRef idx="minor">
+            <a:schemeClr val="lt1"/>
+          </a:fontRef>
+        </p:style>
+        <p:txBody>
+          <a:bodyPr rot="0" spcFirstLastPara="0" vertOverflow="overflow" horzOverflow="overflow" vert="horz" wrap="square" lIns="91440" tIns="45720" rIns="91440" bIns="45720" numCol="1" spcCol="0" rtlCol="0" fromWordArt="0" anchor="ctr" anchorCtr="0" forceAA="0" compatLnSpc="1">
+            <a:prstTxWarp prst="textNoShape">
+              <a:avLst/>
+            </a:prstTxWarp>
+            <a:noAutofit/>
+          </a:bodyPr>
+          <a:lstStyle/>
+          <a:p>
+            <a:pPr algn="ctr"/>
+            <a:endParaRPr lang="pt-BR" sz="2000" dirty="0">
+              <a:solidFill>
+                <a:schemeClr val="tx1"/>
+              </a:solidFill>
+            </a:endParaRPr>
+          </a:p>
+        </p:txBody>
+      </p:sp>
+      <p:sp>
+        <p:nvSpPr>
+          <p:cNvPr id="6" name="Retângulo 5">
+            <a:extLst>
+              <a:ext uri="{FF2B5EF4-FFF2-40B4-BE49-F238E27FC236}">
+                <a16:creationId xmlns:a16="http://schemas.microsoft.com/office/drawing/2014/main" id="{9E1DAC71-092B-4C46-9E9C-3224BABE003A}"/>
+              </a:ext>
+            </a:extLst>
+          </p:cNvPr>
+          <p:cNvSpPr/>
+          <p:nvPr/>
+        </p:nvSpPr>
+        <p:spPr>
+          <a:xfrm>
+            <a:off x="1303867" y="4292601"/>
+            <a:ext cx="2827866" cy="1947333"/>
+          </a:xfrm>
+          <a:prstGeom prst="rect">
+            <a:avLst/>
+          </a:prstGeom>
+          <a:noFill/>
+          <a:ln w="38100">
+            <a:solidFill>
+              <a:srgbClr val="FF0000"/>
+            </a:solidFill>
+          </a:ln>
+        </p:spPr>
+        <p:style>
+          <a:lnRef idx="2">
+            <a:schemeClr val="accent1">
+              <a:shade val="50000"/>
+            </a:schemeClr>
+          </a:lnRef>
+          <a:fillRef idx="1">
+            <a:schemeClr val="accent1"/>
+          </a:fillRef>
+          <a:effectRef idx="0">
+            <a:schemeClr val="accent1"/>
+          </a:effectRef>
+          <a:fontRef idx="minor">
+            <a:schemeClr val="lt1"/>
+          </a:fontRef>
+        </p:style>
+        <p:txBody>
+          <a:bodyPr rot="0" spcFirstLastPara="0" vertOverflow="overflow" horzOverflow="overflow" vert="horz" wrap="square" lIns="91440" tIns="45720" rIns="91440" bIns="45720" numCol="1" spcCol="0" rtlCol="0" fromWordArt="0" anchor="ctr" anchorCtr="0" forceAA="0" compatLnSpc="1">
+            <a:prstTxWarp prst="textNoShape">
+              <a:avLst/>
+            </a:prstTxWarp>
+            <a:noAutofit/>
+          </a:bodyPr>
+          <a:lstStyle/>
+          <a:p>
+            <a:pPr algn="ctr"/>
+            <a:endParaRPr lang="pt-BR" sz="2000" dirty="0">
+              <a:solidFill>
+                <a:schemeClr val="tx1"/>
+              </a:solidFill>
+            </a:endParaRPr>
+          </a:p>
+        </p:txBody>
+      </p:sp>
+      <p:sp>
+        <p:nvSpPr>
+          <p:cNvPr id="7" name="Seta: para a Direita 6">
+            <a:extLst>
+              <a:ext uri="{FF2B5EF4-FFF2-40B4-BE49-F238E27FC236}">
+                <a16:creationId xmlns:a16="http://schemas.microsoft.com/office/drawing/2014/main" id="{C9550070-A828-49CA-B2C7-5F85C5FB61A7}"/>
+              </a:ext>
+            </a:extLst>
+          </p:cNvPr>
+          <p:cNvSpPr/>
+          <p:nvPr/>
+        </p:nvSpPr>
+        <p:spPr>
+          <a:xfrm>
+            <a:off x="220133" y="533399"/>
+            <a:ext cx="939800" cy="880533"/>
+          </a:xfrm>
+          <a:prstGeom prst="rightArrow">
+            <a:avLst/>
+          </a:prstGeom>
+          <a:solidFill>
+            <a:srgbClr val="FFFF00"/>
+          </a:solidFill>
+          <a:ln w="38100">
+            <a:solidFill>
+              <a:srgbClr val="FF0000"/>
+            </a:solidFill>
+          </a:ln>
+        </p:spPr>
+        <p:style>
+          <a:lnRef idx="2">
+            <a:schemeClr val="accent1">
+              <a:shade val="50000"/>
+            </a:schemeClr>
+          </a:lnRef>
+          <a:fillRef idx="1">
+            <a:schemeClr val="accent1"/>
+          </a:fillRef>
+          <a:effectRef idx="0">
+            <a:schemeClr val="accent1"/>
+          </a:effectRef>
+          <a:fontRef idx="minor">
+            <a:schemeClr val="lt1"/>
+          </a:fontRef>
+        </p:style>
+        <p:txBody>
+          <a:bodyPr rot="0" spcFirstLastPara="0" vertOverflow="overflow" horzOverflow="overflow" vert="horz" wrap="square" lIns="91440" tIns="45720" rIns="91440" bIns="45720" numCol="1" spcCol="0" rtlCol="0" fromWordArt="0" anchor="ctr" anchorCtr="0" forceAA="0" compatLnSpc="1">
+            <a:prstTxWarp prst="textNoShape">
+              <a:avLst/>
+            </a:prstTxWarp>
+            <a:noAutofit/>
+          </a:bodyPr>
+          <a:lstStyle/>
+          <a:p>
+            <a:pPr algn="ctr"/>
+            <a:endParaRPr lang="pt-BR" sz="2000" dirty="0">
+              <a:solidFill>
+                <a:schemeClr val="tx1"/>
+              </a:solidFill>
+            </a:endParaRPr>
+          </a:p>
+        </p:txBody>
+      </p:sp>
+      <p:sp>
+        <p:nvSpPr>
+          <p:cNvPr id="8" name="Seta: para a Direita 7">
+            <a:extLst>
+              <a:ext uri="{FF2B5EF4-FFF2-40B4-BE49-F238E27FC236}">
+                <a16:creationId xmlns:a16="http://schemas.microsoft.com/office/drawing/2014/main" id="{AA3E9ECD-1062-4C7D-AD83-82DDB679CB66}"/>
+              </a:ext>
+            </a:extLst>
+          </p:cNvPr>
+          <p:cNvSpPr/>
+          <p:nvPr/>
+        </p:nvSpPr>
+        <p:spPr>
+          <a:xfrm>
+            <a:off x="220133" y="2641598"/>
+            <a:ext cx="939800" cy="880533"/>
+          </a:xfrm>
+          <a:prstGeom prst="rightArrow">
+            <a:avLst/>
+          </a:prstGeom>
+          <a:solidFill>
+            <a:srgbClr val="FFFF00"/>
+          </a:solidFill>
+          <a:ln w="38100">
+            <a:solidFill>
+              <a:srgbClr val="FF0000"/>
+            </a:solidFill>
+          </a:ln>
+        </p:spPr>
+        <p:style>
+          <a:lnRef idx="2">
+            <a:schemeClr val="accent1">
+              <a:shade val="50000"/>
+            </a:schemeClr>
+          </a:lnRef>
+          <a:fillRef idx="1">
+            <a:schemeClr val="accent1"/>
+          </a:fillRef>
+          <a:effectRef idx="0">
+            <a:schemeClr val="accent1"/>
+          </a:effectRef>
+          <a:fontRef idx="minor">
+            <a:schemeClr val="lt1"/>
+          </a:fontRef>
+        </p:style>
+        <p:txBody>
+          <a:bodyPr rot="0" spcFirstLastPara="0" vertOverflow="overflow" horzOverflow="overflow" vert="horz" wrap="square" lIns="91440" tIns="45720" rIns="91440" bIns="45720" numCol="1" spcCol="0" rtlCol="0" fromWordArt="0" anchor="ctr" anchorCtr="0" forceAA="0" compatLnSpc="1">
+            <a:prstTxWarp prst="textNoShape">
+              <a:avLst/>
+            </a:prstTxWarp>
+            <a:noAutofit/>
+          </a:bodyPr>
+          <a:lstStyle/>
+          <a:p>
+            <a:pPr algn="ctr"/>
+            <a:endParaRPr lang="pt-BR" sz="2000" dirty="0">
+              <a:solidFill>
+                <a:schemeClr val="tx1"/>
+              </a:solidFill>
+            </a:endParaRPr>
+          </a:p>
+        </p:txBody>
+      </p:sp>
+      <p:sp>
+        <p:nvSpPr>
+          <p:cNvPr id="9" name="Seta: para a Direita 8">
+            <a:extLst>
+              <a:ext uri="{FF2B5EF4-FFF2-40B4-BE49-F238E27FC236}">
+                <a16:creationId xmlns:a16="http://schemas.microsoft.com/office/drawing/2014/main" id="{1839B500-4F2A-42B9-B0E3-76223DE9C8BB}"/>
+              </a:ext>
+            </a:extLst>
+          </p:cNvPr>
+          <p:cNvSpPr/>
+          <p:nvPr/>
+        </p:nvSpPr>
+        <p:spPr>
+          <a:xfrm>
+            <a:off x="220133" y="4826000"/>
+            <a:ext cx="939800" cy="880533"/>
+          </a:xfrm>
+          <a:prstGeom prst="rightArrow">
+            <a:avLst/>
+          </a:prstGeom>
+          <a:solidFill>
+            <a:srgbClr val="FFFF00"/>
+          </a:solidFill>
+          <a:ln w="38100">
+            <a:solidFill>
+              <a:srgbClr val="FF0000"/>
+            </a:solidFill>
+          </a:ln>
+        </p:spPr>
+        <p:style>
+          <a:lnRef idx="2">
+            <a:schemeClr val="accent1">
+              <a:shade val="50000"/>
+            </a:schemeClr>
+          </a:lnRef>
+          <a:fillRef idx="1">
+            <a:schemeClr val="accent1"/>
+          </a:fillRef>
+          <a:effectRef idx="0">
+            <a:schemeClr val="accent1"/>
+          </a:effectRef>
+          <a:fontRef idx="minor">
+            <a:schemeClr val="lt1"/>
+          </a:fontRef>
+        </p:style>
+        <p:txBody>
+          <a:bodyPr rot="0" spcFirstLastPara="0" vertOverflow="overflow" horzOverflow="overflow" vert="horz" wrap="square" lIns="91440" tIns="45720" rIns="91440" bIns="45720" numCol="1" spcCol="0" rtlCol="0" fromWordArt="0" anchor="ctr" anchorCtr="0" forceAA="0" compatLnSpc="1">
+            <a:prstTxWarp prst="textNoShape">
+              <a:avLst/>
+            </a:prstTxWarp>
+            <a:noAutofit/>
+          </a:bodyPr>
+          <a:lstStyle/>
+          <a:p>
+            <a:pPr algn="ctr"/>
+            <a:endParaRPr lang="pt-BR" sz="2000" dirty="0">
+              <a:solidFill>
+                <a:schemeClr val="tx1"/>
+              </a:solidFill>
+            </a:endParaRPr>
+          </a:p>
+        </p:txBody>
+      </p:sp>
     </p:spTree>
     <p:extLst>
       <p:ext uri="{BB962C8B-B14F-4D97-AF65-F5344CB8AC3E}">
-        <p14:creationId xmlns:p14="http://schemas.microsoft.com/office/powerpoint/2010/main" val="2323022854"/>
+        <p14:creationId xmlns:p14="http://schemas.microsoft.com/office/powerpoint/2010/main" val="2442101673"/>
       </p:ext>
     </p:extLst>
   </p:cSld>
@@ -5108,68 +5242,40 @@
           <a:chExt cx="0" cy="0"/>
         </a:xfrm>
       </p:grpSpPr>
-      <p:sp>
-        <p:nvSpPr>
-          <p:cNvPr id="2" name="Título 1">
-            <a:extLst>
-              <a:ext uri="{FF2B5EF4-FFF2-40B4-BE49-F238E27FC236}">
-                <a16:creationId xmlns:a16="http://schemas.microsoft.com/office/drawing/2014/main" id="{5A0112E1-263F-4C33-BBDC-1B70EF8B160F}"/>
-              </a:ext>
-            </a:extLst>
-          </p:cNvPr>
-          <p:cNvSpPr>
-            <a:spLocks noGrp="1"/>
-          </p:cNvSpPr>
-          <p:nvPr>
-            <p:ph type="ctrTitle"/>
-          </p:nvPr>
-        </p:nvSpPr>
-        <p:spPr/>
-        <p:txBody>
-          <a:bodyPr/>
-          <a:lstStyle/>
-          <a:p>
-            <a:r>
-              <a:rPr lang="pt-BR" dirty="0"/>
-              <a:t>Utilizando o </a:t>
-            </a:r>
-            <a:r>
-              <a:rPr lang="pt-BR" dirty="0" err="1"/>
-              <a:t>rowspan</a:t>
-            </a:r>
-            <a:endParaRPr lang="pt-BR" dirty="0"/>
-          </a:p>
-        </p:txBody>
-      </p:sp>
-      <p:sp>
-        <p:nvSpPr>
-          <p:cNvPr id="3" name="Subtítulo 2">
-            <a:extLst>
-              <a:ext uri="{FF2B5EF4-FFF2-40B4-BE49-F238E27FC236}">
-                <a16:creationId xmlns:a16="http://schemas.microsoft.com/office/drawing/2014/main" id="{75ED29CE-3152-47C3-850E-0F8E151DA4A0}"/>
-              </a:ext>
-            </a:extLst>
-          </p:cNvPr>
-          <p:cNvSpPr>
-            <a:spLocks noGrp="1"/>
-          </p:cNvSpPr>
-          <p:nvPr>
-            <p:ph type="subTitle" idx="1"/>
-          </p:nvPr>
-        </p:nvSpPr>
-        <p:spPr/>
-        <p:txBody>
-          <a:bodyPr/>
-          <a:lstStyle/>
-          <a:p>
-            <a:endParaRPr lang="pt-BR"/>
-          </a:p>
-        </p:txBody>
-      </p:sp>
+      <p:pic>
+        <p:nvPicPr>
+          <p:cNvPr id="2" name="Imagem 1">
+            <a:extLst>
+              <a:ext uri="{FF2B5EF4-FFF2-40B4-BE49-F238E27FC236}">
+                <a16:creationId xmlns:a16="http://schemas.microsoft.com/office/drawing/2014/main" id="{658B38B1-C43F-48AB-9108-698D5A0E1F50}"/>
+              </a:ext>
+            </a:extLst>
+          </p:cNvPr>
+          <p:cNvPicPr>
+            <a:picLocks noChangeAspect="1"/>
+          </p:cNvPicPr>
+          <p:nvPr/>
+        </p:nvPicPr>
+        <p:blipFill>
+          <a:blip r:embed="rId2"/>
+          <a:stretch>
+            <a:fillRect/>
+          </a:stretch>
+        </p:blipFill>
+        <p:spPr>
+          <a:xfrm>
+            <a:off x="2743200" y="1004887"/>
+            <a:ext cx="6705600" cy="4848225"/>
+          </a:xfrm>
+          <a:prstGeom prst="rect">
+            <a:avLst/>
+          </a:prstGeom>
+        </p:spPr>
+      </p:pic>
     </p:spTree>
     <p:extLst>
       <p:ext uri="{BB962C8B-B14F-4D97-AF65-F5344CB8AC3E}">
-        <p14:creationId xmlns:p14="http://schemas.microsoft.com/office/powerpoint/2010/main" val="3836320799"/>
+        <p14:creationId xmlns:p14="http://schemas.microsoft.com/office/powerpoint/2010/main" val="2323022854"/>
       </p:ext>
     </p:extLst>
   </p:cSld>
@@ -5196,216 +5302,68 @@
           <a:chExt cx="0" cy="0"/>
         </a:xfrm>
       </p:grpSpPr>
-      <p:pic>
-        <p:nvPicPr>
-          <p:cNvPr id="2" name="Imagem 1">
-            <a:extLst>
-              <a:ext uri="{FF2B5EF4-FFF2-40B4-BE49-F238E27FC236}">
-                <a16:creationId xmlns:a16="http://schemas.microsoft.com/office/drawing/2014/main" id="{05AED5ED-865B-4897-97D5-A0EA00CAD4DF}"/>
-              </a:ext>
-            </a:extLst>
-          </p:cNvPr>
-          <p:cNvPicPr>
-            <a:picLocks noChangeAspect="1"/>
-          </p:cNvPicPr>
-          <p:nvPr/>
-        </p:nvPicPr>
-        <p:blipFill>
-          <a:blip r:embed="rId2"/>
-          <a:stretch>
-            <a:fillRect/>
-          </a:stretch>
-        </p:blipFill>
-        <p:spPr>
-          <a:xfrm>
-            <a:off x="4682066" y="581553"/>
-            <a:ext cx="6705600" cy="4848225"/>
-          </a:xfrm>
-          <a:prstGeom prst="rect">
-            <a:avLst/>
-          </a:prstGeom>
-        </p:spPr>
-      </p:pic>
-      <p:sp>
-        <p:nvSpPr>
-          <p:cNvPr id="3" name="Retângulo 2">
-            <a:extLst>
-              <a:ext uri="{FF2B5EF4-FFF2-40B4-BE49-F238E27FC236}">
-                <a16:creationId xmlns:a16="http://schemas.microsoft.com/office/drawing/2014/main" id="{E0E37CF1-B255-4D14-AB9A-05492C6AD163}"/>
-              </a:ext>
-            </a:extLst>
-          </p:cNvPr>
-          <p:cNvSpPr/>
-          <p:nvPr/>
-        </p:nvSpPr>
-        <p:spPr>
-          <a:xfrm>
-            <a:off x="5274733" y="3200399"/>
-            <a:ext cx="1016000" cy="601134"/>
-          </a:xfrm>
-          <a:prstGeom prst="rect">
-            <a:avLst/>
-          </a:prstGeom>
-          <a:noFill/>
-          <a:ln w="38100">
-            <a:solidFill>
-              <a:srgbClr val="FF0000"/>
-            </a:solidFill>
-          </a:ln>
-        </p:spPr>
-        <p:style>
-          <a:lnRef idx="2">
-            <a:schemeClr val="accent1">
-              <a:shade val="50000"/>
-            </a:schemeClr>
-          </a:lnRef>
-          <a:fillRef idx="1">
-            <a:schemeClr val="accent1"/>
-          </a:fillRef>
-          <a:effectRef idx="0">
-            <a:schemeClr val="accent1"/>
-          </a:effectRef>
-          <a:fontRef idx="minor">
-            <a:schemeClr val="lt1"/>
-          </a:fontRef>
-        </p:style>
-        <p:txBody>
-          <a:bodyPr rtlCol="0" anchor="ctr"/>
-          <a:lstStyle/>
-          <a:p>
-            <a:pPr algn="ctr"/>
-            <a:endParaRPr lang="pt-BR" sz="2000" dirty="0">
-              <a:solidFill>
-                <a:schemeClr val="tx1"/>
-              </a:solidFill>
-            </a:endParaRPr>
-          </a:p>
-        </p:txBody>
-      </p:sp>
-      <p:sp>
-        <p:nvSpPr>
-          <p:cNvPr id="4" name="Elipse 3">
-            <a:extLst>
-              <a:ext uri="{FF2B5EF4-FFF2-40B4-BE49-F238E27FC236}">
-                <a16:creationId xmlns:a16="http://schemas.microsoft.com/office/drawing/2014/main" id="{D5E9D2C2-8D83-4A3C-A4CB-4BA95C3A9F0A}"/>
-              </a:ext>
-            </a:extLst>
-          </p:cNvPr>
-          <p:cNvSpPr/>
-          <p:nvPr/>
-        </p:nvSpPr>
-        <p:spPr>
-          <a:xfrm>
-            <a:off x="508001" y="2518833"/>
-            <a:ext cx="2980266" cy="1964266"/>
-          </a:xfrm>
-          <a:prstGeom prst="ellipse">
-            <a:avLst/>
-          </a:prstGeom>
-          <a:solidFill>
-            <a:srgbClr val="FFFF00"/>
-          </a:solidFill>
-          <a:ln w="38100">
-            <a:solidFill>
-              <a:srgbClr val="FF0000"/>
-            </a:solidFill>
-          </a:ln>
-        </p:spPr>
-        <p:style>
-          <a:lnRef idx="2">
-            <a:schemeClr val="accent1">
-              <a:shade val="50000"/>
-            </a:schemeClr>
-          </a:lnRef>
-          <a:fillRef idx="1">
-            <a:schemeClr val="accent1"/>
-          </a:fillRef>
-          <a:effectRef idx="0">
-            <a:schemeClr val="accent1"/>
-          </a:effectRef>
-          <a:fontRef idx="minor">
-            <a:schemeClr val="lt1"/>
-          </a:fontRef>
-        </p:style>
-        <p:txBody>
-          <a:bodyPr rtlCol="0" anchor="ctr"/>
-          <a:lstStyle/>
-          <a:p>
-            <a:pPr algn="ctr"/>
+      <p:sp>
+        <p:nvSpPr>
+          <p:cNvPr id="2" name="Título 1">
+            <a:extLst>
+              <a:ext uri="{FF2B5EF4-FFF2-40B4-BE49-F238E27FC236}">
+                <a16:creationId xmlns:a16="http://schemas.microsoft.com/office/drawing/2014/main" id="{5A0112E1-263F-4C33-BBDC-1B70EF8B160F}"/>
+              </a:ext>
+            </a:extLst>
+          </p:cNvPr>
+          <p:cNvSpPr>
+            <a:spLocks noGrp="1"/>
+          </p:cNvSpPr>
+          <p:nvPr>
+            <p:ph type="ctrTitle"/>
+          </p:nvPr>
+        </p:nvSpPr>
+        <p:spPr/>
+        <p:txBody>
+          <a:bodyPr/>
+          <a:lstStyle/>
+          <a:p>
             <a:r>
-              <a:rPr lang="pt-BR" sz="2400" b="1" u="sng" dirty="0">
-                <a:solidFill>
-                  <a:schemeClr val="tx1"/>
-                </a:solidFill>
-                <a:highlight>
-                  <a:srgbClr val="FFFF00"/>
-                </a:highlight>
-              </a:rPr>
-              <a:t>Objetivo</a:t>
+              <a:rPr lang="pt-BR" dirty="0"/>
+              <a:t>Utilizando o </a:t>
             </a:r>
             <a:r>
-              <a:rPr lang="pt-BR" sz="2400" dirty="0">
-                <a:solidFill>
-                  <a:schemeClr val="tx1"/>
-                </a:solidFill>
-                <a:highlight>
-                  <a:srgbClr val="FFFF00"/>
-                </a:highlight>
-              </a:rPr>
-              <a:t>: mesclar estas duas células verticalmente</a:t>
+              <a:rPr lang="pt-BR" dirty="0" err="1"/>
+              <a:t>rowspan</a:t>
             </a:r>
-          </a:p>
-        </p:txBody>
-      </p:sp>
-      <p:cxnSp>
-        <p:nvCxnSpPr>
-          <p:cNvPr id="6" name="Conector de Seta Reta 5">
-            <a:extLst>
-              <a:ext uri="{FF2B5EF4-FFF2-40B4-BE49-F238E27FC236}">
-                <a16:creationId xmlns:a16="http://schemas.microsoft.com/office/drawing/2014/main" id="{0DE96557-2BAF-46DF-BEC2-7FD878913ADA}"/>
-              </a:ext>
-            </a:extLst>
-          </p:cNvPr>
-          <p:cNvCxnSpPr>
-            <a:stCxn id="4" idx="6"/>
-            <a:endCxn id="3" idx="1"/>
-          </p:cNvCxnSpPr>
-          <p:nvPr/>
-        </p:nvCxnSpPr>
-        <p:spPr>
-          <a:xfrm>
-            <a:off x="3488267" y="3500966"/>
-            <a:ext cx="1786466" cy="0"/>
-          </a:xfrm>
-          <a:prstGeom prst="straightConnector1">
-            <a:avLst/>
-          </a:prstGeom>
-          <a:ln w="38100">
-            <a:solidFill>
-              <a:srgbClr val="FF0000"/>
-            </a:solidFill>
-            <a:tailEnd type="triangle"/>
-          </a:ln>
-        </p:spPr>
-        <p:style>
-          <a:lnRef idx="1">
-            <a:schemeClr val="accent1"/>
-          </a:lnRef>
-          <a:fillRef idx="0">
-            <a:schemeClr val="accent1"/>
-          </a:fillRef>
-          <a:effectRef idx="0">
-            <a:schemeClr val="accent1"/>
-          </a:effectRef>
-          <a:fontRef idx="minor">
-            <a:schemeClr val="tx1"/>
-          </a:fontRef>
-        </p:style>
-      </p:cxnSp>
+            <a:endParaRPr lang="pt-BR" dirty="0"/>
+          </a:p>
+        </p:txBody>
+      </p:sp>
+      <p:sp>
+        <p:nvSpPr>
+          <p:cNvPr id="3" name="Subtítulo 2">
+            <a:extLst>
+              <a:ext uri="{FF2B5EF4-FFF2-40B4-BE49-F238E27FC236}">
+                <a16:creationId xmlns:a16="http://schemas.microsoft.com/office/drawing/2014/main" id="{75ED29CE-3152-47C3-850E-0F8E151DA4A0}"/>
+              </a:ext>
+            </a:extLst>
+          </p:cNvPr>
+          <p:cNvSpPr>
+            <a:spLocks noGrp="1"/>
+          </p:cNvSpPr>
+          <p:nvPr>
+            <p:ph type="subTitle" idx="1"/>
+          </p:nvPr>
+        </p:nvSpPr>
+        <p:spPr/>
+        <p:txBody>
+          <a:bodyPr/>
+          <a:lstStyle/>
+          <a:p>
+            <a:endParaRPr lang="pt-BR"/>
+          </a:p>
+        </p:txBody>
+      </p:sp>
     </p:spTree>
     <p:extLst>
       <p:ext uri="{BB962C8B-B14F-4D97-AF65-F5344CB8AC3E}">
-        <p14:creationId xmlns:p14="http://schemas.microsoft.com/office/powerpoint/2010/main" val="4146084436"/>
+        <p14:creationId xmlns:p14="http://schemas.microsoft.com/office/powerpoint/2010/main" val="3836320799"/>
       </p:ext>
     </p:extLst>
   </p:cSld>
@@ -5432,19 +5390,115 @@
           <a:chExt cx="0" cy="0"/>
         </a:xfrm>
       </p:grpSpPr>
+      <p:sp>
+        <p:nvSpPr>
+          <p:cNvPr id="2" name="Título 1">
+            <a:extLst>
+              <a:ext uri="{FF2B5EF4-FFF2-40B4-BE49-F238E27FC236}">
+                <a16:creationId xmlns:a16="http://schemas.microsoft.com/office/drawing/2014/main" id="{DDF79A6B-EE0A-4E2C-8F10-C4A5AB2B3D9C}"/>
+              </a:ext>
+            </a:extLst>
+          </p:cNvPr>
+          <p:cNvSpPr>
+            <a:spLocks noGrp="1"/>
+          </p:cNvSpPr>
+          <p:nvPr>
+            <p:ph type="title"/>
+          </p:nvPr>
+        </p:nvSpPr>
+        <p:spPr/>
+        <p:txBody>
+          <a:bodyPr/>
+          <a:lstStyle/>
+          <a:p>
+            <a:r>
+              <a:rPr lang="pt-BR" dirty="0"/>
+              <a:t>Objetivos da Aula</a:t>
+            </a:r>
+          </a:p>
+        </p:txBody>
+      </p:sp>
+      <p:sp>
+        <p:nvSpPr>
+          <p:cNvPr id="3" name="Espaço Reservado para Texto 2">
+            <a:extLst>
+              <a:ext uri="{FF2B5EF4-FFF2-40B4-BE49-F238E27FC236}">
+                <a16:creationId xmlns:a16="http://schemas.microsoft.com/office/drawing/2014/main" id="{64A3A41B-0523-4345-BD28-15D4733B43B6}"/>
+              </a:ext>
+            </a:extLst>
+          </p:cNvPr>
+          <p:cNvSpPr>
+            <a:spLocks noGrp="1"/>
+          </p:cNvSpPr>
+          <p:nvPr>
+            <p:ph type="body" idx="1"/>
+          </p:nvPr>
+        </p:nvSpPr>
+        <p:spPr/>
+        <p:txBody>
+          <a:bodyPr/>
+          <a:lstStyle/>
+          <a:p>
+            <a:r>
+              <a:rPr lang="pt-BR" dirty="0"/>
+              <a:t>Exemplo 3 - </a:t>
+            </a:r>
+            <a:r>
+              <a:rPr lang="pt-BR" dirty="0" err="1"/>
+              <a:t>colspan</a:t>
+            </a:r>
+            <a:endParaRPr lang="pt-BR" dirty="0"/>
+          </a:p>
+        </p:txBody>
+      </p:sp>
+      <p:sp>
+        <p:nvSpPr>
+          <p:cNvPr id="5" name="Espaço Reservado para Texto 4">
+            <a:extLst>
+              <a:ext uri="{FF2B5EF4-FFF2-40B4-BE49-F238E27FC236}">
+                <a16:creationId xmlns:a16="http://schemas.microsoft.com/office/drawing/2014/main" id="{32413FDC-BDBC-4145-BC15-B3382A6EEC17}"/>
+              </a:ext>
+            </a:extLst>
+          </p:cNvPr>
+          <p:cNvSpPr>
+            <a:spLocks noGrp="1"/>
+          </p:cNvSpPr>
+          <p:nvPr>
+            <p:ph type="body" sz="quarter" idx="3"/>
+          </p:nvPr>
+        </p:nvSpPr>
+        <p:spPr/>
+        <p:txBody>
+          <a:bodyPr/>
+          <a:lstStyle/>
+          <a:p>
+            <a:r>
+              <a:rPr lang="pt-BR" dirty="0"/>
+              <a:t>Exemplo 4 - </a:t>
+            </a:r>
+            <a:r>
+              <a:rPr lang="pt-BR" dirty="0" err="1"/>
+              <a:t>rowspan</a:t>
+            </a:r>
+            <a:endParaRPr lang="pt-BR" dirty="0"/>
+          </a:p>
+        </p:txBody>
+      </p:sp>
       <p:pic>
         <p:nvPicPr>
-          <p:cNvPr id="2" name="Imagem 1">
-            <a:extLst>
-              <a:ext uri="{FF2B5EF4-FFF2-40B4-BE49-F238E27FC236}">
-                <a16:creationId xmlns:a16="http://schemas.microsoft.com/office/drawing/2014/main" id="{A10DE7F4-45B5-4065-A79B-E01603C278B4}"/>
+          <p:cNvPr id="7" name="Espaço Reservado para Conteúdo 6">
+            <a:extLst>
+              <a:ext uri="{FF2B5EF4-FFF2-40B4-BE49-F238E27FC236}">
+                <a16:creationId xmlns:a16="http://schemas.microsoft.com/office/drawing/2014/main" id="{FC6CE060-0CF1-4B8F-8332-A15F933B97DA}"/>
               </a:ext>
             </a:extLst>
           </p:cNvPr>
           <p:cNvPicPr>
-            <a:picLocks noChangeAspect="1"/>
+            <a:picLocks noGrp="1" noChangeAspect="1"/>
           </p:cNvPicPr>
-          <p:nvPr/>
+          <p:nvPr>
+            <p:ph sz="quarter" idx="4"/>
+          </p:nvPr>
         </p:nvPicPr>
         <p:blipFill>
           <a:blip r:embed="rId2"/>
@@ -5454,173 +5508,50 @@
         </p:blipFill>
         <p:spPr>
           <a:xfrm>
-            <a:off x="3904944" y="656838"/>
-            <a:ext cx="4382112" cy="5544324"/>
+            <a:off x="5516153" y="2505075"/>
+            <a:ext cx="5795725" cy="4190376"/>
           </a:xfrm>
           <a:prstGeom prst="rect">
             <a:avLst/>
           </a:prstGeom>
         </p:spPr>
       </p:pic>
-      <p:cxnSp>
-        <p:nvCxnSpPr>
-          <p:cNvPr id="5" name="Conector de Seta Reta 4">
-            <a:extLst>
-              <a:ext uri="{FF2B5EF4-FFF2-40B4-BE49-F238E27FC236}">
-                <a16:creationId xmlns:a16="http://schemas.microsoft.com/office/drawing/2014/main" id="{8ECB68AF-24A0-4970-ABFD-A6A7D698DDFC}"/>
-              </a:ext>
-            </a:extLst>
-          </p:cNvPr>
-          <p:cNvCxnSpPr/>
-          <p:nvPr/>
-        </p:nvCxnSpPr>
-        <p:spPr>
-          <a:xfrm flipH="1" flipV="1">
-            <a:off x="6773333" y="1185333"/>
-            <a:ext cx="2379134" cy="1735667"/>
-          </a:xfrm>
-          <a:prstGeom prst="straightConnector1">
-            <a:avLst/>
-          </a:prstGeom>
-          <a:ln w="38100">
-            <a:solidFill>
-              <a:srgbClr val="FF0000"/>
-            </a:solidFill>
-            <a:tailEnd type="triangle"/>
-          </a:ln>
-        </p:spPr>
-        <p:style>
-          <a:lnRef idx="1">
-            <a:schemeClr val="accent1"/>
-          </a:lnRef>
-          <a:fillRef idx="0">
-            <a:schemeClr val="accent1"/>
-          </a:fillRef>
-          <a:effectRef idx="0">
-            <a:schemeClr val="accent1"/>
-          </a:effectRef>
-          <a:fontRef idx="minor">
-            <a:schemeClr val="tx1"/>
-          </a:fontRef>
-        </p:style>
-      </p:cxnSp>
-      <p:sp>
-        <p:nvSpPr>
-          <p:cNvPr id="6" name="Elipse 5">
-            <a:extLst>
-              <a:ext uri="{FF2B5EF4-FFF2-40B4-BE49-F238E27FC236}">
-                <a16:creationId xmlns:a16="http://schemas.microsoft.com/office/drawing/2014/main" id="{642FFC08-19D5-4F02-8E50-FF8030291515}"/>
-              </a:ext>
-            </a:extLst>
-          </p:cNvPr>
-          <p:cNvSpPr/>
-          <p:nvPr/>
-        </p:nvSpPr>
-        <p:spPr>
-          <a:xfrm>
-            <a:off x="6282267" y="656838"/>
-            <a:ext cx="635000" cy="647029"/>
-          </a:xfrm>
-          <a:prstGeom prst="ellipse">
-            <a:avLst/>
-          </a:prstGeom>
-          <a:noFill/>
-          <a:ln w="38100">
-            <a:solidFill>
-              <a:srgbClr val="FF0000"/>
-            </a:solidFill>
-          </a:ln>
-        </p:spPr>
-        <p:style>
-          <a:lnRef idx="2">
-            <a:schemeClr val="accent1">
-              <a:shade val="50000"/>
-            </a:schemeClr>
-          </a:lnRef>
-          <a:fillRef idx="1">
-            <a:schemeClr val="accent1"/>
-          </a:fillRef>
-          <a:effectRef idx="0">
-            <a:schemeClr val="accent1"/>
-          </a:effectRef>
-          <a:fontRef idx="minor">
-            <a:schemeClr val="lt1"/>
-          </a:fontRef>
-        </p:style>
-        <p:txBody>
-          <a:bodyPr rtlCol="0" anchor="ctr"/>
-          <a:lstStyle/>
-          <a:p>
-            <a:pPr algn="ctr"/>
-            <a:endParaRPr lang="pt-BR"/>
-          </a:p>
-        </p:txBody>
-      </p:sp>
-      <p:sp>
-        <p:nvSpPr>
-          <p:cNvPr id="7" name="Seta: para a Direita 6">
-            <a:extLst>
-              <a:ext uri="{FF2B5EF4-FFF2-40B4-BE49-F238E27FC236}">
-                <a16:creationId xmlns:a16="http://schemas.microsoft.com/office/drawing/2014/main" id="{351305F8-EA61-4DF9-9622-9478C05D41F5}"/>
-              </a:ext>
-            </a:extLst>
-          </p:cNvPr>
-          <p:cNvSpPr/>
-          <p:nvPr/>
-        </p:nvSpPr>
-        <p:spPr>
-          <a:xfrm>
-            <a:off x="1388534" y="2328333"/>
-            <a:ext cx="2692400" cy="1380067"/>
-          </a:xfrm>
-          <a:prstGeom prst="rightArrow">
-            <a:avLst/>
-          </a:prstGeom>
-          <a:solidFill>
-            <a:srgbClr val="FFFF00"/>
-          </a:solidFill>
-          <a:ln w="38100">
-            <a:solidFill>
-              <a:srgbClr val="FF0000"/>
-            </a:solidFill>
-          </a:ln>
-        </p:spPr>
-        <p:style>
-          <a:lnRef idx="2">
-            <a:schemeClr val="accent1">
-              <a:shade val="50000"/>
-            </a:schemeClr>
-          </a:lnRef>
-          <a:fillRef idx="1">
-            <a:schemeClr val="accent1"/>
-          </a:fillRef>
-          <a:effectRef idx="0">
-            <a:schemeClr val="accent1"/>
-          </a:effectRef>
-          <a:fontRef idx="minor">
-            <a:schemeClr val="lt1"/>
-          </a:fontRef>
-        </p:style>
-        <p:txBody>
-          <a:bodyPr rtlCol="0" anchor="ctr"/>
-          <a:lstStyle/>
-          <a:p>
-            <a:pPr algn="ctr"/>
-            <a:r>
-              <a:rPr lang="pt-BR" sz="2000" dirty="0">
-                <a:solidFill>
-                  <a:schemeClr val="tx1"/>
-                </a:solidFill>
-              </a:rPr>
-              <a:t>Estamos na pasta aula 5</a:t>
-            </a:r>
-          </a:p>
-        </p:txBody>
-      </p:sp>
+      <p:pic>
+        <p:nvPicPr>
+          <p:cNvPr id="8" name="Espaço Reservado para Conteúdo 7">
+            <a:extLst>
+              <a:ext uri="{FF2B5EF4-FFF2-40B4-BE49-F238E27FC236}">
+                <a16:creationId xmlns:a16="http://schemas.microsoft.com/office/drawing/2014/main" id="{C11335D1-9784-4836-8308-C387E1923AF4}"/>
+              </a:ext>
+            </a:extLst>
+          </p:cNvPr>
+          <p:cNvPicPr>
+            <a:picLocks noGrp="1" noChangeAspect="1"/>
+          </p:cNvPicPr>
+          <p:nvPr>
+            <p:ph sz="half" idx="2"/>
+          </p:nvPr>
+        </p:nvPicPr>
+        <p:blipFill>
+          <a:blip r:embed="rId3"/>
+          <a:stretch>
+            <a:fillRect/>
+          </a:stretch>
+        </p:blipFill>
+        <p:spPr>
+          <a:xfrm>
+            <a:off x="836612" y="2505074"/>
+            <a:ext cx="4617515" cy="4190377"/>
+          </a:xfrm>
+          <a:prstGeom prst="rect">
+            <a:avLst/>
+          </a:prstGeom>
+        </p:spPr>
+      </p:pic>
     </p:spTree>
     <p:extLst>
       <p:ext uri="{BB962C8B-B14F-4D97-AF65-F5344CB8AC3E}">
-        <p14:creationId xmlns:p14="http://schemas.microsoft.com/office/powerpoint/2010/main" val="888297528"/>
+        <p14:creationId xmlns:p14="http://schemas.microsoft.com/office/powerpoint/2010/main" val="2386491336"/>
       </p:ext>
     </p:extLst>
   </p:cSld>
@@ -5649,10 +5580,10 @@
       </p:grpSpPr>
       <p:pic>
         <p:nvPicPr>
-          <p:cNvPr id="3" name="Imagem 2">
-            <a:extLst>
-              <a:ext uri="{FF2B5EF4-FFF2-40B4-BE49-F238E27FC236}">
-                <a16:creationId xmlns:a16="http://schemas.microsoft.com/office/drawing/2014/main" id="{221D6B3F-8805-41E5-87F4-8CD5CBB3464D}"/>
+          <p:cNvPr id="2" name="Imagem 1">
+            <a:extLst>
+              <a:ext uri="{FF2B5EF4-FFF2-40B4-BE49-F238E27FC236}">
+                <a16:creationId xmlns:a16="http://schemas.microsoft.com/office/drawing/2014/main" id="{05AED5ED-865B-4897-97D5-A0EA00CAD4DF}"/>
               </a:ext>
             </a:extLst>
           </p:cNvPr>
@@ -5662,69 +5593,27 @@
           <p:nvPr/>
         </p:nvPicPr>
         <p:blipFill>
-          <a:blip r:embed="rId2">
-            <a:extLst>
-              <a:ext uri="{28A0092B-C50C-407E-A947-70E740481C1C}">
-                <a14:useLocalDpi xmlns:a14="http://schemas.microsoft.com/office/drawing/2010/main" val="0"/>
-              </a:ext>
-            </a:extLst>
-          </a:blip>
+          <a:blip r:embed="rId2"/>
           <a:stretch>
             <a:fillRect/>
           </a:stretch>
         </p:blipFill>
         <p:spPr>
           <a:xfrm>
-            <a:off x="665475" y="791383"/>
-            <a:ext cx="4063338" cy="4686550"/>
+            <a:off x="4682066" y="581553"/>
+            <a:ext cx="6705600" cy="4848225"/>
           </a:xfrm>
           <a:prstGeom prst="rect">
             <a:avLst/>
           </a:prstGeom>
         </p:spPr>
       </p:pic>
-      <p:pic>
-        <p:nvPicPr>
-          <p:cNvPr id="5" name="Imagem 4">
-            <a:extLst>
-              <a:ext uri="{FF2B5EF4-FFF2-40B4-BE49-F238E27FC236}">
-                <a16:creationId xmlns:a16="http://schemas.microsoft.com/office/drawing/2014/main" id="{11F7B35A-B92E-4718-A9FB-F7A2586CA6D7}"/>
-              </a:ext>
-            </a:extLst>
-          </p:cNvPr>
-          <p:cNvPicPr>
-            <a:picLocks noChangeAspect="1"/>
-          </p:cNvPicPr>
-          <p:nvPr/>
-        </p:nvPicPr>
-        <p:blipFill>
-          <a:blip r:embed="rId3">
-            <a:extLst>
-              <a:ext uri="{28A0092B-C50C-407E-A947-70E740481C1C}">
-                <a14:useLocalDpi xmlns:a14="http://schemas.microsoft.com/office/drawing/2010/main" val="0"/>
-              </a:ext>
-            </a:extLst>
-          </a:blip>
-          <a:stretch>
-            <a:fillRect/>
-          </a:stretch>
-        </p:blipFill>
-        <p:spPr>
-          <a:xfrm>
-            <a:off x="5321733" y="3429000"/>
-            <a:ext cx="6204792" cy="3003172"/>
-          </a:xfrm>
-          <a:prstGeom prst="rect">
-            <a:avLst/>
-          </a:prstGeom>
-        </p:spPr>
-      </p:pic>
-      <p:sp>
-        <p:nvSpPr>
-          <p:cNvPr id="6" name="Seta: Dobrada para Cima 5">
-            <a:extLst>
-              <a:ext uri="{FF2B5EF4-FFF2-40B4-BE49-F238E27FC236}">
-                <a16:creationId xmlns:a16="http://schemas.microsoft.com/office/drawing/2014/main" id="{3DBEB01C-FC64-44C2-ABEF-2F0F3F11A210}"/>
+      <p:sp>
+        <p:nvSpPr>
+          <p:cNvPr id="3" name="Retângulo 2">
+            <a:extLst>
+              <a:ext uri="{FF2B5EF4-FFF2-40B4-BE49-F238E27FC236}">
+                <a16:creationId xmlns:a16="http://schemas.microsoft.com/office/drawing/2014/main" id="{E0E37CF1-B255-4D14-AB9A-05492C6AD163}"/>
               </a:ext>
             </a:extLst>
           </p:cNvPr>
@@ -5732,11 +5621,11 @@
           <p:nvPr/>
         </p:nvSpPr>
         <p:spPr>
-          <a:xfrm flipV="1">
-            <a:off x="1604254" y="2622421"/>
-            <a:ext cx="6574545" cy="1847977"/>
-          </a:xfrm>
-          <a:prstGeom prst="bentUpArrow">
+          <a:xfrm>
+            <a:off x="5274733" y="3200399"/>
+            <a:ext cx="1016000" cy="601134"/>
+          </a:xfrm>
+          <a:prstGeom prst="rect">
             <a:avLst/>
           </a:prstGeom>
           <a:noFill/>
@@ -5777,10 +5666,10 @@
       </p:sp>
       <p:sp>
         <p:nvSpPr>
-          <p:cNvPr id="9" name="Seta: para a Direita 8">
-            <a:extLst>
-              <a:ext uri="{FF2B5EF4-FFF2-40B4-BE49-F238E27FC236}">
-                <a16:creationId xmlns:a16="http://schemas.microsoft.com/office/drawing/2014/main" id="{EBB0A592-7CB0-4079-A587-E9162FE6E475}"/>
+          <p:cNvPr id="4" name="Elipse 3">
+            <a:extLst>
+              <a:ext uri="{FF2B5EF4-FFF2-40B4-BE49-F238E27FC236}">
+                <a16:creationId xmlns:a16="http://schemas.microsoft.com/office/drawing/2014/main" id="{D5E9D2C2-8D83-4A3C-A4CB-4BA95C3A9F0A}"/>
               </a:ext>
             </a:extLst>
           </p:cNvPr>
@@ -5789,10 +5678,10 @@
         </p:nvSpPr>
         <p:spPr>
           <a:xfrm>
-            <a:off x="5638799" y="4356099"/>
-            <a:ext cx="651933" cy="618066"/>
-          </a:xfrm>
-          <a:prstGeom prst="rightArrow">
+            <a:off x="508001" y="2518833"/>
+            <a:ext cx="2980266" cy="1964266"/>
+          </a:xfrm>
+          <a:prstGeom prst="ellipse">
             <a:avLst/>
           </a:prstGeom>
           <a:solidFill>
@@ -5825,76 +5714,80 @@
           <a:lstStyle/>
           <a:p>
             <a:pPr algn="ctr"/>
-            <a:endParaRPr lang="pt-BR" sz="2000" dirty="0">
-              <a:solidFill>
-                <a:schemeClr val="tx1"/>
-              </a:solidFill>
-            </a:endParaRPr>
-          </a:p>
-        </p:txBody>
-      </p:sp>
-      <p:sp>
-        <p:nvSpPr>
-          <p:cNvPr id="10" name="Seta: para a Direita 9">
-            <a:extLst>
-              <a:ext uri="{FF2B5EF4-FFF2-40B4-BE49-F238E27FC236}">
-                <a16:creationId xmlns:a16="http://schemas.microsoft.com/office/drawing/2014/main" id="{2BD0362C-6B69-426D-9DB7-CD024EB7730F}"/>
-              </a:ext>
-            </a:extLst>
-          </p:cNvPr>
-          <p:cNvSpPr/>
+            <a:r>
+              <a:rPr lang="pt-BR" sz="2400" b="1" u="sng" dirty="0">
+                <a:solidFill>
+                  <a:schemeClr val="tx1"/>
+                </a:solidFill>
+                <a:highlight>
+                  <a:srgbClr val="FFFF00"/>
+                </a:highlight>
+              </a:rPr>
+              <a:t>Objetivo</a:t>
+            </a:r>
+            <a:r>
+              <a:rPr lang="pt-BR" sz="2400" dirty="0">
+                <a:solidFill>
+                  <a:schemeClr val="tx1"/>
+                </a:solidFill>
+                <a:highlight>
+                  <a:srgbClr val="FFFF00"/>
+                </a:highlight>
+              </a:rPr>
+              <a:t>: mesclar estas duas células verticalmente</a:t>
+            </a:r>
+          </a:p>
+        </p:txBody>
+      </p:sp>
+      <p:cxnSp>
+        <p:nvCxnSpPr>
+          <p:cNvPr id="6" name="Conector de Seta Reta 5">
+            <a:extLst>
+              <a:ext uri="{FF2B5EF4-FFF2-40B4-BE49-F238E27FC236}">
+                <a16:creationId xmlns:a16="http://schemas.microsoft.com/office/drawing/2014/main" id="{0DE96557-2BAF-46DF-BEC2-7FD878913ADA}"/>
+              </a:ext>
+            </a:extLst>
+          </p:cNvPr>
+          <p:cNvCxnSpPr>
+            <a:stCxn id="4" idx="6"/>
+            <a:endCxn id="3" idx="1"/>
+          </p:cNvCxnSpPr>
           <p:nvPr/>
-        </p:nvSpPr>
-        <p:spPr>
-          <a:xfrm flipH="1">
-            <a:off x="10942326" y="4356099"/>
-            <a:ext cx="651933" cy="618066"/>
-          </a:xfrm>
-          <a:prstGeom prst="rightArrow">
-            <a:avLst/>
-          </a:prstGeom>
-          <a:solidFill>
-            <a:srgbClr val="FFFF00"/>
-          </a:solidFill>
+        </p:nvCxnSpPr>
+        <p:spPr>
+          <a:xfrm>
+            <a:off x="3488267" y="3500966"/>
+            <a:ext cx="1786466" cy="0"/>
+          </a:xfrm>
+          <a:prstGeom prst="straightConnector1">
+            <a:avLst/>
+          </a:prstGeom>
           <a:ln w="38100">
             <a:solidFill>
               <a:srgbClr val="FF0000"/>
             </a:solidFill>
+            <a:tailEnd type="triangle"/>
           </a:ln>
         </p:spPr>
         <p:style>
-          <a:lnRef idx="2">
-            <a:schemeClr val="accent1">
-              <a:shade val="50000"/>
-            </a:schemeClr>
+          <a:lnRef idx="1">
+            <a:schemeClr val="accent1"/>
           </a:lnRef>
-          <a:fillRef idx="1">
+          <a:fillRef idx="0">
             <a:schemeClr val="accent1"/>
           </a:fillRef>
           <a:effectRef idx="0">
             <a:schemeClr val="accent1"/>
           </a:effectRef>
           <a:fontRef idx="minor">
-            <a:schemeClr val="lt1"/>
+            <a:schemeClr val="tx1"/>
           </a:fontRef>
         </p:style>
-        <p:txBody>
-          <a:bodyPr rtlCol="0" anchor="ctr"/>
-          <a:lstStyle/>
-          <a:p>
-            <a:pPr algn="ctr"/>
-            <a:endParaRPr lang="pt-BR" sz="2000" dirty="0">
-              <a:solidFill>
-                <a:schemeClr val="tx1"/>
-              </a:solidFill>
-            </a:endParaRPr>
-          </a:p>
-        </p:txBody>
-      </p:sp>
+      </p:cxnSp>
     </p:spTree>
     <p:extLst>
       <p:ext uri="{BB962C8B-B14F-4D97-AF65-F5344CB8AC3E}">
-        <p14:creationId xmlns:p14="http://schemas.microsoft.com/office/powerpoint/2010/main" val="168310375"/>
+        <p14:creationId xmlns:p14="http://schemas.microsoft.com/office/powerpoint/2010/main" val="4146084436"/>
       </p:ext>
     </p:extLst>
   </p:cSld>
@@ -5923,10 +5816,10 @@
       </p:grpSpPr>
       <p:pic>
         <p:nvPicPr>
-          <p:cNvPr id="2" name="Imagem 1">
-            <a:extLst>
-              <a:ext uri="{FF2B5EF4-FFF2-40B4-BE49-F238E27FC236}">
-                <a16:creationId xmlns:a16="http://schemas.microsoft.com/office/drawing/2014/main" id="{309857C3-6CDC-42F8-A5AF-8D7D8CB5F6C1}"/>
+          <p:cNvPr id="3" name="Imagem 2">
+            <a:extLst>
+              <a:ext uri="{FF2B5EF4-FFF2-40B4-BE49-F238E27FC236}">
+                <a16:creationId xmlns:a16="http://schemas.microsoft.com/office/drawing/2014/main" id="{221D6B3F-8805-41E5-87F4-8CD5CBB3464D}"/>
               </a:ext>
             </a:extLst>
           </p:cNvPr>
@@ -5936,27 +5829,69 @@
           <p:nvPr/>
         </p:nvPicPr>
         <p:blipFill>
-          <a:blip r:embed="rId2"/>
+          <a:blip r:embed="rId2">
+            <a:extLst>
+              <a:ext uri="{28A0092B-C50C-407E-A947-70E740481C1C}">
+                <a14:useLocalDpi xmlns:a14="http://schemas.microsoft.com/office/drawing/2010/main" val="0"/>
+              </a:ext>
+            </a:extLst>
+          </a:blip>
           <a:stretch>
             <a:fillRect/>
           </a:stretch>
         </p:blipFill>
         <p:spPr>
           <a:xfrm>
-            <a:off x="3996266" y="1004887"/>
-            <a:ext cx="6705600" cy="4848225"/>
+            <a:off x="665475" y="791383"/>
+            <a:ext cx="4063338" cy="4686550"/>
           </a:xfrm>
           <a:prstGeom prst="rect">
             <a:avLst/>
           </a:prstGeom>
         </p:spPr>
       </p:pic>
-      <p:sp>
-        <p:nvSpPr>
-          <p:cNvPr id="3" name="Elipse 2">
-            <a:extLst>
-              <a:ext uri="{FF2B5EF4-FFF2-40B4-BE49-F238E27FC236}">
-                <a16:creationId xmlns:a16="http://schemas.microsoft.com/office/drawing/2014/main" id="{EF04B3B3-9734-41CA-8A81-E5C734688FE9}"/>
+      <p:pic>
+        <p:nvPicPr>
+          <p:cNvPr id="5" name="Imagem 4">
+            <a:extLst>
+              <a:ext uri="{FF2B5EF4-FFF2-40B4-BE49-F238E27FC236}">
+                <a16:creationId xmlns:a16="http://schemas.microsoft.com/office/drawing/2014/main" id="{11F7B35A-B92E-4718-A9FB-F7A2586CA6D7}"/>
+              </a:ext>
+            </a:extLst>
+          </p:cNvPr>
+          <p:cNvPicPr>
+            <a:picLocks noChangeAspect="1"/>
+          </p:cNvPicPr>
+          <p:nvPr/>
+        </p:nvPicPr>
+        <p:blipFill>
+          <a:blip r:embed="rId3">
+            <a:extLst>
+              <a:ext uri="{28A0092B-C50C-407E-A947-70E740481C1C}">
+                <a14:useLocalDpi xmlns:a14="http://schemas.microsoft.com/office/drawing/2010/main" val="0"/>
+              </a:ext>
+            </a:extLst>
+          </a:blip>
+          <a:stretch>
+            <a:fillRect/>
+          </a:stretch>
+        </p:blipFill>
+        <p:spPr>
+          <a:xfrm>
+            <a:off x="5321733" y="3429000"/>
+            <a:ext cx="6204792" cy="3003172"/>
+          </a:xfrm>
+          <a:prstGeom prst="rect">
+            <a:avLst/>
+          </a:prstGeom>
+        </p:spPr>
+      </p:pic>
+      <p:sp>
+        <p:nvSpPr>
+          <p:cNvPr id="6" name="Seta: Dobrada para Cima 5">
+            <a:extLst>
+              <a:ext uri="{FF2B5EF4-FFF2-40B4-BE49-F238E27FC236}">
+                <a16:creationId xmlns:a16="http://schemas.microsoft.com/office/drawing/2014/main" id="{3DBEB01C-FC64-44C2-ABEF-2F0F3F11A210}"/>
               </a:ext>
             </a:extLst>
           </p:cNvPr>
@@ -5964,11 +5899,67 @@
           <p:nvPr/>
         </p:nvSpPr>
         <p:spPr>
-          <a:xfrm>
-            <a:off x="237066" y="3026833"/>
-            <a:ext cx="2980266" cy="1964266"/>
-          </a:xfrm>
-          <a:prstGeom prst="ellipse">
+          <a:xfrm flipV="1">
+            <a:off x="1604254" y="2622421"/>
+            <a:ext cx="6574545" cy="1847977"/>
+          </a:xfrm>
+          <a:prstGeom prst="bentUpArrow">
+            <a:avLst/>
+          </a:prstGeom>
+          <a:noFill/>
+          <a:ln w="38100">
+            <a:solidFill>
+              <a:srgbClr val="FF0000"/>
+            </a:solidFill>
+          </a:ln>
+        </p:spPr>
+        <p:style>
+          <a:lnRef idx="2">
+            <a:schemeClr val="accent1">
+              <a:shade val="50000"/>
+            </a:schemeClr>
+          </a:lnRef>
+          <a:fillRef idx="1">
+            <a:schemeClr val="accent1"/>
+          </a:fillRef>
+          <a:effectRef idx="0">
+            <a:schemeClr val="accent1"/>
+          </a:effectRef>
+          <a:fontRef idx="minor">
+            <a:schemeClr val="lt1"/>
+          </a:fontRef>
+        </p:style>
+        <p:txBody>
+          <a:bodyPr rtlCol="0" anchor="ctr"/>
+          <a:lstStyle/>
+          <a:p>
+            <a:pPr algn="ctr"/>
+            <a:endParaRPr lang="pt-BR" sz="2000" dirty="0">
+              <a:solidFill>
+                <a:schemeClr val="tx1"/>
+              </a:solidFill>
+            </a:endParaRPr>
+          </a:p>
+        </p:txBody>
+      </p:sp>
+      <p:sp>
+        <p:nvSpPr>
+          <p:cNvPr id="9" name="Seta: para a Direita 8">
+            <a:extLst>
+              <a:ext uri="{FF2B5EF4-FFF2-40B4-BE49-F238E27FC236}">
+                <a16:creationId xmlns:a16="http://schemas.microsoft.com/office/drawing/2014/main" id="{EBB0A592-7CB0-4079-A587-E9162FE6E475}"/>
+              </a:ext>
+            </a:extLst>
+          </p:cNvPr>
+          <p:cNvSpPr/>
+          <p:nvPr/>
+        </p:nvSpPr>
+        <p:spPr>
+          <a:xfrm>
+            <a:off x="5638799" y="4356099"/>
+            <a:ext cx="651933" cy="618066"/>
+          </a:xfrm>
+          <a:prstGeom prst="rightArrow">
             <a:avLst/>
           </a:prstGeom>
           <a:solidFill>
@@ -6001,83 +5992,20 @@
           <a:lstStyle/>
           <a:p>
             <a:pPr algn="ctr"/>
-            <a:r>
-              <a:rPr lang="pt-BR" sz="2400" b="1" u="sng" dirty="0">
-                <a:solidFill>
-                  <a:schemeClr val="tx1"/>
-                </a:solidFill>
-                <a:highlight>
-                  <a:srgbClr val="FFFF00"/>
-                </a:highlight>
-              </a:rPr>
-              <a:t>Objetivo</a:t>
-            </a:r>
-            <a:r>
-              <a:rPr lang="pt-BR" sz="2400" dirty="0">
-                <a:solidFill>
-                  <a:schemeClr val="tx1"/>
-                </a:solidFill>
-                <a:highlight>
-                  <a:srgbClr val="FFFF00"/>
-                </a:highlight>
-              </a:rPr>
-              <a:t>: mesclar estas duas células verticalmente</a:t>
-            </a:r>
-          </a:p>
-        </p:txBody>
-      </p:sp>
-      <p:cxnSp>
-        <p:nvCxnSpPr>
-          <p:cNvPr id="5" name="Conector de Seta Reta 4">
-            <a:extLst>
-              <a:ext uri="{FF2B5EF4-FFF2-40B4-BE49-F238E27FC236}">
-                <a16:creationId xmlns:a16="http://schemas.microsoft.com/office/drawing/2014/main" id="{6371C75D-CC9A-4FF9-9A1C-476BB64203D9}"/>
-              </a:ext>
-            </a:extLst>
-          </p:cNvPr>
-          <p:cNvCxnSpPr>
-            <a:cxnSpLocks/>
-            <a:stCxn id="3" idx="6"/>
-            <a:endCxn id="6" idx="1"/>
-          </p:cNvCxnSpPr>
-          <p:nvPr/>
-        </p:nvCxnSpPr>
-        <p:spPr>
-          <a:xfrm flipV="1">
-            <a:off x="3217332" y="3945467"/>
-            <a:ext cx="1329268" cy="63499"/>
-          </a:xfrm>
-          <a:prstGeom prst="straightConnector1">
-            <a:avLst/>
-          </a:prstGeom>
-          <a:ln w="38100">
-            <a:solidFill>
-              <a:srgbClr val="FF0000"/>
-            </a:solidFill>
-            <a:tailEnd type="triangle"/>
-          </a:ln>
-        </p:spPr>
-        <p:style>
-          <a:lnRef idx="1">
-            <a:schemeClr val="accent1"/>
-          </a:lnRef>
-          <a:fillRef idx="0">
-            <a:schemeClr val="accent1"/>
-          </a:fillRef>
-          <a:effectRef idx="0">
-            <a:schemeClr val="accent1"/>
-          </a:effectRef>
-          <a:fontRef idx="minor">
-            <a:schemeClr val="tx1"/>
-          </a:fontRef>
-        </p:style>
-      </p:cxnSp>
-      <p:sp>
-        <p:nvSpPr>
-          <p:cNvPr id="6" name="Retângulo 5">
-            <a:extLst>
-              <a:ext uri="{FF2B5EF4-FFF2-40B4-BE49-F238E27FC236}">
-                <a16:creationId xmlns:a16="http://schemas.microsoft.com/office/drawing/2014/main" id="{5BF1340B-6253-4C3B-ADB3-6CE66B6EC203}"/>
+            <a:endParaRPr lang="pt-BR" sz="2000" dirty="0">
+              <a:solidFill>
+                <a:schemeClr val="tx1"/>
+              </a:solidFill>
+            </a:endParaRPr>
+          </a:p>
+        </p:txBody>
+      </p:sp>
+      <p:sp>
+        <p:nvSpPr>
+          <p:cNvPr id="10" name="Seta: para a Direita 9">
+            <a:extLst>
+              <a:ext uri="{FF2B5EF4-FFF2-40B4-BE49-F238E27FC236}">
+                <a16:creationId xmlns:a16="http://schemas.microsoft.com/office/drawing/2014/main" id="{2BD0362C-6B69-426D-9DB7-CD024EB7730F}"/>
               </a:ext>
             </a:extLst>
           </p:cNvPr>
@@ -6085,14 +6013,16 @@
           <p:nvPr/>
         </p:nvSpPr>
         <p:spPr>
-          <a:xfrm>
-            <a:off x="4546600" y="3606800"/>
-            <a:ext cx="1092200" cy="677333"/>
-          </a:xfrm>
-          <a:prstGeom prst="rect">
-            <a:avLst/>
-          </a:prstGeom>
-          <a:noFill/>
+          <a:xfrm flipH="1">
+            <a:off x="10942326" y="4356099"/>
+            <a:ext cx="651933" cy="618066"/>
+          </a:xfrm>
+          <a:prstGeom prst="rightArrow">
+            <a:avLst/>
+          </a:prstGeom>
+          <a:solidFill>
+            <a:srgbClr val="FFFF00"/>
+          </a:solidFill>
           <a:ln w="38100">
             <a:solidFill>
               <a:srgbClr val="FF0000"/>
@@ -6128,122 +6058,10 @@
           </a:p>
         </p:txBody>
       </p:sp>
-      <p:cxnSp>
-        <p:nvCxnSpPr>
-          <p:cNvPr id="9" name="Conector de Seta Reta 8">
-            <a:extLst>
-              <a:ext uri="{FF2B5EF4-FFF2-40B4-BE49-F238E27FC236}">
-                <a16:creationId xmlns:a16="http://schemas.microsoft.com/office/drawing/2014/main" id="{67158E25-BC62-47AB-8040-FEEAB9F55678}"/>
-              </a:ext>
-            </a:extLst>
-          </p:cNvPr>
-          <p:cNvCxnSpPr/>
-          <p:nvPr/>
-        </p:nvCxnSpPr>
-        <p:spPr>
-          <a:xfrm flipH="1">
-            <a:off x="7526866" y="3818467"/>
-            <a:ext cx="1007534" cy="190499"/>
-          </a:xfrm>
-          <a:prstGeom prst="straightConnector1">
-            <a:avLst/>
-          </a:prstGeom>
-          <a:ln w="38100">
-            <a:solidFill>
-              <a:srgbClr val="FF0000"/>
-            </a:solidFill>
-            <a:tailEnd type="triangle"/>
-          </a:ln>
-        </p:spPr>
-        <p:style>
-          <a:lnRef idx="1">
-            <a:schemeClr val="accent1"/>
-          </a:lnRef>
-          <a:fillRef idx="0">
-            <a:schemeClr val="accent1"/>
-          </a:fillRef>
-          <a:effectRef idx="0">
-            <a:schemeClr val="accent1"/>
-          </a:effectRef>
-          <a:fontRef idx="minor">
-            <a:schemeClr val="tx1"/>
-          </a:fontRef>
-        </p:style>
-      </p:cxnSp>
-      <p:sp>
-        <p:nvSpPr>
-          <p:cNvPr id="10" name="Retângulo: Cantos Arredondados 9">
-            <a:extLst>
-              <a:ext uri="{FF2B5EF4-FFF2-40B4-BE49-F238E27FC236}">
-                <a16:creationId xmlns:a16="http://schemas.microsoft.com/office/drawing/2014/main" id="{86F70D00-EACA-41A5-9994-1749BC36023C}"/>
-              </a:ext>
-            </a:extLst>
-          </p:cNvPr>
-          <p:cNvSpPr/>
-          <p:nvPr/>
-        </p:nvSpPr>
-        <p:spPr>
-          <a:xfrm>
-            <a:off x="8415867" y="3429000"/>
-            <a:ext cx="2285999" cy="1363133"/>
-          </a:xfrm>
-          <a:prstGeom prst="roundRect">
-            <a:avLst/>
-          </a:prstGeom>
-          <a:noFill/>
-          <a:ln w="38100">
-            <a:solidFill>
-              <a:srgbClr val="FF0000"/>
-            </a:solidFill>
-          </a:ln>
-        </p:spPr>
-        <p:style>
-          <a:lnRef idx="2">
-            <a:schemeClr val="accent1">
-              <a:shade val="50000"/>
-            </a:schemeClr>
-          </a:lnRef>
-          <a:fillRef idx="1">
-            <a:schemeClr val="accent1"/>
-          </a:fillRef>
-          <a:effectRef idx="0">
-            <a:schemeClr val="accent1"/>
-          </a:effectRef>
-          <a:fontRef idx="minor">
-            <a:schemeClr val="lt1"/>
-          </a:fontRef>
-        </p:style>
-        <p:txBody>
-          <a:bodyPr rtlCol="0" anchor="ctr"/>
-          <a:lstStyle/>
-          <a:p>
-            <a:pPr algn="ctr"/>
-            <a:r>
-              <a:rPr lang="pt-BR" sz="2000" dirty="0">
-                <a:solidFill>
-                  <a:schemeClr val="tx1"/>
-                </a:solidFill>
-              </a:rPr>
-              <a:t>Efeito Colateral</a:t>
-            </a:r>
-          </a:p>
-          <a:p>
-            <a:pPr algn="ctr"/>
-            <a:r>
-              <a:rPr lang="pt-BR" sz="2000" dirty="0">
-                <a:solidFill>
-                  <a:schemeClr val="tx1"/>
-                </a:solidFill>
-              </a:rPr>
-              <a:t>Na 3ª linha há uma coluna a mais sobrando</a:t>
-            </a:r>
-          </a:p>
-        </p:txBody>
-      </p:sp>
     </p:spTree>
     <p:extLst>
       <p:ext uri="{BB962C8B-B14F-4D97-AF65-F5344CB8AC3E}">
-        <p14:creationId xmlns:p14="http://schemas.microsoft.com/office/powerpoint/2010/main" val="1647532102"/>
+        <p14:creationId xmlns:p14="http://schemas.microsoft.com/office/powerpoint/2010/main" val="168310375"/>
       </p:ext>
     </p:extLst>
   </p:cSld>
@@ -6275,7 +6093,7 @@
           <p:cNvPr id="2" name="Imagem 1">
             <a:extLst>
               <a:ext uri="{FF2B5EF4-FFF2-40B4-BE49-F238E27FC236}">
-                <a16:creationId xmlns:a16="http://schemas.microsoft.com/office/drawing/2014/main" id="{ADEF95A6-73AC-4B04-99E7-1A8094B7BB18}"/>
+                <a16:creationId xmlns:a16="http://schemas.microsoft.com/office/drawing/2014/main" id="{309857C3-6CDC-42F8-A5AF-8D7D8CB5F6C1}"/>
               </a:ext>
             </a:extLst>
           </p:cNvPr>
@@ -6292,62 +6110,20 @@
         </p:blipFill>
         <p:spPr>
           <a:xfrm>
-            <a:off x="1299865" y="475838"/>
-            <a:ext cx="4258269" cy="5906324"/>
+            <a:off x="3996266" y="1004887"/>
+            <a:ext cx="6705600" cy="4848225"/>
           </a:xfrm>
           <a:prstGeom prst="rect">
             <a:avLst/>
           </a:prstGeom>
         </p:spPr>
       </p:pic>
-      <p:cxnSp>
-        <p:nvCxnSpPr>
-          <p:cNvPr id="4" name="Conector de Seta Reta 3">
-            <a:extLst>
-              <a:ext uri="{FF2B5EF4-FFF2-40B4-BE49-F238E27FC236}">
-                <a16:creationId xmlns:a16="http://schemas.microsoft.com/office/drawing/2014/main" id="{682AC1D4-CEFD-4A39-8499-166B07455FB1}"/>
-              </a:ext>
-            </a:extLst>
-          </p:cNvPr>
-          <p:cNvCxnSpPr/>
-          <p:nvPr/>
-        </p:nvCxnSpPr>
-        <p:spPr>
-          <a:xfrm flipH="1">
-            <a:off x="3344333" y="4123267"/>
-            <a:ext cx="3175000" cy="237066"/>
-          </a:xfrm>
-          <a:prstGeom prst="straightConnector1">
-            <a:avLst/>
-          </a:prstGeom>
-          <a:ln w="38100">
-            <a:solidFill>
-              <a:srgbClr val="FF0000"/>
-            </a:solidFill>
-            <a:tailEnd type="triangle"/>
-          </a:ln>
-        </p:spPr>
-        <p:style>
-          <a:lnRef idx="1">
-            <a:schemeClr val="accent1"/>
-          </a:lnRef>
-          <a:fillRef idx="0">
-            <a:schemeClr val="accent1"/>
-          </a:fillRef>
-          <a:effectRef idx="0">
-            <a:schemeClr val="accent1"/>
-          </a:effectRef>
-          <a:fontRef idx="minor">
-            <a:schemeClr val="tx1"/>
-          </a:fontRef>
-        </p:style>
-      </p:cxnSp>
-      <p:sp>
-        <p:nvSpPr>
-          <p:cNvPr id="5" name="Retângulo 4">
-            <a:extLst>
-              <a:ext uri="{FF2B5EF4-FFF2-40B4-BE49-F238E27FC236}">
-                <a16:creationId xmlns:a16="http://schemas.microsoft.com/office/drawing/2014/main" id="{F8DEBD69-E9A3-4AC6-A0D4-F6FDE10F83EF}"/>
+      <p:sp>
+        <p:nvSpPr>
+          <p:cNvPr id="3" name="Elipse 2">
+            <a:extLst>
+              <a:ext uri="{FF2B5EF4-FFF2-40B4-BE49-F238E27FC236}">
+                <a16:creationId xmlns:a16="http://schemas.microsoft.com/office/drawing/2014/main" id="{EF04B3B3-9734-41CA-8A81-E5C734688FE9}"/>
               </a:ext>
             </a:extLst>
           </p:cNvPr>
@@ -6356,64 +6132,8 @@
         </p:nvSpPr>
         <p:spPr>
           <a:xfrm>
-            <a:off x="2015067" y="4182533"/>
-            <a:ext cx="1549400" cy="347134"/>
-          </a:xfrm>
-          <a:prstGeom prst="rect">
-            <a:avLst/>
-          </a:prstGeom>
-          <a:noFill/>
-          <a:ln w="38100">
-            <a:solidFill>
-              <a:srgbClr val="FF0000"/>
-            </a:solidFill>
-          </a:ln>
-        </p:spPr>
-        <p:style>
-          <a:lnRef idx="2">
-            <a:schemeClr val="accent1">
-              <a:shade val="50000"/>
-            </a:schemeClr>
-          </a:lnRef>
-          <a:fillRef idx="1">
-            <a:schemeClr val="accent1"/>
-          </a:fillRef>
-          <a:effectRef idx="0">
-            <a:schemeClr val="accent1"/>
-          </a:effectRef>
-          <a:fontRef idx="minor">
-            <a:schemeClr val="lt1"/>
-          </a:fontRef>
-        </p:style>
-        <p:txBody>
-          <a:bodyPr rtlCol="0" anchor="ctr"/>
-          <a:lstStyle/>
-          <a:p>
-            <a:pPr algn="ctr"/>
-            <a:endParaRPr lang="pt-BR" sz="2000" dirty="0">
-              <a:solidFill>
-                <a:schemeClr val="tx1"/>
-              </a:solidFill>
-            </a:endParaRPr>
-          </a:p>
-        </p:txBody>
-      </p:sp>
-      <p:sp>
-        <p:nvSpPr>
-          <p:cNvPr id="6" name="Elipse 5">
-            <a:extLst>
-              <a:ext uri="{FF2B5EF4-FFF2-40B4-BE49-F238E27FC236}">
-                <a16:creationId xmlns:a16="http://schemas.microsoft.com/office/drawing/2014/main" id="{9E9B35C6-C890-4F54-B5AB-0C4BE51D9712}"/>
-              </a:ext>
-            </a:extLst>
-          </p:cNvPr>
-          <p:cNvSpPr/>
-          <p:nvPr/>
-        </p:nvSpPr>
-        <p:spPr>
-          <a:xfrm>
-            <a:off x="6392333" y="3606800"/>
-            <a:ext cx="1794934" cy="1371600"/>
+            <a:off x="237066" y="3026833"/>
+            <a:ext cx="2980266" cy="1964266"/>
           </a:xfrm>
           <a:prstGeom prst="ellipse">
             <a:avLst/>
@@ -6449,28 +6169,240 @@
           <a:p>
             <a:pPr algn="ctr"/>
             <a:r>
-              <a:rPr lang="pt-BR" sz="2000" dirty="0">
+              <a:rPr lang="pt-BR" sz="2400" b="1" u="sng" dirty="0">
                 <a:solidFill>
                   <a:schemeClr val="tx1"/>
                 </a:solidFill>
+                <a:highlight>
+                  <a:srgbClr val="FFFF00"/>
+                </a:highlight>
               </a:rPr>
-              <a:t>Excluir o par &lt;</a:t>
+              <a:t>Objetivo</a:t>
             </a:r>
             <a:r>
-              <a:rPr lang="pt-BR" sz="2000" dirty="0" err="1">
+              <a:rPr lang="pt-BR" sz="2400" dirty="0">
                 <a:solidFill>
                   <a:schemeClr val="tx1"/>
                 </a:solidFill>
+                <a:highlight>
+                  <a:srgbClr val="FFFF00"/>
+                </a:highlight>
               </a:rPr>
-              <a:t>td</a:t>
+              <a:t>: mesclar estas duas células verticalmente</a:t>
             </a:r>
+          </a:p>
+        </p:txBody>
+      </p:sp>
+      <p:cxnSp>
+        <p:nvCxnSpPr>
+          <p:cNvPr id="5" name="Conector de Seta Reta 4">
+            <a:extLst>
+              <a:ext uri="{FF2B5EF4-FFF2-40B4-BE49-F238E27FC236}">
+                <a16:creationId xmlns:a16="http://schemas.microsoft.com/office/drawing/2014/main" id="{6371C75D-CC9A-4FF9-9A1C-476BB64203D9}"/>
+              </a:ext>
+            </a:extLst>
+          </p:cNvPr>
+          <p:cNvCxnSpPr>
+            <a:cxnSpLocks/>
+            <a:stCxn id="3" idx="6"/>
+            <a:endCxn id="6" idx="1"/>
+          </p:cNvCxnSpPr>
+          <p:nvPr/>
+        </p:nvCxnSpPr>
+        <p:spPr>
+          <a:xfrm flipV="1">
+            <a:off x="3217332" y="3945467"/>
+            <a:ext cx="1329268" cy="63499"/>
+          </a:xfrm>
+          <a:prstGeom prst="straightConnector1">
+            <a:avLst/>
+          </a:prstGeom>
+          <a:ln w="38100">
+            <a:solidFill>
+              <a:srgbClr val="FF0000"/>
+            </a:solidFill>
+            <a:tailEnd type="triangle"/>
+          </a:ln>
+        </p:spPr>
+        <p:style>
+          <a:lnRef idx="1">
+            <a:schemeClr val="accent1"/>
+          </a:lnRef>
+          <a:fillRef idx="0">
+            <a:schemeClr val="accent1"/>
+          </a:fillRef>
+          <a:effectRef idx="0">
+            <a:schemeClr val="accent1"/>
+          </a:effectRef>
+          <a:fontRef idx="minor">
+            <a:schemeClr val="tx1"/>
+          </a:fontRef>
+        </p:style>
+      </p:cxnSp>
+      <p:sp>
+        <p:nvSpPr>
+          <p:cNvPr id="6" name="Retângulo 5">
+            <a:extLst>
+              <a:ext uri="{FF2B5EF4-FFF2-40B4-BE49-F238E27FC236}">
+                <a16:creationId xmlns:a16="http://schemas.microsoft.com/office/drawing/2014/main" id="{5BF1340B-6253-4C3B-ADB3-6CE66B6EC203}"/>
+              </a:ext>
+            </a:extLst>
+          </p:cNvPr>
+          <p:cNvSpPr/>
+          <p:nvPr/>
+        </p:nvSpPr>
+        <p:spPr>
+          <a:xfrm>
+            <a:off x="4546600" y="3606800"/>
+            <a:ext cx="1092200" cy="677333"/>
+          </a:xfrm>
+          <a:prstGeom prst="rect">
+            <a:avLst/>
+          </a:prstGeom>
+          <a:noFill/>
+          <a:ln w="38100">
+            <a:solidFill>
+              <a:srgbClr val="FF0000"/>
+            </a:solidFill>
+          </a:ln>
+        </p:spPr>
+        <p:style>
+          <a:lnRef idx="2">
+            <a:schemeClr val="accent1">
+              <a:shade val="50000"/>
+            </a:schemeClr>
+          </a:lnRef>
+          <a:fillRef idx="1">
+            <a:schemeClr val="accent1"/>
+          </a:fillRef>
+          <a:effectRef idx="0">
+            <a:schemeClr val="accent1"/>
+          </a:effectRef>
+          <a:fontRef idx="minor">
+            <a:schemeClr val="lt1"/>
+          </a:fontRef>
+        </p:style>
+        <p:txBody>
+          <a:bodyPr rtlCol="0" anchor="ctr"/>
+          <a:lstStyle/>
+          <a:p>
+            <a:pPr algn="ctr"/>
+            <a:endParaRPr lang="pt-BR" sz="2000" dirty="0">
+              <a:solidFill>
+                <a:schemeClr val="tx1"/>
+              </a:solidFill>
+            </a:endParaRPr>
+          </a:p>
+        </p:txBody>
+      </p:sp>
+      <p:cxnSp>
+        <p:nvCxnSpPr>
+          <p:cNvPr id="9" name="Conector de Seta Reta 8">
+            <a:extLst>
+              <a:ext uri="{FF2B5EF4-FFF2-40B4-BE49-F238E27FC236}">
+                <a16:creationId xmlns:a16="http://schemas.microsoft.com/office/drawing/2014/main" id="{67158E25-BC62-47AB-8040-FEEAB9F55678}"/>
+              </a:ext>
+            </a:extLst>
+          </p:cNvPr>
+          <p:cNvCxnSpPr/>
+          <p:nvPr/>
+        </p:nvCxnSpPr>
+        <p:spPr>
+          <a:xfrm flipH="1">
+            <a:off x="7526866" y="3818467"/>
+            <a:ext cx="1007534" cy="190499"/>
+          </a:xfrm>
+          <a:prstGeom prst="straightConnector1">
+            <a:avLst/>
+          </a:prstGeom>
+          <a:ln w="38100">
+            <a:solidFill>
+              <a:srgbClr val="FF0000"/>
+            </a:solidFill>
+            <a:tailEnd type="triangle"/>
+          </a:ln>
+        </p:spPr>
+        <p:style>
+          <a:lnRef idx="1">
+            <a:schemeClr val="accent1"/>
+          </a:lnRef>
+          <a:fillRef idx="0">
+            <a:schemeClr val="accent1"/>
+          </a:fillRef>
+          <a:effectRef idx="0">
+            <a:schemeClr val="accent1"/>
+          </a:effectRef>
+          <a:fontRef idx="minor">
+            <a:schemeClr val="tx1"/>
+          </a:fontRef>
+        </p:style>
+      </p:cxnSp>
+      <p:sp>
+        <p:nvSpPr>
+          <p:cNvPr id="10" name="Retângulo: Cantos Arredondados 9">
+            <a:extLst>
+              <a:ext uri="{FF2B5EF4-FFF2-40B4-BE49-F238E27FC236}">
+                <a16:creationId xmlns:a16="http://schemas.microsoft.com/office/drawing/2014/main" id="{86F70D00-EACA-41A5-9994-1749BC36023C}"/>
+              </a:ext>
+            </a:extLst>
+          </p:cNvPr>
+          <p:cNvSpPr/>
+          <p:nvPr/>
+        </p:nvSpPr>
+        <p:spPr>
+          <a:xfrm>
+            <a:off x="8415867" y="3429000"/>
+            <a:ext cx="2285999" cy="1363133"/>
+          </a:xfrm>
+          <a:prstGeom prst="roundRect">
+            <a:avLst/>
+          </a:prstGeom>
+          <a:noFill/>
+          <a:ln w="38100">
+            <a:solidFill>
+              <a:srgbClr val="FF0000"/>
+            </a:solidFill>
+          </a:ln>
+        </p:spPr>
+        <p:style>
+          <a:lnRef idx="2">
+            <a:schemeClr val="accent1">
+              <a:shade val="50000"/>
+            </a:schemeClr>
+          </a:lnRef>
+          <a:fillRef idx="1">
+            <a:schemeClr val="accent1"/>
+          </a:fillRef>
+          <a:effectRef idx="0">
+            <a:schemeClr val="accent1"/>
+          </a:effectRef>
+          <a:fontRef idx="minor">
+            <a:schemeClr val="lt1"/>
+          </a:fontRef>
+        </p:style>
+        <p:txBody>
+          <a:bodyPr rtlCol="0" anchor="ctr"/>
+          <a:lstStyle/>
+          <a:p>
+            <a:pPr algn="ctr"/>
             <a:r>
               <a:rPr lang="pt-BR" sz="2000" dirty="0">
                 <a:solidFill>
                   <a:schemeClr val="tx1"/>
                 </a:solidFill>
               </a:rPr>
-              <a:t>&gt;</a:t>
+              <a:t>Efeito Colateral</a:t>
+            </a:r>
+          </a:p>
+          <a:p>
+            <a:pPr algn="ctr"/>
+            <a:r>
+              <a:rPr lang="pt-BR" sz="2000" dirty="0">
+                <a:solidFill>
+                  <a:schemeClr val="tx1"/>
+                </a:solidFill>
+              </a:rPr>
+              <a:t>Na 3ª linha há uma coluna a mais sobrando</a:t>
             </a:r>
           </a:p>
         </p:txBody>
@@ -6478,7 +6410,7 @@
     </p:spTree>
     <p:extLst>
       <p:ext uri="{BB962C8B-B14F-4D97-AF65-F5344CB8AC3E}">
-        <p14:creationId xmlns:p14="http://schemas.microsoft.com/office/powerpoint/2010/main" val="3181705717"/>
+        <p14:creationId xmlns:p14="http://schemas.microsoft.com/office/powerpoint/2010/main" val="1647532102"/>
       </p:ext>
     </p:extLst>
   </p:cSld>
@@ -6510,7 +6442,7 @@
           <p:cNvPr id="2" name="Imagem 1">
             <a:extLst>
               <a:ext uri="{FF2B5EF4-FFF2-40B4-BE49-F238E27FC236}">
-                <a16:creationId xmlns:a16="http://schemas.microsoft.com/office/drawing/2014/main" id="{3E92C05B-5024-4F3B-8DBD-FAADE3B552E4}"/>
+                <a16:creationId xmlns:a16="http://schemas.microsoft.com/office/drawing/2014/main" id="{ADEF95A6-73AC-4B04-99E7-1A8094B7BB18}"/>
               </a:ext>
             </a:extLst>
           </p:cNvPr>
@@ -6527,8 +6459,8 @@
         </p:blipFill>
         <p:spPr>
           <a:xfrm>
-            <a:off x="532623" y="590154"/>
-            <a:ext cx="11126753" cy="5677692"/>
+            <a:off x="1299865" y="475838"/>
+            <a:ext cx="4258269" cy="5906324"/>
           </a:xfrm>
           <a:prstGeom prst="rect">
             <a:avLst/>
@@ -6540,20 +6472,17 @@
           <p:cNvPr id="4" name="Conector de Seta Reta 3">
             <a:extLst>
               <a:ext uri="{FF2B5EF4-FFF2-40B4-BE49-F238E27FC236}">
-                <a16:creationId xmlns:a16="http://schemas.microsoft.com/office/drawing/2014/main" id="{D9568A33-6AC0-4BF3-A329-BC662D6CD621}"/>
-              </a:ext>
-            </a:extLst>
-          </p:cNvPr>
-          <p:cNvCxnSpPr>
-            <a:cxnSpLocks/>
-            <a:stCxn id="5" idx="3"/>
-          </p:cNvCxnSpPr>
+                <a16:creationId xmlns:a16="http://schemas.microsoft.com/office/drawing/2014/main" id="{682AC1D4-CEFD-4A39-8499-166B07455FB1}"/>
+              </a:ext>
+            </a:extLst>
+          </p:cNvPr>
+          <p:cNvCxnSpPr/>
           <p:nvPr/>
         </p:nvCxnSpPr>
         <p:spPr>
-          <a:xfrm flipV="1">
-            <a:off x="3488267" y="4318002"/>
-            <a:ext cx="1380066" cy="355598"/>
+          <a:xfrm flipH="1">
+            <a:off x="3344333" y="4123267"/>
+            <a:ext cx="3175000" cy="237066"/>
           </a:xfrm>
           <a:prstGeom prst="straightConnector1">
             <a:avLst/>
@@ -6585,7 +6514,7 @@
           <p:cNvPr id="5" name="Retângulo 4">
             <a:extLst>
               <a:ext uri="{FF2B5EF4-FFF2-40B4-BE49-F238E27FC236}">
-                <a16:creationId xmlns:a16="http://schemas.microsoft.com/office/drawing/2014/main" id="{DFE55E52-2432-4849-BE14-72AB5240C34A}"/>
+                <a16:creationId xmlns:a16="http://schemas.microsoft.com/office/drawing/2014/main" id="{F8DEBD69-E9A3-4AC6-A0D4-F6FDE10F83EF}"/>
               </a:ext>
             </a:extLst>
           </p:cNvPr>
@@ -6594,8 +6523,8 @@
         </p:nvSpPr>
         <p:spPr>
           <a:xfrm>
-            <a:off x="1236133" y="4191000"/>
-            <a:ext cx="2252134" cy="965200"/>
+            <a:off x="2015067" y="4182533"/>
+            <a:ext cx="1549400" cy="347134"/>
           </a:xfrm>
           <a:prstGeom prst="rect">
             <a:avLst/>
@@ -6638,10 +6567,10 @@
       </p:sp>
       <p:sp>
         <p:nvSpPr>
-          <p:cNvPr id="8" name="Retângulo: Cantos Arredondados 7">
-            <a:extLst>
-              <a:ext uri="{FF2B5EF4-FFF2-40B4-BE49-F238E27FC236}">
-                <a16:creationId xmlns:a16="http://schemas.microsoft.com/office/drawing/2014/main" id="{2B5B20A2-604B-4A9C-8993-4F6F4E3557EE}"/>
+          <p:cNvPr id="6" name="Elipse 5">
+            <a:extLst>
+              <a:ext uri="{FF2B5EF4-FFF2-40B4-BE49-F238E27FC236}">
+                <a16:creationId xmlns:a16="http://schemas.microsoft.com/office/drawing/2014/main" id="{9E9B35C6-C890-4F54-B5AB-0C4BE51D9712}"/>
               </a:ext>
             </a:extLst>
           </p:cNvPr>
@@ -6650,10 +6579,10 @@
         </p:nvSpPr>
         <p:spPr>
           <a:xfrm>
-            <a:off x="2413000" y="5473698"/>
-            <a:ext cx="2116666" cy="1103181"/>
-          </a:xfrm>
-          <a:prstGeom prst="roundRect">
+            <a:off x="6392333" y="3606800"/>
+            <a:ext cx="1794934" cy="1371600"/>
+          </a:xfrm>
+          <a:prstGeom prst="ellipse">
             <a:avLst/>
           </a:prstGeom>
           <a:solidFill>
@@ -6692,7 +6621,7 @@
                   <a:schemeClr val="tx1"/>
                 </a:solidFill>
               </a:rPr>
-              <a:t>Estes 3 &lt;</a:t>
+              <a:t>Excluir o par &lt;</a:t>
             </a:r>
             <a:r>
               <a:rPr lang="pt-BR" sz="2000" dirty="0" err="1">
@@ -6708,7 +6637,7 @@
                   <a:schemeClr val="tx1"/>
                 </a:solidFill>
               </a:rPr>
-              <a:t>&gt; são referente a 3ª linha</a:t>
+              <a:t>&gt;</a:t>
             </a:r>
           </a:p>
         </p:txBody>
@@ -6716,7 +6645,7 @@
     </p:spTree>
     <p:extLst>
       <p:ext uri="{BB962C8B-B14F-4D97-AF65-F5344CB8AC3E}">
-        <p14:creationId xmlns:p14="http://schemas.microsoft.com/office/powerpoint/2010/main" val="230489129"/>
+        <p14:creationId xmlns:p14="http://schemas.microsoft.com/office/powerpoint/2010/main" val="3181705717"/>
       </p:ext>
     </p:extLst>
   </p:cSld>
@@ -6745,10 +6674,10 @@
       </p:grpSpPr>
       <p:pic>
         <p:nvPicPr>
-          <p:cNvPr id="3" name="Imagem 2">
-            <a:extLst>
-              <a:ext uri="{FF2B5EF4-FFF2-40B4-BE49-F238E27FC236}">
-                <a16:creationId xmlns:a16="http://schemas.microsoft.com/office/drawing/2014/main" id="{835F08DD-43EC-4158-A9BB-A694DF673E76}"/>
+          <p:cNvPr id="2" name="Imagem 1">
+            <a:extLst>
+              <a:ext uri="{FF2B5EF4-FFF2-40B4-BE49-F238E27FC236}">
+                <a16:creationId xmlns:a16="http://schemas.microsoft.com/office/drawing/2014/main" id="{3E92C05B-5024-4F3B-8DBD-FAADE3B552E4}"/>
               </a:ext>
             </a:extLst>
           </p:cNvPr>
@@ -6758,33 +6687,72 @@
           <p:nvPr/>
         </p:nvPicPr>
         <p:blipFill>
-          <a:blip r:embed="rId2">
-            <a:extLst>
-              <a:ext uri="{28A0092B-C50C-407E-A947-70E740481C1C}">
-                <a14:useLocalDpi xmlns:a14="http://schemas.microsoft.com/office/drawing/2010/main" val="0"/>
-              </a:ext>
-            </a:extLst>
-          </a:blip>
+          <a:blip r:embed="rId2"/>
           <a:stretch>
             <a:fillRect/>
           </a:stretch>
         </p:blipFill>
         <p:spPr>
           <a:xfrm>
-            <a:off x="151570" y="485364"/>
-            <a:ext cx="11888859" cy="5887272"/>
+            <a:off x="532623" y="590154"/>
+            <a:ext cx="11126753" cy="5677692"/>
           </a:xfrm>
           <a:prstGeom prst="rect">
             <a:avLst/>
           </a:prstGeom>
         </p:spPr>
       </p:pic>
-      <p:sp>
-        <p:nvSpPr>
-          <p:cNvPr id="4" name="Retângulo 3">
-            <a:extLst>
-              <a:ext uri="{FF2B5EF4-FFF2-40B4-BE49-F238E27FC236}">
-                <a16:creationId xmlns:a16="http://schemas.microsoft.com/office/drawing/2014/main" id="{D05749E4-10FE-47E1-BF8A-FCC34040D0A0}"/>
+      <p:cxnSp>
+        <p:nvCxnSpPr>
+          <p:cNvPr id="4" name="Conector de Seta Reta 3">
+            <a:extLst>
+              <a:ext uri="{FF2B5EF4-FFF2-40B4-BE49-F238E27FC236}">
+                <a16:creationId xmlns:a16="http://schemas.microsoft.com/office/drawing/2014/main" id="{D9568A33-6AC0-4BF3-A329-BC662D6CD621}"/>
+              </a:ext>
+            </a:extLst>
+          </p:cNvPr>
+          <p:cNvCxnSpPr>
+            <a:cxnSpLocks/>
+            <a:stCxn id="5" idx="3"/>
+          </p:cNvCxnSpPr>
+          <p:nvPr/>
+        </p:nvCxnSpPr>
+        <p:spPr>
+          <a:xfrm flipV="1">
+            <a:off x="3488267" y="4318002"/>
+            <a:ext cx="1380066" cy="355598"/>
+          </a:xfrm>
+          <a:prstGeom prst="straightConnector1">
+            <a:avLst/>
+          </a:prstGeom>
+          <a:ln w="38100">
+            <a:solidFill>
+              <a:srgbClr val="FF0000"/>
+            </a:solidFill>
+            <a:tailEnd type="triangle"/>
+          </a:ln>
+        </p:spPr>
+        <p:style>
+          <a:lnRef idx="1">
+            <a:schemeClr val="accent1"/>
+          </a:lnRef>
+          <a:fillRef idx="0">
+            <a:schemeClr val="accent1"/>
+          </a:fillRef>
+          <a:effectRef idx="0">
+            <a:schemeClr val="accent1"/>
+          </a:effectRef>
+          <a:fontRef idx="minor">
+            <a:schemeClr val="tx1"/>
+          </a:fontRef>
+        </p:style>
+      </p:cxnSp>
+      <p:sp>
+        <p:nvSpPr>
+          <p:cNvPr id="5" name="Retângulo 4">
+            <a:extLst>
+              <a:ext uri="{FF2B5EF4-FFF2-40B4-BE49-F238E27FC236}">
+                <a16:creationId xmlns:a16="http://schemas.microsoft.com/office/drawing/2014/main" id="{DFE55E52-2432-4849-BE14-72AB5240C34A}"/>
               </a:ext>
             </a:extLst>
           </p:cNvPr>
@@ -6793,8 +6761,8 @@
         </p:nvSpPr>
         <p:spPr>
           <a:xfrm>
-            <a:off x="1083733" y="2489200"/>
-            <a:ext cx="3488267" cy="609600"/>
+            <a:off x="1236133" y="4191000"/>
+            <a:ext cx="2252134" cy="965200"/>
           </a:xfrm>
           <a:prstGeom prst="rect">
             <a:avLst/>
@@ -6835,54 +6803,12 @@
           </a:p>
         </p:txBody>
       </p:sp>
-      <p:cxnSp>
-        <p:nvCxnSpPr>
-          <p:cNvPr id="6" name="Conector de Seta Reta 5">
-            <a:extLst>
-              <a:ext uri="{FF2B5EF4-FFF2-40B4-BE49-F238E27FC236}">
-                <a16:creationId xmlns:a16="http://schemas.microsoft.com/office/drawing/2014/main" id="{C2CFC6CD-E835-4896-A825-9D6102FB8E1E}"/>
-              </a:ext>
-            </a:extLst>
-          </p:cNvPr>
-          <p:cNvCxnSpPr/>
-          <p:nvPr/>
-        </p:nvCxnSpPr>
-        <p:spPr>
-          <a:xfrm>
-            <a:off x="4572000" y="2650067"/>
-            <a:ext cx="558800" cy="778933"/>
-          </a:xfrm>
-          <a:prstGeom prst="straightConnector1">
-            <a:avLst/>
-          </a:prstGeom>
-          <a:ln w="38100">
-            <a:solidFill>
-              <a:srgbClr val="FF0000"/>
-            </a:solidFill>
-            <a:tailEnd type="triangle"/>
-          </a:ln>
-        </p:spPr>
-        <p:style>
-          <a:lnRef idx="1">
-            <a:schemeClr val="accent1"/>
-          </a:lnRef>
-          <a:fillRef idx="0">
-            <a:schemeClr val="accent1"/>
-          </a:fillRef>
-          <a:effectRef idx="0">
-            <a:schemeClr val="accent1"/>
-          </a:effectRef>
-          <a:fontRef idx="minor">
-            <a:schemeClr val="tx1"/>
-          </a:fontRef>
-        </p:style>
-      </p:cxnSp>
-      <p:sp>
-        <p:nvSpPr>
-          <p:cNvPr id="7" name="Retângulo 6">
-            <a:extLst>
-              <a:ext uri="{FF2B5EF4-FFF2-40B4-BE49-F238E27FC236}">
-                <a16:creationId xmlns:a16="http://schemas.microsoft.com/office/drawing/2014/main" id="{18E12C7A-F25C-4A2F-AA23-BE66E9918E2D}"/>
+      <p:sp>
+        <p:nvSpPr>
+          <p:cNvPr id="8" name="Retângulo: Cantos Arredondados 7">
+            <a:extLst>
+              <a:ext uri="{FF2B5EF4-FFF2-40B4-BE49-F238E27FC236}">
+                <a16:creationId xmlns:a16="http://schemas.microsoft.com/office/drawing/2014/main" id="{2B5B20A2-604B-4A9C-8993-4F6F4E3557EE}"/>
               </a:ext>
             </a:extLst>
           </p:cNvPr>
@@ -6891,13 +6817,15 @@
         </p:nvSpPr>
         <p:spPr>
           <a:xfrm>
-            <a:off x="1159933" y="4343400"/>
-            <a:ext cx="2523067" cy="618067"/>
-          </a:xfrm>
-          <a:prstGeom prst="rect">
-            <a:avLst/>
-          </a:prstGeom>
-          <a:noFill/>
+            <a:off x="2413000" y="5473698"/>
+            <a:ext cx="2116666" cy="1103181"/>
+          </a:xfrm>
+          <a:prstGeom prst="roundRect">
+            <a:avLst/>
+          </a:prstGeom>
+          <a:solidFill>
+            <a:srgbClr val="FFFF00"/>
+          </a:solidFill>
           <a:ln w="38100">
             <a:solidFill>
               <a:srgbClr val="FF0000"/>
@@ -6925,60 +6853,37 @@
           <a:lstStyle/>
           <a:p>
             <a:pPr algn="ctr"/>
-            <a:endParaRPr lang="pt-BR" sz="2000" dirty="0">
-              <a:solidFill>
-                <a:schemeClr val="tx1"/>
-              </a:solidFill>
-            </a:endParaRPr>
-          </a:p>
-        </p:txBody>
-      </p:sp>
-      <p:cxnSp>
-        <p:nvCxnSpPr>
-          <p:cNvPr id="9" name="Conector de Seta Reta 8">
-            <a:extLst>
-              <a:ext uri="{FF2B5EF4-FFF2-40B4-BE49-F238E27FC236}">
-                <a16:creationId xmlns:a16="http://schemas.microsoft.com/office/drawing/2014/main" id="{1BADC14E-3186-45AA-BA9E-9C37F84507B5}"/>
-              </a:ext>
-            </a:extLst>
-          </p:cNvPr>
-          <p:cNvCxnSpPr/>
-          <p:nvPr/>
-        </p:nvCxnSpPr>
-        <p:spPr>
-          <a:xfrm flipV="1">
-            <a:off x="3826933" y="3996267"/>
-            <a:ext cx="2836334" cy="750769"/>
-          </a:xfrm>
-          <a:prstGeom prst="straightConnector1">
-            <a:avLst/>
-          </a:prstGeom>
-          <a:ln w="38100">
-            <a:solidFill>
-              <a:srgbClr val="FF0000"/>
-            </a:solidFill>
-            <a:tailEnd type="triangle"/>
-          </a:ln>
-        </p:spPr>
-        <p:style>
-          <a:lnRef idx="1">
-            <a:schemeClr val="accent1"/>
-          </a:lnRef>
-          <a:fillRef idx="0">
-            <a:schemeClr val="accent1"/>
-          </a:fillRef>
-          <a:effectRef idx="0">
-            <a:schemeClr val="accent1"/>
-          </a:effectRef>
-          <a:fontRef idx="minor">
-            <a:schemeClr val="tx1"/>
-          </a:fontRef>
-        </p:style>
-      </p:cxnSp>
+            <a:r>
+              <a:rPr lang="pt-BR" sz="2000" dirty="0">
+                <a:solidFill>
+                  <a:schemeClr val="tx1"/>
+                </a:solidFill>
+              </a:rPr>
+              <a:t>Estes 3 &lt;</a:t>
+            </a:r>
+            <a:r>
+              <a:rPr lang="pt-BR" sz="2000" dirty="0" err="1">
+                <a:solidFill>
+                  <a:schemeClr val="tx1"/>
+                </a:solidFill>
+              </a:rPr>
+              <a:t>td</a:t>
+            </a:r>
+            <a:r>
+              <a:rPr lang="pt-BR" sz="2000" dirty="0">
+                <a:solidFill>
+                  <a:schemeClr val="tx1"/>
+                </a:solidFill>
+              </a:rPr>
+              <a:t>&gt; são referente a 3ª linha</a:t>
+            </a:r>
+          </a:p>
+        </p:txBody>
+      </p:sp>
     </p:spTree>
     <p:extLst>
       <p:ext uri="{BB962C8B-B14F-4D97-AF65-F5344CB8AC3E}">
-        <p14:creationId xmlns:p14="http://schemas.microsoft.com/office/powerpoint/2010/main" val="802548380"/>
+        <p14:creationId xmlns:p14="http://schemas.microsoft.com/office/powerpoint/2010/main" val="230489129"/>
       </p:ext>
     </p:extLst>
   </p:cSld>
@@ -7010,7 +6915,7 @@
           <p:cNvPr id="3" name="Imagem 2">
             <a:extLst>
               <a:ext uri="{FF2B5EF4-FFF2-40B4-BE49-F238E27FC236}">
-                <a16:creationId xmlns:a16="http://schemas.microsoft.com/office/drawing/2014/main" id="{6C47B6A2-C6C4-4B33-8898-2EE2ADDE2484}"/>
+                <a16:creationId xmlns:a16="http://schemas.microsoft.com/office/drawing/2014/main" id="{835F08DD-43EC-4158-A9BB-A694DF673E76}"/>
               </a:ext>
             </a:extLst>
           </p:cNvPr>
@@ -7033,8 +6938,8 @@
         </p:blipFill>
         <p:spPr>
           <a:xfrm>
-            <a:off x="351623" y="618733"/>
-            <a:ext cx="11488753" cy="5620534"/>
+            <a:off x="151570" y="485364"/>
+            <a:ext cx="11888859" cy="5887272"/>
           </a:xfrm>
           <a:prstGeom prst="rect">
             <a:avLst/>
@@ -7046,7 +6951,7 @@
           <p:cNvPr id="4" name="Retângulo 3">
             <a:extLst>
               <a:ext uri="{FF2B5EF4-FFF2-40B4-BE49-F238E27FC236}">
-                <a16:creationId xmlns:a16="http://schemas.microsoft.com/office/drawing/2014/main" id="{624876AC-19CA-4A70-A35A-B0C2227AD82A}"/>
+                <a16:creationId xmlns:a16="http://schemas.microsoft.com/office/drawing/2014/main" id="{D05749E4-10FE-47E1-BF8A-FCC34040D0A0}"/>
               </a:ext>
             </a:extLst>
           </p:cNvPr>
@@ -7055,8 +6960,8 @@
         </p:nvSpPr>
         <p:spPr>
           <a:xfrm>
-            <a:off x="931333" y="3158067"/>
-            <a:ext cx="2726267" cy="965200"/>
+            <a:off x="1083733" y="2489200"/>
+            <a:ext cx="3488267" cy="609600"/>
           </a:xfrm>
           <a:prstGeom prst="rect">
             <a:avLst/>
@@ -7097,12 +7002,54 @@
           </a:p>
         </p:txBody>
       </p:sp>
-      <p:sp>
-        <p:nvSpPr>
-          <p:cNvPr id="5" name="Seta: para a Direita 4">
-            <a:extLst>
-              <a:ext uri="{FF2B5EF4-FFF2-40B4-BE49-F238E27FC236}">
-                <a16:creationId xmlns:a16="http://schemas.microsoft.com/office/drawing/2014/main" id="{DE6AEDFB-FA38-4560-8AB1-78DB2850A198}"/>
+      <p:cxnSp>
+        <p:nvCxnSpPr>
+          <p:cNvPr id="6" name="Conector de Seta Reta 5">
+            <a:extLst>
+              <a:ext uri="{FF2B5EF4-FFF2-40B4-BE49-F238E27FC236}">
+                <a16:creationId xmlns:a16="http://schemas.microsoft.com/office/drawing/2014/main" id="{C2CFC6CD-E835-4896-A825-9D6102FB8E1E}"/>
+              </a:ext>
+            </a:extLst>
+          </p:cNvPr>
+          <p:cNvCxnSpPr/>
+          <p:nvPr/>
+        </p:nvCxnSpPr>
+        <p:spPr>
+          <a:xfrm>
+            <a:off x="4572000" y="2650067"/>
+            <a:ext cx="558800" cy="778933"/>
+          </a:xfrm>
+          <a:prstGeom prst="straightConnector1">
+            <a:avLst/>
+          </a:prstGeom>
+          <a:ln w="38100">
+            <a:solidFill>
+              <a:srgbClr val="FF0000"/>
+            </a:solidFill>
+            <a:tailEnd type="triangle"/>
+          </a:ln>
+        </p:spPr>
+        <p:style>
+          <a:lnRef idx="1">
+            <a:schemeClr val="accent1"/>
+          </a:lnRef>
+          <a:fillRef idx="0">
+            <a:schemeClr val="accent1"/>
+          </a:fillRef>
+          <a:effectRef idx="0">
+            <a:schemeClr val="accent1"/>
+          </a:effectRef>
+          <a:fontRef idx="minor">
+            <a:schemeClr val="tx1"/>
+          </a:fontRef>
+        </p:style>
+      </p:cxnSp>
+      <p:sp>
+        <p:nvSpPr>
+          <p:cNvPr id="7" name="Retângulo 6">
+            <a:extLst>
+              <a:ext uri="{FF2B5EF4-FFF2-40B4-BE49-F238E27FC236}">
+                <a16:creationId xmlns:a16="http://schemas.microsoft.com/office/drawing/2014/main" id="{18E12C7A-F25C-4A2F-AA23-BE66E9918E2D}"/>
               </a:ext>
             </a:extLst>
           </p:cNvPr>
@@ -7111,15 +7058,13 @@
         </p:nvSpPr>
         <p:spPr>
           <a:xfrm>
-            <a:off x="101599" y="3293533"/>
-            <a:ext cx="728134" cy="575734"/>
-          </a:xfrm>
-          <a:prstGeom prst="rightArrow">
-            <a:avLst/>
-          </a:prstGeom>
-          <a:solidFill>
-            <a:srgbClr val="FFFF00"/>
-          </a:solidFill>
+            <a:off x="1159933" y="4343400"/>
+            <a:ext cx="2523067" cy="618067"/>
+          </a:xfrm>
+          <a:prstGeom prst="rect">
+            <a:avLst/>
+          </a:prstGeom>
+          <a:noFill/>
           <a:ln w="38100">
             <a:solidFill>
               <a:srgbClr val="FF0000"/>
@@ -7155,10 +7100,52 @@
           </a:p>
         </p:txBody>
       </p:sp>
+      <p:cxnSp>
+        <p:nvCxnSpPr>
+          <p:cNvPr id="9" name="Conector de Seta Reta 8">
+            <a:extLst>
+              <a:ext uri="{FF2B5EF4-FFF2-40B4-BE49-F238E27FC236}">
+                <a16:creationId xmlns:a16="http://schemas.microsoft.com/office/drawing/2014/main" id="{1BADC14E-3186-45AA-BA9E-9C37F84507B5}"/>
+              </a:ext>
+            </a:extLst>
+          </p:cNvPr>
+          <p:cNvCxnSpPr/>
+          <p:nvPr/>
+        </p:nvCxnSpPr>
+        <p:spPr>
+          <a:xfrm flipV="1">
+            <a:off x="3826933" y="3996267"/>
+            <a:ext cx="2836334" cy="750769"/>
+          </a:xfrm>
+          <a:prstGeom prst="straightConnector1">
+            <a:avLst/>
+          </a:prstGeom>
+          <a:ln w="38100">
+            <a:solidFill>
+              <a:srgbClr val="FF0000"/>
+            </a:solidFill>
+            <a:tailEnd type="triangle"/>
+          </a:ln>
+        </p:spPr>
+        <p:style>
+          <a:lnRef idx="1">
+            <a:schemeClr val="accent1"/>
+          </a:lnRef>
+          <a:fillRef idx="0">
+            <a:schemeClr val="accent1"/>
+          </a:fillRef>
+          <a:effectRef idx="0">
+            <a:schemeClr val="accent1"/>
+          </a:effectRef>
+          <a:fontRef idx="minor">
+            <a:schemeClr val="tx1"/>
+          </a:fontRef>
+        </p:style>
+      </p:cxnSp>
     </p:spTree>
     <p:extLst>
       <p:ext uri="{BB962C8B-B14F-4D97-AF65-F5344CB8AC3E}">
-        <p14:creationId xmlns:p14="http://schemas.microsoft.com/office/powerpoint/2010/main" val="882908080"/>
+        <p14:creationId xmlns:p14="http://schemas.microsoft.com/office/powerpoint/2010/main" val="802548380"/>
       </p:ext>
     </p:extLst>
   </p:cSld>
@@ -7187,10 +7174,10 @@
       </p:grpSpPr>
       <p:pic>
         <p:nvPicPr>
-          <p:cNvPr id="2" name="Imagem 1">
-            <a:extLst>
-              <a:ext uri="{FF2B5EF4-FFF2-40B4-BE49-F238E27FC236}">
-                <a16:creationId xmlns:a16="http://schemas.microsoft.com/office/drawing/2014/main" id="{70470D80-DFBC-40E0-83B1-371FA4C6A177}"/>
+          <p:cNvPr id="3" name="Imagem 2">
+            <a:extLst>
+              <a:ext uri="{FF2B5EF4-FFF2-40B4-BE49-F238E27FC236}">
+                <a16:creationId xmlns:a16="http://schemas.microsoft.com/office/drawing/2014/main" id="{6C47B6A2-C6C4-4B33-8898-2EE2ADDE2484}"/>
               </a:ext>
             </a:extLst>
           </p:cNvPr>
@@ -7200,15 +7187,21 @@
           <p:nvPr/>
         </p:nvPicPr>
         <p:blipFill>
-          <a:blip r:embed="rId2"/>
+          <a:blip r:embed="rId2">
+            <a:extLst>
+              <a:ext uri="{28A0092B-C50C-407E-A947-70E740481C1C}">
+                <a14:useLocalDpi xmlns:a14="http://schemas.microsoft.com/office/drawing/2010/main" val="0"/>
+              </a:ext>
+            </a:extLst>
+          </a:blip>
           <a:stretch>
             <a:fillRect/>
           </a:stretch>
         </p:blipFill>
         <p:spPr>
           <a:xfrm>
-            <a:off x="227781" y="642548"/>
-            <a:ext cx="11736438" cy="5572903"/>
+            <a:off x="351623" y="618733"/>
+            <a:ext cx="11488753" cy="5620534"/>
           </a:xfrm>
           <a:prstGeom prst="rect">
             <a:avLst/>
@@ -7217,10 +7210,10 @@
       </p:pic>
       <p:sp>
         <p:nvSpPr>
-          <p:cNvPr id="3" name="Retângulo 2">
-            <a:extLst>
-              <a:ext uri="{FF2B5EF4-FFF2-40B4-BE49-F238E27FC236}">
-                <a16:creationId xmlns:a16="http://schemas.microsoft.com/office/drawing/2014/main" id="{3621026D-7F99-45D4-B221-107ED3DF388C}"/>
+          <p:cNvPr id="4" name="Retângulo 3">
+            <a:extLst>
+              <a:ext uri="{FF2B5EF4-FFF2-40B4-BE49-F238E27FC236}">
+                <a16:creationId xmlns:a16="http://schemas.microsoft.com/office/drawing/2014/main" id="{624876AC-19CA-4A70-A35A-B0C2227AD82A}"/>
               </a:ext>
             </a:extLst>
           </p:cNvPr>
@@ -7229,8 +7222,8 @@
         </p:nvSpPr>
         <p:spPr>
           <a:xfrm>
-            <a:off x="1066800" y="4893733"/>
-            <a:ext cx="2455333" cy="939800"/>
+            <a:off x="931333" y="3158067"/>
+            <a:ext cx="2726267" cy="965200"/>
           </a:xfrm>
           <a:prstGeom prst="rect">
             <a:avLst/>
@@ -7271,95 +7264,68 @@
           </a:p>
         </p:txBody>
       </p:sp>
-      <p:cxnSp>
-        <p:nvCxnSpPr>
-          <p:cNvPr id="5" name="Conector de Seta Reta 4">
-            <a:extLst>
-              <a:ext uri="{FF2B5EF4-FFF2-40B4-BE49-F238E27FC236}">
-                <a16:creationId xmlns:a16="http://schemas.microsoft.com/office/drawing/2014/main" id="{9DB113B1-CC01-4000-A38F-4A5560974940}"/>
-              </a:ext>
-            </a:extLst>
-          </p:cNvPr>
-          <p:cNvCxnSpPr/>
+      <p:sp>
+        <p:nvSpPr>
+          <p:cNvPr id="5" name="Seta: para a Direita 4">
+            <a:extLst>
+              <a:ext uri="{FF2B5EF4-FFF2-40B4-BE49-F238E27FC236}">
+                <a16:creationId xmlns:a16="http://schemas.microsoft.com/office/drawing/2014/main" id="{DE6AEDFB-FA38-4560-8AB1-78DB2850A198}"/>
+              </a:ext>
+            </a:extLst>
+          </p:cNvPr>
+          <p:cNvSpPr/>
           <p:nvPr/>
-        </p:nvCxnSpPr>
-        <p:spPr>
-          <a:xfrm flipV="1">
-            <a:off x="3522133" y="4639733"/>
-            <a:ext cx="1464734" cy="745067"/>
-          </a:xfrm>
-          <a:prstGeom prst="straightConnector1">
-            <a:avLst/>
-          </a:prstGeom>
+        </p:nvSpPr>
+        <p:spPr>
+          <a:xfrm>
+            <a:off x="101599" y="3293533"/>
+            <a:ext cx="728134" cy="575734"/>
+          </a:xfrm>
+          <a:prstGeom prst="rightArrow">
+            <a:avLst/>
+          </a:prstGeom>
+          <a:solidFill>
+            <a:srgbClr val="FFFF00"/>
+          </a:solidFill>
           <a:ln w="38100">
             <a:solidFill>
               <a:srgbClr val="FF0000"/>
             </a:solidFill>
-            <a:tailEnd type="triangle"/>
           </a:ln>
         </p:spPr>
         <p:style>
-          <a:lnRef idx="1">
-            <a:schemeClr val="accent1"/>
+          <a:lnRef idx="2">
+            <a:schemeClr val="accent1">
+              <a:shade val="50000"/>
+            </a:schemeClr>
           </a:lnRef>
-          <a:fillRef idx="0">
+          <a:fillRef idx="1">
             <a:schemeClr val="accent1"/>
           </a:fillRef>
           <a:effectRef idx="0">
             <a:schemeClr val="accent1"/>
           </a:effectRef>
           <a:fontRef idx="minor">
-            <a:schemeClr val="tx1"/>
+            <a:schemeClr val="lt1"/>
           </a:fontRef>
         </p:style>
-      </p:cxnSp>
-      <p:cxnSp>
-        <p:nvCxnSpPr>
-          <p:cNvPr id="7" name="Conector reto 6">
-            <a:extLst>
-              <a:ext uri="{FF2B5EF4-FFF2-40B4-BE49-F238E27FC236}">
-                <a16:creationId xmlns:a16="http://schemas.microsoft.com/office/drawing/2014/main" id="{E9883753-D3CE-482C-9B66-2807060F55A1}"/>
-              </a:ext>
-            </a:extLst>
-          </p:cNvPr>
-          <p:cNvCxnSpPr/>
-          <p:nvPr/>
-        </p:nvCxnSpPr>
-        <p:spPr>
-          <a:xfrm>
-            <a:off x="4986867" y="4639733"/>
-            <a:ext cx="3505200" cy="0"/>
-          </a:xfrm>
-          <a:prstGeom prst="line">
-            <a:avLst/>
-          </a:prstGeom>
-          <a:ln w="38100">
-            <a:solidFill>
-              <a:srgbClr val="FF0000"/>
-            </a:solidFill>
-            <a:headEnd type="none" w="med" len="med"/>
-            <a:tailEnd type="none" w="med" len="med"/>
-          </a:ln>
-        </p:spPr>
-        <p:style>
-          <a:lnRef idx="1">
-            <a:schemeClr val="accent1"/>
-          </a:lnRef>
-          <a:fillRef idx="0">
-            <a:schemeClr val="accent1"/>
-          </a:fillRef>
-          <a:effectRef idx="0">
-            <a:schemeClr val="accent1"/>
-          </a:effectRef>
-          <a:fontRef idx="minor">
-            <a:schemeClr val="tx1"/>
-          </a:fontRef>
-        </p:style>
-      </p:cxnSp>
+        <p:txBody>
+          <a:bodyPr rtlCol="0" anchor="ctr"/>
+          <a:lstStyle/>
+          <a:p>
+            <a:pPr algn="ctr"/>
+            <a:endParaRPr lang="pt-BR" sz="2000" dirty="0">
+              <a:solidFill>
+                <a:schemeClr val="tx1"/>
+              </a:solidFill>
+            </a:endParaRPr>
+          </a:p>
+        </p:txBody>
+      </p:sp>
     </p:spTree>
     <p:extLst>
       <p:ext uri="{BB962C8B-B14F-4D97-AF65-F5344CB8AC3E}">
-        <p14:creationId xmlns:p14="http://schemas.microsoft.com/office/powerpoint/2010/main" val="1782096221"/>
+        <p14:creationId xmlns:p14="http://schemas.microsoft.com/office/powerpoint/2010/main" val="882908080"/>
       </p:ext>
     </p:extLst>
   </p:cSld>
@@ -7391,7 +7357,7 @@
           <p:cNvPr id="2" name="Imagem 1">
             <a:extLst>
               <a:ext uri="{FF2B5EF4-FFF2-40B4-BE49-F238E27FC236}">
-                <a16:creationId xmlns:a16="http://schemas.microsoft.com/office/drawing/2014/main" id="{7AF021E4-CE24-439C-9610-332359E1D5F9}"/>
+                <a16:creationId xmlns:a16="http://schemas.microsoft.com/office/drawing/2014/main" id="{70470D80-DFBC-40E0-83B1-371FA4C6A177}"/>
               </a:ext>
             </a:extLst>
           </p:cNvPr>
@@ -7418,10 +7384,10 @@
       </p:pic>
       <p:sp>
         <p:nvSpPr>
-          <p:cNvPr id="3" name="Seta: para a Direita 2">
-            <a:extLst>
-              <a:ext uri="{FF2B5EF4-FFF2-40B4-BE49-F238E27FC236}">
-                <a16:creationId xmlns:a16="http://schemas.microsoft.com/office/drawing/2014/main" id="{4FCD26FE-E193-49CB-9A18-D0053D910F33}"/>
+          <p:cNvPr id="3" name="Retângulo 2">
+            <a:extLst>
+              <a:ext uri="{FF2B5EF4-FFF2-40B4-BE49-F238E27FC236}">
+                <a16:creationId xmlns:a16="http://schemas.microsoft.com/office/drawing/2014/main" id="{3621026D-7F99-45D4-B221-107ED3DF388C}"/>
               </a:ext>
             </a:extLst>
           </p:cNvPr>
@@ -7430,15 +7396,13 @@
         </p:nvSpPr>
         <p:spPr>
           <a:xfrm>
-            <a:off x="93134" y="4986867"/>
-            <a:ext cx="931333" cy="668866"/>
-          </a:xfrm>
-          <a:prstGeom prst="rightArrow">
-            <a:avLst/>
-          </a:prstGeom>
-          <a:solidFill>
-            <a:srgbClr val="FFFF00"/>
-          </a:solidFill>
+            <a:off x="1066800" y="4893733"/>
+            <a:ext cx="2455333" cy="939800"/>
+          </a:xfrm>
+          <a:prstGeom prst="rect">
+            <a:avLst/>
+          </a:prstGeom>
+          <a:noFill/>
           <a:ln w="38100">
             <a:solidFill>
               <a:srgbClr val="FF0000"/>
@@ -7466,65 +7430,6 @@
           <a:lstStyle/>
           <a:p>
             <a:pPr algn="ctr"/>
-            <a:r>
-              <a:rPr lang="pt-BR" sz="1600" dirty="0">
-                <a:solidFill>
-                  <a:schemeClr val="tx1"/>
-                </a:solidFill>
-              </a:rPr>
-              <a:t>excluir</a:t>
-            </a:r>
-          </a:p>
-        </p:txBody>
-      </p:sp>
-      <p:sp>
-        <p:nvSpPr>
-          <p:cNvPr id="4" name="Retângulo 3">
-            <a:extLst>
-              <a:ext uri="{FF2B5EF4-FFF2-40B4-BE49-F238E27FC236}">
-                <a16:creationId xmlns:a16="http://schemas.microsoft.com/office/drawing/2014/main" id="{95CAB087-8502-4F01-B89D-5F055372105D}"/>
-              </a:ext>
-            </a:extLst>
-          </p:cNvPr>
-          <p:cNvSpPr/>
-          <p:nvPr/>
-        </p:nvSpPr>
-        <p:spPr>
-          <a:xfrm>
-            <a:off x="1109133" y="5164667"/>
-            <a:ext cx="1388534" cy="330200"/>
-          </a:xfrm>
-          <a:prstGeom prst="rect">
-            <a:avLst/>
-          </a:prstGeom>
-          <a:noFill/>
-          <a:ln w="38100">
-            <a:solidFill>
-              <a:srgbClr val="FF0000"/>
-            </a:solidFill>
-          </a:ln>
-        </p:spPr>
-        <p:style>
-          <a:lnRef idx="2">
-            <a:schemeClr val="accent1">
-              <a:shade val="50000"/>
-            </a:schemeClr>
-          </a:lnRef>
-          <a:fillRef idx="1">
-            <a:schemeClr val="accent1"/>
-          </a:fillRef>
-          <a:effectRef idx="0">
-            <a:schemeClr val="accent1"/>
-          </a:effectRef>
-          <a:fontRef idx="minor">
-            <a:schemeClr val="lt1"/>
-          </a:fontRef>
-        </p:style>
-        <p:txBody>
-          <a:bodyPr rtlCol="0" anchor="ctr"/>
-          <a:lstStyle/>
-          <a:p>
-            <a:pPr algn="ctr"/>
             <a:endParaRPr lang="pt-BR" sz="2000" dirty="0">
               <a:solidFill>
                 <a:schemeClr val="tx1"/>
@@ -7533,10 +7438,95 @@
           </a:p>
         </p:txBody>
       </p:sp>
+      <p:cxnSp>
+        <p:nvCxnSpPr>
+          <p:cNvPr id="5" name="Conector de Seta Reta 4">
+            <a:extLst>
+              <a:ext uri="{FF2B5EF4-FFF2-40B4-BE49-F238E27FC236}">
+                <a16:creationId xmlns:a16="http://schemas.microsoft.com/office/drawing/2014/main" id="{9DB113B1-CC01-4000-A38F-4A5560974940}"/>
+              </a:ext>
+            </a:extLst>
+          </p:cNvPr>
+          <p:cNvCxnSpPr/>
+          <p:nvPr/>
+        </p:nvCxnSpPr>
+        <p:spPr>
+          <a:xfrm flipV="1">
+            <a:off x="3522133" y="4639733"/>
+            <a:ext cx="1464734" cy="745067"/>
+          </a:xfrm>
+          <a:prstGeom prst="straightConnector1">
+            <a:avLst/>
+          </a:prstGeom>
+          <a:ln w="38100">
+            <a:solidFill>
+              <a:srgbClr val="FF0000"/>
+            </a:solidFill>
+            <a:tailEnd type="triangle"/>
+          </a:ln>
+        </p:spPr>
+        <p:style>
+          <a:lnRef idx="1">
+            <a:schemeClr val="accent1"/>
+          </a:lnRef>
+          <a:fillRef idx="0">
+            <a:schemeClr val="accent1"/>
+          </a:fillRef>
+          <a:effectRef idx="0">
+            <a:schemeClr val="accent1"/>
+          </a:effectRef>
+          <a:fontRef idx="minor">
+            <a:schemeClr val="tx1"/>
+          </a:fontRef>
+        </p:style>
+      </p:cxnSp>
+      <p:cxnSp>
+        <p:nvCxnSpPr>
+          <p:cNvPr id="7" name="Conector reto 6">
+            <a:extLst>
+              <a:ext uri="{FF2B5EF4-FFF2-40B4-BE49-F238E27FC236}">
+                <a16:creationId xmlns:a16="http://schemas.microsoft.com/office/drawing/2014/main" id="{E9883753-D3CE-482C-9B66-2807060F55A1}"/>
+              </a:ext>
+            </a:extLst>
+          </p:cNvPr>
+          <p:cNvCxnSpPr/>
+          <p:nvPr/>
+        </p:nvCxnSpPr>
+        <p:spPr>
+          <a:xfrm>
+            <a:off x="4986867" y="4639733"/>
+            <a:ext cx="3505200" cy="0"/>
+          </a:xfrm>
+          <a:prstGeom prst="line">
+            <a:avLst/>
+          </a:prstGeom>
+          <a:ln w="38100">
+            <a:solidFill>
+              <a:srgbClr val="FF0000"/>
+            </a:solidFill>
+            <a:headEnd type="none" w="med" len="med"/>
+            <a:tailEnd type="none" w="med" len="med"/>
+          </a:ln>
+        </p:spPr>
+        <p:style>
+          <a:lnRef idx="1">
+            <a:schemeClr val="accent1"/>
+          </a:lnRef>
+          <a:fillRef idx="0">
+            <a:schemeClr val="accent1"/>
+          </a:fillRef>
+          <a:effectRef idx="0">
+            <a:schemeClr val="accent1"/>
+          </a:effectRef>
+          <a:fontRef idx="minor">
+            <a:schemeClr val="tx1"/>
+          </a:fontRef>
+        </p:style>
+      </p:cxnSp>
     </p:spTree>
     <p:extLst>
       <p:ext uri="{BB962C8B-B14F-4D97-AF65-F5344CB8AC3E}">
-        <p14:creationId xmlns:p14="http://schemas.microsoft.com/office/powerpoint/2010/main" val="3881982321"/>
+        <p14:creationId xmlns:p14="http://schemas.microsoft.com/office/powerpoint/2010/main" val="1782096221"/>
       </p:ext>
     </p:extLst>
   </p:cSld>
@@ -7568,7 +7558,7 @@
           <p:cNvPr id="2" name="Imagem 1">
             <a:extLst>
               <a:ext uri="{FF2B5EF4-FFF2-40B4-BE49-F238E27FC236}">
-                <a16:creationId xmlns:a16="http://schemas.microsoft.com/office/drawing/2014/main" id="{6D8C50C5-C965-4278-AC74-D585E123ADD7}"/>
+                <a16:creationId xmlns:a16="http://schemas.microsoft.com/office/drawing/2014/main" id="{7AF021E4-CE24-439C-9610-332359E1D5F9}"/>
               </a:ext>
             </a:extLst>
           </p:cNvPr>
@@ -7585,18 +7575,135 @@
         </p:blipFill>
         <p:spPr>
           <a:xfrm>
-            <a:off x="280176" y="494890"/>
-            <a:ext cx="11631648" cy="5868219"/>
+            <a:off x="227781" y="642548"/>
+            <a:ext cx="11736438" cy="5572903"/>
           </a:xfrm>
           <a:prstGeom prst="rect">
             <a:avLst/>
           </a:prstGeom>
         </p:spPr>
       </p:pic>
+      <p:sp>
+        <p:nvSpPr>
+          <p:cNvPr id="3" name="Seta: para a Direita 2">
+            <a:extLst>
+              <a:ext uri="{FF2B5EF4-FFF2-40B4-BE49-F238E27FC236}">
+                <a16:creationId xmlns:a16="http://schemas.microsoft.com/office/drawing/2014/main" id="{4FCD26FE-E193-49CB-9A18-D0053D910F33}"/>
+              </a:ext>
+            </a:extLst>
+          </p:cNvPr>
+          <p:cNvSpPr/>
+          <p:nvPr/>
+        </p:nvSpPr>
+        <p:spPr>
+          <a:xfrm>
+            <a:off x="93134" y="4986867"/>
+            <a:ext cx="931333" cy="668866"/>
+          </a:xfrm>
+          <a:prstGeom prst="rightArrow">
+            <a:avLst/>
+          </a:prstGeom>
+          <a:solidFill>
+            <a:srgbClr val="FFFF00"/>
+          </a:solidFill>
+          <a:ln w="38100">
+            <a:solidFill>
+              <a:srgbClr val="FF0000"/>
+            </a:solidFill>
+          </a:ln>
+        </p:spPr>
+        <p:style>
+          <a:lnRef idx="2">
+            <a:schemeClr val="accent1">
+              <a:shade val="50000"/>
+            </a:schemeClr>
+          </a:lnRef>
+          <a:fillRef idx="1">
+            <a:schemeClr val="accent1"/>
+          </a:fillRef>
+          <a:effectRef idx="0">
+            <a:schemeClr val="accent1"/>
+          </a:effectRef>
+          <a:fontRef idx="minor">
+            <a:schemeClr val="lt1"/>
+          </a:fontRef>
+        </p:style>
+        <p:txBody>
+          <a:bodyPr rtlCol="0" anchor="ctr"/>
+          <a:lstStyle/>
+          <a:p>
+            <a:pPr algn="ctr"/>
+            <a:r>
+              <a:rPr lang="pt-BR" sz="1600" dirty="0">
+                <a:solidFill>
+                  <a:schemeClr val="tx1"/>
+                </a:solidFill>
+              </a:rPr>
+              <a:t>excluir</a:t>
+            </a:r>
+          </a:p>
+        </p:txBody>
+      </p:sp>
+      <p:sp>
+        <p:nvSpPr>
+          <p:cNvPr id="4" name="Retângulo 3">
+            <a:extLst>
+              <a:ext uri="{FF2B5EF4-FFF2-40B4-BE49-F238E27FC236}">
+                <a16:creationId xmlns:a16="http://schemas.microsoft.com/office/drawing/2014/main" id="{95CAB087-8502-4F01-B89D-5F055372105D}"/>
+              </a:ext>
+            </a:extLst>
+          </p:cNvPr>
+          <p:cNvSpPr/>
+          <p:nvPr/>
+        </p:nvSpPr>
+        <p:spPr>
+          <a:xfrm>
+            <a:off x="1109133" y="5164667"/>
+            <a:ext cx="1388534" cy="330200"/>
+          </a:xfrm>
+          <a:prstGeom prst="rect">
+            <a:avLst/>
+          </a:prstGeom>
+          <a:noFill/>
+          <a:ln w="38100">
+            <a:solidFill>
+              <a:srgbClr val="FF0000"/>
+            </a:solidFill>
+          </a:ln>
+        </p:spPr>
+        <p:style>
+          <a:lnRef idx="2">
+            <a:schemeClr val="accent1">
+              <a:shade val="50000"/>
+            </a:schemeClr>
+          </a:lnRef>
+          <a:fillRef idx="1">
+            <a:schemeClr val="accent1"/>
+          </a:fillRef>
+          <a:effectRef idx="0">
+            <a:schemeClr val="accent1"/>
+          </a:effectRef>
+          <a:fontRef idx="minor">
+            <a:schemeClr val="lt1"/>
+          </a:fontRef>
+        </p:style>
+        <p:txBody>
+          <a:bodyPr rtlCol="0" anchor="ctr"/>
+          <a:lstStyle/>
+          <a:p>
+            <a:pPr algn="ctr"/>
+            <a:endParaRPr lang="pt-BR" sz="2000" dirty="0">
+              <a:solidFill>
+                <a:schemeClr val="tx1"/>
+              </a:solidFill>
+            </a:endParaRPr>
+          </a:p>
+        </p:txBody>
+      </p:sp>
     </p:spTree>
     <p:extLst>
       <p:ext uri="{BB962C8B-B14F-4D97-AF65-F5344CB8AC3E}">
-        <p14:creationId xmlns:p14="http://schemas.microsoft.com/office/powerpoint/2010/main" val="2996047118"/>
+        <p14:creationId xmlns:p14="http://schemas.microsoft.com/office/powerpoint/2010/main" val="3881982321"/>
       </p:ext>
     </p:extLst>
   </p:cSld>
@@ -7628,7 +7735,7 @@
           <p:cNvPr id="2" name="Imagem 1">
             <a:extLst>
               <a:ext uri="{FF2B5EF4-FFF2-40B4-BE49-F238E27FC236}">
-                <a16:creationId xmlns:a16="http://schemas.microsoft.com/office/drawing/2014/main" id="{A22D08C1-B1C4-4CA6-84AE-480B5CD39570}"/>
+                <a16:creationId xmlns:a16="http://schemas.microsoft.com/office/drawing/2014/main" id="{6D8C50C5-C965-4278-AC74-D585E123ADD7}"/>
               </a:ext>
             </a:extLst>
           </p:cNvPr>
@@ -7645,234 +7752,18 @@
         </p:blipFill>
         <p:spPr>
           <a:xfrm>
-            <a:off x="384965" y="671127"/>
-            <a:ext cx="11422069" cy="5515745"/>
+            <a:off x="280176" y="494890"/>
+            <a:ext cx="11631648" cy="5868219"/>
           </a:xfrm>
           <a:prstGeom prst="rect">
             <a:avLst/>
           </a:prstGeom>
         </p:spPr>
       </p:pic>
-      <p:sp>
-        <p:nvSpPr>
-          <p:cNvPr id="3" name="Retângulo 2">
-            <a:extLst>
-              <a:ext uri="{FF2B5EF4-FFF2-40B4-BE49-F238E27FC236}">
-                <a16:creationId xmlns:a16="http://schemas.microsoft.com/office/drawing/2014/main" id="{4637BFB5-3446-4007-9CBA-40003024AB1A}"/>
-              </a:ext>
-            </a:extLst>
-          </p:cNvPr>
-          <p:cNvSpPr/>
-          <p:nvPr/>
-        </p:nvSpPr>
-        <p:spPr>
-          <a:xfrm>
-            <a:off x="990600" y="2954867"/>
-            <a:ext cx="2150533" cy="338666"/>
-          </a:xfrm>
-          <a:prstGeom prst="rect">
-            <a:avLst/>
-          </a:prstGeom>
-          <a:noFill/>
-          <a:ln w="38100">
-            <a:solidFill>
-              <a:srgbClr val="FF0000"/>
-            </a:solidFill>
-          </a:ln>
-        </p:spPr>
-        <p:style>
-          <a:lnRef idx="2">
-            <a:schemeClr val="accent1">
-              <a:shade val="50000"/>
-            </a:schemeClr>
-          </a:lnRef>
-          <a:fillRef idx="1">
-            <a:schemeClr val="accent1"/>
-          </a:fillRef>
-          <a:effectRef idx="0">
-            <a:schemeClr val="accent1"/>
-          </a:effectRef>
-          <a:fontRef idx="minor">
-            <a:schemeClr val="lt1"/>
-          </a:fontRef>
-        </p:style>
-        <p:txBody>
-          <a:bodyPr rtlCol="0" anchor="ctr"/>
-          <a:lstStyle/>
-          <a:p>
-            <a:pPr algn="ctr"/>
-            <a:endParaRPr lang="pt-BR" sz="2000" dirty="0">
-              <a:solidFill>
-                <a:schemeClr val="tx1"/>
-              </a:solidFill>
-            </a:endParaRPr>
-          </a:p>
-        </p:txBody>
-      </p:sp>
-      <p:cxnSp>
-        <p:nvCxnSpPr>
-          <p:cNvPr id="5" name="Conector de Seta Reta 4">
-            <a:extLst>
-              <a:ext uri="{FF2B5EF4-FFF2-40B4-BE49-F238E27FC236}">
-                <a16:creationId xmlns:a16="http://schemas.microsoft.com/office/drawing/2014/main" id="{1FE43C76-D924-48E0-B2CD-9FCD0ABBCDC2}"/>
-              </a:ext>
-            </a:extLst>
-          </p:cNvPr>
-          <p:cNvCxnSpPr/>
-          <p:nvPr/>
-        </p:nvCxnSpPr>
-        <p:spPr>
-          <a:xfrm flipH="1">
-            <a:off x="3141133" y="1930400"/>
-            <a:ext cx="838200" cy="863600"/>
-          </a:xfrm>
-          <a:prstGeom prst="straightConnector1">
-            <a:avLst/>
-          </a:prstGeom>
-          <a:ln w="38100">
-            <a:solidFill>
-              <a:srgbClr val="FF0000"/>
-            </a:solidFill>
-            <a:tailEnd type="triangle"/>
-          </a:ln>
-        </p:spPr>
-        <p:style>
-          <a:lnRef idx="1">
-            <a:schemeClr val="accent1"/>
-          </a:lnRef>
-          <a:fillRef idx="0">
-            <a:schemeClr val="accent1"/>
-          </a:fillRef>
-          <a:effectRef idx="0">
-            <a:schemeClr val="accent1"/>
-          </a:effectRef>
-          <a:fontRef idx="minor">
-            <a:schemeClr val="tx1"/>
-          </a:fontRef>
-        </p:style>
-      </p:cxnSp>
-      <p:sp>
-        <p:nvSpPr>
-          <p:cNvPr id="6" name="Elipse 5">
-            <a:extLst>
-              <a:ext uri="{FF2B5EF4-FFF2-40B4-BE49-F238E27FC236}">
-                <a16:creationId xmlns:a16="http://schemas.microsoft.com/office/drawing/2014/main" id="{B3C27D48-7AC3-4235-877A-C1C0E5FF06A0}"/>
-              </a:ext>
-            </a:extLst>
-          </p:cNvPr>
-          <p:cNvSpPr/>
-          <p:nvPr/>
-        </p:nvSpPr>
-        <p:spPr>
-          <a:xfrm>
-            <a:off x="3826933" y="1515533"/>
-            <a:ext cx="1617134" cy="1032934"/>
-          </a:xfrm>
-          <a:prstGeom prst="ellipse">
-            <a:avLst/>
-          </a:prstGeom>
-          <a:solidFill>
-            <a:srgbClr val="FFFF00"/>
-          </a:solidFill>
-          <a:ln w="38100">
-            <a:solidFill>
-              <a:srgbClr val="FF0000"/>
-            </a:solidFill>
-          </a:ln>
-        </p:spPr>
-        <p:style>
-          <a:lnRef idx="2">
-            <a:schemeClr val="accent1">
-              <a:shade val="50000"/>
-            </a:schemeClr>
-          </a:lnRef>
-          <a:fillRef idx="1">
-            <a:schemeClr val="accent1"/>
-          </a:fillRef>
-          <a:effectRef idx="0">
-            <a:schemeClr val="accent1"/>
-          </a:effectRef>
-          <a:fontRef idx="minor">
-            <a:schemeClr val="lt1"/>
-          </a:fontRef>
-        </p:style>
-        <p:txBody>
-          <a:bodyPr rtlCol="0" anchor="ctr"/>
-          <a:lstStyle/>
-          <a:p>
-            <a:pPr algn="ctr"/>
-            <a:r>
-              <a:rPr lang="pt-BR" sz="2000" dirty="0">
-                <a:solidFill>
-                  <a:schemeClr val="tx1"/>
-                </a:solidFill>
-              </a:rPr>
-              <a:t>Insira um </a:t>
-            </a:r>
-            <a:r>
-              <a:rPr lang="pt-BR" sz="2000" u="sng" dirty="0" err="1">
-                <a:solidFill>
-                  <a:schemeClr val="tx1"/>
-                </a:solidFill>
-              </a:rPr>
-              <a:t>rowspan</a:t>
-            </a:r>
-            <a:endParaRPr lang="pt-BR" sz="2000" u="sng" dirty="0">
-              <a:solidFill>
-                <a:schemeClr val="tx1"/>
-              </a:solidFill>
-            </a:endParaRPr>
-          </a:p>
-        </p:txBody>
-      </p:sp>
-      <p:cxnSp>
-        <p:nvCxnSpPr>
-          <p:cNvPr id="8" name="Conector de Seta Reta 7">
-            <a:extLst>
-              <a:ext uri="{FF2B5EF4-FFF2-40B4-BE49-F238E27FC236}">
-                <a16:creationId xmlns:a16="http://schemas.microsoft.com/office/drawing/2014/main" id="{68788E1A-8C3D-42C9-AE3E-283983159FB9}"/>
-              </a:ext>
-            </a:extLst>
-          </p:cNvPr>
-          <p:cNvCxnSpPr>
-            <a:stCxn id="6" idx="5"/>
-          </p:cNvCxnSpPr>
-          <p:nvPr/>
-        </p:nvCxnSpPr>
-        <p:spPr>
-          <a:xfrm>
-            <a:off x="5207243" y="2397197"/>
-            <a:ext cx="1371357" cy="1666804"/>
-          </a:xfrm>
-          <a:prstGeom prst="straightConnector1">
-            <a:avLst/>
-          </a:prstGeom>
-          <a:ln w="38100">
-            <a:solidFill>
-              <a:srgbClr val="FF0000"/>
-            </a:solidFill>
-            <a:tailEnd type="triangle"/>
-          </a:ln>
-        </p:spPr>
-        <p:style>
-          <a:lnRef idx="1">
-            <a:schemeClr val="accent1"/>
-          </a:lnRef>
-          <a:fillRef idx="0">
-            <a:schemeClr val="accent1"/>
-          </a:fillRef>
-          <a:effectRef idx="0">
-            <a:schemeClr val="accent1"/>
-          </a:effectRef>
-          <a:fontRef idx="minor">
-            <a:schemeClr val="tx1"/>
-          </a:fontRef>
-        </p:style>
-      </p:cxnSp>
     </p:spTree>
     <p:extLst>
       <p:ext uri="{BB962C8B-B14F-4D97-AF65-F5344CB8AC3E}">
-        <p14:creationId xmlns:p14="http://schemas.microsoft.com/office/powerpoint/2010/main" val="2642839225"/>
+        <p14:creationId xmlns:p14="http://schemas.microsoft.com/office/powerpoint/2010/main" val="2996047118"/>
       </p:ext>
     </p:extLst>
   </p:cSld>
@@ -7901,10 +7792,10 @@
       </p:grpSpPr>
       <p:pic>
         <p:nvPicPr>
-          <p:cNvPr id="3" name="Imagem 2">
-            <a:extLst>
-              <a:ext uri="{FF2B5EF4-FFF2-40B4-BE49-F238E27FC236}">
-                <a16:creationId xmlns:a16="http://schemas.microsoft.com/office/drawing/2014/main" id="{D36600BF-58E1-4D86-9787-C07218442427}"/>
+          <p:cNvPr id="2" name="Imagem 1">
+            <a:extLst>
+              <a:ext uri="{FF2B5EF4-FFF2-40B4-BE49-F238E27FC236}">
+                <a16:creationId xmlns:a16="http://schemas.microsoft.com/office/drawing/2014/main" id="{A10DE7F4-45B5-4065-A79B-E01603C278B4}"/>
               </a:ext>
             </a:extLst>
           </p:cNvPr>
@@ -7914,33 +7805,69 @@
           <p:nvPr/>
         </p:nvPicPr>
         <p:blipFill>
-          <a:blip r:embed="rId2">
-            <a:extLst>
-              <a:ext uri="{28A0092B-C50C-407E-A947-70E740481C1C}">
-                <a14:useLocalDpi xmlns:a14="http://schemas.microsoft.com/office/drawing/2010/main" val="0"/>
-              </a:ext>
-            </a:extLst>
-          </a:blip>
+          <a:blip r:embed="rId2"/>
           <a:stretch>
             <a:fillRect/>
           </a:stretch>
         </p:blipFill>
         <p:spPr>
           <a:xfrm>
-            <a:off x="3342067" y="536986"/>
-            <a:ext cx="5507867" cy="5784029"/>
+            <a:off x="3904944" y="656838"/>
+            <a:ext cx="4382112" cy="5544324"/>
           </a:xfrm>
           <a:prstGeom prst="rect">
             <a:avLst/>
           </a:prstGeom>
         </p:spPr>
       </p:pic>
-      <p:sp>
-        <p:nvSpPr>
-          <p:cNvPr id="4" name="Retângulo 3">
-            <a:extLst>
-              <a:ext uri="{FF2B5EF4-FFF2-40B4-BE49-F238E27FC236}">
-                <a16:creationId xmlns:a16="http://schemas.microsoft.com/office/drawing/2014/main" id="{354DA756-D2DB-4786-A5D3-DF6BA6E9BB7A}"/>
+      <p:cxnSp>
+        <p:nvCxnSpPr>
+          <p:cNvPr id="5" name="Conector de Seta Reta 4">
+            <a:extLst>
+              <a:ext uri="{FF2B5EF4-FFF2-40B4-BE49-F238E27FC236}">
+                <a16:creationId xmlns:a16="http://schemas.microsoft.com/office/drawing/2014/main" id="{8ECB68AF-24A0-4970-ABFD-A6A7D698DDFC}"/>
+              </a:ext>
+            </a:extLst>
+          </p:cNvPr>
+          <p:cNvCxnSpPr/>
+          <p:nvPr/>
+        </p:nvCxnSpPr>
+        <p:spPr>
+          <a:xfrm flipH="1" flipV="1">
+            <a:off x="6773333" y="1185333"/>
+            <a:ext cx="2379134" cy="1735667"/>
+          </a:xfrm>
+          <a:prstGeom prst="straightConnector1">
+            <a:avLst/>
+          </a:prstGeom>
+          <a:ln w="38100">
+            <a:solidFill>
+              <a:srgbClr val="FF0000"/>
+            </a:solidFill>
+            <a:tailEnd type="triangle"/>
+          </a:ln>
+        </p:spPr>
+        <p:style>
+          <a:lnRef idx="1">
+            <a:schemeClr val="accent1"/>
+          </a:lnRef>
+          <a:fillRef idx="0">
+            <a:schemeClr val="accent1"/>
+          </a:fillRef>
+          <a:effectRef idx="0">
+            <a:schemeClr val="accent1"/>
+          </a:effectRef>
+          <a:fontRef idx="minor">
+            <a:schemeClr val="tx1"/>
+          </a:fontRef>
+        </p:style>
+      </p:cxnSp>
+      <p:sp>
+        <p:nvSpPr>
+          <p:cNvPr id="6" name="Elipse 5">
+            <a:extLst>
+              <a:ext uri="{FF2B5EF4-FFF2-40B4-BE49-F238E27FC236}">
+                <a16:creationId xmlns:a16="http://schemas.microsoft.com/office/drawing/2014/main" id="{642FFC08-19D5-4F02-8E50-FF8030291515}"/>
               </a:ext>
             </a:extLst>
           </p:cNvPr>
@@ -7949,10 +7876,10 @@
         </p:nvSpPr>
         <p:spPr>
           <a:xfrm>
-            <a:off x="3666067" y="3928533"/>
-            <a:ext cx="3378200" cy="855134"/>
-          </a:xfrm>
-          <a:prstGeom prst="rect">
+            <a:off x="6282267" y="656838"/>
+            <a:ext cx="635000" cy="647029"/>
+          </a:xfrm>
+          <a:prstGeom prst="ellipse">
             <a:avLst/>
           </a:prstGeom>
           <a:noFill/>
@@ -7979,29 +7906,20 @@
           </a:fontRef>
         </p:style>
         <p:txBody>
-          <a:bodyPr rot="0" spcFirstLastPara="0" vertOverflow="overflow" horzOverflow="overflow" vert="horz" wrap="square" lIns="91440" tIns="45720" rIns="91440" bIns="45720" numCol="1" spcCol="0" rtlCol="0" fromWordArt="0" anchor="ctr" anchorCtr="0" forceAA="0" compatLnSpc="1">
-            <a:prstTxWarp prst="textNoShape">
-              <a:avLst/>
-            </a:prstTxWarp>
-            <a:noAutofit/>
-          </a:bodyPr>
+          <a:bodyPr rtlCol="0" anchor="ctr"/>
           <a:lstStyle/>
           <a:p>
             <a:pPr algn="ctr"/>
-            <a:endParaRPr lang="pt-BR" sz="2000" dirty="0">
-              <a:solidFill>
-                <a:schemeClr val="tx1"/>
-              </a:solidFill>
-            </a:endParaRPr>
-          </a:p>
-        </p:txBody>
-      </p:sp>
-      <p:sp>
-        <p:nvSpPr>
-          <p:cNvPr id="5" name="Seta: para a Direita 4">
-            <a:extLst>
-              <a:ext uri="{FF2B5EF4-FFF2-40B4-BE49-F238E27FC236}">
-                <a16:creationId xmlns:a16="http://schemas.microsoft.com/office/drawing/2014/main" id="{ADEB2D6C-5656-43A4-B605-E3F7F113F083}"/>
+            <a:endParaRPr lang="pt-BR"/>
+          </a:p>
+        </p:txBody>
+      </p:sp>
+      <p:sp>
+        <p:nvSpPr>
+          <p:cNvPr id="7" name="Seta: para a Direita 6">
+            <a:extLst>
+              <a:ext uri="{FF2B5EF4-FFF2-40B4-BE49-F238E27FC236}">
+                <a16:creationId xmlns:a16="http://schemas.microsoft.com/office/drawing/2014/main" id="{351305F8-EA61-4DF9-9622-9478C05D41F5}"/>
               </a:ext>
             </a:extLst>
           </p:cNvPr>
@@ -8010,8 +7928,8 @@
         </p:nvSpPr>
         <p:spPr>
           <a:xfrm>
-            <a:off x="1600200" y="3666067"/>
-            <a:ext cx="1888067" cy="1320800"/>
+            <a:off x="1388534" y="2328333"/>
+            <a:ext cx="2692400" cy="1380067"/>
           </a:xfrm>
           <a:prstGeom prst="rightArrow">
             <a:avLst/>
@@ -8042,12 +7960,7 @@
           </a:fontRef>
         </p:style>
         <p:txBody>
-          <a:bodyPr rot="0" spcFirstLastPara="0" vertOverflow="overflow" horzOverflow="overflow" vert="horz" wrap="square" lIns="91440" tIns="45720" rIns="91440" bIns="45720" numCol="1" spcCol="0" rtlCol="0" fromWordArt="0" anchor="ctr" anchorCtr="0" forceAA="0" compatLnSpc="1">
-            <a:prstTxWarp prst="textNoShape">
-              <a:avLst/>
-            </a:prstTxWarp>
-            <a:noAutofit/>
-          </a:bodyPr>
+          <a:bodyPr rtlCol="0" anchor="ctr"/>
           <a:lstStyle/>
           <a:p>
             <a:pPr algn="ctr"/>
@@ -8057,7 +7970,7 @@
                   <a:schemeClr val="tx1"/>
                 </a:solidFill>
               </a:rPr>
-              <a:t>Criar novo arquivo</a:t>
+              <a:t>Estamos na pasta aula 5</a:t>
             </a:r>
           </a:p>
         </p:txBody>
@@ -8065,7 +7978,7 @@
     </p:spTree>
     <p:extLst>
       <p:ext uri="{BB962C8B-B14F-4D97-AF65-F5344CB8AC3E}">
-        <p14:creationId xmlns:p14="http://schemas.microsoft.com/office/powerpoint/2010/main" val="3223067508"/>
+        <p14:creationId xmlns:p14="http://schemas.microsoft.com/office/powerpoint/2010/main" val="888297528"/>
       </p:ext>
     </p:extLst>
   </p:cSld>
@@ -8092,63 +8005,256 @@
           <a:chExt cx="0" cy="0"/>
         </a:xfrm>
       </p:grpSpPr>
-      <p:sp>
-        <p:nvSpPr>
-          <p:cNvPr id="2" name="Título 1">
-            <a:extLst>
-              <a:ext uri="{FF2B5EF4-FFF2-40B4-BE49-F238E27FC236}">
-                <a16:creationId xmlns:a16="http://schemas.microsoft.com/office/drawing/2014/main" id="{F358CB55-B402-42E6-956A-96883371E5C6}"/>
-              </a:ext>
-            </a:extLst>
-          </p:cNvPr>
-          <p:cNvSpPr>
-            <a:spLocks noGrp="1"/>
-          </p:cNvSpPr>
-          <p:nvPr>
-            <p:ph type="ctrTitle"/>
-          </p:nvPr>
-        </p:nvSpPr>
-        <p:spPr/>
-        <p:txBody>
-          <a:bodyPr/>
-          <a:lstStyle/>
-          <a:p>
+      <p:pic>
+        <p:nvPicPr>
+          <p:cNvPr id="2" name="Imagem 1">
+            <a:extLst>
+              <a:ext uri="{FF2B5EF4-FFF2-40B4-BE49-F238E27FC236}">
+                <a16:creationId xmlns:a16="http://schemas.microsoft.com/office/drawing/2014/main" id="{A22D08C1-B1C4-4CA6-84AE-480B5CD39570}"/>
+              </a:ext>
+            </a:extLst>
+          </p:cNvPr>
+          <p:cNvPicPr>
+            <a:picLocks noChangeAspect="1"/>
+          </p:cNvPicPr>
+          <p:nvPr/>
+        </p:nvPicPr>
+        <p:blipFill>
+          <a:blip r:embed="rId2"/>
+          <a:stretch>
+            <a:fillRect/>
+          </a:stretch>
+        </p:blipFill>
+        <p:spPr>
+          <a:xfrm>
+            <a:off x="384965" y="671127"/>
+            <a:ext cx="11422069" cy="5515745"/>
+          </a:xfrm>
+          <a:prstGeom prst="rect">
+            <a:avLst/>
+          </a:prstGeom>
+        </p:spPr>
+      </p:pic>
+      <p:sp>
+        <p:nvSpPr>
+          <p:cNvPr id="3" name="Retângulo 2">
+            <a:extLst>
+              <a:ext uri="{FF2B5EF4-FFF2-40B4-BE49-F238E27FC236}">
+                <a16:creationId xmlns:a16="http://schemas.microsoft.com/office/drawing/2014/main" id="{4637BFB5-3446-4007-9CBA-40003024AB1A}"/>
+              </a:ext>
+            </a:extLst>
+          </p:cNvPr>
+          <p:cNvSpPr/>
+          <p:nvPr/>
+        </p:nvSpPr>
+        <p:spPr>
+          <a:xfrm>
+            <a:off x="990600" y="2954867"/>
+            <a:ext cx="2150533" cy="338666"/>
+          </a:xfrm>
+          <a:prstGeom prst="rect">
+            <a:avLst/>
+          </a:prstGeom>
+          <a:noFill/>
+          <a:ln w="38100">
+            <a:solidFill>
+              <a:srgbClr val="FF0000"/>
+            </a:solidFill>
+          </a:ln>
+        </p:spPr>
+        <p:style>
+          <a:lnRef idx="2">
+            <a:schemeClr val="accent1">
+              <a:shade val="50000"/>
+            </a:schemeClr>
+          </a:lnRef>
+          <a:fillRef idx="1">
+            <a:schemeClr val="accent1"/>
+          </a:fillRef>
+          <a:effectRef idx="0">
+            <a:schemeClr val="accent1"/>
+          </a:effectRef>
+          <a:fontRef idx="minor">
+            <a:schemeClr val="lt1"/>
+          </a:fontRef>
+        </p:style>
+        <p:txBody>
+          <a:bodyPr rtlCol="0" anchor="ctr"/>
+          <a:lstStyle/>
+          <a:p>
+            <a:pPr algn="ctr"/>
+            <a:endParaRPr lang="pt-BR" sz="2000" dirty="0">
+              <a:solidFill>
+                <a:schemeClr val="tx1"/>
+              </a:solidFill>
+            </a:endParaRPr>
+          </a:p>
+        </p:txBody>
+      </p:sp>
+      <p:cxnSp>
+        <p:nvCxnSpPr>
+          <p:cNvPr id="5" name="Conector de Seta Reta 4">
+            <a:extLst>
+              <a:ext uri="{FF2B5EF4-FFF2-40B4-BE49-F238E27FC236}">
+                <a16:creationId xmlns:a16="http://schemas.microsoft.com/office/drawing/2014/main" id="{1FE43C76-D924-48E0-B2CD-9FCD0ABBCDC2}"/>
+              </a:ext>
+            </a:extLst>
+          </p:cNvPr>
+          <p:cNvCxnSpPr/>
+          <p:nvPr/>
+        </p:nvCxnSpPr>
+        <p:spPr>
+          <a:xfrm flipH="1">
+            <a:off x="3141133" y="1930400"/>
+            <a:ext cx="838200" cy="863600"/>
+          </a:xfrm>
+          <a:prstGeom prst="straightConnector1">
+            <a:avLst/>
+          </a:prstGeom>
+          <a:ln w="38100">
+            <a:solidFill>
+              <a:srgbClr val="FF0000"/>
+            </a:solidFill>
+            <a:tailEnd type="triangle"/>
+          </a:ln>
+        </p:spPr>
+        <p:style>
+          <a:lnRef idx="1">
+            <a:schemeClr val="accent1"/>
+          </a:lnRef>
+          <a:fillRef idx="0">
+            <a:schemeClr val="accent1"/>
+          </a:fillRef>
+          <a:effectRef idx="0">
+            <a:schemeClr val="accent1"/>
+          </a:effectRef>
+          <a:fontRef idx="minor">
+            <a:schemeClr val="tx1"/>
+          </a:fontRef>
+        </p:style>
+      </p:cxnSp>
+      <p:sp>
+        <p:nvSpPr>
+          <p:cNvPr id="6" name="Elipse 5">
+            <a:extLst>
+              <a:ext uri="{FF2B5EF4-FFF2-40B4-BE49-F238E27FC236}">
+                <a16:creationId xmlns:a16="http://schemas.microsoft.com/office/drawing/2014/main" id="{B3C27D48-7AC3-4235-877A-C1C0E5FF06A0}"/>
+              </a:ext>
+            </a:extLst>
+          </p:cNvPr>
+          <p:cNvSpPr/>
+          <p:nvPr/>
+        </p:nvSpPr>
+        <p:spPr>
+          <a:xfrm>
+            <a:off x="3826933" y="1515533"/>
+            <a:ext cx="1617134" cy="1032934"/>
+          </a:xfrm>
+          <a:prstGeom prst="ellipse">
+            <a:avLst/>
+          </a:prstGeom>
+          <a:solidFill>
+            <a:srgbClr val="FFFF00"/>
+          </a:solidFill>
+          <a:ln w="38100">
+            <a:solidFill>
+              <a:srgbClr val="FF0000"/>
+            </a:solidFill>
+          </a:ln>
+        </p:spPr>
+        <p:style>
+          <a:lnRef idx="2">
+            <a:schemeClr val="accent1">
+              <a:shade val="50000"/>
+            </a:schemeClr>
+          </a:lnRef>
+          <a:fillRef idx="1">
+            <a:schemeClr val="accent1"/>
+          </a:fillRef>
+          <a:effectRef idx="0">
+            <a:schemeClr val="accent1"/>
+          </a:effectRef>
+          <a:fontRef idx="minor">
+            <a:schemeClr val="lt1"/>
+          </a:fontRef>
+        </p:style>
+        <p:txBody>
+          <a:bodyPr rtlCol="0" anchor="ctr"/>
+          <a:lstStyle/>
+          <a:p>
+            <a:pPr algn="ctr"/>
             <a:r>
-              <a:rPr lang="pt-BR" dirty="0"/>
-              <a:t>Preenchendo a 5ª aula</a:t>
+              <a:rPr lang="pt-BR" sz="2000" dirty="0">
+                <a:solidFill>
+                  <a:schemeClr val="tx1"/>
+                </a:solidFill>
+              </a:rPr>
+              <a:t>Insira um </a:t>
             </a:r>
-          </a:p>
-        </p:txBody>
-      </p:sp>
-      <p:sp>
-        <p:nvSpPr>
-          <p:cNvPr id="3" name="Subtítulo 2">
-            <a:extLst>
-              <a:ext uri="{FF2B5EF4-FFF2-40B4-BE49-F238E27FC236}">
-                <a16:creationId xmlns:a16="http://schemas.microsoft.com/office/drawing/2014/main" id="{5A0C5FB5-EBBA-4464-BED8-BAA1D0F184D4}"/>
-              </a:ext>
-            </a:extLst>
-          </p:cNvPr>
-          <p:cNvSpPr>
-            <a:spLocks noGrp="1"/>
-          </p:cNvSpPr>
-          <p:nvPr>
-            <p:ph type="subTitle" idx="1"/>
-          </p:nvPr>
-        </p:nvSpPr>
-        <p:spPr/>
-        <p:txBody>
-          <a:bodyPr/>
-          <a:lstStyle/>
-          <a:p>
-            <a:endParaRPr lang="pt-BR"/>
-          </a:p>
-        </p:txBody>
-      </p:sp>
+            <a:r>
+              <a:rPr lang="pt-BR" sz="2000" u="sng" dirty="0" err="1">
+                <a:solidFill>
+                  <a:schemeClr val="tx1"/>
+                </a:solidFill>
+              </a:rPr>
+              <a:t>rowspan</a:t>
+            </a:r>
+            <a:endParaRPr lang="pt-BR" sz="2000" u="sng" dirty="0">
+              <a:solidFill>
+                <a:schemeClr val="tx1"/>
+              </a:solidFill>
+            </a:endParaRPr>
+          </a:p>
+        </p:txBody>
+      </p:sp>
+      <p:cxnSp>
+        <p:nvCxnSpPr>
+          <p:cNvPr id="8" name="Conector de Seta Reta 7">
+            <a:extLst>
+              <a:ext uri="{FF2B5EF4-FFF2-40B4-BE49-F238E27FC236}">
+                <a16:creationId xmlns:a16="http://schemas.microsoft.com/office/drawing/2014/main" id="{68788E1A-8C3D-42C9-AE3E-283983159FB9}"/>
+              </a:ext>
+            </a:extLst>
+          </p:cNvPr>
+          <p:cNvCxnSpPr>
+            <a:stCxn id="6" idx="5"/>
+          </p:cNvCxnSpPr>
+          <p:nvPr/>
+        </p:nvCxnSpPr>
+        <p:spPr>
+          <a:xfrm>
+            <a:off x="5207243" y="2397197"/>
+            <a:ext cx="1371357" cy="1666804"/>
+          </a:xfrm>
+          <a:prstGeom prst="straightConnector1">
+            <a:avLst/>
+          </a:prstGeom>
+          <a:ln w="38100">
+            <a:solidFill>
+              <a:srgbClr val="FF0000"/>
+            </a:solidFill>
+            <a:tailEnd type="triangle"/>
+          </a:ln>
+        </p:spPr>
+        <p:style>
+          <a:lnRef idx="1">
+            <a:schemeClr val="accent1"/>
+          </a:lnRef>
+          <a:fillRef idx="0">
+            <a:schemeClr val="accent1"/>
+          </a:fillRef>
+          <a:effectRef idx="0">
+            <a:schemeClr val="accent1"/>
+          </a:effectRef>
+          <a:fontRef idx="minor">
+            <a:schemeClr val="tx1"/>
+          </a:fontRef>
+        </p:style>
+      </p:cxnSp>
     </p:spTree>
     <p:extLst>
       <p:ext uri="{BB962C8B-B14F-4D97-AF65-F5344CB8AC3E}">
-        <p14:creationId xmlns:p14="http://schemas.microsoft.com/office/powerpoint/2010/main" val="2501837663"/>
+        <p14:creationId xmlns:p14="http://schemas.microsoft.com/office/powerpoint/2010/main" val="2642839225"/>
       </p:ext>
     </p:extLst>
   </p:cSld>
@@ -8175,138 +8281,63 @@
           <a:chExt cx="0" cy="0"/>
         </a:xfrm>
       </p:grpSpPr>
-      <p:pic>
-        <p:nvPicPr>
-          <p:cNvPr id="2" name="Imagem 1">
-            <a:extLst>
-              <a:ext uri="{FF2B5EF4-FFF2-40B4-BE49-F238E27FC236}">
-                <a16:creationId xmlns:a16="http://schemas.microsoft.com/office/drawing/2014/main" id="{26CDE9EE-2AF3-41ED-86FB-B811B89EE8F1}"/>
-              </a:ext>
-            </a:extLst>
-          </p:cNvPr>
-          <p:cNvPicPr>
-            <a:picLocks noChangeAspect="1"/>
-          </p:cNvPicPr>
-          <p:nvPr/>
-        </p:nvPicPr>
-        <p:blipFill>
-          <a:blip r:embed="rId2"/>
-          <a:stretch>
-            <a:fillRect/>
-          </a:stretch>
-        </p:blipFill>
-        <p:spPr>
-          <a:xfrm>
-            <a:off x="361149" y="637785"/>
-            <a:ext cx="11469701" cy="5582429"/>
-          </a:xfrm>
-          <a:prstGeom prst="rect">
-            <a:avLst/>
-          </a:prstGeom>
-        </p:spPr>
-      </p:pic>
-      <p:sp>
-        <p:nvSpPr>
-          <p:cNvPr id="3" name="Retângulo 2">
-            <a:extLst>
-              <a:ext uri="{FF2B5EF4-FFF2-40B4-BE49-F238E27FC236}">
-                <a16:creationId xmlns:a16="http://schemas.microsoft.com/office/drawing/2014/main" id="{76E993C2-B53D-4BB1-B159-0C52E42F6213}"/>
-              </a:ext>
-            </a:extLst>
-          </p:cNvPr>
-          <p:cNvSpPr/>
-          <p:nvPr/>
-        </p:nvSpPr>
-        <p:spPr>
-          <a:xfrm>
-            <a:off x="1134533" y="4241800"/>
-            <a:ext cx="2192867" cy="931333"/>
-          </a:xfrm>
-          <a:prstGeom prst="rect">
-            <a:avLst/>
-          </a:prstGeom>
-          <a:noFill/>
-          <a:ln w="38100">
-            <a:solidFill>
-              <a:srgbClr val="FF0000"/>
-            </a:solidFill>
-          </a:ln>
-        </p:spPr>
-        <p:style>
-          <a:lnRef idx="2">
-            <a:schemeClr val="accent1">
-              <a:shade val="50000"/>
-            </a:schemeClr>
-          </a:lnRef>
-          <a:fillRef idx="1">
-            <a:schemeClr val="accent1"/>
-          </a:fillRef>
-          <a:effectRef idx="0">
-            <a:schemeClr val="accent1"/>
-          </a:effectRef>
-          <a:fontRef idx="minor">
-            <a:schemeClr val="lt1"/>
-          </a:fontRef>
-        </p:style>
-        <p:txBody>
-          <a:bodyPr rtlCol="0" anchor="ctr"/>
-          <a:lstStyle/>
-          <a:p>
-            <a:pPr algn="ctr"/>
-            <a:endParaRPr lang="pt-BR" sz="2000" dirty="0">
-              <a:solidFill>
-                <a:schemeClr val="tx1"/>
-              </a:solidFill>
-            </a:endParaRPr>
-          </a:p>
-        </p:txBody>
-      </p:sp>
-      <p:cxnSp>
-        <p:nvCxnSpPr>
-          <p:cNvPr id="5" name="Conector de Seta Reta 4">
-            <a:extLst>
-              <a:ext uri="{FF2B5EF4-FFF2-40B4-BE49-F238E27FC236}">
-                <a16:creationId xmlns:a16="http://schemas.microsoft.com/office/drawing/2014/main" id="{97AF7078-DE66-4F8F-9C7C-2AB082695931}"/>
-              </a:ext>
-            </a:extLst>
-          </p:cNvPr>
-          <p:cNvCxnSpPr/>
-          <p:nvPr/>
-        </p:nvCxnSpPr>
-        <p:spPr>
-          <a:xfrm>
-            <a:off x="3327400" y="4707467"/>
-            <a:ext cx="1693333" cy="93133"/>
-          </a:xfrm>
-          <a:prstGeom prst="straightConnector1">
-            <a:avLst/>
-          </a:prstGeom>
-          <a:ln w="38100">
-            <a:solidFill>
-              <a:srgbClr val="FF0000"/>
-            </a:solidFill>
-            <a:tailEnd type="triangle"/>
-          </a:ln>
-        </p:spPr>
-        <p:style>
-          <a:lnRef idx="1">
-            <a:schemeClr val="accent1"/>
-          </a:lnRef>
-          <a:fillRef idx="0">
-            <a:schemeClr val="accent1"/>
-          </a:fillRef>
-          <a:effectRef idx="0">
-            <a:schemeClr val="accent1"/>
-          </a:effectRef>
-          <a:fontRef idx="minor">
-            <a:schemeClr val="tx1"/>
-          </a:fontRef>
-        </p:style>
-      </p:cxnSp>
+      <p:sp>
+        <p:nvSpPr>
+          <p:cNvPr id="2" name="Título 1">
+            <a:extLst>
+              <a:ext uri="{FF2B5EF4-FFF2-40B4-BE49-F238E27FC236}">
+                <a16:creationId xmlns:a16="http://schemas.microsoft.com/office/drawing/2014/main" id="{F358CB55-B402-42E6-956A-96883371E5C6}"/>
+              </a:ext>
+            </a:extLst>
+          </p:cNvPr>
+          <p:cNvSpPr>
+            <a:spLocks noGrp="1"/>
+          </p:cNvSpPr>
+          <p:nvPr>
+            <p:ph type="ctrTitle"/>
+          </p:nvPr>
+        </p:nvSpPr>
+        <p:spPr/>
+        <p:txBody>
+          <a:bodyPr/>
+          <a:lstStyle/>
+          <a:p>
+            <a:r>
+              <a:rPr lang="pt-BR" dirty="0"/>
+              <a:t>Preenchendo a 5ª aula</a:t>
+            </a:r>
+          </a:p>
+        </p:txBody>
+      </p:sp>
+      <p:sp>
+        <p:nvSpPr>
+          <p:cNvPr id="3" name="Subtítulo 2">
+            <a:extLst>
+              <a:ext uri="{FF2B5EF4-FFF2-40B4-BE49-F238E27FC236}">
+                <a16:creationId xmlns:a16="http://schemas.microsoft.com/office/drawing/2014/main" id="{5A0C5FB5-EBBA-4464-BED8-BAA1D0F184D4}"/>
+              </a:ext>
+            </a:extLst>
+          </p:cNvPr>
+          <p:cNvSpPr>
+            <a:spLocks noGrp="1"/>
+          </p:cNvSpPr>
+          <p:nvPr>
+            <p:ph type="subTitle" idx="1"/>
+          </p:nvPr>
+        </p:nvSpPr>
+        <p:spPr/>
+        <p:txBody>
+          <a:bodyPr/>
+          <a:lstStyle/>
+          <a:p>
+            <a:endParaRPr lang="pt-BR"/>
+          </a:p>
+        </p:txBody>
+      </p:sp>
     </p:spTree>
     <p:extLst>
       <p:ext uri="{BB962C8B-B14F-4D97-AF65-F5344CB8AC3E}">
-        <p14:creationId xmlns:p14="http://schemas.microsoft.com/office/powerpoint/2010/main" val="2347614594"/>
+        <p14:creationId xmlns:p14="http://schemas.microsoft.com/office/powerpoint/2010/main" val="2501837663"/>
       </p:ext>
     </p:extLst>
   </p:cSld>
@@ -8333,63 +8364,138 @@
           <a:chExt cx="0" cy="0"/>
         </a:xfrm>
       </p:grpSpPr>
-      <p:sp>
-        <p:nvSpPr>
-          <p:cNvPr id="2" name="Título 1">
-            <a:extLst>
-              <a:ext uri="{FF2B5EF4-FFF2-40B4-BE49-F238E27FC236}">
-                <a16:creationId xmlns:a16="http://schemas.microsoft.com/office/drawing/2014/main" id="{F358CB55-B402-42E6-956A-96883371E5C6}"/>
-              </a:ext>
-            </a:extLst>
-          </p:cNvPr>
-          <p:cNvSpPr>
-            <a:spLocks noGrp="1"/>
-          </p:cNvSpPr>
-          <p:nvPr>
-            <p:ph type="ctrTitle"/>
-          </p:nvPr>
-        </p:nvSpPr>
-        <p:spPr/>
-        <p:txBody>
-          <a:bodyPr/>
-          <a:lstStyle/>
-          <a:p>
-            <a:r>
-              <a:rPr lang="pt-BR" dirty="0"/>
-              <a:t>Preenchendo a 6ª aula</a:t>
-            </a:r>
-          </a:p>
-        </p:txBody>
-      </p:sp>
-      <p:sp>
-        <p:nvSpPr>
-          <p:cNvPr id="3" name="Subtítulo 2">
-            <a:extLst>
-              <a:ext uri="{FF2B5EF4-FFF2-40B4-BE49-F238E27FC236}">
-                <a16:creationId xmlns:a16="http://schemas.microsoft.com/office/drawing/2014/main" id="{5A0C5FB5-EBBA-4464-BED8-BAA1D0F184D4}"/>
-              </a:ext>
-            </a:extLst>
-          </p:cNvPr>
-          <p:cNvSpPr>
-            <a:spLocks noGrp="1"/>
-          </p:cNvSpPr>
-          <p:nvPr>
-            <p:ph type="subTitle" idx="1"/>
-          </p:nvPr>
-        </p:nvSpPr>
-        <p:spPr/>
-        <p:txBody>
-          <a:bodyPr/>
-          <a:lstStyle/>
-          <a:p>
-            <a:endParaRPr lang="pt-BR"/>
-          </a:p>
-        </p:txBody>
-      </p:sp>
+      <p:pic>
+        <p:nvPicPr>
+          <p:cNvPr id="2" name="Imagem 1">
+            <a:extLst>
+              <a:ext uri="{FF2B5EF4-FFF2-40B4-BE49-F238E27FC236}">
+                <a16:creationId xmlns:a16="http://schemas.microsoft.com/office/drawing/2014/main" id="{26CDE9EE-2AF3-41ED-86FB-B811B89EE8F1}"/>
+              </a:ext>
+            </a:extLst>
+          </p:cNvPr>
+          <p:cNvPicPr>
+            <a:picLocks noChangeAspect="1"/>
+          </p:cNvPicPr>
+          <p:nvPr/>
+        </p:nvPicPr>
+        <p:blipFill>
+          <a:blip r:embed="rId2"/>
+          <a:stretch>
+            <a:fillRect/>
+          </a:stretch>
+        </p:blipFill>
+        <p:spPr>
+          <a:xfrm>
+            <a:off x="361149" y="637785"/>
+            <a:ext cx="11469701" cy="5582429"/>
+          </a:xfrm>
+          <a:prstGeom prst="rect">
+            <a:avLst/>
+          </a:prstGeom>
+        </p:spPr>
+      </p:pic>
+      <p:sp>
+        <p:nvSpPr>
+          <p:cNvPr id="3" name="Retângulo 2">
+            <a:extLst>
+              <a:ext uri="{FF2B5EF4-FFF2-40B4-BE49-F238E27FC236}">
+                <a16:creationId xmlns:a16="http://schemas.microsoft.com/office/drawing/2014/main" id="{76E993C2-B53D-4BB1-B159-0C52E42F6213}"/>
+              </a:ext>
+            </a:extLst>
+          </p:cNvPr>
+          <p:cNvSpPr/>
+          <p:nvPr/>
+        </p:nvSpPr>
+        <p:spPr>
+          <a:xfrm>
+            <a:off x="1134533" y="4241800"/>
+            <a:ext cx="2192867" cy="931333"/>
+          </a:xfrm>
+          <a:prstGeom prst="rect">
+            <a:avLst/>
+          </a:prstGeom>
+          <a:noFill/>
+          <a:ln w="38100">
+            <a:solidFill>
+              <a:srgbClr val="FF0000"/>
+            </a:solidFill>
+          </a:ln>
+        </p:spPr>
+        <p:style>
+          <a:lnRef idx="2">
+            <a:schemeClr val="accent1">
+              <a:shade val="50000"/>
+            </a:schemeClr>
+          </a:lnRef>
+          <a:fillRef idx="1">
+            <a:schemeClr val="accent1"/>
+          </a:fillRef>
+          <a:effectRef idx="0">
+            <a:schemeClr val="accent1"/>
+          </a:effectRef>
+          <a:fontRef idx="minor">
+            <a:schemeClr val="lt1"/>
+          </a:fontRef>
+        </p:style>
+        <p:txBody>
+          <a:bodyPr rtlCol="0" anchor="ctr"/>
+          <a:lstStyle/>
+          <a:p>
+            <a:pPr algn="ctr"/>
+            <a:endParaRPr lang="pt-BR" sz="2000" dirty="0">
+              <a:solidFill>
+                <a:schemeClr val="tx1"/>
+              </a:solidFill>
+            </a:endParaRPr>
+          </a:p>
+        </p:txBody>
+      </p:sp>
+      <p:cxnSp>
+        <p:nvCxnSpPr>
+          <p:cNvPr id="5" name="Conector de Seta Reta 4">
+            <a:extLst>
+              <a:ext uri="{FF2B5EF4-FFF2-40B4-BE49-F238E27FC236}">
+                <a16:creationId xmlns:a16="http://schemas.microsoft.com/office/drawing/2014/main" id="{97AF7078-DE66-4F8F-9C7C-2AB082695931}"/>
+              </a:ext>
+            </a:extLst>
+          </p:cNvPr>
+          <p:cNvCxnSpPr/>
+          <p:nvPr/>
+        </p:nvCxnSpPr>
+        <p:spPr>
+          <a:xfrm>
+            <a:off x="3327400" y="4707467"/>
+            <a:ext cx="1693333" cy="93133"/>
+          </a:xfrm>
+          <a:prstGeom prst="straightConnector1">
+            <a:avLst/>
+          </a:prstGeom>
+          <a:ln w="38100">
+            <a:solidFill>
+              <a:srgbClr val="FF0000"/>
+            </a:solidFill>
+            <a:tailEnd type="triangle"/>
+          </a:ln>
+        </p:spPr>
+        <p:style>
+          <a:lnRef idx="1">
+            <a:schemeClr val="accent1"/>
+          </a:lnRef>
+          <a:fillRef idx="0">
+            <a:schemeClr val="accent1"/>
+          </a:fillRef>
+          <a:effectRef idx="0">
+            <a:schemeClr val="accent1"/>
+          </a:effectRef>
+          <a:fontRef idx="minor">
+            <a:schemeClr val="tx1"/>
+          </a:fontRef>
+        </p:style>
+      </p:cxnSp>
     </p:spTree>
     <p:extLst>
       <p:ext uri="{BB962C8B-B14F-4D97-AF65-F5344CB8AC3E}">
-        <p14:creationId xmlns:p14="http://schemas.microsoft.com/office/powerpoint/2010/main" val="3726129546"/>
+        <p14:creationId xmlns:p14="http://schemas.microsoft.com/office/powerpoint/2010/main" val="2347614594"/>
       </p:ext>
     </p:extLst>
   </p:cSld>
@@ -8416,140 +8522,63 @@
           <a:chExt cx="0" cy="0"/>
         </a:xfrm>
       </p:grpSpPr>
-      <p:pic>
-        <p:nvPicPr>
-          <p:cNvPr id="2" name="Imagem 1">
-            <a:extLst>
-              <a:ext uri="{FF2B5EF4-FFF2-40B4-BE49-F238E27FC236}">
-                <a16:creationId xmlns:a16="http://schemas.microsoft.com/office/drawing/2014/main" id="{5D9E50D0-91E8-45D6-848F-0A63BBACF499}"/>
-              </a:ext>
-            </a:extLst>
-          </p:cNvPr>
-          <p:cNvPicPr>
-            <a:picLocks noChangeAspect="1"/>
-          </p:cNvPicPr>
-          <p:nvPr/>
-        </p:nvPicPr>
-        <p:blipFill>
-          <a:blip r:embed="rId2"/>
-          <a:stretch>
-            <a:fillRect/>
-          </a:stretch>
-        </p:blipFill>
-        <p:spPr>
-          <a:xfrm>
-            <a:off x="361149" y="742575"/>
-            <a:ext cx="11469701" cy="5372850"/>
-          </a:xfrm>
-          <a:prstGeom prst="rect">
-            <a:avLst/>
-          </a:prstGeom>
-        </p:spPr>
-      </p:pic>
-      <p:sp>
-        <p:nvSpPr>
-          <p:cNvPr id="3" name="Retângulo 2">
-            <a:extLst>
-              <a:ext uri="{FF2B5EF4-FFF2-40B4-BE49-F238E27FC236}">
-                <a16:creationId xmlns:a16="http://schemas.microsoft.com/office/drawing/2014/main" id="{3F398499-7B74-40AC-A265-75E2C4319511}"/>
-              </a:ext>
-            </a:extLst>
-          </p:cNvPr>
-          <p:cNvSpPr/>
-          <p:nvPr/>
-        </p:nvSpPr>
-        <p:spPr>
-          <a:xfrm>
-            <a:off x="1092200" y="3683000"/>
-            <a:ext cx="2760133" cy="889000"/>
-          </a:xfrm>
-          <a:prstGeom prst="rect">
-            <a:avLst/>
-          </a:prstGeom>
-          <a:noFill/>
-          <a:ln w="38100">
-            <a:solidFill>
-              <a:srgbClr val="FF0000"/>
-            </a:solidFill>
-          </a:ln>
-        </p:spPr>
-        <p:style>
-          <a:lnRef idx="2">
-            <a:schemeClr val="accent1">
-              <a:shade val="50000"/>
-            </a:schemeClr>
-          </a:lnRef>
-          <a:fillRef idx="1">
-            <a:schemeClr val="accent1"/>
-          </a:fillRef>
-          <a:effectRef idx="0">
-            <a:schemeClr val="accent1"/>
-          </a:effectRef>
-          <a:fontRef idx="minor">
-            <a:schemeClr val="lt1"/>
-          </a:fontRef>
-        </p:style>
-        <p:txBody>
-          <a:bodyPr rtlCol="0" anchor="ctr"/>
-          <a:lstStyle/>
-          <a:p>
-            <a:pPr algn="ctr"/>
-            <a:endParaRPr lang="pt-BR" sz="2000" dirty="0">
-              <a:solidFill>
-                <a:schemeClr val="tx1"/>
-              </a:solidFill>
-            </a:endParaRPr>
-          </a:p>
-        </p:txBody>
-      </p:sp>
-      <p:cxnSp>
-        <p:nvCxnSpPr>
-          <p:cNvPr id="5" name="Conector de Seta Reta 4">
-            <a:extLst>
-              <a:ext uri="{FF2B5EF4-FFF2-40B4-BE49-F238E27FC236}">
-                <a16:creationId xmlns:a16="http://schemas.microsoft.com/office/drawing/2014/main" id="{30636D1E-82C2-4ECA-AE0B-2374AC0FC397}"/>
-              </a:ext>
-            </a:extLst>
-          </p:cNvPr>
-          <p:cNvCxnSpPr>
-            <a:stCxn id="3" idx="3"/>
-          </p:cNvCxnSpPr>
-          <p:nvPr/>
-        </p:nvCxnSpPr>
-        <p:spPr>
-          <a:xfrm>
-            <a:off x="3852333" y="4127500"/>
-            <a:ext cx="1159934" cy="690033"/>
-          </a:xfrm>
-          <a:prstGeom prst="straightConnector1">
-            <a:avLst/>
-          </a:prstGeom>
-          <a:ln w="38100">
-            <a:solidFill>
-              <a:srgbClr val="FF0000"/>
-            </a:solidFill>
-            <a:tailEnd type="triangle"/>
-          </a:ln>
-        </p:spPr>
-        <p:style>
-          <a:lnRef idx="1">
-            <a:schemeClr val="accent1"/>
-          </a:lnRef>
-          <a:fillRef idx="0">
-            <a:schemeClr val="accent1"/>
-          </a:fillRef>
-          <a:effectRef idx="0">
-            <a:schemeClr val="accent1"/>
-          </a:effectRef>
-          <a:fontRef idx="minor">
-            <a:schemeClr val="tx1"/>
-          </a:fontRef>
-        </p:style>
-      </p:cxnSp>
+      <p:sp>
+        <p:nvSpPr>
+          <p:cNvPr id="2" name="Título 1">
+            <a:extLst>
+              <a:ext uri="{FF2B5EF4-FFF2-40B4-BE49-F238E27FC236}">
+                <a16:creationId xmlns:a16="http://schemas.microsoft.com/office/drawing/2014/main" id="{F358CB55-B402-42E6-956A-96883371E5C6}"/>
+              </a:ext>
+            </a:extLst>
+          </p:cNvPr>
+          <p:cNvSpPr>
+            <a:spLocks noGrp="1"/>
+          </p:cNvSpPr>
+          <p:nvPr>
+            <p:ph type="ctrTitle"/>
+          </p:nvPr>
+        </p:nvSpPr>
+        <p:spPr/>
+        <p:txBody>
+          <a:bodyPr/>
+          <a:lstStyle/>
+          <a:p>
+            <a:r>
+              <a:rPr lang="pt-BR" dirty="0"/>
+              <a:t>Preenchendo a 6ª aula</a:t>
+            </a:r>
+          </a:p>
+        </p:txBody>
+      </p:sp>
+      <p:sp>
+        <p:nvSpPr>
+          <p:cNvPr id="3" name="Subtítulo 2">
+            <a:extLst>
+              <a:ext uri="{FF2B5EF4-FFF2-40B4-BE49-F238E27FC236}">
+                <a16:creationId xmlns:a16="http://schemas.microsoft.com/office/drawing/2014/main" id="{5A0C5FB5-EBBA-4464-BED8-BAA1D0F184D4}"/>
+              </a:ext>
+            </a:extLst>
+          </p:cNvPr>
+          <p:cNvSpPr>
+            <a:spLocks noGrp="1"/>
+          </p:cNvSpPr>
+          <p:nvPr>
+            <p:ph type="subTitle" idx="1"/>
+          </p:nvPr>
+        </p:nvSpPr>
+        <p:spPr/>
+        <p:txBody>
+          <a:bodyPr/>
+          <a:lstStyle/>
+          <a:p>
+            <a:endParaRPr lang="pt-BR"/>
+          </a:p>
+        </p:txBody>
+      </p:sp>
     </p:spTree>
     <p:extLst>
       <p:ext uri="{BB962C8B-B14F-4D97-AF65-F5344CB8AC3E}">
-        <p14:creationId xmlns:p14="http://schemas.microsoft.com/office/powerpoint/2010/main" val="4200346742"/>
+        <p14:creationId xmlns:p14="http://schemas.microsoft.com/office/powerpoint/2010/main" val="3726129546"/>
       </p:ext>
     </p:extLst>
   </p:cSld>
@@ -8576,63 +8605,140 @@
           <a:chExt cx="0" cy="0"/>
         </a:xfrm>
       </p:grpSpPr>
-      <p:sp>
-        <p:nvSpPr>
-          <p:cNvPr id="2" name="Título 1">
-            <a:extLst>
-              <a:ext uri="{FF2B5EF4-FFF2-40B4-BE49-F238E27FC236}">
-                <a16:creationId xmlns:a16="http://schemas.microsoft.com/office/drawing/2014/main" id="{5521A638-D36A-4332-A934-74D40C968EEA}"/>
-              </a:ext>
-            </a:extLst>
-          </p:cNvPr>
-          <p:cNvSpPr>
-            <a:spLocks noGrp="1"/>
-          </p:cNvSpPr>
-          <p:nvPr>
-            <p:ph type="ctrTitle"/>
-          </p:nvPr>
-        </p:nvSpPr>
-        <p:spPr/>
-        <p:txBody>
-          <a:bodyPr/>
-          <a:lstStyle/>
-          <a:p>
-            <a:r>
-              <a:rPr lang="pt-BR" dirty="0"/>
-              <a:t>Mesclando a 5ª e 6ª aula</a:t>
-            </a:r>
-          </a:p>
-        </p:txBody>
-      </p:sp>
-      <p:sp>
-        <p:nvSpPr>
-          <p:cNvPr id="3" name="Subtítulo 2">
-            <a:extLst>
-              <a:ext uri="{FF2B5EF4-FFF2-40B4-BE49-F238E27FC236}">
-                <a16:creationId xmlns:a16="http://schemas.microsoft.com/office/drawing/2014/main" id="{D0DBD50E-78B3-4846-AB48-0BE70D9BCAF2}"/>
-              </a:ext>
-            </a:extLst>
-          </p:cNvPr>
-          <p:cNvSpPr>
-            <a:spLocks noGrp="1"/>
-          </p:cNvSpPr>
-          <p:nvPr>
-            <p:ph type="subTitle" idx="1"/>
-          </p:nvPr>
-        </p:nvSpPr>
-        <p:spPr/>
-        <p:txBody>
-          <a:bodyPr/>
-          <a:lstStyle/>
-          <a:p>
-            <a:endParaRPr lang="pt-BR"/>
-          </a:p>
-        </p:txBody>
-      </p:sp>
+      <p:pic>
+        <p:nvPicPr>
+          <p:cNvPr id="2" name="Imagem 1">
+            <a:extLst>
+              <a:ext uri="{FF2B5EF4-FFF2-40B4-BE49-F238E27FC236}">
+                <a16:creationId xmlns:a16="http://schemas.microsoft.com/office/drawing/2014/main" id="{5D9E50D0-91E8-45D6-848F-0A63BBACF499}"/>
+              </a:ext>
+            </a:extLst>
+          </p:cNvPr>
+          <p:cNvPicPr>
+            <a:picLocks noChangeAspect="1"/>
+          </p:cNvPicPr>
+          <p:nvPr/>
+        </p:nvPicPr>
+        <p:blipFill>
+          <a:blip r:embed="rId2"/>
+          <a:stretch>
+            <a:fillRect/>
+          </a:stretch>
+        </p:blipFill>
+        <p:spPr>
+          <a:xfrm>
+            <a:off x="361149" y="742575"/>
+            <a:ext cx="11469701" cy="5372850"/>
+          </a:xfrm>
+          <a:prstGeom prst="rect">
+            <a:avLst/>
+          </a:prstGeom>
+        </p:spPr>
+      </p:pic>
+      <p:sp>
+        <p:nvSpPr>
+          <p:cNvPr id="3" name="Retângulo 2">
+            <a:extLst>
+              <a:ext uri="{FF2B5EF4-FFF2-40B4-BE49-F238E27FC236}">
+                <a16:creationId xmlns:a16="http://schemas.microsoft.com/office/drawing/2014/main" id="{3F398499-7B74-40AC-A265-75E2C4319511}"/>
+              </a:ext>
+            </a:extLst>
+          </p:cNvPr>
+          <p:cNvSpPr/>
+          <p:nvPr/>
+        </p:nvSpPr>
+        <p:spPr>
+          <a:xfrm>
+            <a:off x="1092200" y="3683000"/>
+            <a:ext cx="2760133" cy="889000"/>
+          </a:xfrm>
+          <a:prstGeom prst="rect">
+            <a:avLst/>
+          </a:prstGeom>
+          <a:noFill/>
+          <a:ln w="38100">
+            <a:solidFill>
+              <a:srgbClr val="FF0000"/>
+            </a:solidFill>
+          </a:ln>
+        </p:spPr>
+        <p:style>
+          <a:lnRef idx="2">
+            <a:schemeClr val="accent1">
+              <a:shade val="50000"/>
+            </a:schemeClr>
+          </a:lnRef>
+          <a:fillRef idx="1">
+            <a:schemeClr val="accent1"/>
+          </a:fillRef>
+          <a:effectRef idx="0">
+            <a:schemeClr val="accent1"/>
+          </a:effectRef>
+          <a:fontRef idx="minor">
+            <a:schemeClr val="lt1"/>
+          </a:fontRef>
+        </p:style>
+        <p:txBody>
+          <a:bodyPr rtlCol="0" anchor="ctr"/>
+          <a:lstStyle/>
+          <a:p>
+            <a:pPr algn="ctr"/>
+            <a:endParaRPr lang="pt-BR" sz="2000" dirty="0">
+              <a:solidFill>
+                <a:schemeClr val="tx1"/>
+              </a:solidFill>
+            </a:endParaRPr>
+          </a:p>
+        </p:txBody>
+      </p:sp>
+      <p:cxnSp>
+        <p:nvCxnSpPr>
+          <p:cNvPr id="5" name="Conector de Seta Reta 4">
+            <a:extLst>
+              <a:ext uri="{FF2B5EF4-FFF2-40B4-BE49-F238E27FC236}">
+                <a16:creationId xmlns:a16="http://schemas.microsoft.com/office/drawing/2014/main" id="{30636D1E-82C2-4ECA-AE0B-2374AC0FC397}"/>
+              </a:ext>
+            </a:extLst>
+          </p:cNvPr>
+          <p:cNvCxnSpPr>
+            <a:stCxn id="3" idx="3"/>
+          </p:cNvCxnSpPr>
+          <p:nvPr/>
+        </p:nvCxnSpPr>
+        <p:spPr>
+          <a:xfrm>
+            <a:off x="3852333" y="4127500"/>
+            <a:ext cx="1159934" cy="690033"/>
+          </a:xfrm>
+          <a:prstGeom prst="straightConnector1">
+            <a:avLst/>
+          </a:prstGeom>
+          <a:ln w="38100">
+            <a:solidFill>
+              <a:srgbClr val="FF0000"/>
+            </a:solidFill>
+            <a:tailEnd type="triangle"/>
+          </a:ln>
+        </p:spPr>
+        <p:style>
+          <a:lnRef idx="1">
+            <a:schemeClr val="accent1"/>
+          </a:lnRef>
+          <a:fillRef idx="0">
+            <a:schemeClr val="accent1"/>
+          </a:fillRef>
+          <a:effectRef idx="0">
+            <a:schemeClr val="accent1"/>
+          </a:effectRef>
+          <a:fontRef idx="minor">
+            <a:schemeClr val="tx1"/>
+          </a:fontRef>
+        </p:style>
+      </p:cxnSp>
     </p:spTree>
     <p:extLst>
       <p:ext uri="{BB962C8B-B14F-4D97-AF65-F5344CB8AC3E}">
-        <p14:creationId xmlns:p14="http://schemas.microsoft.com/office/powerpoint/2010/main" val="3115586943"/>
+        <p14:creationId xmlns:p14="http://schemas.microsoft.com/office/powerpoint/2010/main" val="4200346742"/>
       </p:ext>
     </p:extLst>
   </p:cSld>
@@ -8659,40 +8765,63 @@
           <a:chExt cx="0" cy="0"/>
         </a:xfrm>
       </p:grpSpPr>
-      <p:pic>
-        <p:nvPicPr>
-          <p:cNvPr id="2" name="Imagem 1">
-            <a:extLst>
-              <a:ext uri="{FF2B5EF4-FFF2-40B4-BE49-F238E27FC236}">
-                <a16:creationId xmlns:a16="http://schemas.microsoft.com/office/drawing/2014/main" id="{E77A6E80-5E58-44E6-A3FF-5A4BCF138EE9}"/>
-              </a:ext>
-            </a:extLst>
-          </p:cNvPr>
-          <p:cNvPicPr>
-            <a:picLocks noChangeAspect="1"/>
-          </p:cNvPicPr>
-          <p:nvPr/>
-        </p:nvPicPr>
-        <p:blipFill>
-          <a:blip r:embed="rId2"/>
-          <a:stretch>
-            <a:fillRect/>
-          </a:stretch>
-        </p:blipFill>
-        <p:spPr>
-          <a:xfrm>
-            <a:off x="280176" y="699706"/>
-            <a:ext cx="11631648" cy="5458587"/>
-          </a:xfrm>
-          <a:prstGeom prst="rect">
-            <a:avLst/>
-          </a:prstGeom>
-        </p:spPr>
-      </p:pic>
+      <p:sp>
+        <p:nvSpPr>
+          <p:cNvPr id="2" name="Título 1">
+            <a:extLst>
+              <a:ext uri="{FF2B5EF4-FFF2-40B4-BE49-F238E27FC236}">
+                <a16:creationId xmlns:a16="http://schemas.microsoft.com/office/drawing/2014/main" id="{5521A638-D36A-4332-A934-74D40C968EEA}"/>
+              </a:ext>
+            </a:extLst>
+          </p:cNvPr>
+          <p:cNvSpPr>
+            <a:spLocks noGrp="1"/>
+          </p:cNvSpPr>
+          <p:nvPr>
+            <p:ph type="ctrTitle"/>
+          </p:nvPr>
+        </p:nvSpPr>
+        <p:spPr/>
+        <p:txBody>
+          <a:bodyPr/>
+          <a:lstStyle/>
+          <a:p>
+            <a:r>
+              <a:rPr lang="pt-BR" dirty="0"/>
+              <a:t>Mesclando a 5ª e 6ª aula</a:t>
+            </a:r>
+          </a:p>
+        </p:txBody>
+      </p:sp>
+      <p:sp>
+        <p:nvSpPr>
+          <p:cNvPr id="3" name="Subtítulo 2">
+            <a:extLst>
+              <a:ext uri="{FF2B5EF4-FFF2-40B4-BE49-F238E27FC236}">
+                <a16:creationId xmlns:a16="http://schemas.microsoft.com/office/drawing/2014/main" id="{D0DBD50E-78B3-4846-AB48-0BE70D9BCAF2}"/>
+              </a:ext>
+            </a:extLst>
+          </p:cNvPr>
+          <p:cNvSpPr>
+            <a:spLocks noGrp="1"/>
+          </p:cNvSpPr>
+          <p:nvPr>
+            <p:ph type="subTitle" idx="1"/>
+          </p:nvPr>
+        </p:nvSpPr>
+        <p:spPr/>
+        <p:txBody>
+          <a:bodyPr/>
+          <a:lstStyle/>
+          <a:p>
+            <a:endParaRPr lang="pt-BR"/>
+          </a:p>
+        </p:txBody>
+      </p:sp>
     </p:spTree>
     <p:extLst>
       <p:ext uri="{BB962C8B-B14F-4D97-AF65-F5344CB8AC3E}">
-        <p14:creationId xmlns:p14="http://schemas.microsoft.com/office/powerpoint/2010/main" val="1419219450"/>
+        <p14:creationId xmlns:p14="http://schemas.microsoft.com/office/powerpoint/2010/main" val="3115586943"/>
       </p:ext>
     </p:extLst>
   </p:cSld>
@@ -8724,7 +8853,7 @@
           <p:cNvPr id="2" name="Imagem 1">
             <a:extLst>
               <a:ext uri="{FF2B5EF4-FFF2-40B4-BE49-F238E27FC236}">
-                <a16:creationId xmlns:a16="http://schemas.microsoft.com/office/drawing/2014/main" id="{8A95DDFA-8179-4A06-801C-BF9F6510AAB0}"/>
+                <a16:creationId xmlns:a16="http://schemas.microsoft.com/office/drawing/2014/main" id="{E77A6E80-5E58-44E6-A3FF-5A4BCF138EE9}"/>
               </a:ext>
             </a:extLst>
           </p:cNvPr>
@@ -8741,7 +8870,67 @@
         </p:blipFill>
         <p:spPr>
           <a:xfrm>
-            <a:off x="2743200" y="1004887"/>
+            <a:off x="280176" y="699706"/>
+            <a:ext cx="11631648" cy="5458587"/>
+          </a:xfrm>
+          <a:prstGeom prst="rect">
+            <a:avLst/>
+          </a:prstGeom>
+        </p:spPr>
+      </p:pic>
+    </p:spTree>
+    <p:extLst>
+      <p:ext uri="{BB962C8B-B14F-4D97-AF65-F5344CB8AC3E}">
+        <p14:creationId xmlns:p14="http://schemas.microsoft.com/office/powerpoint/2010/main" val="1419219450"/>
+      </p:ext>
+    </p:extLst>
+  </p:cSld>
+  <p:clrMapOvr>
+    <a:masterClrMapping/>
+  </p:clrMapOvr>
+</p:sld>
+</file>
+
+<file path=ppt/slides/slide37.xml><?xml version="1.0" encoding="utf-8"?>
+<p:sld xmlns:a="http://schemas.openxmlformats.org/drawingml/2006/main" xmlns:r="http://schemas.openxmlformats.org/officeDocument/2006/relationships" xmlns:p="http://schemas.openxmlformats.org/presentationml/2006/main">
+  <p:cSld>
+    <p:spTree>
+      <p:nvGrpSpPr>
+        <p:cNvPr id="1" name=""/>
+        <p:cNvGrpSpPr/>
+        <p:nvPr/>
+      </p:nvGrpSpPr>
+      <p:grpSpPr>
+        <a:xfrm>
+          <a:off x="0" y="0"/>
+          <a:ext cx="0" cy="0"/>
+          <a:chOff x="0" y="0"/>
+          <a:chExt cx="0" cy="0"/>
+        </a:xfrm>
+      </p:grpSpPr>
+      <p:pic>
+        <p:nvPicPr>
+          <p:cNvPr id="2" name="Imagem 1">
+            <a:extLst>
+              <a:ext uri="{FF2B5EF4-FFF2-40B4-BE49-F238E27FC236}">
+                <a16:creationId xmlns:a16="http://schemas.microsoft.com/office/drawing/2014/main" id="{8A95DDFA-8179-4A06-801C-BF9F6510AAB0}"/>
+              </a:ext>
+            </a:extLst>
+          </p:cNvPr>
+          <p:cNvPicPr>
+            <a:picLocks noChangeAspect="1"/>
+          </p:cNvPicPr>
+          <p:nvPr/>
+        </p:nvPicPr>
+        <p:blipFill>
+          <a:blip r:embed="rId2"/>
+          <a:stretch>
+            <a:fillRect/>
+          </a:stretch>
+        </p:blipFill>
+        <p:spPr>
+          <a:xfrm>
+            <a:off x="268942" y="165790"/>
             <a:ext cx="6705600" cy="4848225"/>
           </a:xfrm>
           <a:prstGeom prst="rect">
@@ -8762,7 +8951,7 @@
 </p:sld>
 </file>
 
-<file path=ppt/slides/slide37.xml><?xml version="1.0" encoding="utf-8"?>
+<file path=ppt/slides/slide38.xml><?xml version="1.0" encoding="utf-8"?>
 <p:sld xmlns:a="http://schemas.openxmlformats.org/drawingml/2006/main" xmlns:r="http://schemas.openxmlformats.org/officeDocument/2006/relationships" xmlns:p="http://schemas.openxmlformats.org/presentationml/2006/main">
   <p:cSld>
     <p:spTree>
@@ -9183,7 +9372,7 @@
           <p:cNvPr id="3" name="Imagem 2">
             <a:extLst>
               <a:ext uri="{FF2B5EF4-FFF2-40B4-BE49-F238E27FC236}">
-                <a16:creationId xmlns:a16="http://schemas.microsoft.com/office/drawing/2014/main" id="{D37E0481-B6B0-428D-A057-6200D34DA095}"/>
+                <a16:creationId xmlns:a16="http://schemas.microsoft.com/office/drawing/2014/main" id="{D36600BF-58E1-4D86-9787-C07218442427}"/>
               </a:ext>
             </a:extLst>
           </p:cNvPr>
@@ -9206,18 +9395,145 @@
         </p:blipFill>
         <p:spPr>
           <a:xfrm>
-            <a:off x="761255" y="747338"/>
-            <a:ext cx="10669489" cy="5363323"/>
+            <a:off x="3342067" y="536986"/>
+            <a:ext cx="5507867" cy="5784029"/>
           </a:xfrm>
           <a:prstGeom prst="rect">
             <a:avLst/>
           </a:prstGeom>
         </p:spPr>
       </p:pic>
+      <p:sp>
+        <p:nvSpPr>
+          <p:cNvPr id="4" name="Retângulo 3">
+            <a:extLst>
+              <a:ext uri="{FF2B5EF4-FFF2-40B4-BE49-F238E27FC236}">
+                <a16:creationId xmlns:a16="http://schemas.microsoft.com/office/drawing/2014/main" id="{354DA756-D2DB-4786-A5D3-DF6BA6E9BB7A}"/>
+              </a:ext>
+            </a:extLst>
+          </p:cNvPr>
+          <p:cNvSpPr/>
+          <p:nvPr/>
+        </p:nvSpPr>
+        <p:spPr>
+          <a:xfrm>
+            <a:off x="3666067" y="3928533"/>
+            <a:ext cx="3378200" cy="855134"/>
+          </a:xfrm>
+          <a:prstGeom prst="rect">
+            <a:avLst/>
+          </a:prstGeom>
+          <a:noFill/>
+          <a:ln w="38100">
+            <a:solidFill>
+              <a:srgbClr val="FF0000"/>
+            </a:solidFill>
+          </a:ln>
+        </p:spPr>
+        <p:style>
+          <a:lnRef idx="2">
+            <a:schemeClr val="accent1">
+              <a:shade val="50000"/>
+            </a:schemeClr>
+          </a:lnRef>
+          <a:fillRef idx="1">
+            <a:schemeClr val="accent1"/>
+          </a:fillRef>
+          <a:effectRef idx="0">
+            <a:schemeClr val="accent1"/>
+          </a:effectRef>
+          <a:fontRef idx="minor">
+            <a:schemeClr val="lt1"/>
+          </a:fontRef>
+        </p:style>
+        <p:txBody>
+          <a:bodyPr rot="0" spcFirstLastPara="0" vertOverflow="overflow" horzOverflow="overflow" vert="horz" wrap="square" lIns="91440" tIns="45720" rIns="91440" bIns="45720" numCol="1" spcCol="0" rtlCol="0" fromWordArt="0" anchor="ctr" anchorCtr="0" forceAA="0" compatLnSpc="1">
+            <a:prstTxWarp prst="textNoShape">
+              <a:avLst/>
+            </a:prstTxWarp>
+            <a:noAutofit/>
+          </a:bodyPr>
+          <a:lstStyle/>
+          <a:p>
+            <a:pPr algn="ctr"/>
+            <a:endParaRPr lang="pt-BR" sz="2000" dirty="0">
+              <a:solidFill>
+                <a:schemeClr val="tx1"/>
+              </a:solidFill>
+            </a:endParaRPr>
+          </a:p>
+        </p:txBody>
+      </p:sp>
+      <p:sp>
+        <p:nvSpPr>
+          <p:cNvPr id="5" name="Seta: para a Direita 4">
+            <a:extLst>
+              <a:ext uri="{FF2B5EF4-FFF2-40B4-BE49-F238E27FC236}">
+                <a16:creationId xmlns:a16="http://schemas.microsoft.com/office/drawing/2014/main" id="{ADEB2D6C-5656-43A4-B605-E3F7F113F083}"/>
+              </a:ext>
+            </a:extLst>
+          </p:cNvPr>
+          <p:cNvSpPr/>
+          <p:nvPr/>
+        </p:nvSpPr>
+        <p:spPr>
+          <a:xfrm>
+            <a:off x="1600200" y="3666067"/>
+            <a:ext cx="1888067" cy="1320800"/>
+          </a:xfrm>
+          <a:prstGeom prst="rightArrow">
+            <a:avLst/>
+          </a:prstGeom>
+          <a:solidFill>
+            <a:srgbClr val="FFFF00"/>
+          </a:solidFill>
+          <a:ln w="38100">
+            <a:solidFill>
+              <a:srgbClr val="FF0000"/>
+            </a:solidFill>
+          </a:ln>
+        </p:spPr>
+        <p:style>
+          <a:lnRef idx="2">
+            <a:schemeClr val="accent1">
+              <a:shade val="50000"/>
+            </a:schemeClr>
+          </a:lnRef>
+          <a:fillRef idx="1">
+            <a:schemeClr val="accent1"/>
+          </a:fillRef>
+          <a:effectRef idx="0">
+            <a:schemeClr val="accent1"/>
+          </a:effectRef>
+          <a:fontRef idx="minor">
+            <a:schemeClr val="lt1"/>
+          </a:fontRef>
+        </p:style>
+        <p:txBody>
+          <a:bodyPr rot="0" spcFirstLastPara="0" vertOverflow="overflow" horzOverflow="overflow" vert="horz" wrap="square" lIns="91440" tIns="45720" rIns="91440" bIns="45720" numCol="1" spcCol="0" rtlCol="0" fromWordArt="0" anchor="ctr" anchorCtr="0" forceAA="0" compatLnSpc="1">
+            <a:prstTxWarp prst="textNoShape">
+              <a:avLst/>
+            </a:prstTxWarp>
+            <a:noAutofit/>
+          </a:bodyPr>
+          <a:lstStyle/>
+          <a:p>
+            <a:pPr algn="ctr"/>
+            <a:r>
+              <a:rPr lang="pt-BR" sz="2000" dirty="0">
+                <a:solidFill>
+                  <a:schemeClr val="tx1"/>
+                </a:solidFill>
+              </a:rPr>
+              <a:t>Criar novo arquivo</a:t>
+            </a:r>
+          </a:p>
+        </p:txBody>
+      </p:sp>
     </p:spTree>
     <p:extLst>
       <p:ext uri="{BB962C8B-B14F-4D97-AF65-F5344CB8AC3E}">
-        <p14:creationId xmlns:p14="http://schemas.microsoft.com/office/powerpoint/2010/main" val="499400983"/>
+        <p14:creationId xmlns:p14="http://schemas.microsoft.com/office/powerpoint/2010/main" val="3223067508"/>
       </p:ext>
     </p:extLst>
   </p:cSld>
@@ -9244,63 +9560,46 @@
           <a:chExt cx="0" cy="0"/>
         </a:xfrm>
       </p:grpSpPr>
-      <p:sp>
-        <p:nvSpPr>
-          <p:cNvPr id="2" name="Título 1">
-            <a:extLst>
-              <a:ext uri="{FF2B5EF4-FFF2-40B4-BE49-F238E27FC236}">
-                <a16:creationId xmlns:a16="http://schemas.microsoft.com/office/drawing/2014/main" id="{1CCC3B8B-0A09-4484-B5BC-3EF99FD8ADA8}"/>
-              </a:ext>
-            </a:extLst>
-          </p:cNvPr>
-          <p:cNvSpPr>
-            <a:spLocks noGrp="1"/>
-          </p:cNvSpPr>
-          <p:nvPr>
-            <p:ph type="ctrTitle"/>
-          </p:nvPr>
-        </p:nvSpPr>
-        <p:spPr/>
-        <p:txBody>
-          <a:bodyPr/>
-          <a:lstStyle/>
-          <a:p>
-            <a:r>
-              <a:rPr lang="pt-BR" dirty="0"/>
-              <a:t>Adicionando o estilo</a:t>
-            </a:r>
-          </a:p>
-        </p:txBody>
-      </p:sp>
-      <p:sp>
-        <p:nvSpPr>
-          <p:cNvPr id="3" name="Subtítulo 2">
-            <a:extLst>
-              <a:ext uri="{FF2B5EF4-FFF2-40B4-BE49-F238E27FC236}">
-                <a16:creationId xmlns:a16="http://schemas.microsoft.com/office/drawing/2014/main" id="{5688CFF9-2A8E-4156-BC6B-5C0A4B040F9B}"/>
-              </a:ext>
-            </a:extLst>
-          </p:cNvPr>
-          <p:cNvSpPr>
-            <a:spLocks noGrp="1"/>
-          </p:cNvSpPr>
-          <p:nvPr>
-            <p:ph type="subTitle" idx="1"/>
-          </p:nvPr>
-        </p:nvSpPr>
-        <p:spPr/>
-        <p:txBody>
-          <a:bodyPr/>
-          <a:lstStyle/>
-          <a:p>
-            <a:endParaRPr lang="pt-BR"/>
-          </a:p>
-        </p:txBody>
-      </p:sp>
+      <p:pic>
+        <p:nvPicPr>
+          <p:cNvPr id="3" name="Imagem 2">
+            <a:extLst>
+              <a:ext uri="{FF2B5EF4-FFF2-40B4-BE49-F238E27FC236}">
+                <a16:creationId xmlns:a16="http://schemas.microsoft.com/office/drawing/2014/main" id="{D37E0481-B6B0-428D-A057-6200D34DA095}"/>
+              </a:ext>
+            </a:extLst>
+          </p:cNvPr>
+          <p:cNvPicPr>
+            <a:picLocks noChangeAspect="1"/>
+          </p:cNvPicPr>
+          <p:nvPr/>
+        </p:nvPicPr>
+        <p:blipFill>
+          <a:blip r:embed="rId2">
+            <a:extLst>
+              <a:ext uri="{28A0092B-C50C-407E-A947-70E740481C1C}">
+                <a14:useLocalDpi xmlns:a14="http://schemas.microsoft.com/office/drawing/2010/main" val="0"/>
+              </a:ext>
+            </a:extLst>
+          </a:blip>
+          <a:stretch>
+            <a:fillRect/>
+          </a:stretch>
+        </p:blipFill>
+        <p:spPr>
+          <a:xfrm>
+            <a:off x="761255" y="747338"/>
+            <a:ext cx="10669489" cy="5363323"/>
+          </a:xfrm>
+          <a:prstGeom prst="rect">
+            <a:avLst/>
+          </a:prstGeom>
+        </p:spPr>
+      </p:pic>
     </p:spTree>
     <p:extLst>
       <p:ext uri="{BB962C8B-B14F-4D97-AF65-F5344CB8AC3E}">
-        <p14:creationId xmlns:p14="http://schemas.microsoft.com/office/powerpoint/2010/main" val="116920353"/>
+        <p14:creationId xmlns:p14="http://schemas.microsoft.com/office/powerpoint/2010/main" val="499400983"/>
       </p:ext>
     </p:extLst>
   </p:cSld>
@@ -9327,101 +9626,63 @@
           <a:chExt cx="0" cy="0"/>
         </a:xfrm>
       </p:grpSpPr>
-      <p:pic>
-        <p:nvPicPr>
-          <p:cNvPr id="2" name="Imagem 1">
-            <a:extLst>
-              <a:ext uri="{FF2B5EF4-FFF2-40B4-BE49-F238E27FC236}">
-                <a16:creationId xmlns:a16="http://schemas.microsoft.com/office/drawing/2014/main" id="{BEC65666-7982-4E40-8E51-3EAC207CF0BB}"/>
-              </a:ext>
-            </a:extLst>
-          </p:cNvPr>
-          <p:cNvPicPr>
-            <a:picLocks noChangeAspect="1"/>
-          </p:cNvPicPr>
-          <p:nvPr/>
-        </p:nvPicPr>
-        <p:blipFill>
-          <a:blip r:embed="rId2"/>
-          <a:stretch>
-            <a:fillRect/>
-          </a:stretch>
-        </p:blipFill>
-        <p:spPr>
-          <a:xfrm>
-            <a:off x="2736048" y="621367"/>
-            <a:ext cx="6719904" cy="5615264"/>
-          </a:xfrm>
-          <a:prstGeom prst="rect">
-            <a:avLst/>
-          </a:prstGeom>
-        </p:spPr>
-      </p:pic>
-      <p:sp>
-        <p:nvSpPr>
-          <p:cNvPr id="3" name="Retângulo 2">
-            <a:extLst>
-              <a:ext uri="{FF2B5EF4-FFF2-40B4-BE49-F238E27FC236}">
-                <a16:creationId xmlns:a16="http://schemas.microsoft.com/office/drawing/2014/main" id="{F0DC8B0F-26D4-4132-8A4E-C30D34100D7E}"/>
-              </a:ext>
-            </a:extLst>
-          </p:cNvPr>
-          <p:cNvSpPr/>
-          <p:nvPr/>
-        </p:nvSpPr>
-        <p:spPr>
-          <a:xfrm>
-            <a:off x="3488267" y="3031067"/>
-            <a:ext cx="2429933" cy="2142066"/>
-          </a:xfrm>
-          <a:prstGeom prst="rect">
-            <a:avLst/>
-          </a:prstGeom>
-          <a:noFill/>
-          <a:ln w="38100">
-            <a:solidFill>
-              <a:srgbClr val="FF0000"/>
-            </a:solidFill>
-          </a:ln>
-        </p:spPr>
-        <p:style>
-          <a:lnRef idx="2">
-            <a:schemeClr val="accent1">
-              <a:shade val="50000"/>
-            </a:schemeClr>
-          </a:lnRef>
-          <a:fillRef idx="1">
-            <a:schemeClr val="accent1"/>
-          </a:fillRef>
-          <a:effectRef idx="0">
-            <a:schemeClr val="accent1"/>
-          </a:effectRef>
-          <a:fontRef idx="minor">
-            <a:schemeClr val="lt1"/>
-          </a:fontRef>
-        </p:style>
-        <p:txBody>
-          <a:bodyPr rot="0" spcFirstLastPara="0" vertOverflow="overflow" horzOverflow="overflow" vert="horz" wrap="square" lIns="91440" tIns="45720" rIns="91440" bIns="45720" numCol="1" spcCol="0" rtlCol="0" fromWordArt="0" anchor="ctr" anchorCtr="0" forceAA="0" compatLnSpc="1">
-            <a:prstTxWarp prst="textNoShape">
-              <a:avLst/>
-            </a:prstTxWarp>
-            <a:noAutofit/>
-          </a:bodyPr>
-          <a:lstStyle/>
-          <a:p>
-            <a:pPr algn="ctr"/>
-            <a:endParaRPr lang="pt-BR" sz="2000" dirty="0">
-              <a:solidFill>
-                <a:schemeClr val="tx1"/>
-              </a:solidFill>
-            </a:endParaRPr>
+      <p:sp>
+        <p:nvSpPr>
+          <p:cNvPr id="2" name="Título 1">
+            <a:extLst>
+              <a:ext uri="{FF2B5EF4-FFF2-40B4-BE49-F238E27FC236}">
+                <a16:creationId xmlns:a16="http://schemas.microsoft.com/office/drawing/2014/main" id="{1CCC3B8B-0A09-4484-B5BC-3EF99FD8ADA8}"/>
+              </a:ext>
+            </a:extLst>
+          </p:cNvPr>
+          <p:cNvSpPr>
+            <a:spLocks noGrp="1"/>
+          </p:cNvSpPr>
+          <p:nvPr>
+            <p:ph type="ctrTitle"/>
+          </p:nvPr>
+        </p:nvSpPr>
+        <p:spPr/>
+        <p:txBody>
+          <a:bodyPr/>
+          <a:lstStyle/>
+          <a:p>
+            <a:r>
+              <a:rPr lang="pt-BR" dirty="0"/>
+              <a:t>Adicionando o estilo</a:t>
+            </a:r>
+          </a:p>
+        </p:txBody>
+      </p:sp>
+      <p:sp>
+        <p:nvSpPr>
+          <p:cNvPr id="3" name="Subtítulo 2">
+            <a:extLst>
+              <a:ext uri="{FF2B5EF4-FFF2-40B4-BE49-F238E27FC236}">
+                <a16:creationId xmlns:a16="http://schemas.microsoft.com/office/drawing/2014/main" id="{5688CFF9-2A8E-4156-BC6B-5C0A4B040F9B}"/>
+              </a:ext>
+            </a:extLst>
+          </p:cNvPr>
+          <p:cNvSpPr>
+            <a:spLocks noGrp="1"/>
+          </p:cNvSpPr>
+          <p:nvPr>
+            <p:ph type="subTitle" idx="1"/>
+          </p:nvPr>
+        </p:nvSpPr>
+        <p:spPr/>
+        <p:txBody>
+          <a:bodyPr/>
+          <a:lstStyle/>
+          <a:p>
+            <a:endParaRPr lang="pt-BR"/>
           </a:p>
         </p:txBody>
       </p:sp>
     </p:spTree>
     <p:extLst>
       <p:ext uri="{BB962C8B-B14F-4D97-AF65-F5344CB8AC3E}">
-        <p14:creationId xmlns:p14="http://schemas.microsoft.com/office/powerpoint/2010/main" val="1773549004"/>
+        <p14:creationId xmlns:p14="http://schemas.microsoft.com/office/powerpoint/2010/main" val="116920353"/>
       </p:ext>
     </p:extLst>
   </p:cSld>
@@ -9450,10 +9711,10 @@
       </p:grpSpPr>
       <p:pic>
         <p:nvPicPr>
-          <p:cNvPr id="3" name="Imagem 2">
-            <a:extLst>
-              <a:ext uri="{FF2B5EF4-FFF2-40B4-BE49-F238E27FC236}">
-                <a16:creationId xmlns:a16="http://schemas.microsoft.com/office/drawing/2014/main" id="{8E99A60E-9D0A-490C-9A0E-45E6EF3127A1}"/>
+          <p:cNvPr id="2" name="Imagem 1">
+            <a:extLst>
+              <a:ext uri="{FF2B5EF4-FFF2-40B4-BE49-F238E27FC236}">
+                <a16:creationId xmlns:a16="http://schemas.microsoft.com/office/drawing/2014/main" id="{BEC65666-7982-4E40-8E51-3EAC207CF0BB}"/>
               </a:ext>
             </a:extLst>
           </p:cNvPr>
@@ -9463,31 +9724,86 @@
           <p:nvPr/>
         </p:nvPicPr>
         <p:blipFill>
-          <a:blip r:embed="rId2">
-            <a:extLst>
-              <a:ext uri="{28A0092B-C50C-407E-A947-70E740481C1C}">
-                <a14:useLocalDpi xmlns:a14="http://schemas.microsoft.com/office/drawing/2010/main" val="0"/>
-              </a:ext>
-            </a:extLst>
-          </a:blip>
+          <a:blip r:embed="rId2"/>
           <a:stretch>
             <a:fillRect/>
           </a:stretch>
         </p:blipFill>
         <p:spPr>
           <a:xfrm>
-            <a:off x="4362326" y="912871"/>
-            <a:ext cx="3467349" cy="5032258"/>
+            <a:off x="2736048" y="621367"/>
+            <a:ext cx="6719904" cy="5615264"/>
           </a:xfrm>
           <a:prstGeom prst="rect">
             <a:avLst/>
           </a:prstGeom>
         </p:spPr>
       </p:pic>
+      <p:sp>
+        <p:nvSpPr>
+          <p:cNvPr id="3" name="Retângulo 2">
+            <a:extLst>
+              <a:ext uri="{FF2B5EF4-FFF2-40B4-BE49-F238E27FC236}">
+                <a16:creationId xmlns:a16="http://schemas.microsoft.com/office/drawing/2014/main" id="{F0DC8B0F-26D4-4132-8A4E-C30D34100D7E}"/>
+              </a:ext>
+            </a:extLst>
+          </p:cNvPr>
+          <p:cNvSpPr/>
+          <p:nvPr/>
+        </p:nvSpPr>
+        <p:spPr>
+          <a:xfrm>
+            <a:off x="3488267" y="3031067"/>
+            <a:ext cx="2429933" cy="2142066"/>
+          </a:xfrm>
+          <a:prstGeom prst="rect">
+            <a:avLst/>
+          </a:prstGeom>
+          <a:noFill/>
+          <a:ln w="38100">
+            <a:solidFill>
+              <a:srgbClr val="FF0000"/>
+            </a:solidFill>
+          </a:ln>
+        </p:spPr>
+        <p:style>
+          <a:lnRef idx="2">
+            <a:schemeClr val="accent1">
+              <a:shade val="50000"/>
+            </a:schemeClr>
+          </a:lnRef>
+          <a:fillRef idx="1">
+            <a:schemeClr val="accent1"/>
+          </a:fillRef>
+          <a:effectRef idx="0">
+            <a:schemeClr val="accent1"/>
+          </a:effectRef>
+          <a:fontRef idx="minor">
+            <a:schemeClr val="lt1"/>
+          </a:fontRef>
+        </p:style>
+        <p:txBody>
+          <a:bodyPr rot="0" spcFirstLastPara="0" vertOverflow="overflow" horzOverflow="overflow" vert="horz" wrap="square" lIns="91440" tIns="45720" rIns="91440" bIns="45720" numCol="1" spcCol="0" rtlCol="0" fromWordArt="0" anchor="ctr" anchorCtr="0" forceAA="0" compatLnSpc="1">
+            <a:prstTxWarp prst="textNoShape">
+              <a:avLst/>
+            </a:prstTxWarp>
+            <a:noAutofit/>
+          </a:bodyPr>
+          <a:lstStyle/>
+          <a:p>
+            <a:pPr algn="ctr"/>
+            <a:endParaRPr lang="pt-BR" sz="2000" dirty="0">
+              <a:solidFill>
+                <a:schemeClr val="tx1"/>
+              </a:solidFill>
+            </a:endParaRPr>
+          </a:p>
+        </p:txBody>
+      </p:sp>
     </p:spTree>
     <p:extLst>
       <p:ext uri="{BB962C8B-B14F-4D97-AF65-F5344CB8AC3E}">
-        <p14:creationId xmlns:p14="http://schemas.microsoft.com/office/powerpoint/2010/main" val="1275874106"/>
+        <p14:creationId xmlns:p14="http://schemas.microsoft.com/office/powerpoint/2010/main" val="1773549004"/>
       </p:ext>
     </p:extLst>
   </p:cSld>
@@ -9519,7 +9835,7 @@
           <p:cNvPr id="3" name="Imagem 2">
             <a:extLst>
               <a:ext uri="{FF2B5EF4-FFF2-40B4-BE49-F238E27FC236}">
-                <a16:creationId xmlns:a16="http://schemas.microsoft.com/office/drawing/2014/main" id="{9506974D-EF3E-4670-AD8B-AC8811A61595}"/>
+                <a16:creationId xmlns:a16="http://schemas.microsoft.com/office/drawing/2014/main" id="{8E99A60E-9D0A-490C-9A0E-45E6EF3127A1}"/>
               </a:ext>
             </a:extLst>
           </p:cNvPr>
@@ -9542,145 +9858,18 @@
         </p:blipFill>
         <p:spPr>
           <a:xfrm>
-            <a:off x="1719422" y="218627"/>
-            <a:ext cx="5315692" cy="6420746"/>
+            <a:off x="3788480" y="80033"/>
+            <a:ext cx="4615041" cy="6697935"/>
           </a:xfrm>
           <a:prstGeom prst="rect">
             <a:avLst/>
           </a:prstGeom>
         </p:spPr>
       </p:pic>
-      <p:sp>
-        <p:nvSpPr>
-          <p:cNvPr id="4" name="Retângulo 3">
-            <a:extLst>
-              <a:ext uri="{FF2B5EF4-FFF2-40B4-BE49-F238E27FC236}">
-                <a16:creationId xmlns:a16="http://schemas.microsoft.com/office/drawing/2014/main" id="{8B6686A0-8672-41C6-BE58-77EF94767190}"/>
-              </a:ext>
-            </a:extLst>
-          </p:cNvPr>
-          <p:cNvSpPr/>
-          <p:nvPr/>
-        </p:nvSpPr>
-        <p:spPr>
-          <a:xfrm>
-            <a:off x="3090333" y="2921000"/>
-            <a:ext cx="3826934" cy="1532467"/>
-          </a:xfrm>
-          <a:prstGeom prst="rect">
-            <a:avLst/>
-          </a:prstGeom>
-          <a:noFill/>
-          <a:ln w="38100">
-            <a:solidFill>
-              <a:srgbClr val="FF0000"/>
-            </a:solidFill>
-          </a:ln>
-        </p:spPr>
-        <p:style>
-          <a:lnRef idx="2">
-            <a:schemeClr val="accent1">
-              <a:shade val="50000"/>
-            </a:schemeClr>
-          </a:lnRef>
-          <a:fillRef idx="1">
-            <a:schemeClr val="accent1"/>
-          </a:fillRef>
-          <a:effectRef idx="0">
-            <a:schemeClr val="accent1"/>
-          </a:effectRef>
-          <a:fontRef idx="minor">
-            <a:schemeClr val="lt1"/>
-          </a:fontRef>
-        </p:style>
-        <p:txBody>
-          <a:bodyPr rot="0" spcFirstLastPara="0" vertOverflow="overflow" horzOverflow="overflow" vert="horz" wrap="square" lIns="91440" tIns="45720" rIns="91440" bIns="45720" numCol="1" spcCol="0" rtlCol="0" fromWordArt="0" anchor="ctr" anchorCtr="0" forceAA="0" compatLnSpc="1">
-            <a:prstTxWarp prst="textNoShape">
-              <a:avLst/>
-            </a:prstTxWarp>
-            <a:noAutofit/>
-          </a:bodyPr>
-          <a:lstStyle/>
-          <a:p>
-            <a:pPr algn="ctr"/>
-            <a:endParaRPr lang="pt-BR" sz="2000" dirty="0">
-              <a:solidFill>
-                <a:schemeClr val="tx1"/>
-              </a:solidFill>
-            </a:endParaRPr>
-          </a:p>
-        </p:txBody>
-      </p:sp>
-      <p:sp>
-        <p:nvSpPr>
-          <p:cNvPr id="5" name="Seta: para a Esquerda 4">
-            <a:extLst>
-              <a:ext uri="{FF2B5EF4-FFF2-40B4-BE49-F238E27FC236}">
-                <a16:creationId xmlns:a16="http://schemas.microsoft.com/office/drawing/2014/main" id="{CCCF9F61-CFE4-49A2-A8F5-3FEAB7D179D7}"/>
-              </a:ext>
-            </a:extLst>
-          </p:cNvPr>
-          <p:cNvSpPr/>
-          <p:nvPr/>
-        </p:nvSpPr>
-        <p:spPr>
-          <a:xfrm>
-            <a:off x="7188200" y="2921000"/>
-            <a:ext cx="2446867" cy="1532467"/>
-          </a:xfrm>
-          <a:prstGeom prst="leftArrow">
-            <a:avLst/>
-          </a:prstGeom>
-          <a:solidFill>
-            <a:srgbClr val="FFFF00"/>
-          </a:solidFill>
-          <a:ln w="38100">
-            <a:solidFill>
-              <a:srgbClr val="FF0000"/>
-            </a:solidFill>
-          </a:ln>
-        </p:spPr>
-        <p:style>
-          <a:lnRef idx="2">
-            <a:schemeClr val="accent1">
-              <a:shade val="50000"/>
-            </a:schemeClr>
-          </a:lnRef>
-          <a:fillRef idx="1">
-            <a:schemeClr val="accent1"/>
-          </a:fillRef>
-          <a:effectRef idx="0">
-            <a:schemeClr val="accent1"/>
-          </a:effectRef>
-          <a:fontRef idx="minor">
-            <a:schemeClr val="lt1"/>
-          </a:fontRef>
-        </p:style>
-        <p:txBody>
-          <a:bodyPr rot="0" spcFirstLastPara="0" vertOverflow="overflow" horzOverflow="overflow" vert="horz" wrap="square" lIns="91440" tIns="45720" rIns="91440" bIns="45720" numCol="1" spcCol="0" rtlCol="0" fromWordArt="0" anchor="ctr" anchorCtr="0" forceAA="0" compatLnSpc="1">
-            <a:prstTxWarp prst="textNoShape">
-              <a:avLst/>
-            </a:prstTxWarp>
-            <a:noAutofit/>
-          </a:bodyPr>
-          <a:lstStyle/>
-          <a:p>
-            <a:pPr algn="ctr"/>
-            <a:r>
-              <a:rPr lang="pt-BR" sz="2000" dirty="0">
-                <a:solidFill>
-                  <a:schemeClr val="tx1"/>
-                </a:solidFill>
-              </a:rPr>
-              <a:t>Digitas esta propriedades</a:t>
-            </a:r>
-          </a:p>
-        </p:txBody>
-      </p:sp>
     </p:spTree>
     <p:extLst>
       <p:ext uri="{BB962C8B-B14F-4D97-AF65-F5344CB8AC3E}">
-        <p14:creationId xmlns:p14="http://schemas.microsoft.com/office/powerpoint/2010/main" val="3660701500"/>
+        <p14:creationId xmlns:p14="http://schemas.microsoft.com/office/powerpoint/2010/main" val="1275874106"/>
       </p:ext>
     </p:extLst>
   </p:cSld>
@@ -9712,7 +9901,7 @@
           <p:cNvPr id="3" name="Imagem 2">
             <a:extLst>
               <a:ext uri="{FF2B5EF4-FFF2-40B4-BE49-F238E27FC236}">
-                <a16:creationId xmlns:a16="http://schemas.microsoft.com/office/drawing/2014/main" id="{FF064A9E-0C37-414E-BC50-940E99A8C81E}"/>
+                <a16:creationId xmlns:a16="http://schemas.microsoft.com/office/drawing/2014/main" id="{9506974D-EF3E-4670-AD8B-AC8811A61595}"/>
               </a:ext>
             </a:extLst>
           </p:cNvPr>
@@ -9735,8 +9924,8 @@
         </p:blipFill>
         <p:spPr>
           <a:xfrm>
-            <a:off x="3214284" y="374382"/>
-            <a:ext cx="5763430" cy="6109236"/>
+            <a:off x="1719422" y="218627"/>
+            <a:ext cx="5315692" cy="6420746"/>
           </a:xfrm>
           <a:prstGeom prst="rect">
             <a:avLst/>
@@ -9748,7 +9937,7 @@
           <p:cNvPr id="4" name="Retângulo 3">
             <a:extLst>
               <a:ext uri="{FF2B5EF4-FFF2-40B4-BE49-F238E27FC236}">
-                <a16:creationId xmlns:a16="http://schemas.microsoft.com/office/drawing/2014/main" id="{3AE0CEB2-BDE1-4E3E-847A-B955D952F261}"/>
+                <a16:creationId xmlns:a16="http://schemas.microsoft.com/office/drawing/2014/main" id="{8B6686A0-8672-41C6-BE58-77EF94767190}"/>
               </a:ext>
             </a:extLst>
           </p:cNvPr>
@@ -9757,8 +9946,8 @@
         </p:nvSpPr>
         <p:spPr>
           <a:xfrm>
-            <a:off x="3776133" y="3835400"/>
-            <a:ext cx="2455334" cy="1642533"/>
+            <a:off x="3090333" y="2921000"/>
+            <a:ext cx="3826934" cy="1532467"/>
           </a:xfrm>
           <a:prstGeom prst="rect">
             <a:avLst/>
@@ -9806,10 +9995,10 @@
       </p:sp>
       <p:sp>
         <p:nvSpPr>
-          <p:cNvPr id="5" name="Seta: para a Direita 4">
-            <a:extLst>
-              <a:ext uri="{FF2B5EF4-FFF2-40B4-BE49-F238E27FC236}">
-                <a16:creationId xmlns:a16="http://schemas.microsoft.com/office/drawing/2014/main" id="{0901F328-91A0-4856-A2A1-B6F9F71A06E2}"/>
+          <p:cNvPr id="5" name="Seta: para a Esquerda 4">
+            <a:extLst>
+              <a:ext uri="{FF2B5EF4-FFF2-40B4-BE49-F238E27FC236}">
+                <a16:creationId xmlns:a16="http://schemas.microsoft.com/office/drawing/2014/main" id="{CCCF9F61-CFE4-49A2-A8F5-3FEAB7D179D7}"/>
               </a:ext>
             </a:extLst>
           </p:cNvPr>
@@ -9818,10 +10007,10 @@
         </p:nvSpPr>
         <p:spPr>
           <a:xfrm>
-            <a:off x="1236133" y="4064000"/>
-            <a:ext cx="2286000" cy="1159933"/>
-          </a:xfrm>
-          <a:prstGeom prst="rightArrow">
+            <a:off x="7188200" y="2921000"/>
+            <a:ext cx="2446867" cy="1532467"/>
+          </a:xfrm>
+          <a:prstGeom prst="leftArrow">
             <a:avLst/>
           </a:prstGeom>
           <a:solidFill>
@@ -9865,7 +10054,7 @@
                   <a:schemeClr val="tx1"/>
                 </a:solidFill>
               </a:rPr>
-              <a:t>Digite estas linhas</a:t>
+              <a:t>Digitas esta propriedades</a:t>
             </a:r>
           </a:p>
         </p:txBody>
@@ -9873,7 +10062,7 @@
     </p:spTree>
     <p:extLst>
       <p:ext uri="{BB962C8B-B14F-4D97-AF65-F5344CB8AC3E}">
-        <p14:creationId xmlns:p14="http://schemas.microsoft.com/office/powerpoint/2010/main" val="3738543215"/>
+        <p14:creationId xmlns:p14="http://schemas.microsoft.com/office/powerpoint/2010/main" val="3660701500"/>
       </p:ext>
     </p:extLst>
   </p:cSld>
